--- a/DSS_Presentation/DSS_Presentation.pptx
+++ b/DSS_Presentation/DSS_Presentation.pptx
@@ -1,18 +1,24 @@
 
 <file path=ppt/presentation.xml><?xml version="1.0" encoding="utf-8"?>
-<p:presentation xmlns:a="http://schemas.openxmlformats.org/drawingml/2006/main" xmlns:r="http://schemas.openxmlformats.org/officeDocument/2006/relationships" xmlns:p="http://schemas.openxmlformats.org/presentationml/2006/main" saveSubsetFonts="1">
+<p:presentation xmlns:a="http://schemas.openxmlformats.org/drawingml/2006/main" xmlns:r="http://schemas.openxmlformats.org/officeDocument/2006/relationships" xmlns:p="http://schemas.openxmlformats.org/presentationml/2006/main" saveSubsetFonts="1" autoCompressPictures="0">
   <p:sldMasterIdLst>
     <p:sldMasterId id="2147483900" r:id="rId1"/>
   </p:sldMasterIdLst>
   <p:notesMasterIdLst>
-    <p:notesMasterId r:id="rId4"/>
+    <p:notesMasterId r:id="rId10"/>
   </p:notesMasterIdLst>
   <p:handoutMasterIdLst>
-    <p:handoutMasterId r:id="rId5"/>
+    <p:handoutMasterId r:id="rId11"/>
   </p:handoutMasterIdLst>
   <p:sldIdLst>
-    <p:sldId id="257" r:id="rId2"/>
+    <p:sldId id="258" r:id="rId2"/>
     <p:sldId id="259" r:id="rId3"/>
+    <p:sldId id="260" r:id="rId4"/>
+    <p:sldId id="269" r:id="rId5"/>
+    <p:sldId id="265" r:id="rId6"/>
+    <p:sldId id="270" r:id="rId7"/>
+    <p:sldId id="271" r:id="rId8"/>
+    <p:sldId id="268" r:id="rId9"/>
   </p:sldIdLst>
   <p:sldSz cx="9144000" cy="6858000" type="screen4x3"/>
   <p:notesSz cx="6797675" cy="9926638"/>
@@ -419,7 +425,7 @@
             </a:pPr>
             <a:fld id="{4E0C06B7-C559-4809-80E3-2886171D3968}" type="datetime1">
               <a:rPr lang="de-DE" smtClean="0"/>
-              <a:t>12.03.25</a:t>
+              <a:t>21.06.2026</a:t>
             </a:fld>
             <a:endParaRPr lang="de-DE"/>
           </a:p>
@@ -447,14 +453,14 @@
           </a:ln>
           <a:extLst>
             <a:ext uri="{909E8E84-426E-40dd-AFC4-6F175D3DCCD1}">
-              <a14:hiddenFill xmlns="" xmlns:a14="http://schemas.microsoft.com/office/drawing/2010/main">
+              <a14:hiddenFill xmlns:a14="http://schemas.microsoft.com/office/drawing/2010/main" xmlns="">
                 <a:solidFill>
                   <a:srgbClr val="FFFFFF"/>
                 </a:solidFill>
               </a14:hiddenFill>
             </a:ext>
             <a:ext uri="{91240B29-F687-4f45-9708-019B960494DF}">
-              <a14:hiddenLine xmlns="" xmlns:a14="http://schemas.microsoft.com/office/drawing/2010/main" w="9525">
+              <a14:hiddenLine xmlns:a14="http://schemas.microsoft.com/office/drawing/2010/main" xmlns="" w="9525">
                 <a:solidFill>
                   <a:srgbClr val="000000"/>
                 </a:solidFill>
@@ -507,14 +513,14 @@
           </a:ln>
           <a:extLst>
             <a:ext uri="{909E8E84-426E-40dd-AFC4-6F175D3DCCD1}">
-              <a14:hiddenFill xmlns="" xmlns:a14="http://schemas.microsoft.com/office/drawing/2010/main">
+              <a14:hiddenFill xmlns:a14="http://schemas.microsoft.com/office/drawing/2010/main" xmlns="">
                 <a:solidFill>
                   <a:srgbClr val="FFFFFF"/>
                 </a:solidFill>
               </a14:hiddenFill>
             </a:ext>
             <a:ext uri="{91240B29-F687-4f45-9708-019B960494DF}">
-              <a14:hiddenLine xmlns="" xmlns:a14="http://schemas.microsoft.com/office/drawing/2010/main" w="9525">
+              <a14:hiddenLine xmlns:a14="http://schemas.microsoft.com/office/drawing/2010/main" xmlns="" w="9525">
                 <a:solidFill>
                   <a:srgbClr val="000000"/>
                 </a:solidFill>
@@ -553,7 +559,7 @@
                 <a:buClrTx/>
                 <a:buSzTx/>
               </a:pPr>
-              <a:t>‹Nr.›</a:t>
+              <a:t>‹#›</a:t>
             </a:fld>
             <a:endParaRPr lang="de-DE" b="1">
               <a:ea typeface="ヒラギノ角ゴ Pro W3" pitchFamily="96" charset="-128"/>
@@ -588,7 +594,7 @@
           </a:ln>
           <a:extLst>
             <a:ext uri="{909E8E84-426E-40dd-AFC4-6F175D3DCCD1}">
-              <a14:hiddenFill xmlns="" xmlns:a14="http://schemas.microsoft.com/office/drawing/2010/main">
+              <a14:hiddenFill xmlns:a14="http://schemas.microsoft.com/office/drawing/2010/main" xmlns="">
                 <a:noFill/>
               </a14:hiddenFill>
             </a:ext>
@@ -628,7 +634,7 @@
           </a:ln>
           <a:extLst>
             <a:ext uri="{91240B29-F687-4f45-9708-019B960494DF}">
-              <a14:hiddenLine xmlns="" xmlns:a14="http://schemas.microsoft.com/office/drawing/2010/main" w="9525">
+              <a14:hiddenLine xmlns:a14="http://schemas.microsoft.com/office/drawing/2010/main" xmlns="" w="9525">
                 <a:solidFill>
                   <a:srgbClr val="000000"/>
                 </a:solidFill>
@@ -674,7 +680,7 @@
           </a:ln>
           <a:extLst>
             <a:ext uri="{909E8E84-426E-40dd-AFC4-6F175D3DCCD1}">
-              <a14:hiddenFill xmlns="" xmlns:a14="http://schemas.microsoft.com/office/drawing/2010/main">
+              <a14:hiddenFill xmlns:a14="http://schemas.microsoft.com/office/drawing/2010/main" xmlns="">
                 <a:noFill/>
               </a14:hiddenFill>
             </a:ext>
@@ -715,7 +721,7 @@
           </a:ln>
           <a:extLst>
             <a:ext uri="{909E8E84-426E-40dd-AFC4-6F175D3DCCD1}">
-              <a14:hiddenFill xmlns="" xmlns:a14="http://schemas.microsoft.com/office/drawing/2010/main">
+              <a14:hiddenFill xmlns:a14="http://schemas.microsoft.com/office/drawing/2010/main" xmlns="">
                 <a:noFill/>
               </a14:hiddenFill>
             </a:ext>
@@ -764,14 +770,14 @@
           </a:ln>
           <a:extLst>
             <a:ext uri="{909E8E84-426E-40dd-AFC4-6F175D3DCCD1}">
-              <a14:hiddenFill xmlns="" xmlns:a14="http://schemas.microsoft.com/office/drawing/2010/main">
+              <a14:hiddenFill xmlns:a14="http://schemas.microsoft.com/office/drawing/2010/main" xmlns="">
                 <a:solidFill>
                   <a:srgbClr val="FFFFFF"/>
                 </a:solidFill>
               </a14:hiddenFill>
             </a:ext>
             <a:ext uri="{91240B29-F687-4f45-9708-019B960494DF}">
-              <a14:hiddenLine xmlns="" xmlns:a14="http://schemas.microsoft.com/office/drawing/2010/main" w="9525">
+              <a14:hiddenLine xmlns:a14="http://schemas.microsoft.com/office/drawing/2010/main" xmlns="" w="9525">
                 <a:solidFill>
                   <a:srgbClr val="000000"/>
                 </a:solidFill>
@@ -849,7 +855,7 @@
           </a:ln>
           <a:extLst>
             <a:ext uri="{909E8E84-426E-40dd-AFC4-6F175D3DCCD1}">
-              <a14:hiddenFill xmlns="" xmlns:a14="http://schemas.microsoft.com/office/drawing/2010/main">
+              <a14:hiddenFill xmlns:a14="http://schemas.microsoft.com/office/drawing/2010/main" xmlns="">
                 <a:solidFill>
                   <a:srgbClr val="FFFFFF"/>
                 </a:solidFill>
@@ -1049,7 +1055,7 @@
             </a:pPr>
             <a:fld id="{C7E54160-B116-4109-AA92-3860CE6317DD}" type="datetime1">
               <a:rPr lang="de-DE" smtClean="0"/>
-              <a:t>12.03.25</a:t>
+              <a:t>21.06.2026</a:t>
             </a:fld>
             <a:endParaRPr lang="de-DE"/>
           </a:p>
@@ -1077,14 +1083,14 @@
           </a:ln>
           <a:extLst>
             <a:ext uri="{909E8E84-426E-40dd-AFC4-6F175D3DCCD1}">
-              <a14:hiddenFill xmlns="" xmlns:a14="http://schemas.microsoft.com/office/drawing/2010/main">
+              <a14:hiddenFill xmlns:a14="http://schemas.microsoft.com/office/drawing/2010/main" xmlns="">
                 <a:solidFill>
                   <a:srgbClr val="FFFFFF"/>
                 </a:solidFill>
               </a14:hiddenFill>
             </a:ext>
             <a:ext uri="{91240B29-F687-4f45-9708-019B960494DF}">
-              <a14:hiddenLine xmlns="" xmlns:a14="http://schemas.microsoft.com/office/drawing/2010/main" w="9525">
+              <a14:hiddenLine xmlns:a14="http://schemas.microsoft.com/office/drawing/2010/main" xmlns="" w="9525">
                 <a:solidFill>
                   <a:srgbClr val="000000"/>
                 </a:solidFill>
@@ -1139,14 +1145,14 @@
           </a:ln>
           <a:extLst>
             <a:ext uri="{909E8E84-426E-40dd-AFC4-6F175D3DCCD1}">
-              <a14:hiddenFill xmlns="" xmlns:a14="http://schemas.microsoft.com/office/drawing/2010/main">
+              <a14:hiddenFill xmlns:a14="http://schemas.microsoft.com/office/drawing/2010/main" xmlns="">
                 <a:solidFill>
                   <a:srgbClr val="FFFFFF"/>
                 </a:solidFill>
               </a14:hiddenFill>
             </a:ext>
             <a:ext uri="{91240B29-F687-4f45-9708-019B960494DF}">
-              <a14:hiddenLine xmlns="" xmlns:a14="http://schemas.microsoft.com/office/drawing/2010/main" w="9525">
+              <a14:hiddenLine xmlns:a14="http://schemas.microsoft.com/office/drawing/2010/main" xmlns="" w="9525">
                 <a:solidFill>
                   <a:srgbClr val="000000"/>
                 </a:solidFill>
@@ -1189,7 +1195,7 @@
                 <a:buFontTx/>
                 <a:buNone/>
               </a:pPr>
-              <a:t>‹Nr.›</a:t>
+              <a:t>‹#›</a:t>
             </a:fld>
             <a:endParaRPr lang="de-DE" sz="1600" b="1">
               <a:ea typeface="ヒラギノ角ゴ Pro W3" pitchFamily="96" charset="-128"/>
@@ -1224,7 +1230,7 @@
           </a:ln>
           <a:extLst>
             <a:ext uri="{909E8E84-426E-40dd-AFC4-6F175D3DCCD1}">
-              <a14:hiddenFill xmlns="" xmlns:a14="http://schemas.microsoft.com/office/drawing/2010/main">
+              <a14:hiddenFill xmlns:a14="http://schemas.microsoft.com/office/drawing/2010/main" xmlns="">
                 <a:noFill/>
               </a14:hiddenFill>
             </a:ext>
@@ -1264,7 +1270,7 @@
           </a:ln>
           <a:extLst>
             <a:ext uri="{91240B29-F687-4f45-9708-019B960494DF}">
-              <a14:hiddenLine xmlns="" xmlns:a14="http://schemas.microsoft.com/office/drawing/2010/main" w="9525">
+              <a14:hiddenLine xmlns:a14="http://schemas.microsoft.com/office/drawing/2010/main" xmlns="" w="9525">
                 <a:solidFill>
                   <a:srgbClr val="000000"/>
                 </a:solidFill>
@@ -1310,7 +1316,7 @@
           </a:ln>
           <a:extLst>
             <a:ext uri="{909E8E84-426E-40dd-AFC4-6F175D3DCCD1}">
-              <a14:hiddenFill xmlns="" xmlns:a14="http://schemas.microsoft.com/office/drawing/2010/main">
+              <a14:hiddenFill xmlns:a14="http://schemas.microsoft.com/office/drawing/2010/main" xmlns="">
                 <a:noFill/>
               </a14:hiddenFill>
             </a:ext>
@@ -1351,7 +1357,7 @@
           </a:ln>
           <a:extLst>
             <a:ext uri="{909E8E84-426E-40dd-AFC4-6F175D3DCCD1}">
-              <a14:hiddenFill xmlns="" xmlns:a14="http://schemas.microsoft.com/office/drawing/2010/main">
+              <a14:hiddenFill xmlns:a14="http://schemas.microsoft.com/office/drawing/2010/main" xmlns="">
                 <a:noFill/>
               </a14:hiddenFill>
             </a:ext>
@@ -1400,14 +1406,14 @@
           </a:ln>
           <a:extLst>
             <a:ext uri="{909E8E84-426E-40dd-AFC4-6F175D3DCCD1}">
-              <a14:hiddenFill xmlns="" xmlns:a14="http://schemas.microsoft.com/office/drawing/2010/main">
+              <a14:hiddenFill xmlns:a14="http://schemas.microsoft.com/office/drawing/2010/main" xmlns="">
                 <a:solidFill>
                   <a:srgbClr val="FFFFFF"/>
                 </a:solidFill>
               </a14:hiddenFill>
             </a:ext>
             <a:ext uri="{91240B29-F687-4f45-9708-019B960494DF}">
-              <a14:hiddenLine xmlns="" xmlns:a14="http://schemas.microsoft.com/office/drawing/2010/main" w="9525">
+              <a14:hiddenLine xmlns:a14="http://schemas.microsoft.com/office/drawing/2010/main" xmlns="" w="9525">
                 <a:solidFill>
                   <a:srgbClr val="000000"/>
                 </a:solidFill>
@@ -1553,102 +1559,6 @@
 </p:notesMaster>
 </file>
 
-<file path=ppt/notesSlides/notesSlide1.xml><?xml version="1.0" encoding="utf-8"?>
-<p:notes xmlns:a="http://schemas.openxmlformats.org/drawingml/2006/main" xmlns:r="http://schemas.openxmlformats.org/officeDocument/2006/relationships" xmlns:p="http://schemas.openxmlformats.org/presentationml/2006/main">
-  <p:cSld>
-    <p:spTree>
-      <p:nvGrpSpPr>
-        <p:cNvPr id="1" name=""/>
-        <p:cNvGrpSpPr/>
-        <p:nvPr/>
-      </p:nvGrpSpPr>
-      <p:grpSpPr>
-        <a:xfrm>
-          <a:off x="0" y="0"/>
-          <a:ext cx="0" cy="0"/>
-          <a:chOff x="0" y="0"/>
-          <a:chExt cx="0" cy="0"/>
-        </a:xfrm>
-      </p:grpSpPr>
-      <p:sp>
-        <p:nvSpPr>
-          <p:cNvPr id="2" name="Notes Placeholder"/>
-          <p:cNvSpPr>
-            <a:spLocks noGrp="1"/>
-          </p:cNvSpPr>
-          <p:nvPr>
-            <p:ph type="body" idx="1"/>
-          </p:nvPr>
-        </p:nvSpPr>
-        <p:spPr/>
-        <p:txBody>
-          <a:bodyPr>
-            <a:normAutofit/>
-          </a:bodyPr>
-          <a:lstStyle/>
-          <a:p>
-            <a:r>
-              <a:rPr lang="de-DE" dirty="0"/>
-              <a:t>&lt;</a:t>
-            </a:r>
-            <a:endParaRPr dirty="0"/>
-          </a:p>
-        </p:txBody>
-      </p:sp>
-    </p:spTree>
-  </p:cSld>
-  <p:clrMapOvr>
-    <a:masterClrMapping/>
-  </p:clrMapOvr>
-</p:notes>
-</file>
-
-<file path=ppt/notesSlides/notesSlide2.xml><?xml version="1.0" encoding="utf-8"?>
-<p:notes xmlns:a="http://schemas.openxmlformats.org/drawingml/2006/main" xmlns:r="http://schemas.openxmlformats.org/officeDocument/2006/relationships" xmlns:p="http://schemas.openxmlformats.org/presentationml/2006/main">
-  <p:cSld>
-    <p:spTree>
-      <p:nvGrpSpPr>
-        <p:cNvPr id="1" name=""/>
-        <p:cNvGrpSpPr/>
-        <p:nvPr/>
-      </p:nvGrpSpPr>
-      <p:grpSpPr>
-        <a:xfrm>
-          <a:off x="0" y="0"/>
-          <a:ext cx="0" cy="0"/>
-          <a:chOff x="0" y="0"/>
-          <a:chExt cx="0" cy="0"/>
-        </a:xfrm>
-      </p:grpSpPr>
-      <p:sp>
-        <p:nvSpPr>
-          <p:cNvPr id="2" name="Notes Placeholder"/>
-          <p:cNvSpPr>
-            <a:spLocks noGrp="1"/>
-          </p:cNvSpPr>
-          <p:nvPr>
-            <p:ph type="body" idx="1"/>
-          </p:nvPr>
-        </p:nvSpPr>
-        <p:spPr/>
-        <p:txBody>
-          <a:bodyPr>
-            <a:normAutofit/>
-          </a:bodyPr>
-          <a:lstStyle/>
-          <a:p>
-            <a:endParaRPr/>
-          </a:p>
-        </p:txBody>
-      </p:sp>
-    </p:spTree>
-  </p:cSld>
-  <p:clrMapOvr>
-    <a:masterClrMapping/>
-  </p:clrMapOvr>
-</p:notes>
-</file>
-
 <file path=ppt/slideLayouts/slideLayout1.xml><?xml version="1.0" encoding="utf-8"?>
 <p:sldLayout xmlns:a="http://schemas.openxmlformats.org/drawingml/2006/main" xmlns:r="http://schemas.openxmlformats.org/officeDocument/2006/relationships" xmlns:p="http://schemas.openxmlformats.org/presentationml/2006/main" showMasterSp="0" type="title" preserve="1">
   <p:cSld name="Titelfolie">
@@ -1693,7 +1603,7 @@
           </a:ln>
           <a:extLst>
             <a:ext uri="{909E8E84-426E-40dd-AFC4-6F175D3DCCD1}">
-              <a14:hiddenFill xmlns="" xmlns:a14="http://schemas.microsoft.com/office/drawing/2010/main">
+              <a14:hiddenFill xmlns:a14="http://schemas.microsoft.com/office/drawing/2010/main" xmlns="">
                 <a:noFill/>
               </a14:hiddenFill>
             </a:ext>
@@ -2006,7 +1916,7 @@
             </a:pPr>
             <a:fld id="{67076C5B-2EA2-7A47-B86E-99AAD28441A6}" type="datetime1">
               <a:rPr lang="de-DE" smtClean="0"/>
-              <a:t>12.03.25</a:t>
+              <a:t>21.06.2026</a:t>
             </a:fld>
             <a:endParaRPr lang="de-DE" dirty="0"/>
           </a:p>
@@ -2078,7 +1988,7 @@
               <a:pPr>
                 <a:defRPr/>
               </a:pPr>
-              <a:t>‹Nr.›</a:t>
+              <a:t>‹#›</a:t>
             </a:fld>
             <a:r>
               <a:rPr lang="de-DE" dirty="0"/>
@@ -2368,7 +2278,7 @@
             </a:pPr>
             <a:fld id="{EEA6CC5D-69A9-BA4B-AC99-9F8254D0981E}" type="datetime1">
               <a:rPr lang="de-DE" smtClean="0"/>
-              <a:t>12.03.25</a:t>
+              <a:t>21.06.2026</a:t>
             </a:fld>
             <a:endParaRPr lang="de-DE" dirty="0"/>
           </a:p>
@@ -2440,7 +2350,7 @@
               <a:pPr>
                 <a:defRPr/>
               </a:pPr>
-              <a:t>‹Nr.›</a:t>
+              <a:t>‹#›</a:t>
             </a:fld>
             <a:r>
               <a:rPr lang="de-DE" dirty="0"/>
@@ -2781,7 +2691,7 @@
             </a:pPr>
             <a:fld id="{0B1EAA1D-2E15-9046-9A40-4947ABB751C4}" type="datetime1">
               <a:rPr lang="de-DE" smtClean="0"/>
-              <a:t>12.03.25</a:t>
+              <a:t>21.06.2026</a:t>
             </a:fld>
             <a:endParaRPr lang="de-DE"/>
           </a:p>
@@ -2853,7 +2763,7 @@
               <a:pPr>
                 <a:defRPr/>
               </a:pPr>
-              <a:t>‹Nr.›</a:t>
+              <a:t>‹#›</a:t>
             </a:fld>
             <a:r>
               <a:rPr lang="de-DE" dirty="0"/>
@@ -3056,7 +2966,7 @@
             </a:pPr>
             <a:fld id="{25B5056C-E1FC-1F4E-A35C-F2D495D58E09}" type="datetime1">
               <a:rPr lang="de-DE" smtClean="0"/>
-              <a:t>12.03.25</a:t>
+              <a:t>21.06.2026</a:t>
             </a:fld>
             <a:endParaRPr lang="de-DE"/>
           </a:p>
@@ -3128,7 +3038,7 @@
               <a:pPr>
                 <a:defRPr/>
               </a:pPr>
-              <a:t>‹Nr.›</a:t>
+              <a:t>‹#›</a:t>
             </a:fld>
             <a:r>
               <a:rPr lang="de-DE" dirty="0"/>
@@ -3306,7 +3216,7 @@
             </a:pPr>
             <a:fld id="{E5DC69DE-E521-EC4C-AFF3-2A6651E3F1AC}" type="datetime1">
               <a:rPr lang="de-DE" smtClean="0"/>
-              <a:t>12.03.25</a:t>
+              <a:t>21.06.2026</a:t>
             </a:fld>
             <a:endParaRPr lang="de-DE"/>
           </a:p>
@@ -3378,7 +3288,7 @@
               <a:pPr>
                 <a:defRPr/>
               </a:pPr>
-              <a:t>‹Nr.›</a:t>
+              <a:t>‹#›</a:t>
             </a:fld>
             <a:r>
               <a:rPr lang="de-DE" dirty="0"/>
@@ -3568,7 +3478,7 @@
             </a:pPr>
             <a:fld id="{D1C5E747-687F-9C49-A498-1184E7908D39}" type="datetime1">
               <a:rPr lang="de-DE" smtClean="0"/>
-              <a:t>12.03.25</a:t>
+              <a:t>21.06.2026</a:t>
             </a:fld>
             <a:endParaRPr lang="de-DE"/>
           </a:p>
@@ -3640,7 +3550,7 @@
               <a:pPr>
                 <a:defRPr/>
               </a:pPr>
-              <a:t>‹Nr.›</a:t>
+              <a:t>‹#›</a:t>
             </a:fld>
             <a:r>
               <a:rPr lang="de-DE" dirty="0"/>
@@ -3653,198 +3563,6 @@
     <p:extLst>
       <p:ext uri="{BB962C8B-B14F-4D97-AF65-F5344CB8AC3E}">
         <p14:creationId xmlns:p14="http://schemas.microsoft.com/office/powerpoint/2010/main" val="1912718982"/>
-      </p:ext>
-    </p:extLst>
-  </p:cSld>
-  <p:clrMapOvr>
-    <a:masterClrMapping/>
-  </p:clrMapOvr>
-</p:sldLayout>
-</file>
-
-<file path=ppt/slideLayouts/slideLayout7.xml><?xml version="1.0" encoding="utf-8"?>
-<p:sldLayout xmlns:a="http://schemas.openxmlformats.org/drawingml/2006/main" xmlns:r="http://schemas.openxmlformats.org/officeDocument/2006/relationships" xmlns:p="http://schemas.openxmlformats.org/presentationml/2006/main" type="obj">
-  <p:cSld name="Blank">
-    <p:spTree>
-      <p:nvGrpSpPr>
-        <p:cNvPr id="1" name=""/>
-        <p:cNvGrpSpPr/>
-        <p:nvPr/>
-      </p:nvGrpSpPr>
-      <p:grpSpPr>
-        <a:xfrm>
-          <a:off x="0" y="0"/>
-          <a:ext cx="0" cy="0"/>
-          <a:chOff x="0" y="0"/>
-          <a:chExt cx="0" cy="0"/>
-        </a:xfrm>
-      </p:grpSpPr>
-      <p:sp>
-        <p:nvSpPr>
-          <p:cNvPr id="5" name="Rectangle 5"/>
-          <p:cNvSpPr>
-            <a:spLocks noGrp="1" noChangeArrowheads="1"/>
-          </p:cNvSpPr>
-          <p:nvPr>
-            <p:ph type="ftr" sz="quarter" idx="10"/>
-          </p:nvPr>
-        </p:nvSpPr>
-        <p:spPr>
-          <a:xfrm>
-            <a:off x="182563" y="6656388"/>
-            <a:ext cx="4389437" cy="144462"/>
-          </a:xfrm>
-          <a:ln/>
-        </p:spPr>
-        <p:txBody>
-          <a:bodyPr/>
-          <a:lstStyle>
-            <a:lvl1pPr>
-              <a:defRPr/>
-            </a:lvl1pPr>
-          </a:lstStyle>
-          <a:p>
-            <a:pPr>
-              <a:defRPr/>
-            </a:pPr>
-            <a:r>
-              <a:rPr lang="de-DE" dirty="0"/>
-              <a:t>Prof. Dr. Achim Rettberg – University </a:t>
-            </a:r>
-            <a:r>
-              <a:rPr lang="de-DE" dirty="0" err="1"/>
-              <a:t>of</a:t>
-            </a:r>
-            <a:r>
-              <a:rPr lang="de-DE" dirty="0"/>
-              <a:t> Applied </a:t>
-            </a:r>
-            <a:r>
-              <a:rPr lang="de-DE" dirty="0" err="1"/>
-              <a:t>Sciences</a:t>
-            </a:r>
-            <a:r>
-              <a:rPr lang="de-DE" dirty="0"/>
-              <a:t> Hamm-Lippstadt</a:t>
-            </a:r>
-          </a:p>
-        </p:txBody>
-      </p:sp>
-      <p:sp>
-        <p:nvSpPr>
-          <p:cNvPr id="6" name="Rectangle 15"/>
-          <p:cNvSpPr>
-            <a:spLocks noGrp="1" noChangeArrowheads="1"/>
-          </p:cNvSpPr>
-          <p:nvPr>
-            <p:ph type="dt" sz="half" idx="12"/>
-          </p:nvPr>
-        </p:nvSpPr>
-        <p:spPr>
-          <a:xfrm>
-            <a:off x="7812360" y="6656388"/>
-            <a:ext cx="755650" cy="144462"/>
-          </a:xfrm>
-          <a:ln/>
-        </p:spPr>
-        <p:txBody>
-          <a:bodyPr/>
-          <a:lstStyle>
-            <a:lvl1pPr>
-              <a:defRPr/>
-            </a:lvl1pPr>
-          </a:lstStyle>
-          <a:p>
-            <a:pPr>
-              <a:defRPr/>
-            </a:pPr>
-            <a:fld id="{8171E94B-46F9-304A-8F0C-ACC28ECEDCF5}" type="datetime1">
-              <a:rPr lang="de-DE" smtClean="0"/>
-              <a:t>12.03.25</a:t>
-            </a:fld>
-            <a:endParaRPr lang="de-DE"/>
-          </a:p>
-        </p:txBody>
-      </p:sp>
-      <p:sp>
-        <p:nvSpPr>
-          <p:cNvPr id="7" name="Slide Number Placeholder 6"/>
-          <p:cNvSpPr>
-            <a:spLocks noGrp="1" noChangeArrowheads="1"/>
-          </p:cNvSpPr>
-          <p:nvPr>
-            <p:ph type="sldNum" sz="quarter" idx="4"/>
-          </p:nvPr>
-        </p:nvSpPr>
-        <p:spPr bwMode="auto">
-          <a:xfrm>
-            <a:off x="8676456" y="6655197"/>
-            <a:ext cx="468052" cy="158179"/>
-          </a:xfrm>
-          <a:prstGeom prst="rect">
-            <a:avLst/>
-          </a:prstGeom>
-          <a:noFill/>
-          <a:ln w="9525">
-            <a:noFill/>
-            <a:miter lim="800000"/>
-            <a:headEnd/>
-            <a:tailEnd/>
-          </a:ln>
-          <a:effectLst/>
-        </p:spPr>
-        <p:txBody>
-          <a:bodyPr vert="horz" wrap="none" lIns="0" tIns="0" rIns="0" bIns="0" numCol="1" anchor="t" anchorCtr="0" compatLnSpc="1">
-            <a:prstTxWarp prst="textNoShape">
-              <a:avLst/>
-            </a:prstTxWarp>
-          </a:bodyPr>
-          <a:lstStyle>
-            <a:lvl1pPr algn="l">
-              <a:lnSpc>
-                <a:spcPct val="100000"/>
-              </a:lnSpc>
-              <a:spcAft>
-                <a:spcPct val="0"/>
-              </a:spcAft>
-              <a:buClrTx/>
-              <a:buSzTx/>
-              <a:buFontTx/>
-              <a:buNone/>
-              <a:defRPr sz="1000" b="0">
-                <a:solidFill>
-                  <a:schemeClr val="bg1"/>
-                </a:solidFill>
-                <a:latin typeface="Arial" pitchFamily="34" charset="0"/>
-              </a:defRPr>
-            </a:lvl1pPr>
-          </a:lstStyle>
-          <a:p>
-            <a:pPr>
-              <a:defRPr/>
-            </a:pPr>
-            <a:r>
-              <a:rPr lang="de-DE" dirty="0"/>
-              <a:t>&lt; </a:t>
-            </a:r>
-            <a:fld id="{1A61C92B-C297-4AC9-B551-2D8A658A0122}" type="slidenum">
-              <a:rPr lang="de-DE" smtClean="0"/>
-              <a:pPr>
-                <a:defRPr/>
-              </a:pPr>
-              <a:t>‹Nr.›</a:t>
-            </a:fld>
-            <a:r>
-              <a:rPr lang="de-DE" dirty="0"/>
-              <a:t> &gt;</a:t>
-            </a:r>
-          </a:p>
-        </p:txBody>
-      </p:sp>
-    </p:spTree>
-    <p:extLst>
-      <p:ext uri="{BB962C8B-B14F-4D97-AF65-F5344CB8AC3E}">
-        <p14:creationId xmlns:p14="http://schemas.microsoft.com/office/powerpoint/2010/main" val="3637891143"/>
       </p:ext>
     </p:extLst>
   </p:cSld>
@@ -3997,14 +3715,14 @@
           </a:ln>
           <a:extLst>
             <a:ext uri="{909E8E84-426E-40dd-AFC4-6F175D3DCCD1}">
-              <a14:hiddenFill xmlns="" xmlns:a14="http://schemas.microsoft.com/office/drawing/2010/main">
+              <a14:hiddenFill xmlns:a14="http://schemas.microsoft.com/office/drawing/2010/main" xmlns="">
                 <a:solidFill>
                   <a:srgbClr val="FFFFFF"/>
                 </a:solidFill>
               </a14:hiddenFill>
             </a:ext>
             <a:ext uri="{91240B29-F687-4f45-9708-019B960494DF}">
-              <a14:hiddenLine xmlns="" xmlns:a14="http://schemas.microsoft.com/office/drawing/2010/main" w="9525">
+              <a14:hiddenLine xmlns:a14="http://schemas.microsoft.com/office/drawing/2010/main" xmlns="" w="9525">
                 <a:solidFill>
                   <a:srgbClr val="000000"/>
                 </a:solidFill>
@@ -4055,14 +3773,14 @@
           </a:ln>
           <a:extLst>
             <a:ext uri="{909E8E84-426E-40dd-AFC4-6F175D3DCCD1}">
-              <a14:hiddenFill xmlns="" xmlns:a14="http://schemas.microsoft.com/office/drawing/2010/main">
+              <a14:hiddenFill xmlns:a14="http://schemas.microsoft.com/office/drawing/2010/main" xmlns="">
                 <a:solidFill>
                   <a:srgbClr val="FFFFFF"/>
                 </a:solidFill>
               </a14:hiddenFill>
             </a:ext>
             <a:ext uri="{91240B29-F687-4f45-9708-019B960494DF}">
-              <a14:hiddenLine xmlns="" xmlns:a14="http://schemas.microsoft.com/office/drawing/2010/main" w="9525">
+              <a14:hiddenLine xmlns:a14="http://schemas.microsoft.com/office/drawing/2010/main" xmlns="" w="9525">
                 <a:solidFill>
                   <a:srgbClr val="000000"/>
                 </a:solidFill>
@@ -4263,7 +3981,7 @@
               <a:pPr>
                 <a:defRPr/>
               </a:pPr>
-              <a:t>‹Nr.›</a:t>
+              <a:t>‹#›</a:t>
             </a:fld>
             <a:r>
               <a:rPr lang="de-DE" dirty="0"/>
@@ -4299,7 +4017,7 @@
           </a:ln>
           <a:extLst>
             <a:ext uri="{909E8E84-426E-40dd-AFC4-6F175D3DCCD1}">
-              <a14:hiddenFill xmlns="" xmlns:a14="http://schemas.microsoft.com/office/drawing/2010/main">
+              <a14:hiddenFill xmlns:a14="http://schemas.microsoft.com/office/drawing/2010/main" xmlns="">
                 <a:noFill/>
               </a14:hiddenFill>
             </a:ext>
@@ -4372,7 +4090,7 @@
             </a:pPr>
             <a:fld id="{0B2D14DF-C64B-D248-822C-9E9F774E507A}" type="datetime1">
               <a:rPr lang="de-DE" noProof="0" smtClean="0"/>
-              <a:t>12.03.25</a:t>
+              <a:t>21.06.2026</a:t>
             </a:fld>
             <a:endParaRPr lang="de-DE" noProof="0" dirty="0"/>
           </a:p>
@@ -4420,7 +4138,7 @@
           <p:nvPr userDrawn="1"/>
         </p:nvPicPr>
         <p:blipFill>
-          <a:blip r:embed="rId9" cstate="screen">
+          <a:blip r:embed="rId8" cstate="screen">
             <a:extLst>
               <a:ext uri="{28A0092B-C50C-407E-A947-70E740481C1C}">
                 <a14:useLocalDpi xmlns:a14="http://schemas.microsoft.com/office/drawing/2010/main"/>
@@ -4456,7 +4174,6 @@
     <p:sldLayoutId id="2147483905" r:id="rId4"/>
     <p:sldLayoutId id="2147483906" r:id="rId5"/>
     <p:sldLayoutId id="2147483908" r:id="rId6"/>
-    <p:sldLayoutId id="2147483909" r:id="rId7"/>
   </p:sldLayoutIdLst>
   <p:hf hdr="0"/>
   <p:txStyles>
@@ -4937,7 +4654,113 @@
       </p:grpSpPr>
       <p:sp>
         <p:nvSpPr>
-          <p:cNvPr id="4" name="Date Placeholder 3"/>
+          <p:cNvPr id="2" name="Заголовок 1">
+            <a:extLst>
+              <a:ext uri="{FF2B5EF4-FFF2-40B4-BE49-F238E27FC236}">
+                <a16:creationId xmlns:a16="http://schemas.microsoft.com/office/drawing/2014/main" id="{F734D097-2924-CEC1-73BB-8E3BF1082725}"/>
+              </a:ext>
+            </a:extLst>
+          </p:cNvPr>
+          <p:cNvSpPr>
+            <a:spLocks noGrp="1"/>
+          </p:cNvSpPr>
+          <p:nvPr>
+            <p:ph type="ctrTitle"/>
+          </p:nvPr>
+        </p:nvSpPr>
+        <p:spPr>
+          <a:xfrm>
+            <a:off x="909533" y="2204864"/>
+            <a:ext cx="7324934" cy="984885"/>
+          </a:xfrm>
+        </p:spPr>
+        <p:txBody>
+          <a:bodyPr/>
+          <a:lstStyle/>
+          <a:p>
+            <a:r>
+              <a:rPr lang="en-US" sz="3200" dirty="0"/>
+              <a:t>The Dynamic Sporadic Server Algorithm</a:t>
+            </a:r>
+          </a:p>
+        </p:txBody>
+      </p:sp>
+      <p:sp>
+        <p:nvSpPr>
+          <p:cNvPr id="3" name="Подзаголовок 2">
+            <a:extLst>
+              <a:ext uri="{FF2B5EF4-FFF2-40B4-BE49-F238E27FC236}">
+                <a16:creationId xmlns:a16="http://schemas.microsoft.com/office/drawing/2014/main" id="{5FA9FE19-29C8-EC15-67F0-749786579BBC}"/>
+              </a:ext>
+            </a:extLst>
+          </p:cNvPr>
+          <p:cNvSpPr>
+            <a:spLocks noGrp="1"/>
+          </p:cNvSpPr>
+          <p:nvPr>
+            <p:ph type="subTitle" idx="4"/>
+          </p:nvPr>
+        </p:nvSpPr>
+        <p:spPr/>
+        <p:txBody>
+          <a:bodyPr/>
+          <a:lstStyle/>
+          <a:p>
+            <a:r>
+              <a:rPr lang="en-US" dirty="0"/>
+              <a:t>By Oleg Kelner</a:t>
+            </a:r>
+          </a:p>
+        </p:txBody>
+      </p:sp>
+      <p:sp>
+        <p:nvSpPr>
+          <p:cNvPr id="4" name="Нижний колонтитул 3">
+            <a:extLst>
+              <a:ext uri="{FF2B5EF4-FFF2-40B4-BE49-F238E27FC236}">
+                <a16:creationId xmlns:a16="http://schemas.microsoft.com/office/drawing/2014/main" id="{41CF7CF1-C1F6-3272-2C76-40FDEA8B6A42}"/>
+              </a:ext>
+            </a:extLst>
+          </p:cNvPr>
+          <p:cNvSpPr>
+            <a:spLocks noGrp="1"/>
+          </p:cNvSpPr>
+          <p:nvPr>
+            <p:ph type="ftr" sz="quarter" idx="10"/>
+          </p:nvPr>
+        </p:nvSpPr>
+        <p:spPr/>
+        <p:txBody>
+          <a:bodyPr/>
+          <a:lstStyle/>
+          <a:p>
+            <a:pPr>
+              <a:defRPr/>
+            </a:pPr>
+            <a:r>
+              <a:rPr lang="de-DE" dirty="0"/>
+              <a:t>Oleg Kelner – University </a:t>
+            </a:r>
+            <a:r>
+              <a:rPr lang="de-DE" dirty="0" err="1"/>
+              <a:t>of</a:t>
+            </a:r>
+            <a:r>
+              <a:rPr lang="de-DE" dirty="0"/>
+              <a:t> Applied Sciences Hamm-Lippstadt</a:t>
+            </a:r>
+          </a:p>
+        </p:txBody>
+      </p:sp>
+      <p:sp>
+        <p:nvSpPr>
+          <p:cNvPr id="5" name="Дата 4">
+            <a:extLst>
+              <a:ext uri="{FF2B5EF4-FFF2-40B4-BE49-F238E27FC236}">
+                <a16:creationId xmlns:a16="http://schemas.microsoft.com/office/drawing/2014/main" id="{46580BC1-1C8B-9BB1-0180-1C2AB84C1236}"/>
+              </a:ext>
+            </a:extLst>
+          </p:cNvPr>
           <p:cNvSpPr>
             <a:spLocks noGrp="1"/>
           </p:cNvSpPr>
@@ -4953,9 +4776,9 @@
             <a:pPr>
               <a:defRPr/>
             </a:pPr>
-            <a:fld id="{BD306EEC-5963-564C-98B6-D7B34F509262}" type="datetime1">
+            <a:fld id="{D1C5E747-687F-9C49-A498-1184E7908D39}" type="datetime1">
               <a:rPr lang="de-DE" smtClean="0"/>
-              <a:t>12.03.25</a:t>
+              <a:t>21.06.2026</a:t>
             </a:fld>
             <a:endParaRPr lang="de-DE"/>
           </a:p>
@@ -4963,33 +4786,13 @@
       </p:sp>
       <p:sp>
         <p:nvSpPr>
-          <p:cNvPr id="5" name="Footer Placeholder 4"/>
-          <p:cNvSpPr>
-            <a:spLocks noGrp="1"/>
-          </p:cNvSpPr>
-          <p:nvPr>
-            <p:ph type="ftr" sz="quarter" idx="10"/>
-          </p:nvPr>
-        </p:nvSpPr>
-        <p:spPr/>
-        <p:txBody>
-          <a:bodyPr/>
-          <a:lstStyle/>
-          <a:p>
-            <a:pPr>
-              <a:defRPr/>
-            </a:pPr>
-            <a:r>
-              <a:rPr lang="de-DE"/>
-              <a:t>Prof. Dr. Achim Rettberg – University of Applied Sciences Hamm-Lippstadt</a:t>
-            </a:r>
-            <a:endParaRPr lang="de-DE" dirty="0"/>
-          </a:p>
-        </p:txBody>
-      </p:sp>
-      <p:sp>
-        <p:nvSpPr>
-          <p:cNvPr id="6" name="Slide Number Placeholder 5"/>
+          <p:cNvPr id="6" name="Номер слайда 5">
+            <a:extLst>
+              <a:ext uri="{FF2B5EF4-FFF2-40B4-BE49-F238E27FC236}">
+                <a16:creationId xmlns:a16="http://schemas.microsoft.com/office/drawing/2014/main" id="{6C0B7D74-49BE-DB11-056A-B67F12142D22}"/>
+              </a:ext>
+            </a:extLst>
+          </p:cNvPr>
           <p:cNvSpPr>
             <a:spLocks noGrp="1"/>
           </p:cNvSpPr>
@@ -5027,7 +4830,7 @@
     </p:spTree>
     <p:extLst>
       <p:ext uri="{BB962C8B-B14F-4D97-AF65-F5344CB8AC3E}">
-        <p14:creationId xmlns:p14="http://schemas.microsoft.com/office/powerpoint/2010/main" val="3091120582"/>
+        <p14:creationId xmlns:p14="http://schemas.microsoft.com/office/powerpoint/2010/main" val="2912482713"/>
       </p:ext>
     </p:extLst>
   </p:cSld>
@@ -5056,7 +4859,52 @@
       </p:grpSpPr>
       <p:sp>
         <p:nvSpPr>
-          <p:cNvPr id="3" name="Date Placeholder 2"/>
+          <p:cNvPr id="4" name="Нижний колонтитул 3">
+            <a:extLst>
+              <a:ext uri="{FF2B5EF4-FFF2-40B4-BE49-F238E27FC236}">
+                <a16:creationId xmlns:a16="http://schemas.microsoft.com/office/drawing/2014/main" id="{DC0D5E76-9209-577E-662A-2E178FF9249D}"/>
+              </a:ext>
+            </a:extLst>
+          </p:cNvPr>
+          <p:cNvSpPr>
+            <a:spLocks noGrp="1"/>
+          </p:cNvSpPr>
+          <p:nvPr>
+            <p:ph type="ftr" sz="quarter" idx="10"/>
+          </p:nvPr>
+        </p:nvSpPr>
+        <p:spPr/>
+        <p:txBody>
+          <a:bodyPr/>
+          <a:lstStyle/>
+          <a:p>
+            <a:pPr>
+              <a:defRPr/>
+            </a:pPr>
+            <a:r>
+              <a:rPr lang="de-DE" dirty="0"/>
+              <a:t>Oleg Kelner – University </a:t>
+            </a:r>
+            <a:r>
+              <a:rPr lang="de-DE" dirty="0" err="1"/>
+              <a:t>of</a:t>
+            </a:r>
+            <a:r>
+              <a:rPr lang="de-DE" dirty="0"/>
+              <a:t> Applied Sciences Hamm-Lippstadt</a:t>
+            </a:r>
+          </a:p>
+        </p:txBody>
+      </p:sp>
+      <p:sp>
+        <p:nvSpPr>
+          <p:cNvPr id="5" name="Дата 4">
+            <a:extLst>
+              <a:ext uri="{FF2B5EF4-FFF2-40B4-BE49-F238E27FC236}">
+                <a16:creationId xmlns:a16="http://schemas.microsoft.com/office/drawing/2014/main" id="{F6228B52-5945-3E7D-BCAF-BF0445C88DA9}"/>
+              </a:ext>
+            </a:extLst>
+          </p:cNvPr>
           <p:cNvSpPr>
             <a:spLocks noGrp="1"/>
           </p:cNvSpPr>
@@ -5072,9 +4920,9 @@
             <a:pPr>
               <a:defRPr/>
             </a:pPr>
-            <a:fld id="{BC3D5FFD-D629-EB49-AAC5-C3A2BD184236}" type="datetime1">
+            <a:fld id="{D1C5E747-687F-9C49-A498-1184E7908D39}" type="datetime1">
               <a:rPr lang="de-DE" smtClean="0"/>
-              <a:t>12.03.25</a:t>
+              <a:t>21.06.2026</a:t>
             </a:fld>
             <a:endParaRPr lang="de-DE"/>
           </a:p>
@@ -5082,7 +4930,155 @@
       </p:sp>
       <p:sp>
         <p:nvSpPr>
-          <p:cNvPr id="4" name="Footer Placeholder 3"/>
+          <p:cNvPr id="6" name="Номер слайда 5">
+            <a:extLst>
+              <a:ext uri="{FF2B5EF4-FFF2-40B4-BE49-F238E27FC236}">
+                <a16:creationId xmlns:a16="http://schemas.microsoft.com/office/drawing/2014/main" id="{01CE94C0-56AA-4F63-A526-AC51A569F03E}"/>
+              </a:ext>
+            </a:extLst>
+          </p:cNvPr>
+          <p:cNvSpPr>
+            <a:spLocks noGrp="1"/>
+          </p:cNvSpPr>
+          <p:nvPr>
+            <p:ph type="sldNum" sz="quarter" idx="13"/>
+          </p:nvPr>
+        </p:nvSpPr>
+        <p:spPr/>
+        <p:txBody>
+          <a:bodyPr/>
+          <a:lstStyle/>
+          <a:p>
+            <a:pPr>
+              <a:defRPr/>
+            </a:pPr>
+            <a:r>
+              <a:rPr lang="de-DE"/>
+              <a:t>&lt; </a:t>
+            </a:r>
+            <a:fld id="{1A61C92B-C297-4AC9-B551-2D8A658A0122}" type="slidenum">
+              <a:rPr lang="de-DE" smtClean="0"/>
+              <a:pPr>
+                <a:defRPr/>
+              </a:pPr>
+              <a:t>2</a:t>
+            </a:fld>
+            <a:r>
+              <a:rPr lang="de-DE"/>
+              <a:t> &gt;</a:t>
+            </a:r>
+            <a:endParaRPr lang="de-DE" dirty="0"/>
+          </a:p>
+        </p:txBody>
+      </p:sp>
+      <p:sp>
+        <p:nvSpPr>
+          <p:cNvPr id="7" name="Заголовок 1">
+            <a:extLst>
+              <a:ext uri="{FF2B5EF4-FFF2-40B4-BE49-F238E27FC236}">
+                <a16:creationId xmlns:a16="http://schemas.microsoft.com/office/drawing/2014/main" id="{BB7DC91F-5A21-1847-65F1-76A6C5229E9D}"/>
+              </a:ext>
+            </a:extLst>
+          </p:cNvPr>
+          <p:cNvSpPr>
+            <a:spLocks noGrp="1"/>
+          </p:cNvSpPr>
+          <p:nvPr>
+            <p:ph type="ctrTitle"/>
+          </p:nvPr>
+        </p:nvSpPr>
+        <p:spPr>
+          <a:xfrm>
+            <a:off x="395536" y="188640"/>
+            <a:ext cx="7324934" cy="492443"/>
+          </a:xfrm>
+        </p:spPr>
+        <p:txBody>
+          <a:bodyPr/>
+          <a:lstStyle/>
+          <a:p>
+            <a:r>
+              <a:rPr lang="en-US" sz="3200" dirty="0"/>
+              <a:t>UPPAAL model</a:t>
+            </a:r>
+          </a:p>
+        </p:txBody>
+      </p:sp>
+      <p:pic>
+        <p:nvPicPr>
+          <p:cNvPr id="9" name="Рисунок 8">
+            <a:extLst>
+              <a:ext uri="{FF2B5EF4-FFF2-40B4-BE49-F238E27FC236}">
+                <a16:creationId xmlns:a16="http://schemas.microsoft.com/office/drawing/2014/main" id="{24F83CC1-EBCC-561C-95E1-097772681598}"/>
+              </a:ext>
+            </a:extLst>
+          </p:cNvPr>
+          <p:cNvPicPr>
+            <a:picLocks noChangeAspect="1"/>
+          </p:cNvPicPr>
+          <p:nvPr/>
+        </p:nvPicPr>
+        <p:blipFill>
+          <a:blip r:embed="rId2"/>
+          <a:stretch>
+            <a:fillRect/>
+          </a:stretch>
+        </p:blipFill>
+        <p:spPr>
+          <a:xfrm>
+            <a:off x="4463988" y="952575"/>
+            <a:ext cx="4572000" cy="2376109"/>
+          </a:xfrm>
+          <a:prstGeom prst="rect">
+            <a:avLst/>
+          </a:prstGeom>
+        </p:spPr>
+      </p:pic>
+    </p:spTree>
+    <p:extLst>
+      <p:ext uri="{BB962C8B-B14F-4D97-AF65-F5344CB8AC3E}">
+        <p14:creationId xmlns:p14="http://schemas.microsoft.com/office/powerpoint/2010/main" val="3229125298"/>
+      </p:ext>
+    </p:extLst>
+  </p:cSld>
+  <p:clrMapOvr>
+    <a:masterClrMapping/>
+  </p:clrMapOvr>
+</p:sld>
+</file>
+
+<file path=ppt/slides/slide3.xml><?xml version="1.0" encoding="utf-8"?>
+<p:sld xmlns:a="http://schemas.openxmlformats.org/drawingml/2006/main" xmlns:r="http://schemas.openxmlformats.org/officeDocument/2006/relationships" xmlns:p="http://schemas.openxmlformats.org/presentationml/2006/main">
+  <p:cSld>
+    <p:spTree>
+      <p:nvGrpSpPr>
+        <p:cNvPr id="1" name="">
+          <a:extLst>
+            <a:ext uri="{FF2B5EF4-FFF2-40B4-BE49-F238E27FC236}">
+              <a16:creationId xmlns:a16="http://schemas.microsoft.com/office/drawing/2014/main" id="{2976D7ED-9648-92E7-D31A-6B414BD8E1C7}"/>
+            </a:ext>
+          </a:extLst>
+        </p:cNvPr>
+        <p:cNvGrpSpPr/>
+        <p:nvPr/>
+      </p:nvGrpSpPr>
+      <p:grpSpPr>
+        <a:xfrm>
+          <a:off x="0" y="0"/>
+          <a:ext cx="0" cy="0"/>
+          <a:chOff x="0" y="0"/>
+          <a:chExt cx="0" cy="0"/>
+        </a:xfrm>
+      </p:grpSpPr>
+      <p:sp>
+        <p:nvSpPr>
+          <p:cNvPr id="4" name="Нижний колонтитул 3">
+            <a:extLst>
+              <a:ext uri="{FF2B5EF4-FFF2-40B4-BE49-F238E27FC236}">
+                <a16:creationId xmlns:a16="http://schemas.microsoft.com/office/drawing/2014/main" id="{124AFB3F-1442-861D-735C-AB14CF84C37F}"/>
+              </a:ext>
+            </a:extLst>
+          </p:cNvPr>
           <p:cNvSpPr>
             <a:spLocks noGrp="1"/>
           </p:cNvSpPr>
@@ -5099,21 +5095,34 @@
               <a:defRPr/>
             </a:pPr>
             <a:r>
-              <a:rPr lang="de-DE"/>
-              <a:t>Prof. Dr. Achim Rettberg – University of Applied Sciences Hamm-Lippstadt</a:t>
-            </a:r>
-            <a:endParaRPr lang="de-DE" dirty="0"/>
+              <a:rPr lang="de-DE" dirty="0"/>
+              <a:t>Oleg Kelner – University </a:t>
+            </a:r>
+            <a:r>
+              <a:rPr lang="de-DE" dirty="0" err="1"/>
+              <a:t>of</a:t>
+            </a:r>
+            <a:r>
+              <a:rPr lang="de-DE" dirty="0"/>
+              <a:t> Applied Sciences Hamm-Lippstadt</a:t>
+            </a:r>
           </a:p>
         </p:txBody>
       </p:sp>
       <p:sp>
         <p:nvSpPr>
-          <p:cNvPr id="6" name="Slide Number Placeholder 5"/>
+          <p:cNvPr id="5" name="Дата 4">
+            <a:extLst>
+              <a:ext uri="{FF2B5EF4-FFF2-40B4-BE49-F238E27FC236}">
+                <a16:creationId xmlns:a16="http://schemas.microsoft.com/office/drawing/2014/main" id="{38AC054B-7AE3-91CF-9E9F-6B6064EAF347}"/>
+              </a:ext>
+            </a:extLst>
+          </p:cNvPr>
           <p:cNvSpPr>
             <a:spLocks noGrp="1"/>
           </p:cNvSpPr>
           <p:nvPr>
-            <p:ph type="sldNum" sz="quarter" idx="4"/>
+            <p:ph type="dt" sz="half" idx="12"/>
           </p:nvPr>
         </p:nvSpPr>
         <p:spPr/>
@@ -5124,6 +5133,38 @@
             <a:pPr>
               <a:defRPr/>
             </a:pPr>
+            <a:fld id="{D1C5E747-687F-9C49-A498-1184E7908D39}" type="datetime1">
+              <a:rPr lang="de-DE" smtClean="0"/>
+              <a:t>21.06.2026</a:t>
+            </a:fld>
+            <a:endParaRPr lang="de-DE"/>
+          </a:p>
+        </p:txBody>
+      </p:sp>
+      <p:sp>
+        <p:nvSpPr>
+          <p:cNvPr id="6" name="Номер слайда 5">
+            <a:extLst>
+              <a:ext uri="{FF2B5EF4-FFF2-40B4-BE49-F238E27FC236}">
+                <a16:creationId xmlns:a16="http://schemas.microsoft.com/office/drawing/2014/main" id="{31D7F136-F29C-3E4D-BD54-42A15D7AA308}"/>
+              </a:ext>
+            </a:extLst>
+          </p:cNvPr>
+          <p:cNvSpPr>
+            <a:spLocks noGrp="1"/>
+          </p:cNvSpPr>
+          <p:nvPr>
+            <p:ph type="sldNum" sz="quarter" idx="13"/>
+          </p:nvPr>
+        </p:nvSpPr>
+        <p:spPr/>
+        <p:txBody>
+          <a:bodyPr/>
+          <a:lstStyle/>
+          <a:p>
+            <a:pPr>
+              <a:defRPr/>
+            </a:pPr>
             <a:r>
               <a:rPr lang="de-DE"/>
               <a:t>&lt; </a:t>
@@ -5133,20 +5174,5075 @@
               <a:pPr>
                 <a:defRPr/>
               </a:pPr>
-              <a:t>2</a:t>
+              <a:t>3</a:t>
             </a:fld>
             <a:r>
               <a:rPr lang="de-DE"/>
               <a:t> &gt;</a:t>
             </a:r>
             <a:endParaRPr lang="de-DE" dirty="0"/>
+          </a:p>
+        </p:txBody>
+      </p:sp>
+      <p:sp>
+        <p:nvSpPr>
+          <p:cNvPr id="7" name="Заголовок 1">
+            <a:extLst>
+              <a:ext uri="{FF2B5EF4-FFF2-40B4-BE49-F238E27FC236}">
+                <a16:creationId xmlns:a16="http://schemas.microsoft.com/office/drawing/2014/main" id="{7CC69C23-1CA8-9079-0483-F0861C293AE2}"/>
+              </a:ext>
+            </a:extLst>
+          </p:cNvPr>
+          <p:cNvSpPr>
+            <a:spLocks noGrp="1"/>
+          </p:cNvSpPr>
+          <p:nvPr>
+            <p:ph type="ctrTitle"/>
+          </p:nvPr>
+        </p:nvSpPr>
+        <p:spPr>
+          <a:xfrm>
+            <a:off x="395536" y="188640"/>
+            <a:ext cx="7324934" cy="492443"/>
+          </a:xfrm>
+        </p:spPr>
+        <p:txBody>
+          <a:bodyPr/>
+          <a:lstStyle/>
+          <a:p>
+            <a:r>
+              <a:rPr lang="en-US" sz="3200" dirty="0"/>
+              <a:t>Implementation</a:t>
+            </a:r>
+          </a:p>
+        </p:txBody>
+      </p:sp>
+      <p:pic>
+        <p:nvPicPr>
+          <p:cNvPr id="3" name="Рисунок 2">
+            <a:extLst>
+              <a:ext uri="{FF2B5EF4-FFF2-40B4-BE49-F238E27FC236}">
+                <a16:creationId xmlns:a16="http://schemas.microsoft.com/office/drawing/2014/main" id="{F5D0FA63-BD62-6CC1-A360-0F37CEF58341}"/>
+              </a:ext>
+            </a:extLst>
+          </p:cNvPr>
+          <p:cNvPicPr>
+            <a:picLocks noChangeAspect="1"/>
+          </p:cNvPicPr>
+          <p:nvPr/>
+        </p:nvPicPr>
+        <p:blipFill>
+          <a:blip r:embed="rId2">
+            <a:extLst>
+              <a:ext uri="{28A0092B-C50C-407E-A947-70E740481C1C}">
+                <a14:useLocalDpi xmlns:a14="http://schemas.microsoft.com/office/drawing/2010/main" val="0"/>
+              </a:ext>
+            </a:extLst>
+          </a:blip>
+          <a:stretch>
+            <a:fillRect/>
+          </a:stretch>
+        </p:blipFill>
+        <p:spPr>
+          <a:xfrm>
+            <a:off x="1052995" y="926978"/>
+            <a:ext cx="6795115" cy="2718046"/>
+          </a:xfrm>
+          <a:prstGeom prst="rect">
+            <a:avLst/>
+          </a:prstGeom>
+        </p:spPr>
+      </p:pic>
+      <p:pic>
+        <p:nvPicPr>
+          <p:cNvPr id="9" name="Рисунок 8">
+            <a:extLst>
+              <a:ext uri="{FF2B5EF4-FFF2-40B4-BE49-F238E27FC236}">
+                <a16:creationId xmlns:a16="http://schemas.microsoft.com/office/drawing/2014/main" id="{D8DE2513-7B8A-9F6F-EF13-1B260F60B07B}"/>
+              </a:ext>
+            </a:extLst>
+          </p:cNvPr>
+          <p:cNvPicPr>
+            <a:picLocks noChangeAspect="1"/>
+          </p:cNvPicPr>
+          <p:nvPr/>
+        </p:nvPicPr>
+        <p:blipFill>
+          <a:blip r:embed="rId3">
+            <a:extLst>
+              <a:ext uri="{28A0092B-C50C-407E-A947-70E740481C1C}">
+                <a14:useLocalDpi xmlns:a14="http://schemas.microsoft.com/office/drawing/2010/main" val="0"/>
+              </a:ext>
+            </a:extLst>
+          </a:blip>
+          <a:stretch>
+            <a:fillRect/>
+          </a:stretch>
+        </p:blipFill>
+        <p:spPr>
+          <a:xfrm>
+            <a:off x="1295890" y="3784257"/>
+            <a:ext cx="6552220" cy="2620888"/>
+          </a:xfrm>
+          <a:prstGeom prst="rect">
+            <a:avLst/>
+          </a:prstGeom>
+        </p:spPr>
+      </p:pic>
+      <mc:AlternateContent xmlns:mc="http://schemas.openxmlformats.org/markup-compatibility/2006">
+        <mc:Choice xmlns:a14="http://schemas.microsoft.com/office/drawing/2010/main" Requires="a14">
+          <p:sp>
+            <p:nvSpPr>
+              <p:cNvPr id="10" name="TextBox 9">
+                <a:extLst>
+                  <a:ext uri="{FF2B5EF4-FFF2-40B4-BE49-F238E27FC236}">
+                    <a16:creationId xmlns:a16="http://schemas.microsoft.com/office/drawing/2014/main" id="{512D799F-9922-0B54-D1C3-340A34541AF3}"/>
+                  </a:ext>
+                </a:extLst>
+              </p:cNvPr>
+              <p:cNvSpPr txBox="1"/>
+              <p:nvPr/>
+            </p:nvSpPr>
+            <p:spPr>
+              <a:xfrm>
+                <a:off x="8015542" y="4857456"/>
+                <a:ext cx="903324" cy="474489"/>
+              </a:xfrm>
+              <a:prstGeom prst="rect">
+                <a:avLst/>
+              </a:prstGeom>
+              <a:noFill/>
+            </p:spPr>
+            <p:txBody>
+              <a:bodyPr wrap="none" lIns="0" tIns="0" rIns="0" bIns="0" rtlCol="0">
+                <a:spAutoFit/>
+              </a:bodyPr>
+              <a:lstStyle/>
+              <a:p>
+                <a14:m>
+                  <m:oMathPara xmlns:m="http://schemas.openxmlformats.org/officeDocument/2006/math">
+                    <m:oMathParaPr>
+                      <m:jc m:val="centerGroup"/>
+                    </m:oMathParaPr>
+                    <m:oMath xmlns:m="http://schemas.openxmlformats.org/officeDocument/2006/math">
+                      <m:sSub>
+                        <m:sSubPr>
+                          <m:ctrlPr>
+                            <a:rPr lang="en-US" b="0" i="1" smtClean="0">
+                              <a:latin typeface="Cambria Math" panose="02040503050406030204" pitchFamily="18" charset="0"/>
+                            </a:rPr>
+                          </m:ctrlPr>
+                        </m:sSubPr>
+                        <m:e>
+                          <m:r>
+                            <a:rPr lang="en-US" b="0" i="1" smtClean="0">
+                              <a:latin typeface="Cambria Math" panose="02040503050406030204" pitchFamily="18" charset="0"/>
+                            </a:rPr>
+                            <m:t>𝐶</m:t>
+                          </m:r>
+                        </m:e>
+                        <m:sub>
+                          <m:r>
+                            <a:rPr lang="en-US" b="0" i="1" smtClean="0">
+                              <a:latin typeface="Cambria Math" panose="02040503050406030204" pitchFamily="18" charset="0"/>
+                            </a:rPr>
+                            <m:t>𝑠</m:t>
+                          </m:r>
+                        </m:sub>
+                      </m:sSub>
+                      <m:r>
+                        <a:rPr lang="en-US" b="0" i="1" smtClean="0">
+                          <a:latin typeface="Cambria Math" panose="02040503050406030204" pitchFamily="18" charset="0"/>
+                        </a:rPr>
+                        <m:t>=2</m:t>
+                      </m:r>
+                      <m:r>
+                        <a:rPr lang="en-US" b="0" i="1" smtClean="0">
+                          <a:latin typeface="Cambria Math" panose="02040503050406030204" pitchFamily="18" charset="0"/>
+                        </a:rPr>
+                        <m:t>𝑚𝑠</m:t>
+                      </m:r>
+                    </m:oMath>
+                    <m:oMath xmlns:m="http://schemas.openxmlformats.org/officeDocument/2006/math">
+                      <m:sSub>
+                        <m:sSubPr>
+                          <m:ctrlPr>
+                            <a:rPr lang="en-US" b="0" i="1" smtClean="0">
+                              <a:latin typeface="Cambria Math" panose="02040503050406030204" pitchFamily="18" charset="0"/>
+                            </a:rPr>
+                          </m:ctrlPr>
+                        </m:sSubPr>
+                        <m:e>
+                          <m:r>
+                            <a:rPr lang="en-US" b="0" i="1" smtClean="0">
+                              <a:latin typeface="Cambria Math" panose="02040503050406030204" pitchFamily="18" charset="0"/>
+                            </a:rPr>
+                            <m:t>𝑇</m:t>
+                          </m:r>
+                        </m:e>
+                        <m:sub>
+                          <m:r>
+                            <a:rPr lang="en-US" b="0" i="1" smtClean="0">
+                              <a:latin typeface="Cambria Math" panose="02040503050406030204" pitchFamily="18" charset="0"/>
+                            </a:rPr>
+                            <m:t>𝑠</m:t>
+                          </m:r>
+                        </m:sub>
+                      </m:sSub>
+                      <m:r>
+                        <a:rPr lang="en-US" b="0" i="1" smtClean="0">
+                          <a:latin typeface="Cambria Math" panose="02040503050406030204" pitchFamily="18" charset="0"/>
+                        </a:rPr>
+                        <m:t>=5</m:t>
+                      </m:r>
+                      <m:r>
+                        <a:rPr lang="en-US" b="0" i="1" smtClean="0">
+                          <a:latin typeface="Cambria Math" panose="02040503050406030204" pitchFamily="18" charset="0"/>
+                        </a:rPr>
+                        <m:t>𝑚𝑠</m:t>
+                      </m:r>
+                    </m:oMath>
+                  </m:oMathPara>
+                </a14:m>
+                <a:endParaRPr lang="en-US" b="0" dirty="0"/>
+              </a:p>
+            </p:txBody>
+          </p:sp>
+        </mc:Choice>
+        <mc:Fallback>
+          <p:sp>
+            <p:nvSpPr>
+              <p:cNvPr id="10" name="TextBox 9">
+                <a:extLst>
+                  <a:ext uri="{FF2B5EF4-FFF2-40B4-BE49-F238E27FC236}">
+                    <a16:creationId xmlns:a16="http://schemas.microsoft.com/office/drawing/2014/main" id="{512D799F-9922-0B54-D1C3-340A34541AF3}"/>
+                  </a:ext>
+                </a:extLst>
+              </p:cNvPr>
+              <p:cNvSpPr txBox="1">
+                <a:spLocks noRot="1" noChangeAspect="1" noMove="1" noResize="1" noEditPoints="1" noAdjustHandles="1" noChangeArrowheads="1" noChangeShapeType="1" noTextEdit="1"/>
+              </p:cNvSpPr>
+              <p:nvPr/>
+            </p:nvSpPr>
+            <p:spPr>
+              <a:xfrm>
+                <a:off x="8015542" y="4857456"/>
+                <a:ext cx="903324" cy="474489"/>
+              </a:xfrm>
+              <a:prstGeom prst="rect">
+                <a:avLst/>
+              </a:prstGeom>
+              <a:blipFill>
+                <a:blip r:embed="rId4"/>
+                <a:stretch>
+                  <a:fillRect l="-4730" r="-2703"/>
+                </a:stretch>
+              </a:blipFill>
+            </p:spPr>
+            <p:txBody>
+              <a:bodyPr/>
+              <a:lstStyle/>
+              <a:p>
+                <a:r>
+                  <a:rPr lang="en-US">
+                    <a:noFill/>
+                  </a:rPr>
+                  <a:t> </a:t>
+                </a:r>
+              </a:p>
+            </p:txBody>
+          </p:sp>
+        </mc:Fallback>
+      </mc:AlternateContent>
+    </p:spTree>
+    <p:extLst>
+      <p:ext uri="{BB962C8B-B14F-4D97-AF65-F5344CB8AC3E}">
+        <p14:creationId xmlns:p14="http://schemas.microsoft.com/office/powerpoint/2010/main" val="1337078943"/>
+      </p:ext>
+    </p:extLst>
+  </p:cSld>
+  <p:clrMapOvr>
+    <a:masterClrMapping/>
+  </p:clrMapOvr>
+</p:sld>
+</file>
+
+<file path=ppt/slides/slide4.xml><?xml version="1.0" encoding="utf-8"?>
+<p:sld xmlns:a="http://schemas.openxmlformats.org/drawingml/2006/main" xmlns:r="http://schemas.openxmlformats.org/officeDocument/2006/relationships" xmlns:p="http://schemas.openxmlformats.org/presentationml/2006/main">
+  <p:cSld>
+    <p:spTree>
+      <p:nvGrpSpPr>
+        <p:cNvPr id="1" name="">
+          <a:extLst>
+            <a:ext uri="{FF2B5EF4-FFF2-40B4-BE49-F238E27FC236}">
+              <a16:creationId xmlns:a16="http://schemas.microsoft.com/office/drawing/2014/main" id="{9A0D711A-EC1E-4D14-6CC8-F181430A6E5E}"/>
+            </a:ext>
+          </a:extLst>
+        </p:cNvPr>
+        <p:cNvGrpSpPr/>
+        <p:nvPr/>
+      </p:nvGrpSpPr>
+      <p:grpSpPr>
+        <a:xfrm>
+          <a:off x="0" y="0"/>
+          <a:ext cx="0" cy="0"/>
+          <a:chOff x="0" y="0"/>
+          <a:chExt cx="0" cy="0"/>
+        </a:xfrm>
+      </p:grpSpPr>
+      <p:sp>
+        <p:nvSpPr>
+          <p:cNvPr id="4" name="Нижний колонтитул 3">
+            <a:extLst>
+              <a:ext uri="{FF2B5EF4-FFF2-40B4-BE49-F238E27FC236}">
+                <a16:creationId xmlns:a16="http://schemas.microsoft.com/office/drawing/2014/main" id="{8153A1E2-619A-6725-4EA7-3953E9628DF8}"/>
+              </a:ext>
+            </a:extLst>
+          </p:cNvPr>
+          <p:cNvSpPr>
+            <a:spLocks noGrp="1"/>
+          </p:cNvSpPr>
+          <p:nvPr>
+            <p:ph type="ftr" sz="quarter" idx="10"/>
+          </p:nvPr>
+        </p:nvSpPr>
+        <p:spPr/>
+        <p:txBody>
+          <a:bodyPr/>
+          <a:lstStyle/>
+          <a:p>
+            <a:pPr>
+              <a:defRPr/>
+            </a:pPr>
+            <a:r>
+              <a:rPr lang="de-DE" dirty="0"/>
+              <a:t>Oleg Kelner – University </a:t>
+            </a:r>
+            <a:r>
+              <a:rPr lang="de-DE" dirty="0" err="1"/>
+              <a:t>of</a:t>
+            </a:r>
+            <a:r>
+              <a:rPr lang="de-DE" dirty="0"/>
+              <a:t> Applied Sciences Hamm-Lippstadt</a:t>
+            </a:r>
+          </a:p>
+        </p:txBody>
+      </p:sp>
+      <p:sp>
+        <p:nvSpPr>
+          <p:cNvPr id="5" name="Дата 4">
+            <a:extLst>
+              <a:ext uri="{FF2B5EF4-FFF2-40B4-BE49-F238E27FC236}">
+                <a16:creationId xmlns:a16="http://schemas.microsoft.com/office/drawing/2014/main" id="{7E07262B-1E22-29E8-70DA-B295EBD8664F}"/>
+              </a:ext>
+            </a:extLst>
+          </p:cNvPr>
+          <p:cNvSpPr>
+            <a:spLocks noGrp="1"/>
+          </p:cNvSpPr>
+          <p:nvPr>
+            <p:ph type="dt" sz="half" idx="12"/>
+          </p:nvPr>
+        </p:nvSpPr>
+        <p:spPr/>
+        <p:txBody>
+          <a:bodyPr/>
+          <a:lstStyle/>
+          <a:p>
+            <a:pPr>
+              <a:defRPr/>
+            </a:pPr>
+            <a:fld id="{D1C5E747-687F-9C49-A498-1184E7908D39}" type="datetime1">
+              <a:rPr lang="de-DE" smtClean="0"/>
+              <a:t>21.06.2026</a:t>
+            </a:fld>
+            <a:endParaRPr lang="de-DE"/>
+          </a:p>
+        </p:txBody>
+      </p:sp>
+      <p:sp>
+        <p:nvSpPr>
+          <p:cNvPr id="6" name="Номер слайда 5">
+            <a:extLst>
+              <a:ext uri="{FF2B5EF4-FFF2-40B4-BE49-F238E27FC236}">
+                <a16:creationId xmlns:a16="http://schemas.microsoft.com/office/drawing/2014/main" id="{C98FDEFE-8218-D86B-ED79-84A5537FA6EC}"/>
+              </a:ext>
+            </a:extLst>
+          </p:cNvPr>
+          <p:cNvSpPr>
+            <a:spLocks noGrp="1"/>
+          </p:cNvSpPr>
+          <p:nvPr>
+            <p:ph type="sldNum" sz="quarter" idx="13"/>
+          </p:nvPr>
+        </p:nvSpPr>
+        <p:spPr/>
+        <p:txBody>
+          <a:bodyPr/>
+          <a:lstStyle/>
+          <a:p>
+            <a:pPr>
+              <a:defRPr/>
+            </a:pPr>
+            <a:r>
+              <a:rPr lang="de-DE"/>
+              <a:t>&lt; </a:t>
+            </a:r>
+            <a:fld id="{1A61C92B-C297-4AC9-B551-2D8A658A0122}" type="slidenum">
+              <a:rPr lang="de-DE" smtClean="0"/>
+              <a:pPr>
+                <a:defRPr/>
+              </a:pPr>
+              <a:t>4</a:t>
+            </a:fld>
+            <a:r>
+              <a:rPr lang="de-DE"/>
+              <a:t> &gt;</a:t>
+            </a:r>
+            <a:endParaRPr lang="de-DE" dirty="0"/>
+          </a:p>
+        </p:txBody>
+      </p:sp>
+      <p:sp>
+        <p:nvSpPr>
+          <p:cNvPr id="7" name="Заголовок 1">
+            <a:extLst>
+              <a:ext uri="{FF2B5EF4-FFF2-40B4-BE49-F238E27FC236}">
+                <a16:creationId xmlns:a16="http://schemas.microsoft.com/office/drawing/2014/main" id="{59DEB1C1-B531-44EC-90A0-9F2682123FE4}"/>
+              </a:ext>
+            </a:extLst>
+          </p:cNvPr>
+          <p:cNvSpPr>
+            <a:spLocks noGrp="1"/>
+          </p:cNvSpPr>
+          <p:nvPr>
+            <p:ph type="ctrTitle"/>
+          </p:nvPr>
+        </p:nvSpPr>
+        <p:spPr>
+          <a:xfrm>
+            <a:off x="395536" y="188640"/>
+            <a:ext cx="7324934" cy="492443"/>
+          </a:xfrm>
+        </p:spPr>
+        <p:txBody>
+          <a:bodyPr/>
+          <a:lstStyle/>
+          <a:p>
+            <a:r>
+              <a:rPr lang="en-US" sz="3200" dirty="0"/>
+              <a:t>Implementation</a:t>
+            </a:r>
+          </a:p>
+        </p:txBody>
+      </p:sp>
+      <p:pic>
+        <p:nvPicPr>
+          <p:cNvPr id="9" name="Рисунок 8">
+            <a:extLst>
+              <a:ext uri="{FF2B5EF4-FFF2-40B4-BE49-F238E27FC236}">
+                <a16:creationId xmlns:a16="http://schemas.microsoft.com/office/drawing/2014/main" id="{6C20E9E3-6D47-8C34-2EAB-C2482F1E0790}"/>
+              </a:ext>
+            </a:extLst>
+          </p:cNvPr>
+          <p:cNvPicPr>
+            <a:picLocks noChangeAspect="1"/>
+          </p:cNvPicPr>
+          <p:nvPr/>
+        </p:nvPicPr>
+        <p:blipFill>
+          <a:blip r:embed="rId2">
+            <a:extLst>
+              <a:ext uri="{28A0092B-C50C-407E-A947-70E740481C1C}">
+                <a14:useLocalDpi xmlns:a14="http://schemas.microsoft.com/office/drawing/2010/main" val="0"/>
+              </a:ext>
+            </a:extLst>
+          </a:blip>
+          <a:stretch>
+            <a:fillRect/>
+          </a:stretch>
+        </p:blipFill>
+        <p:spPr>
+          <a:xfrm>
+            <a:off x="1295890" y="3784257"/>
+            <a:ext cx="6552220" cy="2620888"/>
+          </a:xfrm>
+          <a:prstGeom prst="rect">
+            <a:avLst/>
+          </a:prstGeom>
+        </p:spPr>
+      </p:pic>
+      <mc:AlternateContent xmlns:mc="http://schemas.openxmlformats.org/markup-compatibility/2006">
+        <mc:Choice xmlns:a14="http://schemas.microsoft.com/office/drawing/2010/main" Requires="a14">
+          <p:sp>
+            <p:nvSpPr>
+              <p:cNvPr id="10" name="TextBox 9">
+                <a:extLst>
+                  <a:ext uri="{FF2B5EF4-FFF2-40B4-BE49-F238E27FC236}">
+                    <a16:creationId xmlns:a16="http://schemas.microsoft.com/office/drawing/2014/main" id="{15F57179-2DCD-ED96-3FBF-7F39B9A59283}"/>
+                  </a:ext>
+                </a:extLst>
+              </p:cNvPr>
+              <p:cNvSpPr txBox="1"/>
+              <p:nvPr/>
+            </p:nvSpPr>
+            <p:spPr>
+              <a:xfrm>
+                <a:off x="7962414" y="4491972"/>
+                <a:ext cx="941348" cy="1205458"/>
+              </a:xfrm>
+              <a:prstGeom prst="rect">
+                <a:avLst/>
+              </a:prstGeom>
+              <a:noFill/>
+            </p:spPr>
+            <p:txBody>
+              <a:bodyPr wrap="none" lIns="0" tIns="0" rIns="0" bIns="0" rtlCol="0">
+                <a:spAutoFit/>
+              </a:bodyPr>
+              <a:lstStyle/>
+              <a:p>
+                <a:pPr/>
+                <a14:m>
+                  <m:oMathPara xmlns:m="http://schemas.openxmlformats.org/officeDocument/2006/math">
+                    <m:oMathParaPr>
+                      <m:jc m:val="centerGroup"/>
+                    </m:oMathParaPr>
+                    <m:oMath xmlns:m="http://schemas.openxmlformats.org/officeDocument/2006/math">
+                      <m:sSub>
+                        <m:sSubPr>
+                          <m:ctrlPr>
+                            <a:rPr lang="en-US" b="0" i="1" smtClean="0">
+                              <a:latin typeface="Cambria Math" panose="02040503050406030204" pitchFamily="18" charset="0"/>
+                            </a:rPr>
+                          </m:ctrlPr>
+                        </m:sSubPr>
+                        <m:e>
+                          <m:r>
+                            <a:rPr lang="en-US" b="0" i="1" smtClean="0">
+                              <a:latin typeface="Cambria Math" panose="02040503050406030204" pitchFamily="18" charset="0"/>
+                            </a:rPr>
+                            <m:t>𝐶</m:t>
+                          </m:r>
+                        </m:e>
+                        <m:sub>
+                          <m:r>
+                            <a:rPr lang="en-US" b="0" i="1" smtClean="0">
+                              <a:latin typeface="Cambria Math" panose="02040503050406030204" pitchFamily="18" charset="0"/>
+                            </a:rPr>
+                            <m:t>𝑠</m:t>
+                          </m:r>
+                        </m:sub>
+                      </m:sSub>
+                      <m:r>
+                        <a:rPr lang="en-US" b="0" i="1" smtClean="0">
+                          <a:latin typeface="Cambria Math" panose="02040503050406030204" pitchFamily="18" charset="0"/>
+                        </a:rPr>
+                        <m:t>=2</m:t>
+                      </m:r>
+                      <m:r>
+                        <a:rPr lang="en-US" b="0" i="1" smtClean="0">
+                          <a:latin typeface="Cambria Math" panose="02040503050406030204" pitchFamily="18" charset="0"/>
+                        </a:rPr>
+                        <m:t>𝑚𝑠</m:t>
+                      </m:r>
+                    </m:oMath>
+                  </m:oMathPara>
+                </a14:m>
+                <a:br>
+                  <a:rPr lang="en-US" b="0" i="1" dirty="0">
+                    <a:latin typeface="Cambria Math" panose="02040503050406030204" pitchFamily="18" charset="0"/>
+                  </a:rPr>
+                </a:br>
+                <a:endParaRPr lang="en-US" b="0" i="1" dirty="0">
+                  <a:latin typeface="Cambria Math" panose="02040503050406030204" pitchFamily="18" charset="0"/>
+                </a:endParaRPr>
+              </a:p>
+              <a:p>
+                <a:pPr/>
+                <a:endParaRPr lang="en-US" i="1" dirty="0">
+                  <a:latin typeface="Cambria Math" panose="02040503050406030204" pitchFamily="18" charset="0"/>
+                </a:endParaRPr>
+              </a:p>
+              <a:p>
+                <a:pPr/>
+                <a14:m>
+                  <m:oMathPara xmlns:m="http://schemas.openxmlformats.org/officeDocument/2006/math">
+                    <m:oMathParaPr>
+                      <m:jc m:val="centerGroup"/>
+                    </m:oMathParaPr>
+                    <m:oMath xmlns:m="http://schemas.openxmlformats.org/officeDocument/2006/math">
+                      <m:sSub>
+                        <m:sSubPr>
+                          <m:ctrlPr>
+                            <a:rPr lang="en-US" b="0" i="1" smtClean="0">
+                              <a:latin typeface="Cambria Math" panose="02040503050406030204" pitchFamily="18" charset="0"/>
+                            </a:rPr>
+                          </m:ctrlPr>
+                        </m:sSubPr>
+                        <m:e>
+                          <m:r>
+                            <a:rPr lang="en-US" b="0" i="1" smtClean="0">
+                              <a:latin typeface="Cambria Math" panose="02040503050406030204" pitchFamily="18" charset="0"/>
+                            </a:rPr>
+                            <m:t>𝑇</m:t>
+                          </m:r>
+                        </m:e>
+                        <m:sub>
+                          <m:r>
+                            <a:rPr lang="en-US" b="0" i="1" smtClean="0">
+                              <a:latin typeface="Cambria Math" panose="02040503050406030204" pitchFamily="18" charset="0"/>
+                            </a:rPr>
+                            <m:t>𝑠</m:t>
+                          </m:r>
+                        </m:sub>
+                      </m:sSub>
+                      <m:r>
+                        <a:rPr lang="en-US" b="0" i="1" smtClean="0">
+                          <a:latin typeface="Cambria Math" panose="02040503050406030204" pitchFamily="18" charset="0"/>
+                        </a:rPr>
+                        <m:t>=5</m:t>
+                      </m:r>
+                      <m:r>
+                        <a:rPr lang="en-US" b="0" i="1" smtClean="0">
+                          <a:latin typeface="Cambria Math" panose="02040503050406030204" pitchFamily="18" charset="0"/>
+                        </a:rPr>
+                        <m:t>𝑚𝑠</m:t>
+                      </m:r>
+                    </m:oMath>
+                  </m:oMathPara>
+                </a14:m>
+                <a:br>
+                  <a:rPr lang="en-US" b="0" i="1" dirty="0">
+                    <a:latin typeface="Cambria Math" panose="02040503050406030204" pitchFamily="18" charset="0"/>
+                  </a:rPr>
+                </a:br>
+                <a:endParaRPr lang="en-US" b="0" i="1" dirty="0">
+                  <a:latin typeface="Cambria Math" panose="02040503050406030204" pitchFamily="18" charset="0"/>
+                </a:endParaRPr>
+              </a:p>
+              <a:p>
+                <a:pPr/>
+                <a:endParaRPr lang="en-US" b="0" i="1" dirty="0">
+                  <a:latin typeface="Cambria Math" panose="02040503050406030204" pitchFamily="18" charset="0"/>
+                </a:endParaRPr>
+              </a:p>
+              <a:p>
+                <a:pPr/>
+                <a14:m>
+                  <m:oMathPara xmlns:m="http://schemas.openxmlformats.org/officeDocument/2006/math">
+                    <m:oMathParaPr>
+                      <m:jc m:val="centerGroup"/>
+                    </m:oMathParaPr>
+                    <m:oMath xmlns:m="http://schemas.openxmlformats.org/officeDocument/2006/math">
+                      <m:sSub>
+                        <m:sSubPr>
+                          <m:ctrlPr>
+                            <a:rPr lang="en-US" b="0" i="1" smtClean="0">
+                              <a:latin typeface="Cambria Math" panose="02040503050406030204" pitchFamily="18" charset="0"/>
+                            </a:rPr>
+                          </m:ctrlPr>
+                        </m:sSubPr>
+                        <m:e>
+                          <m:r>
+                            <a:rPr lang="en-US" b="0" i="1" smtClean="0">
+                              <a:latin typeface="Cambria Math" panose="02040503050406030204" pitchFamily="18" charset="0"/>
+                            </a:rPr>
+                            <m:t>𝑈</m:t>
+                          </m:r>
+                        </m:e>
+                        <m:sub>
+                          <m:r>
+                            <a:rPr lang="en-US" b="0" i="1" smtClean="0">
+                              <a:latin typeface="Cambria Math" panose="02040503050406030204" pitchFamily="18" charset="0"/>
+                            </a:rPr>
+                            <m:t>𝑠</m:t>
+                          </m:r>
+                        </m:sub>
+                      </m:sSub>
+                      <m:r>
+                        <a:rPr lang="en-US" b="0" i="1" smtClean="0">
+                          <a:latin typeface="Cambria Math" panose="02040503050406030204" pitchFamily="18" charset="0"/>
+                        </a:rPr>
+                        <m:t>=</m:t>
+                      </m:r>
+                      <m:f>
+                        <m:fPr>
+                          <m:ctrlPr>
+                            <a:rPr lang="en-US" b="0" i="1" smtClean="0">
+                              <a:latin typeface="Cambria Math" panose="02040503050406030204" pitchFamily="18" charset="0"/>
+                            </a:rPr>
+                          </m:ctrlPr>
+                        </m:fPr>
+                        <m:num>
+                          <m:r>
+                            <a:rPr lang="en-US" b="0" i="1" smtClean="0">
+                              <a:latin typeface="Cambria Math" panose="02040503050406030204" pitchFamily="18" charset="0"/>
+                            </a:rPr>
+                            <m:t>2</m:t>
+                          </m:r>
+                        </m:num>
+                        <m:den>
+                          <m:r>
+                            <a:rPr lang="en-US" b="0" i="1" smtClean="0">
+                              <a:latin typeface="Cambria Math" panose="02040503050406030204" pitchFamily="18" charset="0"/>
+                            </a:rPr>
+                            <m:t>5</m:t>
+                          </m:r>
+                        </m:den>
+                      </m:f>
+                    </m:oMath>
+                  </m:oMathPara>
+                </a14:m>
+                <a:endParaRPr lang="en-US" b="0" dirty="0"/>
+              </a:p>
+            </p:txBody>
+          </p:sp>
+        </mc:Choice>
+        <mc:Fallback>
+          <p:sp>
+            <p:nvSpPr>
+              <p:cNvPr id="10" name="TextBox 9">
+                <a:extLst>
+                  <a:ext uri="{FF2B5EF4-FFF2-40B4-BE49-F238E27FC236}">
+                    <a16:creationId xmlns:a16="http://schemas.microsoft.com/office/drawing/2014/main" id="{15F57179-2DCD-ED96-3FBF-7F39B9A59283}"/>
+                  </a:ext>
+                </a:extLst>
+              </p:cNvPr>
+              <p:cNvSpPr txBox="1">
+                <a:spLocks noRot="1" noChangeAspect="1" noMove="1" noResize="1" noEditPoints="1" noAdjustHandles="1" noChangeArrowheads="1" noChangeShapeType="1" noTextEdit="1"/>
+              </p:cNvSpPr>
+              <p:nvPr/>
+            </p:nvSpPr>
+            <p:spPr>
+              <a:xfrm>
+                <a:off x="7962414" y="4491972"/>
+                <a:ext cx="941348" cy="1205458"/>
+              </a:xfrm>
+              <a:prstGeom prst="rect">
+                <a:avLst/>
+              </a:prstGeom>
+              <a:blipFill>
+                <a:blip r:embed="rId3"/>
+                <a:stretch>
+                  <a:fillRect l="-1935" r="-645" b="-6566"/>
+                </a:stretch>
+              </a:blipFill>
+            </p:spPr>
+            <p:txBody>
+              <a:bodyPr/>
+              <a:lstStyle/>
+              <a:p>
+                <a:r>
+                  <a:rPr lang="en-US">
+                    <a:noFill/>
+                  </a:rPr>
+                  <a:t> </a:t>
+                </a:r>
+              </a:p>
+            </p:txBody>
+          </p:sp>
+        </mc:Fallback>
+      </mc:AlternateContent>
+      <p:pic>
+        <p:nvPicPr>
+          <p:cNvPr id="8" name="Рисунок 7">
+            <a:extLst>
+              <a:ext uri="{FF2B5EF4-FFF2-40B4-BE49-F238E27FC236}">
+                <a16:creationId xmlns:a16="http://schemas.microsoft.com/office/drawing/2014/main" id="{FD50C094-D3EF-59DD-EB42-2F680EC70EEB}"/>
+              </a:ext>
+            </a:extLst>
+          </p:cNvPr>
+          <p:cNvPicPr>
+            <a:picLocks noChangeAspect="1"/>
+          </p:cNvPicPr>
+          <p:nvPr/>
+        </p:nvPicPr>
+        <p:blipFill>
+          <a:blip r:embed="rId4">
+            <a:extLst>
+              <a:ext uri="{28A0092B-C50C-407E-A947-70E740481C1C}">
+                <a14:useLocalDpi xmlns:a14="http://schemas.microsoft.com/office/drawing/2010/main" val="0"/>
+              </a:ext>
+            </a:extLst>
+          </a:blip>
+          <a:stretch>
+            <a:fillRect/>
+          </a:stretch>
+        </p:blipFill>
+        <p:spPr>
+          <a:xfrm>
+            <a:off x="1295894" y="1047848"/>
+            <a:ext cx="6552216" cy="2620887"/>
+          </a:xfrm>
+          <a:prstGeom prst="rect">
+            <a:avLst/>
+          </a:prstGeom>
+        </p:spPr>
+      </p:pic>
+      <mc:AlternateContent xmlns:mc="http://schemas.openxmlformats.org/markup-compatibility/2006">
+        <mc:Choice xmlns:a14="http://schemas.microsoft.com/office/drawing/2010/main" Requires="a14">
+          <p:sp>
+            <p:nvSpPr>
+              <p:cNvPr id="12" name="TextBox 11">
+                <a:extLst>
+                  <a:ext uri="{FF2B5EF4-FFF2-40B4-BE49-F238E27FC236}">
+                    <a16:creationId xmlns:a16="http://schemas.microsoft.com/office/drawing/2014/main" id="{C93817A3-CA3A-2F0D-950E-308EA053508A}"/>
+                  </a:ext>
+                </a:extLst>
+              </p:cNvPr>
+              <p:cNvSpPr txBox="1"/>
+              <p:nvPr/>
+            </p:nvSpPr>
+            <p:spPr>
+              <a:xfrm>
+                <a:off x="7870813" y="1818209"/>
+                <a:ext cx="1289327" cy="1205458"/>
+              </a:xfrm>
+              <a:prstGeom prst="rect">
+                <a:avLst/>
+              </a:prstGeom>
+              <a:noFill/>
+            </p:spPr>
+            <p:txBody>
+              <a:bodyPr wrap="none" lIns="0" tIns="0" rIns="0" bIns="0" rtlCol="0">
+                <a:spAutoFit/>
+              </a:bodyPr>
+              <a:lstStyle/>
+              <a:p>
+                <a:pPr/>
+                <a14:m>
+                  <m:oMathPara xmlns:m="http://schemas.openxmlformats.org/officeDocument/2006/math">
+                    <m:oMathParaPr>
+                      <m:jc m:val="centerGroup"/>
+                    </m:oMathParaPr>
+                    <m:oMath xmlns:m="http://schemas.openxmlformats.org/officeDocument/2006/math">
+                      <m:sSub>
+                        <m:sSubPr>
+                          <m:ctrlPr>
+                            <a:rPr lang="en-US" b="0" i="1" smtClean="0">
+                              <a:latin typeface="Cambria Math" panose="02040503050406030204" pitchFamily="18" charset="0"/>
+                            </a:rPr>
+                          </m:ctrlPr>
+                        </m:sSubPr>
+                        <m:e>
+                          <m:r>
+                            <a:rPr lang="en-US" b="0" i="1" smtClean="0">
+                              <a:latin typeface="Cambria Math" panose="02040503050406030204" pitchFamily="18" charset="0"/>
+                            </a:rPr>
+                            <m:t>𝐶</m:t>
+                          </m:r>
+                        </m:e>
+                        <m:sub>
+                          <m:r>
+                            <a:rPr lang="en-US" b="0" i="1" smtClean="0">
+                              <a:latin typeface="Cambria Math" panose="02040503050406030204" pitchFamily="18" charset="0"/>
+                            </a:rPr>
+                            <m:t>𝑠</m:t>
+                          </m:r>
+                        </m:sub>
+                      </m:sSub>
+                      <m:r>
+                        <a:rPr lang="en-US" b="0" i="1" smtClean="0">
+                          <a:latin typeface="Cambria Math" panose="02040503050406030204" pitchFamily="18" charset="0"/>
+                        </a:rPr>
+                        <m:t>=</m:t>
+                      </m:r>
+                      <m:r>
+                        <a:rPr lang="en-US" b="0" i="1" smtClean="0">
+                          <a:latin typeface="Cambria Math" panose="02040503050406030204" pitchFamily="18" charset="0"/>
+                        </a:rPr>
+                        <m:t>4</m:t>
+                      </m:r>
+                      <m:r>
+                        <a:rPr lang="en-US" b="0" i="1" smtClean="0">
+                          <a:latin typeface="Cambria Math" panose="02040503050406030204" pitchFamily="18" charset="0"/>
+                        </a:rPr>
+                        <m:t>𝑚𝑠</m:t>
+                      </m:r>
+                    </m:oMath>
+                  </m:oMathPara>
+                </a14:m>
+                <a:br>
+                  <a:rPr lang="en-US" b="0" i="1" dirty="0">
+                    <a:latin typeface="Cambria Math" panose="02040503050406030204" pitchFamily="18" charset="0"/>
+                  </a:rPr>
+                </a:br>
+                <a:endParaRPr lang="en-US" b="0" i="1" dirty="0">
+                  <a:latin typeface="Cambria Math" panose="02040503050406030204" pitchFamily="18" charset="0"/>
+                </a:endParaRPr>
+              </a:p>
+              <a:p>
+                <a:pPr/>
+                <a:endParaRPr lang="en-US" i="1" dirty="0">
+                  <a:latin typeface="Cambria Math" panose="02040503050406030204" pitchFamily="18" charset="0"/>
+                </a:endParaRPr>
+              </a:p>
+              <a:p>
+                <a:pPr/>
+                <a14:m>
+                  <m:oMathPara xmlns:m="http://schemas.openxmlformats.org/officeDocument/2006/math">
+                    <m:oMathParaPr>
+                      <m:jc m:val="centerGroup"/>
+                    </m:oMathParaPr>
+                    <m:oMath xmlns:m="http://schemas.openxmlformats.org/officeDocument/2006/math">
+                      <m:sSub>
+                        <m:sSubPr>
+                          <m:ctrlPr>
+                            <a:rPr lang="en-US" b="0" i="1" smtClean="0">
+                              <a:latin typeface="Cambria Math" panose="02040503050406030204" pitchFamily="18" charset="0"/>
+                            </a:rPr>
+                          </m:ctrlPr>
+                        </m:sSubPr>
+                        <m:e>
+                          <m:r>
+                            <a:rPr lang="en-US" b="0" i="1" smtClean="0">
+                              <a:latin typeface="Cambria Math" panose="02040503050406030204" pitchFamily="18" charset="0"/>
+                            </a:rPr>
+                            <m:t>𝑇</m:t>
+                          </m:r>
+                        </m:e>
+                        <m:sub>
+                          <m:r>
+                            <a:rPr lang="en-US" b="0" i="1" smtClean="0">
+                              <a:latin typeface="Cambria Math" panose="02040503050406030204" pitchFamily="18" charset="0"/>
+                            </a:rPr>
+                            <m:t>𝑠</m:t>
+                          </m:r>
+                        </m:sub>
+                      </m:sSub>
+                      <m:r>
+                        <a:rPr lang="en-US" b="0" i="1" smtClean="0">
+                          <a:latin typeface="Cambria Math" panose="02040503050406030204" pitchFamily="18" charset="0"/>
+                        </a:rPr>
+                        <m:t>=</m:t>
+                      </m:r>
+                      <m:r>
+                        <a:rPr lang="en-US" b="0" i="1" smtClean="0">
+                          <a:latin typeface="Cambria Math" panose="02040503050406030204" pitchFamily="18" charset="0"/>
+                        </a:rPr>
+                        <m:t>10</m:t>
+                      </m:r>
+                      <m:r>
+                        <a:rPr lang="en-US" b="0" i="1" smtClean="0">
+                          <a:latin typeface="Cambria Math" panose="02040503050406030204" pitchFamily="18" charset="0"/>
+                        </a:rPr>
+                        <m:t>𝑚𝑠</m:t>
+                      </m:r>
+                    </m:oMath>
+                  </m:oMathPara>
+                </a14:m>
+                <a:br>
+                  <a:rPr lang="en-US" b="0" i="1" dirty="0">
+                    <a:latin typeface="Cambria Math" panose="02040503050406030204" pitchFamily="18" charset="0"/>
+                  </a:rPr>
+                </a:br>
+                <a:endParaRPr lang="en-US" b="0" i="1" dirty="0">
+                  <a:latin typeface="Cambria Math" panose="02040503050406030204" pitchFamily="18" charset="0"/>
+                </a:endParaRPr>
+              </a:p>
+              <a:p>
+                <a:pPr/>
+                <a:endParaRPr lang="en-US" b="0" i="1" dirty="0">
+                  <a:latin typeface="Cambria Math" panose="02040503050406030204" pitchFamily="18" charset="0"/>
+                </a:endParaRPr>
+              </a:p>
+              <a:p>
+                <a:pPr/>
+                <a14:m>
+                  <m:oMathPara xmlns:m="http://schemas.openxmlformats.org/officeDocument/2006/math">
+                    <m:oMathParaPr>
+                      <m:jc m:val="centerGroup"/>
+                    </m:oMathParaPr>
+                    <m:oMath xmlns:m="http://schemas.openxmlformats.org/officeDocument/2006/math">
+                      <m:sSub>
+                        <m:sSubPr>
+                          <m:ctrlPr>
+                            <a:rPr lang="en-US" b="0" i="1" smtClean="0">
+                              <a:latin typeface="Cambria Math" panose="02040503050406030204" pitchFamily="18" charset="0"/>
+                            </a:rPr>
+                          </m:ctrlPr>
+                        </m:sSubPr>
+                        <m:e>
+                          <m:r>
+                            <a:rPr lang="en-US" b="0" i="1" smtClean="0">
+                              <a:latin typeface="Cambria Math" panose="02040503050406030204" pitchFamily="18" charset="0"/>
+                            </a:rPr>
+                            <m:t>𝑈</m:t>
+                          </m:r>
+                        </m:e>
+                        <m:sub>
+                          <m:r>
+                            <a:rPr lang="en-US" b="0" i="1" smtClean="0">
+                              <a:latin typeface="Cambria Math" panose="02040503050406030204" pitchFamily="18" charset="0"/>
+                            </a:rPr>
+                            <m:t>𝑠</m:t>
+                          </m:r>
+                        </m:sub>
+                      </m:sSub>
+                      <m:r>
+                        <a:rPr lang="en-US" b="0" i="1" smtClean="0">
+                          <a:latin typeface="Cambria Math" panose="02040503050406030204" pitchFamily="18" charset="0"/>
+                        </a:rPr>
+                        <m:t>=</m:t>
+                      </m:r>
+                      <m:f>
+                        <m:fPr>
+                          <m:ctrlPr>
+                            <a:rPr lang="en-US" b="0" i="1" smtClean="0">
+                              <a:latin typeface="Cambria Math" panose="02040503050406030204" pitchFamily="18" charset="0"/>
+                            </a:rPr>
+                          </m:ctrlPr>
+                        </m:fPr>
+                        <m:num>
+                          <m:r>
+                            <a:rPr lang="en-US" b="0" i="1" smtClean="0">
+                              <a:latin typeface="Cambria Math" panose="02040503050406030204" pitchFamily="18" charset="0"/>
+                            </a:rPr>
+                            <m:t>4</m:t>
+                          </m:r>
+                        </m:num>
+                        <m:den>
+                          <m:r>
+                            <a:rPr lang="en-US" b="0" i="1" smtClean="0">
+                              <a:latin typeface="Cambria Math" panose="02040503050406030204" pitchFamily="18" charset="0"/>
+                            </a:rPr>
+                            <m:t>10</m:t>
+                          </m:r>
+                        </m:den>
+                      </m:f>
+                      <m:r>
+                        <a:rPr lang="en-US" b="0" i="1" smtClean="0">
+                          <a:latin typeface="Cambria Math" panose="02040503050406030204" pitchFamily="18" charset="0"/>
+                        </a:rPr>
+                        <m:t>=</m:t>
+                      </m:r>
+                      <m:f>
+                        <m:fPr>
+                          <m:ctrlPr>
+                            <a:rPr lang="en-US" b="0" i="1" smtClean="0">
+                              <a:latin typeface="Cambria Math" panose="02040503050406030204" pitchFamily="18" charset="0"/>
+                            </a:rPr>
+                          </m:ctrlPr>
+                        </m:fPr>
+                        <m:num>
+                          <m:r>
+                            <a:rPr lang="en-US" b="0" i="1" smtClean="0">
+                              <a:latin typeface="Cambria Math" panose="02040503050406030204" pitchFamily="18" charset="0"/>
+                            </a:rPr>
+                            <m:t>2</m:t>
+                          </m:r>
+                        </m:num>
+                        <m:den>
+                          <m:r>
+                            <a:rPr lang="en-US" b="0" i="1" smtClean="0">
+                              <a:latin typeface="Cambria Math" panose="02040503050406030204" pitchFamily="18" charset="0"/>
+                            </a:rPr>
+                            <m:t>5</m:t>
+                          </m:r>
+                        </m:den>
+                      </m:f>
+                    </m:oMath>
+                  </m:oMathPara>
+                </a14:m>
+                <a:endParaRPr lang="en-US" b="0" dirty="0"/>
+              </a:p>
+            </p:txBody>
+          </p:sp>
+        </mc:Choice>
+        <mc:Fallback>
+          <p:sp>
+            <p:nvSpPr>
+              <p:cNvPr id="12" name="TextBox 11">
+                <a:extLst>
+                  <a:ext uri="{FF2B5EF4-FFF2-40B4-BE49-F238E27FC236}">
+                    <a16:creationId xmlns:a16="http://schemas.microsoft.com/office/drawing/2014/main" id="{C93817A3-CA3A-2F0D-950E-308EA053508A}"/>
+                  </a:ext>
+                </a:extLst>
+              </p:cNvPr>
+              <p:cNvSpPr txBox="1">
+                <a:spLocks noRot="1" noChangeAspect="1" noMove="1" noResize="1" noEditPoints="1" noAdjustHandles="1" noChangeArrowheads="1" noChangeShapeType="1" noTextEdit="1"/>
+              </p:cNvSpPr>
+              <p:nvPr/>
+            </p:nvSpPr>
+            <p:spPr>
+              <a:xfrm>
+                <a:off x="7870813" y="1818209"/>
+                <a:ext cx="1289327" cy="1205458"/>
+              </a:xfrm>
+              <a:prstGeom prst="rect">
+                <a:avLst/>
+              </a:prstGeom>
+              <a:blipFill>
+                <a:blip r:embed="rId5"/>
+                <a:stretch>
+                  <a:fillRect b="-6566"/>
+                </a:stretch>
+              </a:blipFill>
+            </p:spPr>
+            <p:txBody>
+              <a:bodyPr/>
+              <a:lstStyle/>
+              <a:p>
+                <a:r>
+                  <a:rPr lang="en-US">
+                    <a:noFill/>
+                  </a:rPr>
+                  <a:t> </a:t>
+                </a:r>
+              </a:p>
+            </p:txBody>
+          </p:sp>
+        </mc:Fallback>
+      </mc:AlternateContent>
+    </p:spTree>
+    <p:extLst>
+      <p:ext uri="{BB962C8B-B14F-4D97-AF65-F5344CB8AC3E}">
+        <p14:creationId xmlns:p14="http://schemas.microsoft.com/office/powerpoint/2010/main" val="3753505977"/>
+      </p:ext>
+    </p:extLst>
+  </p:cSld>
+  <p:clrMapOvr>
+    <a:masterClrMapping/>
+  </p:clrMapOvr>
+</p:sld>
+</file>
+
+<file path=ppt/slides/slide5.xml><?xml version="1.0" encoding="utf-8"?>
+<p:sld xmlns:a="http://schemas.openxmlformats.org/drawingml/2006/main" xmlns:r="http://schemas.openxmlformats.org/officeDocument/2006/relationships" xmlns:p="http://schemas.openxmlformats.org/presentationml/2006/main">
+  <p:cSld>
+    <p:spTree>
+      <p:nvGrpSpPr>
+        <p:cNvPr id="1" name="">
+          <a:extLst>
+            <a:ext uri="{FF2B5EF4-FFF2-40B4-BE49-F238E27FC236}">
+              <a16:creationId xmlns:a16="http://schemas.microsoft.com/office/drawing/2014/main" id="{FA509B63-E9D3-339B-2475-AD6A0A0ACBCD}"/>
+            </a:ext>
+          </a:extLst>
+        </p:cNvPr>
+        <p:cNvGrpSpPr/>
+        <p:nvPr/>
+      </p:nvGrpSpPr>
+      <p:grpSpPr>
+        <a:xfrm>
+          <a:off x="0" y="0"/>
+          <a:ext cx="0" cy="0"/>
+          <a:chOff x="0" y="0"/>
+          <a:chExt cx="0" cy="0"/>
+        </a:xfrm>
+      </p:grpSpPr>
+      <p:sp>
+        <p:nvSpPr>
+          <p:cNvPr id="4" name="Нижний колонтитул 3">
+            <a:extLst>
+              <a:ext uri="{FF2B5EF4-FFF2-40B4-BE49-F238E27FC236}">
+                <a16:creationId xmlns:a16="http://schemas.microsoft.com/office/drawing/2014/main" id="{DAB5D9D4-5D25-1DD5-7909-DB8D4C204718}"/>
+              </a:ext>
+            </a:extLst>
+          </p:cNvPr>
+          <p:cNvSpPr>
+            <a:spLocks noGrp="1"/>
+          </p:cNvSpPr>
+          <p:nvPr>
+            <p:ph type="ftr" sz="quarter" idx="10"/>
+          </p:nvPr>
+        </p:nvSpPr>
+        <p:spPr/>
+        <p:txBody>
+          <a:bodyPr/>
+          <a:lstStyle/>
+          <a:p>
+            <a:pPr>
+              <a:defRPr/>
+            </a:pPr>
+            <a:r>
+              <a:rPr lang="de-DE" dirty="0"/>
+              <a:t>Oleg Kelner – University </a:t>
+            </a:r>
+            <a:r>
+              <a:rPr lang="de-DE" dirty="0" err="1"/>
+              <a:t>of</a:t>
+            </a:r>
+            <a:r>
+              <a:rPr lang="de-DE" dirty="0"/>
+              <a:t> Applied Sciences Hamm-Lippstadt</a:t>
+            </a:r>
+          </a:p>
+        </p:txBody>
+      </p:sp>
+      <p:sp>
+        <p:nvSpPr>
+          <p:cNvPr id="5" name="Дата 4">
+            <a:extLst>
+              <a:ext uri="{FF2B5EF4-FFF2-40B4-BE49-F238E27FC236}">
+                <a16:creationId xmlns:a16="http://schemas.microsoft.com/office/drawing/2014/main" id="{23EFF270-D0DB-DD8F-28CA-7C35BECC7D41}"/>
+              </a:ext>
+            </a:extLst>
+          </p:cNvPr>
+          <p:cNvSpPr>
+            <a:spLocks noGrp="1"/>
+          </p:cNvSpPr>
+          <p:nvPr>
+            <p:ph type="dt" sz="half" idx="12"/>
+          </p:nvPr>
+        </p:nvSpPr>
+        <p:spPr/>
+        <p:txBody>
+          <a:bodyPr/>
+          <a:lstStyle/>
+          <a:p>
+            <a:pPr>
+              <a:defRPr/>
+            </a:pPr>
+            <a:fld id="{D1C5E747-687F-9C49-A498-1184E7908D39}" type="datetime1">
+              <a:rPr lang="de-DE" smtClean="0"/>
+              <a:t>21.06.2026</a:t>
+            </a:fld>
+            <a:endParaRPr lang="de-DE"/>
+          </a:p>
+        </p:txBody>
+      </p:sp>
+      <p:sp>
+        <p:nvSpPr>
+          <p:cNvPr id="6" name="Номер слайда 5">
+            <a:extLst>
+              <a:ext uri="{FF2B5EF4-FFF2-40B4-BE49-F238E27FC236}">
+                <a16:creationId xmlns:a16="http://schemas.microsoft.com/office/drawing/2014/main" id="{AD6C50CD-537B-9867-0829-A808C74022BD}"/>
+              </a:ext>
+            </a:extLst>
+          </p:cNvPr>
+          <p:cNvSpPr>
+            <a:spLocks noGrp="1"/>
+          </p:cNvSpPr>
+          <p:nvPr>
+            <p:ph type="sldNum" sz="quarter" idx="13"/>
+          </p:nvPr>
+        </p:nvSpPr>
+        <p:spPr/>
+        <p:txBody>
+          <a:bodyPr/>
+          <a:lstStyle/>
+          <a:p>
+            <a:pPr>
+              <a:defRPr/>
+            </a:pPr>
+            <a:r>
+              <a:rPr lang="de-DE"/>
+              <a:t>&lt; </a:t>
+            </a:r>
+            <a:fld id="{1A61C92B-C297-4AC9-B551-2D8A658A0122}" type="slidenum">
+              <a:rPr lang="de-DE" smtClean="0"/>
+              <a:pPr>
+                <a:defRPr/>
+              </a:pPr>
+              <a:t>5</a:t>
+            </a:fld>
+            <a:r>
+              <a:rPr lang="de-DE"/>
+              <a:t> &gt;</a:t>
+            </a:r>
+            <a:endParaRPr lang="de-DE" dirty="0"/>
+          </a:p>
+        </p:txBody>
+      </p:sp>
+      <p:sp>
+        <p:nvSpPr>
+          <p:cNvPr id="7" name="Заголовок 1">
+            <a:extLst>
+              <a:ext uri="{FF2B5EF4-FFF2-40B4-BE49-F238E27FC236}">
+                <a16:creationId xmlns:a16="http://schemas.microsoft.com/office/drawing/2014/main" id="{AC84ED15-8B28-0E9F-C636-A2F1B98FA38E}"/>
+              </a:ext>
+            </a:extLst>
+          </p:cNvPr>
+          <p:cNvSpPr>
+            <a:spLocks noGrp="1"/>
+          </p:cNvSpPr>
+          <p:nvPr>
+            <p:ph type="ctrTitle"/>
+          </p:nvPr>
+        </p:nvSpPr>
+        <p:spPr>
+          <a:xfrm>
+            <a:off x="395536" y="188640"/>
+            <a:ext cx="7324934" cy="492443"/>
+          </a:xfrm>
+        </p:spPr>
+        <p:txBody>
+          <a:bodyPr/>
+          <a:lstStyle/>
+          <a:p>
+            <a:r>
+              <a:rPr lang="en-US" sz="3200" dirty="0"/>
+              <a:t>Implementation</a:t>
+            </a:r>
+          </a:p>
+        </p:txBody>
+      </p:sp>
+      <p:pic>
+        <p:nvPicPr>
+          <p:cNvPr id="9" name="Рисунок 8">
+            <a:extLst>
+              <a:ext uri="{FF2B5EF4-FFF2-40B4-BE49-F238E27FC236}">
+                <a16:creationId xmlns:a16="http://schemas.microsoft.com/office/drawing/2014/main" id="{D42453C0-1C63-55C6-1368-1010164C0332}"/>
+              </a:ext>
+            </a:extLst>
+          </p:cNvPr>
+          <p:cNvPicPr>
+            <a:picLocks noChangeAspect="1"/>
+          </p:cNvPicPr>
+          <p:nvPr/>
+        </p:nvPicPr>
+        <p:blipFill>
+          <a:blip r:embed="rId2">
+            <a:extLst>
+              <a:ext uri="{28A0092B-C50C-407E-A947-70E740481C1C}">
+                <a14:useLocalDpi xmlns:a14="http://schemas.microsoft.com/office/drawing/2010/main" val="0"/>
+              </a:ext>
+            </a:extLst>
+          </a:blip>
+          <a:stretch>
+            <a:fillRect/>
+          </a:stretch>
+        </p:blipFill>
+        <p:spPr>
+          <a:xfrm>
+            <a:off x="0" y="836712"/>
+            <a:ext cx="4572000" cy="2743200"/>
+          </a:xfrm>
+          <a:prstGeom prst="rect">
+            <a:avLst/>
+          </a:prstGeom>
+        </p:spPr>
+      </p:pic>
+      <p:pic>
+        <p:nvPicPr>
+          <p:cNvPr id="11" name="Рисунок 10">
+            <a:extLst>
+              <a:ext uri="{FF2B5EF4-FFF2-40B4-BE49-F238E27FC236}">
+                <a16:creationId xmlns:a16="http://schemas.microsoft.com/office/drawing/2014/main" id="{8B857FBA-7125-4AAE-ADEA-1EF10DAE6F8E}"/>
+              </a:ext>
+            </a:extLst>
+          </p:cNvPr>
+          <p:cNvPicPr>
+            <a:picLocks noChangeAspect="1"/>
+          </p:cNvPicPr>
+          <p:nvPr/>
+        </p:nvPicPr>
+        <p:blipFill>
+          <a:blip r:embed="rId3">
+            <a:extLst>
+              <a:ext uri="{28A0092B-C50C-407E-A947-70E740481C1C}">
+                <a14:useLocalDpi xmlns:a14="http://schemas.microsoft.com/office/drawing/2010/main" val="0"/>
+              </a:ext>
+            </a:extLst>
+          </a:blip>
+          <a:stretch>
+            <a:fillRect/>
+          </a:stretch>
+        </p:blipFill>
+        <p:spPr>
+          <a:xfrm>
+            <a:off x="4572000" y="836712"/>
+            <a:ext cx="4572000" cy="2743200"/>
+          </a:xfrm>
+          <a:prstGeom prst="rect">
+            <a:avLst/>
+          </a:prstGeom>
+        </p:spPr>
+      </p:pic>
+      <p:pic>
+        <p:nvPicPr>
+          <p:cNvPr id="13" name="Рисунок 12">
+            <a:extLst>
+              <a:ext uri="{FF2B5EF4-FFF2-40B4-BE49-F238E27FC236}">
+                <a16:creationId xmlns:a16="http://schemas.microsoft.com/office/drawing/2014/main" id="{6AB9B395-4E5A-1F89-EEB1-06E2EE97D978}"/>
+              </a:ext>
+            </a:extLst>
+          </p:cNvPr>
+          <p:cNvPicPr>
+            <a:picLocks noChangeAspect="1"/>
+          </p:cNvPicPr>
+          <p:nvPr/>
+        </p:nvPicPr>
+        <p:blipFill>
+          <a:blip r:embed="rId4">
+            <a:extLst>
+              <a:ext uri="{28A0092B-C50C-407E-A947-70E740481C1C}">
+                <a14:useLocalDpi xmlns:a14="http://schemas.microsoft.com/office/drawing/2010/main" val="0"/>
+              </a:ext>
+            </a:extLst>
+          </a:blip>
+          <a:stretch>
+            <a:fillRect/>
+          </a:stretch>
+        </p:blipFill>
+        <p:spPr>
+          <a:xfrm>
+            <a:off x="0" y="3579520"/>
+            <a:ext cx="4572000" cy="2743200"/>
+          </a:xfrm>
+          <a:prstGeom prst="rect">
+            <a:avLst/>
+          </a:prstGeom>
+        </p:spPr>
+      </p:pic>
+      <p:pic>
+        <p:nvPicPr>
+          <p:cNvPr id="15" name="Рисунок 14">
+            <a:extLst>
+              <a:ext uri="{FF2B5EF4-FFF2-40B4-BE49-F238E27FC236}">
+                <a16:creationId xmlns:a16="http://schemas.microsoft.com/office/drawing/2014/main" id="{5B99F86C-7D02-6D49-6BCE-EFA2469630AF}"/>
+              </a:ext>
+            </a:extLst>
+          </p:cNvPr>
+          <p:cNvPicPr>
+            <a:picLocks noChangeAspect="1"/>
+          </p:cNvPicPr>
+          <p:nvPr/>
+        </p:nvPicPr>
+        <p:blipFill>
+          <a:blip r:embed="rId5">
+            <a:extLst>
+              <a:ext uri="{28A0092B-C50C-407E-A947-70E740481C1C}">
+                <a14:useLocalDpi xmlns:a14="http://schemas.microsoft.com/office/drawing/2010/main" val="0"/>
+              </a:ext>
+            </a:extLst>
+          </a:blip>
+          <a:stretch>
+            <a:fillRect/>
+          </a:stretch>
+        </p:blipFill>
+        <p:spPr>
+          <a:xfrm>
+            <a:off x="4576740" y="3579520"/>
+            <a:ext cx="4572000" cy="2743200"/>
+          </a:xfrm>
+          <a:prstGeom prst="rect">
+            <a:avLst/>
+          </a:prstGeom>
+        </p:spPr>
+      </p:pic>
+      <mc:AlternateContent xmlns:mc="http://schemas.openxmlformats.org/markup-compatibility/2006">
+        <mc:Choice xmlns:a14="http://schemas.microsoft.com/office/drawing/2010/main" Requires="a14">
+          <p:sp>
+            <p:nvSpPr>
+              <p:cNvPr id="16" name="TextBox 15">
+                <a:extLst>
+                  <a:ext uri="{FF2B5EF4-FFF2-40B4-BE49-F238E27FC236}">
+                    <a16:creationId xmlns:a16="http://schemas.microsoft.com/office/drawing/2014/main" id="{B99661C2-351F-FFE4-43C0-4007ABFA17CB}"/>
+                  </a:ext>
+                </a:extLst>
+              </p:cNvPr>
+              <p:cNvSpPr txBox="1"/>
+              <p:nvPr/>
+            </p:nvSpPr>
+            <p:spPr>
+              <a:xfrm>
+                <a:off x="3059832" y="1586615"/>
+                <a:ext cx="1117678" cy="1205458"/>
+              </a:xfrm>
+              <a:prstGeom prst="rect">
+                <a:avLst/>
+              </a:prstGeom>
+              <a:noFill/>
+            </p:spPr>
+            <p:txBody>
+              <a:bodyPr wrap="none" lIns="0" tIns="0" rIns="0" bIns="0" rtlCol="0">
+                <a:spAutoFit/>
+              </a:bodyPr>
+              <a:lstStyle/>
+              <a:p>
+                <a:pPr/>
+                <a14:m>
+                  <m:oMathPara xmlns:m="http://schemas.openxmlformats.org/officeDocument/2006/math">
+                    <m:oMathParaPr>
+                      <m:jc m:val="centerGroup"/>
+                    </m:oMathParaPr>
+                    <m:oMath xmlns:m="http://schemas.openxmlformats.org/officeDocument/2006/math">
+                      <m:sSub>
+                        <m:sSubPr>
+                          <m:ctrlPr>
+                            <a:rPr lang="en-US" b="0" i="1" smtClean="0">
+                              <a:latin typeface="Cambria Math" panose="02040503050406030204" pitchFamily="18" charset="0"/>
+                            </a:rPr>
+                          </m:ctrlPr>
+                        </m:sSubPr>
+                        <m:e>
+                          <m:r>
+                            <a:rPr lang="en-US" b="0" i="1" smtClean="0">
+                              <a:latin typeface="Cambria Math" panose="02040503050406030204" pitchFamily="18" charset="0"/>
+                            </a:rPr>
+                            <m:t>𝐶</m:t>
+                          </m:r>
+                        </m:e>
+                        <m:sub>
+                          <m:r>
+                            <a:rPr lang="en-US" b="0" i="1" smtClean="0">
+                              <a:latin typeface="Cambria Math" panose="02040503050406030204" pitchFamily="18" charset="0"/>
+                            </a:rPr>
+                            <m:t>𝑠</m:t>
+                          </m:r>
+                        </m:sub>
+                      </m:sSub>
+                      <m:r>
+                        <a:rPr lang="en-US" b="0" i="1" smtClean="0">
+                          <a:latin typeface="Cambria Math" panose="02040503050406030204" pitchFamily="18" charset="0"/>
+                        </a:rPr>
+                        <m:t>=</m:t>
+                      </m:r>
+                      <m:r>
+                        <a:rPr lang="en-US" b="0" i="1" smtClean="0">
+                          <a:latin typeface="Cambria Math" panose="02040503050406030204" pitchFamily="18" charset="0"/>
+                        </a:rPr>
+                        <m:t>12</m:t>
+                      </m:r>
+                      <m:r>
+                        <a:rPr lang="en-US" b="0" i="1" smtClean="0">
+                          <a:latin typeface="Cambria Math" panose="02040503050406030204" pitchFamily="18" charset="0"/>
+                        </a:rPr>
+                        <m:t>𝑚𝑠</m:t>
+                      </m:r>
+                    </m:oMath>
+                  </m:oMathPara>
+                </a14:m>
+                <a:br>
+                  <a:rPr lang="en-US" b="0" i="1" dirty="0">
+                    <a:latin typeface="Cambria Math" panose="02040503050406030204" pitchFamily="18" charset="0"/>
+                  </a:rPr>
+                </a:br>
+                <a:endParaRPr lang="en-US" b="0" i="1" dirty="0">
+                  <a:latin typeface="Cambria Math" panose="02040503050406030204" pitchFamily="18" charset="0"/>
+                </a:endParaRPr>
+              </a:p>
+              <a:p>
+                <a:pPr/>
+                <a:endParaRPr lang="en-US" i="1" dirty="0">
+                  <a:latin typeface="Cambria Math" panose="02040503050406030204" pitchFamily="18" charset="0"/>
+                </a:endParaRPr>
+              </a:p>
+              <a:p>
+                <a:pPr/>
+                <a14:m>
+                  <m:oMathPara xmlns:m="http://schemas.openxmlformats.org/officeDocument/2006/math">
+                    <m:oMathParaPr>
+                      <m:jc m:val="centerGroup"/>
+                    </m:oMathParaPr>
+                    <m:oMath xmlns:m="http://schemas.openxmlformats.org/officeDocument/2006/math">
+                      <m:sSub>
+                        <m:sSubPr>
+                          <m:ctrlPr>
+                            <a:rPr lang="en-US" b="0" i="1" smtClean="0">
+                              <a:latin typeface="Cambria Math" panose="02040503050406030204" pitchFamily="18" charset="0"/>
+                            </a:rPr>
+                          </m:ctrlPr>
+                        </m:sSubPr>
+                        <m:e>
+                          <m:r>
+                            <a:rPr lang="en-US" b="0" i="1" smtClean="0">
+                              <a:latin typeface="Cambria Math" panose="02040503050406030204" pitchFamily="18" charset="0"/>
+                            </a:rPr>
+                            <m:t>𝑇</m:t>
+                          </m:r>
+                        </m:e>
+                        <m:sub>
+                          <m:r>
+                            <a:rPr lang="en-US" b="0" i="1" smtClean="0">
+                              <a:latin typeface="Cambria Math" panose="02040503050406030204" pitchFamily="18" charset="0"/>
+                            </a:rPr>
+                            <m:t>𝑠</m:t>
+                          </m:r>
+                        </m:sub>
+                      </m:sSub>
+                      <m:r>
+                        <a:rPr lang="en-US" b="0" i="1" smtClean="0">
+                          <a:latin typeface="Cambria Math" panose="02040503050406030204" pitchFamily="18" charset="0"/>
+                        </a:rPr>
+                        <m:t>=</m:t>
+                      </m:r>
+                      <m:r>
+                        <a:rPr lang="en-US" b="0" i="1" smtClean="0">
+                          <a:latin typeface="Cambria Math" panose="02040503050406030204" pitchFamily="18" charset="0"/>
+                        </a:rPr>
+                        <m:t>25</m:t>
+                      </m:r>
+                      <m:r>
+                        <a:rPr lang="en-US" b="0" i="1" smtClean="0">
+                          <a:latin typeface="Cambria Math" panose="02040503050406030204" pitchFamily="18" charset="0"/>
+                        </a:rPr>
+                        <m:t>𝑚𝑠</m:t>
+                      </m:r>
+                    </m:oMath>
+                  </m:oMathPara>
+                </a14:m>
+                <a:br>
+                  <a:rPr lang="en-US" b="0" i="1" dirty="0">
+                    <a:latin typeface="Cambria Math" panose="02040503050406030204" pitchFamily="18" charset="0"/>
+                  </a:rPr>
+                </a:br>
+                <a:endParaRPr lang="en-US" b="0" i="1" dirty="0">
+                  <a:latin typeface="Cambria Math" panose="02040503050406030204" pitchFamily="18" charset="0"/>
+                </a:endParaRPr>
+              </a:p>
+              <a:p>
+                <a:pPr/>
+                <a:endParaRPr lang="en-US" b="0" i="1" dirty="0">
+                  <a:latin typeface="Cambria Math" panose="02040503050406030204" pitchFamily="18" charset="0"/>
+                </a:endParaRPr>
+              </a:p>
+              <a:p>
+                <a:pPr/>
+                <a14:m>
+                  <m:oMathPara xmlns:m="http://schemas.openxmlformats.org/officeDocument/2006/math">
+                    <m:oMathParaPr>
+                      <m:jc m:val="centerGroup"/>
+                    </m:oMathParaPr>
+                    <m:oMath xmlns:m="http://schemas.openxmlformats.org/officeDocument/2006/math">
+                      <m:sSub>
+                        <m:sSubPr>
+                          <m:ctrlPr>
+                            <a:rPr lang="en-US" b="0" i="1" smtClean="0">
+                              <a:latin typeface="Cambria Math" panose="02040503050406030204" pitchFamily="18" charset="0"/>
+                            </a:rPr>
+                          </m:ctrlPr>
+                        </m:sSubPr>
+                        <m:e>
+                          <m:r>
+                            <a:rPr lang="en-US" b="0" i="1" smtClean="0">
+                              <a:latin typeface="Cambria Math" panose="02040503050406030204" pitchFamily="18" charset="0"/>
+                            </a:rPr>
+                            <m:t>𝑈</m:t>
+                          </m:r>
+                        </m:e>
+                        <m:sub>
+                          <m:r>
+                            <a:rPr lang="en-US" b="0" i="1" smtClean="0">
+                              <a:latin typeface="Cambria Math" panose="02040503050406030204" pitchFamily="18" charset="0"/>
+                            </a:rPr>
+                            <m:t>𝑠</m:t>
+                          </m:r>
+                        </m:sub>
+                      </m:sSub>
+                      <m:r>
+                        <a:rPr lang="en-US" b="0" i="1" smtClean="0">
+                          <a:latin typeface="Cambria Math" panose="02040503050406030204" pitchFamily="18" charset="0"/>
+                        </a:rPr>
+                        <m:t>=</m:t>
+                      </m:r>
+                      <m:f>
+                        <m:fPr>
+                          <m:ctrlPr>
+                            <a:rPr lang="en-US" b="0" i="1" smtClean="0">
+                              <a:latin typeface="Cambria Math" panose="02040503050406030204" pitchFamily="18" charset="0"/>
+                            </a:rPr>
+                          </m:ctrlPr>
+                        </m:fPr>
+                        <m:num>
+                          <m:r>
+                            <a:rPr lang="en-US" b="0" i="1" smtClean="0">
+                              <a:latin typeface="Cambria Math" panose="02040503050406030204" pitchFamily="18" charset="0"/>
+                            </a:rPr>
+                            <m:t>1</m:t>
+                          </m:r>
+                          <m:r>
+                            <a:rPr lang="en-US" b="0" i="1" smtClean="0">
+                              <a:latin typeface="Cambria Math" panose="02040503050406030204" pitchFamily="18" charset="0"/>
+                            </a:rPr>
+                            <m:t>2</m:t>
+                          </m:r>
+                        </m:num>
+                        <m:den>
+                          <m:r>
+                            <a:rPr lang="en-US" b="0" i="1" smtClean="0">
+                              <a:latin typeface="Cambria Math" panose="02040503050406030204" pitchFamily="18" charset="0"/>
+                            </a:rPr>
+                            <m:t>25</m:t>
+                          </m:r>
+                        </m:den>
+                      </m:f>
+                    </m:oMath>
+                  </m:oMathPara>
+                </a14:m>
+                <a:endParaRPr lang="en-US" b="0" dirty="0"/>
+              </a:p>
+            </p:txBody>
+          </p:sp>
+        </mc:Choice>
+        <mc:Fallback>
+          <p:sp>
+            <p:nvSpPr>
+              <p:cNvPr id="16" name="TextBox 15">
+                <a:extLst>
+                  <a:ext uri="{FF2B5EF4-FFF2-40B4-BE49-F238E27FC236}">
+                    <a16:creationId xmlns:a16="http://schemas.microsoft.com/office/drawing/2014/main" id="{B99661C2-351F-FFE4-43C0-4007ABFA17CB}"/>
+                  </a:ext>
+                </a:extLst>
+              </p:cNvPr>
+              <p:cNvSpPr txBox="1">
+                <a:spLocks noRot="1" noChangeAspect="1" noMove="1" noResize="1" noEditPoints="1" noAdjustHandles="1" noChangeArrowheads="1" noChangeShapeType="1" noTextEdit="1"/>
+              </p:cNvSpPr>
+              <p:nvPr/>
+            </p:nvSpPr>
+            <p:spPr>
+              <a:xfrm>
+                <a:off x="3059832" y="1586615"/>
+                <a:ext cx="1117678" cy="1205458"/>
+              </a:xfrm>
+              <a:prstGeom prst="rect">
+                <a:avLst/>
+              </a:prstGeom>
+              <a:blipFill>
+                <a:blip r:embed="rId6"/>
+                <a:stretch>
+                  <a:fillRect b="-6566"/>
+                </a:stretch>
+              </a:blipFill>
+            </p:spPr>
+            <p:txBody>
+              <a:bodyPr/>
+              <a:lstStyle/>
+              <a:p>
+                <a:r>
+                  <a:rPr lang="en-US">
+                    <a:noFill/>
+                  </a:rPr>
+                  <a:t> </a:t>
+                </a:r>
+              </a:p>
+            </p:txBody>
+          </p:sp>
+        </mc:Fallback>
+      </mc:AlternateContent>
+      <mc:AlternateContent xmlns:mc="http://schemas.openxmlformats.org/markup-compatibility/2006">
+        <mc:Choice xmlns:a14="http://schemas.microsoft.com/office/drawing/2010/main" Requires="a14">
+          <p:sp>
+            <p:nvSpPr>
+              <p:cNvPr id="17" name="TextBox 16">
+                <a:extLst>
+                  <a:ext uri="{FF2B5EF4-FFF2-40B4-BE49-F238E27FC236}">
+                    <a16:creationId xmlns:a16="http://schemas.microsoft.com/office/drawing/2014/main" id="{E06FF81D-B882-2FAC-6C6E-5B5926834692}"/>
+                  </a:ext>
+                </a:extLst>
+              </p:cNvPr>
+              <p:cNvSpPr txBox="1"/>
+              <p:nvPr/>
+            </p:nvSpPr>
+            <p:spPr>
+              <a:xfrm>
+                <a:off x="7720470" y="1605583"/>
+                <a:ext cx="1117678" cy="1205458"/>
+              </a:xfrm>
+              <a:prstGeom prst="rect">
+                <a:avLst/>
+              </a:prstGeom>
+              <a:noFill/>
+            </p:spPr>
+            <p:txBody>
+              <a:bodyPr wrap="none" lIns="0" tIns="0" rIns="0" bIns="0" rtlCol="0">
+                <a:spAutoFit/>
+              </a:bodyPr>
+              <a:lstStyle/>
+              <a:p>
+                <a:pPr/>
+                <a14:m>
+                  <m:oMathPara xmlns:m="http://schemas.openxmlformats.org/officeDocument/2006/math">
+                    <m:oMathParaPr>
+                      <m:jc m:val="centerGroup"/>
+                    </m:oMathParaPr>
+                    <m:oMath xmlns:m="http://schemas.openxmlformats.org/officeDocument/2006/math">
+                      <m:sSub>
+                        <m:sSubPr>
+                          <m:ctrlPr>
+                            <a:rPr lang="en-US" b="0" i="1" smtClean="0">
+                              <a:latin typeface="Cambria Math" panose="02040503050406030204" pitchFamily="18" charset="0"/>
+                            </a:rPr>
+                          </m:ctrlPr>
+                        </m:sSubPr>
+                        <m:e>
+                          <m:r>
+                            <a:rPr lang="en-US" b="0" i="1" smtClean="0">
+                              <a:latin typeface="Cambria Math" panose="02040503050406030204" pitchFamily="18" charset="0"/>
+                            </a:rPr>
+                            <m:t>𝐶</m:t>
+                          </m:r>
+                        </m:e>
+                        <m:sub>
+                          <m:r>
+                            <a:rPr lang="en-US" b="0" i="1" smtClean="0">
+                              <a:latin typeface="Cambria Math" panose="02040503050406030204" pitchFamily="18" charset="0"/>
+                            </a:rPr>
+                            <m:t>𝑠</m:t>
+                          </m:r>
+                        </m:sub>
+                      </m:sSub>
+                      <m:r>
+                        <a:rPr lang="en-US" b="0" i="1" smtClean="0">
+                          <a:latin typeface="Cambria Math" panose="02040503050406030204" pitchFamily="18" charset="0"/>
+                        </a:rPr>
+                        <m:t>=</m:t>
+                      </m:r>
+                      <m:r>
+                        <a:rPr lang="en-US" b="0" i="1" smtClean="0">
+                          <a:latin typeface="Cambria Math" panose="02040503050406030204" pitchFamily="18" charset="0"/>
+                        </a:rPr>
+                        <m:t>24</m:t>
+                      </m:r>
+                      <m:r>
+                        <a:rPr lang="en-US" b="0" i="1" smtClean="0">
+                          <a:latin typeface="Cambria Math" panose="02040503050406030204" pitchFamily="18" charset="0"/>
+                        </a:rPr>
+                        <m:t>𝑚𝑠</m:t>
+                      </m:r>
+                    </m:oMath>
+                  </m:oMathPara>
+                </a14:m>
+                <a:br>
+                  <a:rPr lang="en-US" b="0" i="1" dirty="0">
+                    <a:latin typeface="Cambria Math" panose="02040503050406030204" pitchFamily="18" charset="0"/>
+                  </a:rPr>
+                </a:br>
+                <a:endParaRPr lang="en-US" b="0" i="1" dirty="0">
+                  <a:latin typeface="Cambria Math" panose="02040503050406030204" pitchFamily="18" charset="0"/>
+                </a:endParaRPr>
+              </a:p>
+              <a:p>
+                <a:pPr/>
+                <a:endParaRPr lang="en-US" i="1" dirty="0">
+                  <a:latin typeface="Cambria Math" panose="02040503050406030204" pitchFamily="18" charset="0"/>
+                </a:endParaRPr>
+              </a:p>
+              <a:p>
+                <a:pPr/>
+                <a14:m>
+                  <m:oMathPara xmlns:m="http://schemas.openxmlformats.org/officeDocument/2006/math">
+                    <m:oMathParaPr>
+                      <m:jc m:val="centerGroup"/>
+                    </m:oMathParaPr>
+                    <m:oMath xmlns:m="http://schemas.openxmlformats.org/officeDocument/2006/math">
+                      <m:sSub>
+                        <m:sSubPr>
+                          <m:ctrlPr>
+                            <a:rPr lang="en-US" b="0" i="1" smtClean="0">
+                              <a:latin typeface="Cambria Math" panose="02040503050406030204" pitchFamily="18" charset="0"/>
+                            </a:rPr>
+                          </m:ctrlPr>
+                        </m:sSubPr>
+                        <m:e>
+                          <m:r>
+                            <a:rPr lang="en-US" b="0" i="1" smtClean="0">
+                              <a:latin typeface="Cambria Math" panose="02040503050406030204" pitchFamily="18" charset="0"/>
+                            </a:rPr>
+                            <m:t>𝑇</m:t>
+                          </m:r>
+                        </m:e>
+                        <m:sub>
+                          <m:r>
+                            <a:rPr lang="en-US" b="0" i="1" smtClean="0">
+                              <a:latin typeface="Cambria Math" panose="02040503050406030204" pitchFamily="18" charset="0"/>
+                            </a:rPr>
+                            <m:t>𝑠</m:t>
+                          </m:r>
+                        </m:sub>
+                      </m:sSub>
+                      <m:r>
+                        <a:rPr lang="en-US" b="0" i="1" smtClean="0">
+                          <a:latin typeface="Cambria Math" panose="02040503050406030204" pitchFamily="18" charset="0"/>
+                        </a:rPr>
+                        <m:t>=</m:t>
+                      </m:r>
+                      <m:r>
+                        <a:rPr lang="en-US" b="0" i="1" smtClean="0">
+                          <a:latin typeface="Cambria Math" panose="02040503050406030204" pitchFamily="18" charset="0"/>
+                        </a:rPr>
+                        <m:t>50</m:t>
+                      </m:r>
+                      <m:r>
+                        <a:rPr lang="en-US" b="0" i="1" smtClean="0">
+                          <a:latin typeface="Cambria Math" panose="02040503050406030204" pitchFamily="18" charset="0"/>
+                        </a:rPr>
+                        <m:t>𝑚𝑠</m:t>
+                      </m:r>
+                    </m:oMath>
+                  </m:oMathPara>
+                </a14:m>
+                <a:br>
+                  <a:rPr lang="en-US" b="0" i="1" dirty="0">
+                    <a:latin typeface="Cambria Math" panose="02040503050406030204" pitchFamily="18" charset="0"/>
+                  </a:rPr>
+                </a:br>
+                <a:endParaRPr lang="en-US" b="0" i="1" dirty="0">
+                  <a:latin typeface="Cambria Math" panose="02040503050406030204" pitchFamily="18" charset="0"/>
+                </a:endParaRPr>
+              </a:p>
+              <a:p>
+                <a:pPr/>
+                <a:endParaRPr lang="en-US" b="0" i="1" dirty="0">
+                  <a:latin typeface="Cambria Math" panose="02040503050406030204" pitchFamily="18" charset="0"/>
+                </a:endParaRPr>
+              </a:p>
+              <a:p>
+                <a:pPr/>
+                <a14:m>
+                  <m:oMathPara xmlns:m="http://schemas.openxmlformats.org/officeDocument/2006/math">
+                    <m:oMathParaPr>
+                      <m:jc m:val="centerGroup"/>
+                    </m:oMathParaPr>
+                    <m:oMath xmlns:m="http://schemas.openxmlformats.org/officeDocument/2006/math">
+                      <m:sSub>
+                        <m:sSubPr>
+                          <m:ctrlPr>
+                            <a:rPr lang="en-US" b="0" i="1" smtClean="0">
+                              <a:latin typeface="Cambria Math" panose="02040503050406030204" pitchFamily="18" charset="0"/>
+                            </a:rPr>
+                          </m:ctrlPr>
+                        </m:sSubPr>
+                        <m:e>
+                          <m:r>
+                            <a:rPr lang="en-US" b="0" i="1" smtClean="0">
+                              <a:latin typeface="Cambria Math" panose="02040503050406030204" pitchFamily="18" charset="0"/>
+                            </a:rPr>
+                            <m:t>𝑈</m:t>
+                          </m:r>
+                        </m:e>
+                        <m:sub>
+                          <m:r>
+                            <a:rPr lang="en-US" b="0" i="1" smtClean="0">
+                              <a:latin typeface="Cambria Math" panose="02040503050406030204" pitchFamily="18" charset="0"/>
+                            </a:rPr>
+                            <m:t>𝑠</m:t>
+                          </m:r>
+                        </m:sub>
+                      </m:sSub>
+                      <m:r>
+                        <a:rPr lang="en-US" b="0" i="1" smtClean="0">
+                          <a:latin typeface="Cambria Math" panose="02040503050406030204" pitchFamily="18" charset="0"/>
+                        </a:rPr>
+                        <m:t>=</m:t>
+                      </m:r>
+                      <m:f>
+                        <m:fPr>
+                          <m:ctrlPr>
+                            <a:rPr lang="en-US" b="0" i="1" smtClean="0">
+                              <a:latin typeface="Cambria Math" panose="02040503050406030204" pitchFamily="18" charset="0"/>
+                            </a:rPr>
+                          </m:ctrlPr>
+                        </m:fPr>
+                        <m:num>
+                          <m:r>
+                            <a:rPr lang="en-US" b="0" i="1" smtClean="0">
+                              <a:latin typeface="Cambria Math" panose="02040503050406030204" pitchFamily="18" charset="0"/>
+                            </a:rPr>
+                            <m:t>1</m:t>
+                          </m:r>
+                          <m:r>
+                            <a:rPr lang="en-US" b="0" i="1" smtClean="0">
+                              <a:latin typeface="Cambria Math" panose="02040503050406030204" pitchFamily="18" charset="0"/>
+                            </a:rPr>
+                            <m:t>2</m:t>
+                          </m:r>
+                        </m:num>
+                        <m:den>
+                          <m:r>
+                            <a:rPr lang="en-US" b="0" i="1" smtClean="0">
+                              <a:latin typeface="Cambria Math" panose="02040503050406030204" pitchFamily="18" charset="0"/>
+                            </a:rPr>
+                            <m:t>25</m:t>
+                          </m:r>
+                        </m:den>
+                      </m:f>
+                    </m:oMath>
+                  </m:oMathPara>
+                </a14:m>
+                <a:endParaRPr lang="en-US" b="0" dirty="0"/>
+              </a:p>
+            </p:txBody>
+          </p:sp>
+        </mc:Choice>
+        <mc:Fallback>
+          <p:sp>
+            <p:nvSpPr>
+              <p:cNvPr id="17" name="TextBox 16">
+                <a:extLst>
+                  <a:ext uri="{FF2B5EF4-FFF2-40B4-BE49-F238E27FC236}">
+                    <a16:creationId xmlns:a16="http://schemas.microsoft.com/office/drawing/2014/main" id="{E06FF81D-B882-2FAC-6C6E-5B5926834692}"/>
+                  </a:ext>
+                </a:extLst>
+              </p:cNvPr>
+              <p:cNvSpPr txBox="1">
+                <a:spLocks noRot="1" noChangeAspect="1" noMove="1" noResize="1" noEditPoints="1" noAdjustHandles="1" noChangeArrowheads="1" noChangeShapeType="1" noTextEdit="1"/>
+              </p:cNvSpPr>
+              <p:nvPr/>
+            </p:nvSpPr>
+            <p:spPr>
+              <a:xfrm>
+                <a:off x="7720470" y="1605583"/>
+                <a:ext cx="1117678" cy="1205458"/>
+              </a:xfrm>
+              <a:prstGeom prst="rect">
+                <a:avLst/>
+              </a:prstGeom>
+              <a:blipFill>
+                <a:blip r:embed="rId7"/>
+                <a:stretch>
+                  <a:fillRect b="-6566"/>
+                </a:stretch>
+              </a:blipFill>
+            </p:spPr>
+            <p:txBody>
+              <a:bodyPr/>
+              <a:lstStyle/>
+              <a:p>
+                <a:r>
+                  <a:rPr lang="en-US">
+                    <a:noFill/>
+                  </a:rPr>
+                  <a:t> </a:t>
+                </a:r>
+              </a:p>
+            </p:txBody>
+          </p:sp>
+        </mc:Fallback>
+      </mc:AlternateContent>
+      <mc:AlternateContent xmlns:mc="http://schemas.openxmlformats.org/markup-compatibility/2006">
+        <mc:Choice xmlns:a14="http://schemas.microsoft.com/office/drawing/2010/main" Requires="a14">
+          <p:sp>
+            <p:nvSpPr>
+              <p:cNvPr id="18" name="TextBox 17">
+                <a:extLst>
+                  <a:ext uri="{FF2B5EF4-FFF2-40B4-BE49-F238E27FC236}">
+                    <a16:creationId xmlns:a16="http://schemas.microsoft.com/office/drawing/2014/main" id="{CFD0A0AC-3210-C36F-B729-11E6DE76CC0B}"/>
+                  </a:ext>
+                </a:extLst>
+              </p:cNvPr>
+              <p:cNvSpPr txBox="1"/>
+              <p:nvPr/>
+            </p:nvSpPr>
+            <p:spPr>
+              <a:xfrm>
+                <a:off x="3059832" y="4292600"/>
+                <a:ext cx="1148648" cy="1205458"/>
+              </a:xfrm>
+              <a:prstGeom prst="rect">
+                <a:avLst/>
+              </a:prstGeom>
+              <a:noFill/>
+            </p:spPr>
+            <p:txBody>
+              <a:bodyPr wrap="none" lIns="0" tIns="0" rIns="0" bIns="0" rtlCol="0">
+                <a:spAutoFit/>
+              </a:bodyPr>
+              <a:lstStyle/>
+              <a:p>
+                <a:pPr/>
+                <a14:m>
+                  <m:oMathPara xmlns:m="http://schemas.openxmlformats.org/officeDocument/2006/math">
+                    <m:oMathParaPr>
+                      <m:jc m:val="centerGroup"/>
+                    </m:oMathParaPr>
+                    <m:oMath xmlns:m="http://schemas.openxmlformats.org/officeDocument/2006/math">
+                      <m:sSub>
+                        <m:sSubPr>
+                          <m:ctrlPr>
+                            <a:rPr lang="en-US" b="0" i="1" smtClean="0">
+                              <a:latin typeface="Cambria Math" panose="02040503050406030204" pitchFamily="18" charset="0"/>
+                            </a:rPr>
+                          </m:ctrlPr>
+                        </m:sSubPr>
+                        <m:e>
+                          <m:r>
+                            <a:rPr lang="en-US" b="0" i="1" smtClean="0">
+                              <a:latin typeface="Cambria Math" panose="02040503050406030204" pitchFamily="18" charset="0"/>
+                            </a:rPr>
+                            <m:t>𝐶</m:t>
+                          </m:r>
+                        </m:e>
+                        <m:sub>
+                          <m:r>
+                            <a:rPr lang="en-US" b="0" i="1" smtClean="0">
+                              <a:latin typeface="Cambria Math" panose="02040503050406030204" pitchFamily="18" charset="0"/>
+                            </a:rPr>
+                            <m:t>𝑠</m:t>
+                          </m:r>
+                        </m:sub>
+                      </m:sSub>
+                      <m:r>
+                        <a:rPr lang="en-US" b="0" i="1" smtClean="0">
+                          <a:latin typeface="Cambria Math" panose="02040503050406030204" pitchFamily="18" charset="0"/>
+                        </a:rPr>
+                        <m:t>=</m:t>
+                      </m:r>
+                      <m:r>
+                        <a:rPr lang="en-US" b="0" i="1" smtClean="0">
+                          <a:latin typeface="Cambria Math" panose="02040503050406030204" pitchFamily="18" charset="0"/>
+                        </a:rPr>
+                        <m:t>6</m:t>
+                      </m:r>
+                      <m:r>
+                        <a:rPr lang="en-US" b="0" i="1" smtClean="0">
+                          <a:latin typeface="Cambria Math" panose="02040503050406030204" pitchFamily="18" charset="0"/>
+                        </a:rPr>
+                        <m:t>𝑚𝑠</m:t>
+                      </m:r>
+                    </m:oMath>
+                  </m:oMathPara>
+                </a14:m>
+                <a:br>
+                  <a:rPr lang="en-US" b="0" i="1" dirty="0">
+                    <a:latin typeface="Cambria Math" panose="02040503050406030204" pitchFamily="18" charset="0"/>
+                  </a:rPr>
+                </a:br>
+                <a:endParaRPr lang="en-US" b="0" i="1" dirty="0">
+                  <a:latin typeface="Cambria Math" panose="02040503050406030204" pitchFamily="18" charset="0"/>
+                </a:endParaRPr>
+              </a:p>
+              <a:p>
+                <a:pPr/>
+                <a:endParaRPr lang="en-US" i="1" dirty="0">
+                  <a:latin typeface="Cambria Math" panose="02040503050406030204" pitchFamily="18" charset="0"/>
+                </a:endParaRPr>
+              </a:p>
+              <a:p>
+                <a:pPr/>
+                <a14:m>
+                  <m:oMathPara xmlns:m="http://schemas.openxmlformats.org/officeDocument/2006/math">
+                    <m:oMathParaPr>
+                      <m:jc m:val="centerGroup"/>
+                    </m:oMathParaPr>
+                    <m:oMath xmlns:m="http://schemas.openxmlformats.org/officeDocument/2006/math">
+                      <m:sSub>
+                        <m:sSubPr>
+                          <m:ctrlPr>
+                            <a:rPr lang="en-US" b="0" i="1" smtClean="0">
+                              <a:latin typeface="Cambria Math" panose="02040503050406030204" pitchFamily="18" charset="0"/>
+                            </a:rPr>
+                          </m:ctrlPr>
+                        </m:sSubPr>
+                        <m:e>
+                          <m:r>
+                            <a:rPr lang="en-US" b="0" i="1" smtClean="0">
+                              <a:latin typeface="Cambria Math" panose="02040503050406030204" pitchFamily="18" charset="0"/>
+                            </a:rPr>
+                            <m:t>𝑇</m:t>
+                          </m:r>
+                        </m:e>
+                        <m:sub>
+                          <m:r>
+                            <a:rPr lang="en-US" b="0" i="1" smtClean="0">
+                              <a:latin typeface="Cambria Math" panose="02040503050406030204" pitchFamily="18" charset="0"/>
+                            </a:rPr>
+                            <m:t>𝑠</m:t>
+                          </m:r>
+                        </m:sub>
+                      </m:sSub>
+                      <m:r>
+                        <a:rPr lang="en-US" b="0" i="1" smtClean="0">
+                          <a:latin typeface="Cambria Math" panose="02040503050406030204" pitchFamily="18" charset="0"/>
+                        </a:rPr>
+                        <m:t>=</m:t>
+                      </m:r>
+                      <m:r>
+                        <a:rPr lang="en-US" b="0" i="1" smtClean="0">
+                          <a:latin typeface="Cambria Math" panose="02040503050406030204" pitchFamily="18" charset="0"/>
+                        </a:rPr>
+                        <m:t>13</m:t>
+                      </m:r>
+                      <m:r>
+                        <a:rPr lang="en-US" b="0" i="1" smtClean="0">
+                          <a:latin typeface="Cambria Math" panose="02040503050406030204" pitchFamily="18" charset="0"/>
+                        </a:rPr>
+                        <m:t>𝑚𝑠</m:t>
+                      </m:r>
+                    </m:oMath>
+                  </m:oMathPara>
+                </a14:m>
+                <a:br>
+                  <a:rPr lang="en-US" b="0" i="1" dirty="0">
+                    <a:latin typeface="Cambria Math" panose="02040503050406030204" pitchFamily="18" charset="0"/>
+                  </a:rPr>
+                </a:br>
+                <a:endParaRPr lang="en-US" b="0" i="1" dirty="0">
+                  <a:latin typeface="Cambria Math" panose="02040503050406030204" pitchFamily="18" charset="0"/>
+                </a:endParaRPr>
+              </a:p>
+              <a:p>
+                <a:pPr/>
+                <a:endParaRPr lang="en-US" b="0" i="1" dirty="0">
+                  <a:latin typeface="Cambria Math" panose="02040503050406030204" pitchFamily="18" charset="0"/>
+                </a:endParaRPr>
+              </a:p>
+              <a:p>
+                <a:pPr/>
+                <a14:m>
+                  <m:oMathPara xmlns:m="http://schemas.openxmlformats.org/officeDocument/2006/math">
+                    <m:oMathParaPr>
+                      <m:jc m:val="centerGroup"/>
+                    </m:oMathParaPr>
+                    <m:oMath xmlns:m="http://schemas.openxmlformats.org/officeDocument/2006/math">
+                      <m:sSub>
+                        <m:sSubPr>
+                          <m:ctrlPr>
+                            <a:rPr lang="en-US" b="0" i="1" smtClean="0">
+                              <a:latin typeface="Cambria Math" panose="02040503050406030204" pitchFamily="18" charset="0"/>
+                            </a:rPr>
+                          </m:ctrlPr>
+                        </m:sSubPr>
+                        <m:e>
+                          <m:r>
+                            <a:rPr lang="en-US" b="0" i="1" smtClean="0">
+                              <a:latin typeface="Cambria Math" panose="02040503050406030204" pitchFamily="18" charset="0"/>
+                            </a:rPr>
+                            <m:t>𝑈</m:t>
+                          </m:r>
+                        </m:e>
+                        <m:sub>
+                          <m:r>
+                            <a:rPr lang="en-US" b="0" i="1" smtClean="0">
+                              <a:latin typeface="Cambria Math" panose="02040503050406030204" pitchFamily="18" charset="0"/>
+                            </a:rPr>
+                            <m:t>𝑠</m:t>
+                          </m:r>
+                        </m:sub>
+                      </m:sSub>
+                      <m:r>
+                        <a:rPr lang="en-US" b="0" i="1" smtClean="0">
+                          <a:latin typeface="Cambria Math" panose="02040503050406030204" pitchFamily="18" charset="0"/>
+                        </a:rPr>
+                        <m:t>=</m:t>
+                      </m:r>
+                      <m:f>
+                        <m:fPr>
+                          <m:ctrlPr>
+                            <a:rPr lang="en-US" b="0" i="1" smtClean="0">
+                              <a:latin typeface="Cambria Math" panose="02040503050406030204" pitchFamily="18" charset="0"/>
+                            </a:rPr>
+                          </m:ctrlPr>
+                        </m:fPr>
+                        <m:num>
+                          <m:r>
+                            <a:rPr lang="en-US" b="0" i="1" smtClean="0">
+                              <a:latin typeface="Cambria Math" panose="02040503050406030204" pitchFamily="18" charset="0"/>
+                            </a:rPr>
+                            <m:t>11.54</m:t>
+                          </m:r>
+                        </m:num>
+                        <m:den>
+                          <m:r>
+                            <a:rPr lang="en-US" b="0" i="1" smtClean="0">
+                              <a:latin typeface="Cambria Math" panose="02040503050406030204" pitchFamily="18" charset="0"/>
+                            </a:rPr>
+                            <m:t>25</m:t>
+                          </m:r>
+                        </m:den>
+                      </m:f>
+                    </m:oMath>
+                  </m:oMathPara>
+                </a14:m>
+                <a:endParaRPr lang="en-US" b="0" dirty="0"/>
+              </a:p>
+            </p:txBody>
+          </p:sp>
+        </mc:Choice>
+        <mc:Fallback>
+          <p:sp>
+            <p:nvSpPr>
+              <p:cNvPr id="18" name="TextBox 17">
+                <a:extLst>
+                  <a:ext uri="{FF2B5EF4-FFF2-40B4-BE49-F238E27FC236}">
+                    <a16:creationId xmlns:a16="http://schemas.microsoft.com/office/drawing/2014/main" id="{CFD0A0AC-3210-C36F-B729-11E6DE76CC0B}"/>
+                  </a:ext>
+                </a:extLst>
+              </p:cNvPr>
+              <p:cNvSpPr txBox="1">
+                <a:spLocks noRot="1" noChangeAspect="1" noMove="1" noResize="1" noEditPoints="1" noAdjustHandles="1" noChangeArrowheads="1" noChangeShapeType="1" noTextEdit="1"/>
+              </p:cNvSpPr>
+              <p:nvPr/>
+            </p:nvSpPr>
+            <p:spPr>
+              <a:xfrm>
+                <a:off x="3059832" y="4292600"/>
+                <a:ext cx="1148648" cy="1205458"/>
+              </a:xfrm>
+              <a:prstGeom prst="rect">
+                <a:avLst/>
+              </a:prstGeom>
+              <a:blipFill>
+                <a:blip r:embed="rId8"/>
+                <a:stretch>
+                  <a:fillRect b="-6566"/>
+                </a:stretch>
+              </a:blipFill>
+            </p:spPr>
+            <p:txBody>
+              <a:bodyPr/>
+              <a:lstStyle/>
+              <a:p>
+                <a:r>
+                  <a:rPr lang="en-US">
+                    <a:noFill/>
+                  </a:rPr>
+                  <a:t> </a:t>
+                </a:r>
+              </a:p>
+            </p:txBody>
+          </p:sp>
+        </mc:Fallback>
+      </mc:AlternateContent>
+      <mc:AlternateContent xmlns:mc="http://schemas.openxmlformats.org/markup-compatibility/2006">
+        <mc:Choice xmlns:a14="http://schemas.microsoft.com/office/drawing/2010/main" Requires="a14">
+          <p:sp>
+            <p:nvSpPr>
+              <p:cNvPr id="19" name="TextBox 18">
+                <a:extLst>
+                  <a:ext uri="{FF2B5EF4-FFF2-40B4-BE49-F238E27FC236}">
+                    <a16:creationId xmlns:a16="http://schemas.microsoft.com/office/drawing/2014/main" id="{F82BEC1C-C3F8-B721-3D5F-56A9BB82E4AA}"/>
+                  </a:ext>
+                </a:extLst>
+              </p:cNvPr>
+              <p:cNvSpPr txBox="1"/>
+              <p:nvPr/>
+            </p:nvSpPr>
+            <p:spPr>
+              <a:xfrm>
+                <a:off x="7723918" y="4292600"/>
+                <a:ext cx="1046377" cy="1205458"/>
+              </a:xfrm>
+              <a:prstGeom prst="rect">
+                <a:avLst/>
+              </a:prstGeom>
+              <a:noFill/>
+            </p:spPr>
+            <p:txBody>
+              <a:bodyPr wrap="none" lIns="0" tIns="0" rIns="0" bIns="0" rtlCol="0">
+                <a:spAutoFit/>
+              </a:bodyPr>
+              <a:lstStyle/>
+              <a:p>
+                <a:pPr/>
+                <a14:m>
+                  <m:oMathPara xmlns:m="http://schemas.openxmlformats.org/officeDocument/2006/math">
+                    <m:oMathParaPr>
+                      <m:jc m:val="centerGroup"/>
+                    </m:oMathParaPr>
+                    <m:oMath xmlns:m="http://schemas.openxmlformats.org/officeDocument/2006/math">
+                      <m:sSub>
+                        <m:sSubPr>
+                          <m:ctrlPr>
+                            <a:rPr lang="en-US" b="0" i="1" smtClean="0">
+                              <a:latin typeface="Cambria Math" panose="02040503050406030204" pitchFamily="18" charset="0"/>
+                            </a:rPr>
+                          </m:ctrlPr>
+                        </m:sSubPr>
+                        <m:e>
+                          <m:r>
+                            <a:rPr lang="en-US" b="0" i="1" smtClean="0">
+                              <a:latin typeface="Cambria Math" panose="02040503050406030204" pitchFamily="18" charset="0"/>
+                            </a:rPr>
+                            <m:t>𝐶</m:t>
+                          </m:r>
+                        </m:e>
+                        <m:sub>
+                          <m:r>
+                            <a:rPr lang="en-US" b="0" i="1" smtClean="0">
+                              <a:latin typeface="Cambria Math" panose="02040503050406030204" pitchFamily="18" charset="0"/>
+                            </a:rPr>
+                            <m:t>𝑠</m:t>
+                          </m:r>
+                        </m:sub>
+                      </m:sSub>
+                      <m:r>
+                        <a:rPr lang="en-US" b="0" i="1" smtClean="0">
+                          <a:latin typeface="Cambria Math" panose="02040503050406030204" pitchFamily="18" charset="0"/>
+                        </a:rPr>
+                        <m:t>=</m:t>
+                      </m:r>
+                      <m:r>
+                        <a:rPr lang="en-US" b="0" i="1" smtClean="0">
+                          <a:latin typeface="Cambria Math" panose="02040503050406030204" pitchFamily="18" charset="0"/>
+                        </a:rPr>
+                        <m:t>3</m:t>
+                      </m:r>
+                      <m:r>
+                        <a:rPr lang="en-US" b="0" i="1" smtClean="0">
+                          <a:latin typeface="Cambria Math" panose="02040503050406030204" pitchFamily="18" charset="0"/>
+                        </a:rPr>
+                        <m:t>𝑚𝑠</m:t>
+                      </m:r>
+                    </m:oMath>
+                  </m:oMathPara>
+                </a14:m>
+                <a:br>
+                  <a:rPr lang="en-US" b="0" i="1" dirty="0">
+                    <a:latin typeface="Cambria Math" panose="02040503050406030204" pitchFamily="18" charset="0"/>
+                  </a:rPr>
+                </a:br>
+                <a:endParaRPr lang="en-US" b="0" i="1" dirty="0">
+                  <a:latin typeface="Cambria Math" panose="02040503050406030204" pitchFamily="18" charset="0"/>
+                </a:endParaRPr>
+              </a:p>
+              <a:p>
+                <a:pPr/>
+                <a:endParaRPr lang="en-US" i="1" dirty="0">
+                  <a:latin typeface="Cambria Math" panose="02040503050406030204" pitchFamily="18" charset="0"/>
+                </a:endParaRPr>
+              </a:p>
+              <a:p>
+                <a:pPr/>
+                <a14:m>
+                  <m:oMathPara xmlns:m="http://schemas.openxmlformats.org/officeDocument/2006/math">
+                    <m:oMathParaPr>
+                      <m:jc m:val="centerGroup"/>
+                    </m:oMathParaPr>
+                    <m:oMath xmlns:m="http://schemas.openxmlformats.org/officeDocument/2006/math">
+                      <m:sSub>
+                        <m:sSubPr>
+                          <m:ctrlPr>
+                            <a:rPr lang="en-US" b="0" i="1" smtClean="0">
+                              <a:latin typeface="Cambria Math" panose="02040503050406030204" pitchFamily="18" charset="0"/>
+                            </a:rPr>
+                          </m:ctrlPr>
+                        </m:sSubPr>
+                        <m:e>
+                          <m:r>
+                            <a:rPr lang="en-US" b="0" i="1" smtClean="0">
+                              <a:latin typeface="Cambria Math" panose="02040503050406030204" pitchFamily="18" charset="0"/>
+                            </a:rPr>
+                            <m:t>𝑇</m:t>
+                          </m:r>
+                        </m:e>
+                        <m:sub>
+                          <m:r>
+                            <a:rPr lang="en-US" b="0" i="1" smtClean="0">
+                              <a:latin typeface="Cambria Math" panose="02040503050406030204" pitchFamily="18" charset="0"/>
+                            </a:rPr>
+                            <m:t>𝑠</m:t>
+                          </m:r>
+                        </m:sub>
+                      </m:sSub>
+                      <m:r>
+                        <a:rPr lang="en-US" b="0" i="1" smtClean="0">
+                          <a:latin typeface="Cambria Math" panose="02040503050406030204" pitchFamily="18" charset="0"/>
+                        </a:rPr>
+                        <m:t>=</m:t>
+                      </m:r>
+                      <m:r>
+                        <a:rPr lang="en-US" b="0" i="1" smtClean="0">
+                          <a:latin typeface="Cambria Math" panose="02040503050406030204" pitchFamily="18" charset="0"/>
+                        </a:rPr>
+                        <m:t>7</m:t>
+                      </m:r>
+                      <m:r>
+                        <a:rPr lang="en-US" b="0" i="1" smtClean="0">
+                          <a:latin typeface="Cambria Math" panose="02040503050406030204" pitchFamily="18" charset="0"/>
+                        </a:rPr>
+                        <m:t>𝑚𝑠</m:t>
+                      </m:r>
+                    </m:oMath>
+                  </m:oMathPara>
+                </a14:m>
+                <a:br>
+                  <a:rPr lang="en-US" b="0" i="1" dirty="0">
+                    <a:latin typeface="Cambria Math" panose="02040503050406030204" pitchFamily="18" charset="0"/>
+                  </a:rPr>
+                </a:br>
+                <a:endParaRPr lang="en-US" b="0" i="1" dirty="0">
+                  <a:latin typeface="Cambria Math" panose="02040503050406030204" pitchFamily="18" charset="0"/>
+                </a:endParaRPr>
+              </a:p>
+              <a:p>
+                <a:pPr/>
+                <a:endParaRPr lang="en-US" b="0" i="1" dirty="0">
+                  <a:latin typeface="Cambria Math" panose="02040503050406030204" pitchFamily="18" charset="0"/>
+                </a:endParaRPr>
+              </a:p>
+              <a:p>
+                <a:pPr/>
+                <a14:m>
+                  <m:oMathPara xmlns:m="http://schemas.openxmlformats.org/officeDocument/2006/math">
+                    <m:oMathParaPr>
+                      <m:jc m:val="centerGroup"/>
+                    </m:oMathParaPr>
+                    <m:oMath xmlns:m="http://schemas.openxmlformats.org/officeDocument/2006/math">
+                      <m:sSub>
+                        <m:sSubPr>
+                          <m:ctrlPr>
+                            <a:rPr lang="en-US" b="0" i="1" smtClean="0">
+                              <a:latin typeface="Cambria Math" panose="02040503050406030204" pitchFamily="18" charset="0"/>
+                            </a:rPr>
+                          </m:ctrlPr>
+                        </m:sSubPr>
+                        <m:e>
+                          <m:r>
+                            <a:rPr lang="en-US" b="0" i="1" smtClean="0">
+                              <a:latin typeface="Cambria Math" panose="02040503050406030204" pitchFamily="18" charset="0"/>
+                            </a:rPr>
+                            <m:t>𝑈</m:t>
+                          </m:r>
+                        </m:e>
+                        <m:sub>
+                          <m:r>
+                            <a:rPr lang="en-US" b="0" i="1" smtClean="0">
+                              <a:latin typeface="Cambria Math" panose="02040503050406030204" pitchFamily="18" charset="0"/>
+                            </a:rPr>
+                            <m:t>𝑠</m:t>
+                          </m:r>
+                        </m:sub>
+                      </m:sSub>
+                      <m:r>
+                        <a:rPr lang="en-US" b="0" i="1" smtClean="0">
+                          <a:latin typeface="Cambria Math" panose="02040503050406030204" pitchFamily="18" charset="0"/>
+                        </a:rPr>
+                        <m:t>=</m:t>
+                      </m:r>
+                      <m:f>
+                        <m:fPr>
+                          <m:ctrlPr>
+                            <a:rPr lang="en-US" b="0" i="1" smtClean="0">
+                              <a:latin typeface="Cambria Math" panose="02040503050406030204" pitchFamily="18" charset="0"/>
+                            </a:rPr>
+                          </m:ctrlPr>
+                        </m:fPr>
+                        <m:num>
+                          <m:r>
+                            <a:rPr lang="en-US" b="0" i="1" smtClean="0">
+                              <a:latin typeface="Cambria Math" panose="02040503050406030204" pitchFamily="18" charset="0"/>
+                            </a:rPr>
+                            <m:t>10.71</m:t>
+                          </m:r>
+                        </m:num>
+                        <m:den>
+                          <m:r>
+                            <a:rPr lang="en-US" b="0" i="1" smtClean="0">
+                              <a:latin typeface="Cambria Math" panose="02040503050406030204" pitchFamily="18" charset="0"/>
+                            </a:rPr>
+                            <m:t>25</m:t>
+                          </m:r>
+                        </m:den>
+                      </m:f>
+                    </m:oMath>
+                  </m:oMathPara>
+                </a14:m>
+                <a:endParaRPr lang="en-US" b="0" dirty="0"/>
+              </a:p>
+            </p:txBody>
+          </p:sp>
+        </mc:Choice>
+        <mc:Fallback>
+          <p:sp>
+            <p:nvSpPr>
+              <p:cNvPr id="19" name="TextBox 18">
+                <a:extLst>
+                  <a:ext uri="{FF2B5EF4-FFF2-40B4-BE49-F238E27FC236}">
+                    <a16:creationId xmlns:a16="http://schemas.microsoft.com/office/drawing/2014/main" id="{F82BEC1C-C3F8-B721-3D5F-56A9BB82E4AA}"/>
+                  </a:ext>
+                </a:extLst>
+              </p:cNvPr>
+              <p:cNvSpPr txBox="1">
+                <a:spLocks noRot="1" noChangeAspect="1" noMove="1" noResize="1" noEditPoints="1" noAdjustHandles="1" noChangeArrowheads="1" noChangeShapeType="1" noTextEdit="1"/>
+              </p:cNvSpPr>
+              <p:nvPr/>
+            </p:nvSpPr>
+            <p:spPr>
+              <a:xfrm>
+                <a:off x="7723918" y="4292600"/>
+                <a:ext cx="1046377" cy="1205458"/>
+              </a:xfrm>
+              <a:prstGeom prst="rect">
+                <a:avLst/>
+              </a:prstGeom>
+              <a:blipFill>
+                <a:blip r:embed="rId9"/>
+                <a:stretch>
+                  <a:fillRect l="-2907" r="-2326" b="-6566"/>
+                </a:stretch>
+              </a:blipFill>
+            </p:spPr>
+            <p:txBody>
+              <a:bodyPr/>
+              <a:lstStyle/>
+              <a:p>
+                <a:r>
+                  <a:rPr lang="en-US">
+                    <a:noFill/>
+                  </a:rPr>
+                  <a:t> </a:t>
+                </a:r>
+              </a:p>
+            </p:txBody>
+          </p:sp>
+        </mc:Fallback>
+      </mc:AlternateContent>
+    </p:spTree>
+    <p:extLst>
+      <p:ext uri="{BB962C8B-B14F-4D97-AF65-F5344CB8AC3E}">
+        <p14:creationId xmlns:p14="http://schemas.microsoft.com/office/powerpoint/2010/main" val="4223297031"/>
+      </p:ext>
+    </p:extLst>
+  </p:cSld>
+  <p:clrMapOvr>
+    <a:masterClrMapping/>
+  </p:clrMapOvr>
+</p:sld>
+</file>
+
+<file path=ppt/slides/slide6.xml><?xml version="1.0" encoding="utf-8"?>
+<p:sld xmlns:a="http://schemas.openxmlformats.org/drawingml/2006/main" xmlns:r="http://schemas.openxmlformats.org/officeDocument/2006/relationships" xmlns:p="http://schemas.openxmlformats.org/presentationml/2006/main">
+  <p:cSld>
+    <p:spTree>
+      <p:nvGrpSpPr>
+        <p:cNvPr id="1" name="">
+          <a:extLst>
+            <a:ext uri="{FF2B5EF4-FFF2-40B4-BE49-F238E27FC236}">
+              <a16:creationId xmlns:a16="http://schemas.microsoft.com/office/drawing/2014/main" id="{DF1B987A-3F07-C1EC-FAFB-BB3759218F3B}"/>
+            </a:ext>
+          </a:extLst>
+        </p:cNvPr>
+        <p:cNvGrpSpPr/>
+        <p:nvPr/>
+      </p:nvGrpSpPr>
+      <p:grpSpPr>
+        <a:xfrm>
+          <a:off x="0" y="0"/>
+          <a:ext cx="0" cy="0"/>
+          <a:chOff x="0" y="0"/>
+          <a:chExt cx="0" cy="0"/>
+        </a:xfrm>
+      </p:grpSpPr>
+      <p:sp>
+        <p:nvSpPr>
+          <p:cNvPr id="4" name="Нижний колонтитул 3">
+            <a:extLst>
+              <a:ext uri="{FF2B5EF4-FFF2-40B4-BE49-F238E27FC236}">
+                <a16:creationId xmlns:a16="http://schemas.microsoft.com/office/drawing/2014/main" id="{23074646-6D33-D608-0E08-BE97C5B35E8C}"/>
+              </a:ext>
+            </a:extLst>
+          </p:cNvPr>
+          <p:cNvSpPr>
+            <a:spLocks noGrp="1"/>
+          </p:cNvSpPr>
+          <p:nvPr>
+            <p:ph type="ftr" sz="quarter" idx="10"/>
+          </p:nvPr>
+        </p:nvSpPr>
+        <p:spPr/>
+        <p:txBody>
+          <a:bodyPr/>
+          <a:lstStyle/>
+          <a:p>
+            <a:pPr>
+              <a:defRPr/>
+            </a:pPr>
+            <a:r>
+              <a:rPr lang="de-DE" dirty="0"/>
+              <a:t>Oleg Kelner – University </a:t>
+            </a:r>
+            <a:r>
+              <a:rPr lang="de-DE" dirty="0" err="1"/>
+              <a:t>of</a:t>
+            </a:r>
+            <a:r>
+              <a:rPr lang="de-DE" dirty="0"/>
+              <a:t> Applied Sciences Hamm-Lippstadt</a:t>
+            </a:r>
+          </a:p>
+        </p:txBody>
+      </p:sp>
+      <p:sp>
+        <p:nvSpPr>
+          <p:cNvPr id="5" name="Дата 4">
+            <a:extLst>
+              <a:ext uri="{FF2B5EF4-FFF2-40B4-BE49-F238E27FC236}">
+                <a16:creationId xmlns:a16="http://schemas.microsoft.com/office/drawing/2014/main" id="{A0475037-2149-1F0D-0CB2-F1FAA4A5039D}"/>
+              </a:ext>
+            </a:extLst>
+          </p:cNvPr>
+          <p:cNvSpPr>
+            <a:spLocks noGrp="1"/>
+          </p:cNvSpPr>
+          <p:nvPr>
+            <p:ph type="dt" sz="half" idx="12"/>
+          </p:nvPr>
+        </p:nvSpPr>
+        <p:spPr/>
+        <p:txBody>
+          <a:bodyPr/>
+          <a:lstStyle/>
+          <a:p>
+            <a:pPr>
+              <a:defRPr/>
+            </a:pPr>
+            <a:fld id="{D1C5E747-687F-9C49-A498-1184E7908D39}" type="datetime1">
+              <a:rPr lang="de-DE" smtClean="0"/>
+              <a:t>21.06.2026</a:t>
+            </a:fld>
+            <a:endParaRPr lang="de-DE"/>
+          </a:p>
+        </p:txBody>
+      </p:sp>
+      <p:sp>
+        <p:nvSpPr>
+          <p:cNvPr id="6" name="Номер слайда 5">
+            <a:extLst>
+              <a:ext uri="{FF2B5EF4-FFF2-40B4-BE49-F238E27FC236}">
+                <a16:creationId xmlns:a16="http://schemas.microsoft.com/office/drawing/2014/main" id="{E226DD6B-1562-79BB-3284-5862AE0B74A4}"/>
+              </a:ext>
+            </a:extLst>
+          </p:cNvPr>
+          <p:cNvSpPr>
+            <a:spLocks noGrp="1"/>
+          </p:cNvSpPr>
+          <p:nvPr>
+            <p:ph type="sldNum" sz="quarter" idx="13"/>
+          </p:nvPr>
+        </p:nvSpPr>
+        <p:spPr/>
+        <p:txBody>
+          <a:bodyPr/>
+          <a:lstStyle/>
+          <a:p>
+            <a:pPr>
+              <a:defRPr/>
+            </a:pPr>
+            <a:r>
+              <a:rPr lang="de-DE"/>
+              <a:t>&lt; </a:t>
+            </a:r>
+            <a:fld id="{1A61C92B-C297-4AC9-B551-2D8A658A0122}" type="slidenum">
+              <a:rPr lang="de-DE" smtClean="0"/>
+              <a:pPr>
+                <a:defRPr/>
+              </a:pPr>
+              <a:t>6</a:t>
+            </a:fld>
+            <a:r>
+              <a:rPr lang="de-DE"/>
+              <a:t> &gt;</a:t>
+            </a:r>
+            <a:endParaRPr lang="de-DE" dirty="0"/>
+          </a:p>
+        </p:txBody>
+      </p:sp>
+      <p:sp>
+        <p:nvSpPr>
+          <p:cNvPr id="7" name="Заголовок 1">
+            <a:extLst>
+              <a:ext uri="{FF2B5EF4-FFF2-40B4-BE49-F238E27FC236}">
+                <a16:creationId xmlns:a16="http://schemas.microsoft.com/office/drawing/2014/main" id="{CE8B5DCC-1489-2D0D-8674-75B130DB924C}"/>
+              </a:ext>
+            </a:extLst>
+          </p:cNvPr>
+          <p:cNvSpPr>
+            <a:spLocks noGrp="1"/>
+          </p:cNvSpPr>
+          <p:nvPr>
+            <p:ph type="ctrTitle"/>
+          </p:nvPr>
+        </p:nvSpPr>
+        <p:spPr>
+          <a:xfrm>
+            <a:off x="395536" y="188640"/>
+            <a:ext cx="7324934" cy="492443"/>
+          </a:xfrm>
+        </p:spPr>
+        <p:txBody>
+          <a:bodyPr/>
+          <a:lstStyle/>
+          <a:p>
+            <a:r>
+              <a:rPr lang="en-US" sz="3200" dirty="0"/>
+              <a:t>Implementation</a:t>
+            </a:r>
+          </a:p>
+        </p:txBody>
+      </p:sp>
+      <p:pic>
+        <p:nvPicPr>
+          <p:cNvPr id="13" name="Рисунок 12">
+            <a:extLst>
+              <a:ext uri="{FF2B5EF4-FFF2-40B4-BE49-F238E27FC236}">
+                <a16:creationId xmlns:a16="http://schemas.microsoft.com/office/drawing/2014/main" id="{1B930C43-F4B4-A05D-0C98-35C9CB131367}"/>
+              </a:ext>
+            </a:extLst>
+          </p:cNvPr>
+          <p:cNvPicPr>
+            <a:picLocks noChangeAspect="1"/>
+          </p:cNvPicPr>
+          <p:nvPr/>
+        </p:nvPicPr>
+        <p:blipFill>
+          <a:blip r:embed="rId2">
+            <a:extLst>
+              <a:ext uri="{28A0092B-C50C-407E-A947-70E740481C1C}">
+                <a14:useLocalDpi xmlns:a14="http://schemas.microsoft.com/office/drawing/2010/main" val="0"/>
+              </a:ext>
+            </a:extLst>
+          </a:blip>
+          <a:stretch>
+            <a:fillRect/>
+          </a:stretch>
+        </p:blipFill>
+        <p:spPr>
+          <a:xfrm>
+            <a:off x="0" y="836712"/>
+            <a:ext cx="4572000" cy="2743200"/>
+          </a:xfrm>
+          <a:prstGeom prst="rect">
+            <a:avLst/>
+          </a:prstGeom>
+        </p:spPr>
+      </p:pic>
+      <p:pic>
+        <p:nvPicPr>
+          <p:cNvPr id="15" name="Рисунок 14">
+            <a:extLst>
+              <a:ext uri="{FF2B5EF4-FFF2-40B4-BE49-F238E27FC236}">
+                <a16:creationId xmlns:a16="http://schemas.microsoft.com/office/drawing/2014/main" id="{EA770027-BB63-449A-6EC6-368ABD541B2C}"/>
+              </a:ext>
+            </a:extLst>
+          </p:cNvPr>
+          <p:cNvPicPr>
+            <a:picLocks noChangeAspect="1"/>
+          </p:cNvPicPr>
+          <p:nvPr/>
+        </p:nvPicPr>
+        <p:blipFill>
+          <a:blip r:embed="rId3">
+            <a:extLst>
+              <a:ext uri="{28A0092B-C50C-407E-A947-70E740481C1C}">
+                <a14:useLocalDpi xmlns:a14="http://schemas.microsoft.com/office/drawing/2010/main" val="0"/>
+              </a:ext>
+            </a:extLst>
+          </a:blip>
+          <a:stretch>
+            <a:fillRect/>
+          </a:stretch>
+        </p:blipFill>
+        <p:spPr>
+          <a:xfrm>
+            <a:off x="4576740" y="836712"/>
+            <a:ext cx="4572000" cy="2743200"/>
+          </a:xfrm>
+          <a:prstGeom prst="rect">
+            <a:avLst/>
+          </a:prstGeom>
+        </p:spPr>
+      </p:pic>
+      <mc:AlternateContent xmlns:mc="http://schemas.openxmlformats.org/markup-compatibility/2006">
+        <mc:Choice xmlns:a14="http://schemas.microsoft.com/office/drawing/2010/main" Requires="a14">
+          <p:sp>
+            <p:nvSpPr>
+              <p:cNvPr id="18" name="TextBox 17">
+                <a:extLst>
+                  <a:ext uri="{FF2B5EF4-FFF2-40B4-BE49-F238E27FC236}">
+                    <a16:creationId xmlns:a16="http://schemas.microsoft.com/office/drawing/2014/main" id="{292C6C7D-9D1B-3CF8-03FF-9974ACF773DC}"/>
+                  </a:ext>
+                </a:extLst>
+              </p:cNvPr>
+              <p:cNvSpPr txBox="1"/>
+              <p:nvPr/>
+            </p:nvSpPr>
+            <p:spPr>
+              <a:xfrm>
+                <a:off x="3059832" y="1549792"/>
+                <a:ext cx="1148648" cy="1205458"/>
+              </a:xfrm>
+              <a:prstGeom prst="rect">
+                <a:avLst/>
+              </a:prstGeom>
+              <a:noFill/>
+            </p:spPr>
+            <p:txBody>
+              <a:bodyPr wrap="none" lIns="0" tIns="0" rIns="0" bIns="0" rtlCol="0">
+                <a:spAutoFit/>
+              </a:bodyPr>
+              <a:lstStyle/>
+              <a:p>
+                <a:pPr/>
+                <a14:m>
+                  <m:oMathPara xmlns:m="http://schemas.openxmlformats.org/officeDocument/2006/math">
+                    <m:oMathParaPr>
+                      <m:jc m:val="centerGroup"/>
+                    </m:oMathParaPr>
+                    <m:oMath xmlns:m="http://schemas.openxmlformats.org/officeDocument/2006/math">
+                      <m:sSub>
+                        <m:sSubPr>
+                          <m:ctrlPr>
+                            <a:rPr lang="en-US" b="0" i="1" smtClean="0">
+                              <a:latin typeface="Cambria Math" panose="02040503050406030204" pitchFamily="18" charset="0"/>
+                            </a:rPr>
+                          </m:ctrlPr>
+                        </m:sSubPr>
+                        <m:e>
+                          <m:r>
+                            <a:rPr lang="en-US" b="0" i="1" smtClean="0">
+                              <a:latin typeface="Cambria Math" panose="02040503050406030204" pitchFamily="18" charset="0"/>
+                            </a:rPr>
+                            <m:t>𝐶</m:t>
+                          </m:r>
+                        </m:e>
+                        <m:sub>
+                          <m:r>
+                            <a:rPr lang="en-US" b="0" i="1" smtClean="0">
+                              <a:latin typeface="Cambria Math" panose="02040503050406030204" pitchFamily="18" charset="0"/>
+                            </a:rPr>
+                            <m:t>𝑠</m:t>
+                          </m:r>
+                        </m:sub>
+                      </m:sSub>
+                      <m:r>
+                        <a:rPr lang="en-US" b="0" i="1" smtClean="0">
+                          <a:latin typeface="Cambria Math" panose="02040503050406030204" pitchFamily="18" charset="0"/>
+                        </a:rPr>
+                        <m:t>=6</m:t>
+                      </m:r>
+                      <m:r>
+                        <a:rPr lang="en-US" b="0" i="1" smtClean="0">
+                          <a:latin typeface="Cambria Math" panose="02040503050406030204" pitchFamily="18" charset="0"/>
+                        </a:rPr>
+                        <m:t>𝑚𝑠</m:t>
+                      </m:r>
+                    </m:oMath>
+                  </m:oMathPara>
+                </a14:m>
+                <a:br>
+                  <a:rPr lang="en-US" b="0" i="1" dirty="0">
+                    <a:latin typeface="Cambria Math" panose="02040503050406030204" pitchFamily="18" charset="0"/>
+                  </a:rPr>
+                </a:br>
+                <a:endParaRPr lang="en-US" b="0" i="1" dirty="0">
+                  <a:latin typeface="Cambria Math" panose="02040503050406030204" pitchFamily="18" charset="0"/>
+                </a:endParaRPr>
+              </a:p>
+              <a:p>
+                <a:endParaRPr lang="en-US" i="1" dirty="0">
+                  <a:latin typeface="Cambria Math" panose="02040503050406030204" pitchFamily="18" charset="0"/>
+                </a:endParaRPr>
+              </a:p>
+              <a:p>
+                <a:pPr/>
+                <a14:m>
+                  <m:oMathPara xmlns:m="http://schemas.openxmlformats.org/officeDocument/2006/math">
+                    <m:oMathParaPr>
+                      <m:jc m:val="centerGroup"/>
+                    </m:oMathParaPr>
+                    <m:oMath xmlns:m="http://schemas.openxmlformats.org/officeDocument/2006/math">
+                      <m:sSub>
+                        <m:sSubPr>
+                          <m:ctrlPr>
+                            <a:rPr lang="en-US" b="0" i="1" smtClean="0">
+                              <a:latin typeface="Cambria Math" panose="02040503050406030204" pitchFamily="18" charset="0"/>
+                            </a:rPr>
+                          </m:ctrlPr>
+                        </m:sSubPr>
+                        <m:e>
+                          <m:r>
+                            <a:rPr lang="en-US" b="0" i="1" smtClean="0">
+                              <a:latin typeface="Cambria Math" panose="02040503050406030204" pitchFamily="18" charset="0"/>
+                            </a:rPr>
+                            <m:t>𝑇</m:t>
+                          </m:r>
+                        </m:e>
+                        <m:sub>
+                          <m:r>
+                            <a:rPr lang="en-US" b="0" i="1" smtClean="0">
+                              <a:latin typeface="Cambria Math" panose="02040503050406030204" pitchFamily="18" charset="0"/>
+                            </a:rPr>
+                            <m:t>𝑠</m:t>
+                          </m:r>
+                        </m:sub>
+                      </m:sSub>
+                      <m:r>
+                        <a:rPr lang="en-US" b="0" i="1" smtClean="0">
+                          <a:latin typeface="Cambria Math" panose="02040503050406030204" pitchFamily="18" charset="0"/>
+                        </a:rPr>
+                        <m:t>=13</m:t>
+                      </m:r>
+                      <m:r>
+                        <a:rPr lang="en-US" b="0" i="1" smtClean="0">
+                          <a:latin typeface="Cambria Math" panose="02040503050406030204" pitchFamily="18" charset="0"/>
+                        </a:rPr>
+                        <m:t>𝑚𝑠</m:t>
+                      </m:r>
+                    </m:oMath>
+                  </m:oMathPara>
+                </a14:m>
+                <a:br>
+                  <a:rPr lang="en-US" b="0" i="1" dirty="0">
+                    <a:latin typeface="Cambria Math" panose="02040503050406030204" pitchFamily="18" charset="0"/>
+                  </a:rPr>
+                </a:br>
+                <a:endParaRPr lang="en-US" b="0" i="1" dirty="0">
+                  <a:latin typeface="Cambria Math" panose="02040503050406030204" pitchFamily="18" charset="0"/>
+                </a:endParaRPr>
+              </a:p>
+              <a:p>
+                <a:endParaRPr lang="en-US" b="0" i="1" dirty="0">
+                  <a:latin typeface="Cambria Math" panose="02040503050406030204" pitchFamily="18" charset="0"/>
+                </a:endParaRPr>
+              </a:p>
+              <a:p>
+                <a:pPr/>
+                <a14:m>
+                  <m:oMathPara xmlns:m="http://schemas.openxmlformats.org/officeDocument/2006/math">
+                    <m:oMathParaPr>
+                      <m:jc m:val="centerGroup"/>
+                    </m:oMathParaPr>
+                    <m:oMath xmlns:m="http://schemas.openxmlformats.org/officeDocument/2006/math">
+                      <m:sSub>
+                        <m:sSubPr>
+                          <m:ctrlPr>
+                            <a:rPr lang="en-US" b="0" i="1" smtClean="0">
+                              <a:latin typeface="Cambria Math" panose="02040503050406030204" pitchFamily="18" charset="0"/>
+                            </a:rPr>
+                          </m:ctrlPr>
+                        </m:sSubPr>
+                        <m:e>
+                          <m:r>
+                            <a:rPr lang="en-US" b="0" i="1" smtClean="0">
+                              <a:latin typeface="Cambria Math" panose="02040503050406030204" pitchFamily="18" charset="0"/>
+                            </a:rPr>
+                            <m:t>𝑈</m:t>
+                          </m:r>
+                        </m:e>
+                        <m:sub>
+                          <m:r>
+                            <a:rPr lang="en-US" b="0" i="1" smtClean="0">
+                              <a:latin typeface="Cambria Math" panose="02040503050406030204" pitchFamily="18" charset="0"/>
+                            </a:rPr>
+                            <m:t>𝑠</m:t>
+                          </m:r>
+                        </m:sub>
+                      </m:sSub>
+                      <m:r>
+                        <a:rPr lang="en-US" b="0" i="1" smtClean="0">
+                          <a:latin typeface="Cambria Math" panose="02040503050406030204" pitchFamily="18" charset="0"/>
+                        </a:rPr>
+                        <m:t>=</m:t>
+                      </m:r>
+                      <m:f>
+                        <m:fPr>
+                          <m:ctrlPr>
+                            <a:rPr lang="en-US" b="0" i="1" smtClean="0">
+                              <a:latin typeface="Cambria Math" panose="02040503050406030204" pitchFamily="18" charset="0"/>
+                            </a:rPr>
+                          </m:ctrlPr>
+                        </m:fPr>
+                        <m:num>
+                          <m:r>
+                            <a:rPr lang="en-US" b="0" i="1" smtClean="0">
+                              <a:latin typeface="Cambria Math" panose="02040503050406030204" pitchFamily="18" charset="0"/>
+                            </a:rPr>
+                            <m:t>11.54</m:t>
+                          </m:r>
+                        </m:num>
+                        <m:den>
+                          <m:r>
+                            <a:rPr lang="en-US" b="0" i="1" smtClean="0">
+                              <a:latin typeface="Cambria Math" panose="02040503050406030204" pitchFamily="18" charset="0"/>
+                            </a:rPr>
+                            <m:t>25</m:t>
+                          </m:r>
+                        </m:den>
+                      </m:f>
+                    </m:oMath>
+                  </m:oMathPara>
+                </a14:m>
+                <a:endParaRPr lang="en-US" b="0" dirty="0"/>
+              </a:p>
+            </p:txBody>
+          </p:sp>
+        </mc:Choice>
+        <mc:Fallback>
+          <p:sp>
+            <p:nvSpPr>
+              <p:cNvPr id="18" name="TextBox 17">
+                <a:extLst>
+                  <a:ext uri="{FF2B5EF4-FFF2-40B4-BE49-F238E27FC236}">
+                    <a16:creationId xmlns:a16="http://schemas.microsoft.com/office/drawing/2014/main" id="{292C6C7D-9D1B-3CF8-03FF-9974ACF773DC}"/>
+                  </a:ext>
+                </a:extLst>
+              </p:cNvPr>
+              <p:cNvSpPr txBox="1">
+                <a:spLocks noRot="1" noChangeAspect="1" noMove="1" noResize="1" noEditPoints="1" noAdjustHandles="1" noChangeArrowheads="1" noChangeShapeType="1" noTextEdit="1"/>
+              </p:cNvSpPr>
+              <p:nvPr/>
+            </p:nvSpPr>
+            <p:spPr>
+              <a:xfrm>
+                <a:off x="3059832" y="1549792"/>
+                <a:ext cx="1148648" cy="1205458"/>
+              </a:xfrm>
+              <a:prstGeom prst="rect">
+                <a:avLst/>
+              </a:prstGeom>
+              <a:blipFill>
+                <a:blip r:embed="rId4"/>
+                <a:stretch>
+                  <a:fillRect b="-6566"/>
+                </a:stretch>
+              </a:blipFill>
+            </p:spPr>
+            <p:txBody>
+              <a:bodyPr/>
+              <a:lstStyle/>
+              <a:p>
+                <a:r>
+                  <a:rPr lang="en-US">
+                    <a:noFill/>
+                  </a:rPr>
+                  <a:t> </a:t>
+                </a:r>
+              </a:p>
+            </p:txBody>
+          </p:sp>
+        </mc:Fallback>
+      </mc:AlternateContent>
+      <mc:AlternateContent xmlns:mc="http://schemas.openxmlformats.org/markup-compatibility/2006">
+        <mc:Choice xmlns:a14="http://schemas.microsoft.com/office/drawing/2010/main" Requires="a14">
+          <p:sp>
+            <p:nvSpPr>
+              <p:cNvPr id="19" name="TextBox 18">
+                <a:extLst>
+                  <a:ext uri="{FF2B5EF4-FFF2-40B4-BE49-F238E27FC236}">
+                    <a16:creationId xmlns:a16="http://schemas.microsoft.com/office/drawing/2014/main" id="{F9605ABD-4F30-FF28-6651-B1813099A86B}"/>
+                  </a:ext>
+                </a:extLst>
+              </p:cNvPr>
+              <p:cNvSpPr txBox="1"/>
+              <p:nvPr/>
+            </p:nvSpPr>
+            <p:spPr>
+              <a:xfrm>
+                <a:off x="7723918" y="1549792"/>
+                <a:ext cx="1046377" cy="1205458"/>
+              </a:xfrm>
+              <a:prstGeom prst="rect">
+                <a:avLst/>
+              </a:prstGeom>
+              <a:noFill/>
+            </p:spPr>
+            <p:txBody>
+              <a:bodyPr wrap="none" lIns="0" tIns="0" rIns="0" bIns="0" rtlCol="0">
+                <a:spAutoFit/>
+              </a:bodyPr>
+              <a:lstStyle/>
+              <a:p>
+                <a:pPr/>
+                <a14:m>
+                  <m:oMathPara xmlns:m="http://schemas.openxmlformats.org/officeDocument/2006/math">
+                    <m:oMathParaPr>
+                      <m:jc m:val="centerGroup"/>
+                    </m:oMathParaPr>
+                    <m:oMath xmlns:m="http://schemas.openxmlformats.org/officeDocument/2006/math">
+                      <m:sSub>
+                        <m:sSubPr>
+                          <m:ctrlPr>
+                            <a:rPr lang="en-US" b="0" i="1" smtClean="0">
+                              <a:latin typeface="Cambria Math" panose="02040503050406030204" pitchFamily="18" charset="0"/>
+                            </a:rPr>
+                          </m:ctrlPr>
+                        </m:sSubPr>
+                        <m:e>
+                          <m:r>
+                            <a:rPr lang="en-US" b="0" i="1" smtClean="0">
+                              <a:latin typeface="Cambria Math" panose="02040503050406030204" pitchFamily="18" charset="0"/>
+                            </a:rPr>
+                            <m:t>𝐶</m:t>
+                          </m:r>
+                        </m:e>
+                        <m:sub>
+                          <m:r>
+                            <a:rPr lang="en-US" b="0" i="1" smtClean="0">
+                              <a:latin typeface="Cambria Math" panose="02040503050406030204" pitchFamily="18" charset="0"/>
+                            </a:rPr>
+                            <m:t>𝑠</m:t>
+                          </m:r>
+                        </m:sub>
+                      </m:sSub>
+                      <m:r>
+                        <a:rPr lang="en-US" b="0" i="1" smtClean="0">
+                          <a:latin typeface="Cambria Math" panose="02040503050406030204" pitchFamily="18" charset="0"/>
+                        </a:rPr>
+                        <m:t>=3</m:t>
+                      </m:r>
+                      <m:r>
+                        <a:rPr lang="en-US" b="0" i="1" smtClean="0">
+                          <a:latin typeface="Cambria Math" panose="02040503050406030204" pitchFamily="18" charset="0"/>
+                        </a:rPr>
+                        <m:t>𝑚𝑠</m:t>
+                      </m:r>
+                    </m:oMath>
+                  </m:oMathPara>
+                </a14:m>
+                <a:br>
+                  <a:rPr lang="en-US" b="0" i="1" dirty="0">
+                    <a:latin typeface="Cambria Math" panose="02040503050406030204" pitchFamily="18" charset="0"/>
+                  </a:rPr>
+                </a:br>
+                <a:endParaRPr lang="en-US" b="0" i="1" dirty="0">
+                  <a:latin typeface="Cambria Math" panose="02040503050406030204" pitchFamily="18" charset="0"/>
+                </a:endParaRPr>
+              </a:p>
+              <a:p>
+                <a:endParaRPr lang="en-US" i="1" dirty="0">
+                  <a:latin typeface="Cambria Math" panose="02040503050406030204" pitchFamily="18" charset="0"/>
+                </a:endParaRPr>
+              </a:p>
+              <a:p>
+                <a:pPr/>
+                <a14:m>
+                  <m:oMathPara xmlns:m="http://schemas.openxmlformats.org/officeDocument/2006/math">
+                    <m:oMathParaPr>
+                      <m:jc m:val="centerGroup"/>
+                    </m:oMathParaPr>
+                    <m:oMath xmlns:m="http://schemas.openxmlformats.org/officeDocument/2006/math">
+                      <m:sSub>
+                        <m:sSubPr>
+                          <m:ctrlPr>
+                            <a:rPr lang="en-US" b="0" i="1" smtClean="0">
+                              <a:latin typeface="Cambria Math" panose="02040503050406030204" pitchFamily="18" charset="0"/>
+                            </a:rPr>
+                          </m:ctrlPr>
+                        </m:sSubPr>
+                        <m:e>
+                          <m:r>
+                            <a:rPr lang="en-US" b="0" i="1" smtClean="0">
+                              <a:latin typeface="Cambria Math" panose="02040503050406030204" pitchFamily="18" charset="0"/>
+                            </a:rPr>
+                            <m:t>𝑇</m:t>
+                          </m:r>
+                        </m:e>
+                        <m:sub>
+                          <m:r>
+                            <a:rPr lang="en-US" b="0" i="1" smtClean="0">
+                              <a:latin typeface="Cambria Math" panose="02040503050406030204" pitchFamily="18" charset="0"/>
+                            </a:rPr>
+                            <m:t>𝑠</m:t>
+                          </m:r>
+                        </m:sub>
+                      </m:sSub>
+                      <m:r>
+                        <a:rPr lang="en-US" b="0" i="1" smtClean="0">
+                          <a:latin typeface="Cambria Math" panose="02040503050406030204" pitchFamily="18" charset="0"/>
+                        </a:rPr>
+                        <m:t>=7</m:t>
+                      </m:r>
+                      <m:r>
+                        <a:rPr lang="en-US" b="0" i="1" smtClean="0">
+                          <a:latin typeface="Cambria Math" panose="02040503050406030204" pitchFamily="18" charset="0"/>
+                        </a:rPr>
+                        <m:t>𝑚𝑠</m:t>
+                      </m:r>
+                    </m:oMath>
+                  </m:oMathPara>
+                </a14:m>
+                <a:br>
+                  <a:rPr lang="en-US" b="0" i="1" dirty="0">
+                    <a:latin typeface="Cambria Math" panose="02040503050406030204" pitchFamily="18" charset="0"/>
+                  </a:rPr>
+                </a:br>
+                <a:endParaRPr lang="en-US" b="0" i="1" dirty="0">
+                  <a:latin typeface="Cambria Math" panose="02040503050406030204" pitchFamily="18" charset="0"/>
+                </a:endParaRPr>
+              </a:p>
+              <a:p>
+                <a:endParaRPr lang="en-US" b="0" i="1" dirty="0">
+                  <a:latin typeface="Cambria Math" panose="02040503050406030204" pitchFamily="18" charset="0"/>
+                </a:endParaRPr>
+              </a:p>
+              <a:p>
+                <a:pPr/>
+                <a14:m>
+                  <m:oMathPara xmlns:m="http://schemas.openxmlformats.org/officeDocument/2006/math">
+                    <m:oMathParaPr>
+                      <m:jc m:val="centerGroup"/>
+                    </m:oMathParaPr>
+                    <m:oMath xmlns:m="http://schemas.openxmlformats.org/officeDocument/2006/math">
+                      <m:sSub>
+                        <m:sSubPr>
+                          <m:ctrlPr>
+                            <a:rPr lang="en-US" b="0" i="1" smtClean="0">
+                              <a:latin typeface="Cambria Math" panose="02040503050406030204" pitchFamily="18" charset="0"/>
+                            </a:rPr>
+                          </m:ctrlPr>
+                        </m:sSubPr>
+                        <m:e>
+                          <m:r>
+                            <a:rPr lang="en-US" b="0" i="1" smtClean="0">
+                              <a:latin typeface="Cambria Math" panose="02040503050406030204" pitchFamily="18" charset="0"/>
+                            </a:rPr>
+                            <m:t>𝑈</m:t>
+                          </m:r>
+                        </m:e>
+                        <m:sub>
+                          <m:r>
+                            <a:rPr lang="en-US" b="0" i="1" smtClean="0">
+                              <a:latin typeface="Cambria Math" panose="02040503050406030204" pitchFamily="18" charset="0"/>
+                            </a:rPr>
+                            <m:t>𝑠</m:t>
+                          </m:r>
+                        </m:sub>
+                      </m:sSub>
+                      <m:r>
+                        <a:rPr lang="en-US" b="0" i="1" smtClean="0">
+                          <a:latin typeface="Cambria Math" panose="02040503050406030204" pitchFamily="18" charset="0"/>
+                        </a:rPr>
+                        <m:t>=</m:t>
+                      </m:r>
+                      <m:f>
+                        <m:fPr>
+                          <m:ctrlPr>
+                            <a:rPr lang="en-US" b="0" i="1" smtClean="0">
+                              <a:latin typeface="Cambria Math" panose="02040503050406030204" pitchFamily="18" charset="0"/>
+                            </a:rPr>
+                          </m:ctrlPr>
+                        </m:fPr>
+                        <m:num>
+                          <m:r>
+                            <a:rPr lang="en-US" b="0" i="1" smtClean="0">
+                              <a:latin typeface="Cambria Math" panose="02040503050406030204" pitchFamily="18" charset="0"/>
+                            </a:rPr>
+                            <m:t>10.71</m:t>
+                          </m:r>
+                        </m:num>
+                        <m:den>
+                          <m:r>
+                            <a:rPr lang="en-US" b="0" i="1" smtClean="0">
+                              <a:latin typeface="Cambria Math" panose="02040503050406030204" pitchFamily="18" charset="0"/>
+                            </a:rPr>
+                            <m:t>25</m:t>
+                          </m:r>
+                        </m:den>
+                      </m:f>
+                    </m:oMath>
+                  </m:oMathPara>
+                </a14:m>
+                <a:endParaRPr lang="en-US" b="0" dirty="0"/>
+              </a:p>
+            </p:txBody>
+          </p:sp>
+        </mc:Choice>
+        <mc:Fallback>
+          <p:sp>
+            <p:nvSpPr>
+              <p:cNvPr id="19" name="TextBox 18">
+                <a:extLst>
+                  <a:ext uri="{FF2B5EF4-FFF2-40B4-BE49-F238E27FC236}">
+                    <a16:creationId xmlns:a16="http://schemas.microsoft.com/office/drawing/2014/main" id="{F9605ABD-4F30-FF28-6651-B1813099A86B}"/>
+                  </a:ext>
+                </a:extLst>
+              </p:cNvPr>
+              <p:cNvSpPr txBox="1">
+                <a:spLocks noRot="1" noChangeAspect="1" noMove="1" noResize="1" noEditPoints="1" noAdjustHandles="1" noChangeArrowheads="1" noChangeShapeType="1" noTextEdit="1"/>
+              </p:cNvSpPr>
+              <p:nvPr/>
+            </p:nvSpPr>
+            <p:spPr>
+              <a:xfrm>
+                <a:off x="7723918" y="1549792"/>
+                <a:ext cx="1046377" cy="1205458"/>
+              </a:xfrm>
+              <a:prstGeom prst="rect">
+                <a:avLst/>
+              </a:prstGeom>
+              <a:blipFill>
+                <a:blip r:embed="rId5"/>
+                <a:stretch>
+                  <a:fillRect l="-2907" r="-2326" b="-6566"/>
+                </a:stretch>
+              </a:blipFill>
+            </p:spPr>
+            <p:txBody>
+              <a:bodyPr/>
+              <a:lstStyle/>
+              <a:p>
+                <a:r>
+                  <a:rPr lang="en-US">
+                    <a:noFill/>
+                  </a:rPr>
+                  <a:t> </a:t>
+                </a:r>
+              </a:p>
+            </p:txBody>
+          </p:sp>
+        </mc:Fallback>
+      </mc:AlternateContent>
+      <p:pic>
+        <p:nvPicPr>
+          <p:cNvPr id="3" name="Рисунок 2">
+            <a:extLst>
+              <a:ext uri="{FF2B5EF4-FFF2-40B4-BE49-F238E27FC236}">
+                <a16:creationId xmlns:a16="http://schemas.microsoft.com/office/drawing/2014/main" id="{FAE0FD6B-342F-6FBD-F8B5-D82F6CEF2DA5}"/>
+              </a:ext>
+            </a:extLst>
+          </p:cNvPr>
+          <p:cNvPicPr>
+            <a:picLocks noChangeAspect="1"/>
+          </p:cNvPicPr>
+          <p:nvPr/>
+        </p:nvPicPr>
+        <p:blipFill>
+          <a:blip r:embed="rId6">
+            <a:extLst>
+              <a:ext uri="{28A0092B-C50C-407E-A947-70E740481C1C}">
+                <a14:useLocalDpi xmlns:a14="http://schemas.microsoft.com/office/drawing/2010/main" val="0"/>
+              </a:ext>
+            </a:extLst>
+          </a:blip>
+          <a:stretch>
+            <a:fillRect/>
+          </a:stretch>
+        </p:blipFill>
+        <p:spPr>
+          <a:xfrm>
+            <a:off x="4561385" y="3579912"/>
+            <a:ext cx="4567261" cy="2740357"/>
+          </a:xfrm>
+          <a:prstGeom prst="rect">
+            <a:avLst/>
+          </a:prstGeom>
+        </p:spPr>
+      </p:pic>
+      <mc:AlternateContent xmlns:mc="http://schemas.openxmlformats.org/markup-compatibility/2006">
+        <mc:Choice xmlns:a14="http://schemas.microsoft.com/office/drawing/2010/main" Requires="a14">
+          <p:sp>
+            <p:nvSpPr>
+              <p:cNvPr id="8" name="TextBox 7">
+                <a:extLst>
+                  <a:ext uri="{FF2B5EF4-FFF2-40B4-BE49-F238E27FC236}">
+                    <a16:creationId xmlns:a16="http://schemas.microsoft.com/office/drawing/2014/main" id="{C4D48BD3-A05A-EE61-170A-C35863B68F53}"/>
+                  </a:ext>
+                </a:extLst>
+              </p:cNvPr>
+              <p:cNvSpPr txBox="1"/>
+              <p:nvPr/>
+            </p:nvSpPr>
+            <p:spPr>
+              <a:xfrm>
+                <a:off x="7560193" y="4221088"/>
+                <a:ext cx="1017523" cy="1205458"/>
+              </a:xfrm>
+              <a:prstGeom prst="rect">
+                <a:avLst/>
+              </a:prstGeom>
+              <a:noFill/>
+            </p:spPr>
+            <p:txBody>
+              <a:bodyPr wrap="none" lIns="0" tIns="0" rIns="0" bIns="0" rtlCol="0">
+                <a:spAutoFit/>
+              </a:bodyPr>
+              <a:lstStyle/>
+              <a:p>
+                <a:pPr/>
+                <a14:m>
+                  <m:oMathPara xmlns:m="http://schemas.openxmlformats.org/officeDocument/2006/math">
+                    <m:oMathParaPr>
+                      <m:jc m:val="centerGroup"/>
+                    </m:oMathParaPr>
+                    <m:oMath xmlns:m="http://schemas.openxmlformats.org/officeDocument/2006/math">
+                      <m:sSub>
+                        <m:sSubPr>
+                          <m:ctrlPr>
+                            <a:rPr lang="en-US" b="0" i="1" smtClean="0">
+                              <a:latin typeface="Cambria Math" panose="02040503050406030204" pitchFamily="18" charset="0"/>
+                            </a:rPr>
+                          </m:ctrlPr>
+                        </m:sSubPr>
+                        <m:e>
+                          <m:r>
+                            <a:rPr lang="en-US" b="0" i="1" smtClean="0">
+                              <a:latin typeface="Cambria Math" panose="02040503050406030204" pitchFamily="18" charset="0"/>
+                            </a:rPr>
+                            <m:t>𝐶</m:t>
+                          </m:r>
+                        </m:e>
+                        <m:sub>
+                          <m:r>
+                            <a:rPr lang="en-US" b="0" i="1" smtClean="0">
+                              <a:latin typeface="Cambria Math" panose="02040503050406030204" pitchFamily="18" charset="0"/>
+                            </a:rPr>
+                            <m:t>𝑠</m:t>
+                          </m:r>
+                        </m:sub>
+                      </m:sSub>
+                      <m:r>
+                        <a:rPr lang="en-US" b="0" i="1" smtClean="0">
+                          <a:latin typeface="Cambria Math" panose="02040503050406030204" pitchFamily="18" charset="0"/>
+                        </a:rPr>
+                        <m:t>=</m:t>
+                      </m:r>
+                      <m:r>
+                        <a:rPr lang="en-US" b="0" i="1" smtClean="0">
+                          <a:latin typeface="Cambria Math" panose="02040503050406030204" pitchFamily="18" charset="0"/>
+                        </a:rPr>
+                        <m:t>2</m:t>
+                      </m:r>
+                      <m:r>
+                        <a:rPr lang="en-US" b="0" i="1" smtClean="0">
+                          <a:latin typeface="Cambria Math" panose="02040503050406030204" pitchFamily="18" charset="0"/>
+                        </a:rPr>
+                        <m:t>𝑚𝑠</m:t>
+                      </m:r>
+                    </m:oMath>
+                  </m:oMathPara>
+                </a14:m>
+                <a:br>
+                  <a:rPr lang="en-US" b="0" i="1" dirty="0">
+                    <a:latin typeface="Cambria Math" panose="02040503050406030204" pitchFamily="18" charset="0"/>
+                  </a:rPr>
+                </a:br>
+                <a:endParaRPr lang="en-US" b="0" i="1" dirty="0">
+                  <a:latin typeface="Cambria Math" panose="02040503050406030204" pitchFamily="18" charset="0"/>
+                </a:endParaRPr>
+              </a:p>
+              <a:p>
+                <a:endParaRPr lang="en-US" i="1" dirty="0">
+                  <a:latin typeface="Cambria Math" panose="02040503050406030204" pitchFamily="18" charset="0"/>
+                </a:endParaRPr>
+              </a:p>
+              <a:p>
+                <a:pPr/>
+                <a14:m>
+                  <m:oMathPara xmlns:m="http://schemas.openxmlformats.org/officeDocument/2006/math">
+                    <m:oMathParaPr>
+                      <m:jc m:val="centerGroup"/>
+                    </m:oMathParaPr>
+                    <m:oMath xmlns:m="http://schemas.openxmlformats.org/officeDocument/2006/math">
+                      <m:sSub>
+                        <m:sSubPr>
+                          <m:ctrlPr>
+                            <a:rPr lang="en-US" b="0" i="1" smtClean="0">
+                              <a:latin typeface="Cambria Math" panose="02040503050406030204" pitchFamily="18" charset="0"/>
+                            </a:rPr>
+                          </m:ctrlPr>
+                        </m:sSubPr>
+                        <m:e>
+                          <m:r>
+                            <a:rPr lang="en-US" b="0" i="1" smtClean="0">
+                              <a:latin typeface="Cambria Math" panose="02040503050406030204" pitchFamily="18" charset="0"/>
+                            </a:rPr>
+                            <m:t>𝑇</m:t>
+                          </m:r>
+                        </m:e>
+                        <m:sub>
+                          <m:r>
+                            <a:rPr lang="en-US" b="0" i="1" smtClean="0">
+                              <a:latin typeface="Cambria Math" panose="02040503050406030204" pitchFamily="18" charset="0"/>
+                            </a:rPr>
+                            <m:t>𝑠</m:t>
+                          </m:r>
+                        </m:sub>
+                      </m:sSub>
+                      <m:r>
+                        <a:rPr lang="en-US" b="0" i="1" smtClean="0">
+                          <a:latin typeface="Cambria Math" panose="02040503050406030204" pitchFamily="18" charset="0"/>
+                        </a:rPr>
+                        <m:t>=</m:t>
+                      </m:r>
+                      <m:r>
+                        <a:rPr lang="en-US" b="0" i="1" smtClean="0">
+                          <a:latin typeface="Cambria Math" panose="02040503050406030204" pitchFamily="18" charset="0"/>
+                        </a:rPr>
+                        <m:t>5</m:t>
+                      </m:r>
+                      <m:r>
+                        <a:rPr lang="en-US" b="0" i="1" smtClean="0">
+                          <a:latin typeface="Cambria Math" panose="02040503050406030204" pitchFamily="18" charset="0"/>
+                        </a:rPr>
+                        <m:t>𝑚𝑠</m:t>
+                      </m:r>
+                    </m:oMath>
+                  </m:oMathPara>
+                </a14:m>
+                <a:br>
+                  <a:rPr lang="en-US" b="0" i="1" dirty="0">
+                    <a:latin typeface="Cambria Math" panose="02040503050406030204" pitchFamily="18" charset="0"/>
+                  </a:rPr>
+                </a:br>
+                <a:endParaRPr lang="en-US" b="0" i="1" dirty="0">
+                  <a:latin typeface="Cambria Math" panose="02040503050406030204" pitchFamily="18" charset="0"/>
+                </a:endParaRPr>
+              </a:p>
+              <a:p>
+                <a:endParaRPr lang="en-US" b="0" i="1" dirty="0">
+                  <a:latin typeface="Cambria Math" panose="02040503050406030204" pitchFamily="18" charset="0"/>
+                </a:endParaRPr>
+              </a:p>
+              <a:p>
+                <a:pPr/>
+                <a14:m>
+                  <m:oMathPara xmlns:m="http://schemas.openxmlformats.org/officeDocument/2006/math">
+                    <m:oMathParaPr>
+                      <m:jc m:val="centerGroup"/>
+                    </m:oMathParaPr>
+                    <m:oMath xmlns:m="http://schemas.openxmlformats.org/officeDocument/2006/math">
+                      <m:sSub>
+                        <m:sSubPr>
+                          <m:ctrlPr>
+                            <a:rPr lang="en-US" b="0" i="1" smtClean="0">
+                              <a:latin typeface="Cambria Math" panose="02040503050406030204" pitchFamily="18" charset="0"/>
+                            </a:rPr>
+                          </m:ctrlPr>
+                        </m:sSubPr>
+                        <m:e>
+                          <m:r>
+                            <a:rPr lang="en-US" b="0" i="1" smtClean="0">
+                              <a:latin typeface="Cambria Math" panose="02040503050406030204" pitchFamily="18" charset="0"/>
+                            </a:rPr>
+                            <m:t>𝑈</m:t>
+                          </m:r>
+                        </m:e>
+                        <m:sub>
+                          <m:r>
+                            <a:rPr lang="en-US" b="0" i="1" smtClean="0">
+                              <a:latin typeface="Cambria Math" panose="02040503050406030204" pitchFamily="18" charset="0"/>
+                            </a:rPr>
+                            <m:t>𝑠</m:t>
+                          </m:r>
+                        </m:sub>
+                      </m:sSub>
+                      <m:r>
+                        <a:rPr lang="en-US" b="0" i="1" smtClean="0">
+                          <a:latin typeface="Cambria Math" panose="02040503050406030204" pitchFamily="18" charset="0"/>
+                        </a:rPr>
+                        <m:t>=</m:t>
+                      </m:r>
+                      <m:f>
+                        <m:fPr>
+                          <m:ctrlPr>
+                            <a:rPr lang="en-US" b="0" i="1" smtClean="0">
+                              <a:latin typeface="Cambria Math" panose="02040503050406030204" pitchFamily="18" charset="0"/>
+                            </a:rPr>
+                          </m:ctrlPr>
+                        </m:fPr>
+                        <m:num>
+                          <m:r>
+                            <a:rPr lang="en-US" b="0" i="1" smtClean="0">
+                              <a:latin typeface="Cambria Math" panose="02040503050406030204" pitchFamily="18" charset="0"/>
+                            </a:rPr>
+                            <m:t>10</m:t>
+                          </m:r>
+                        </m:num>
+                        <m:den>
+                          <m:r>
+                            <a:rPr lang="en-US" b="0" i="1" smtClean="0">
+                              <a:latin typeface="Cambria Math" panose="02040503050406030204" pitchFamily="18" charset="0"/>
+                            </a:rPr>
+                            <m:t>25</m:t>
+                          </m:r>
+                        </m:den>
+                      </m:f>
+                    </m:oMath>
+                  </m:oMathPara>
+                </a14:m>
+                <a:endParaRPr lang="en-US" b="0" dirty="0"/>
+              </a:p>
+            </p:txBody>
+          </p:sp>
+        </mc:Choice>
+        <mc:Fallback>
+          <p:sp>
+            <p:nvSpPr>
+              <p:cNvPr id="8" name="TextBox 7">
+                <a:extLst>
+                  <a:ext uri="{FF2B5EF4-FFF2-40B4-BE49-F238E27FC236}">
+                    <a16:creationId xmlns:a16="http://schemas.microsoft.com/office/drawing/2014/main" id="{C4D48BD3-A05A-EE61-170A-C35863B68F53}"/>
+                  </a:ext>
+                </a:extLst>
+              </p:cNvPr>
+              <p:cNvSpPr txBox="1">
+                <a:spLocks noRot="1" noChangeAspect="1" noMove="1" noResize="1" noEditPoints="1" noAdjustHandles="1" noChangeArrowheads="1" noChangeShapeType="1" noTextEdit="1"/>
+              </p:cNvSpPr>
+              <p:nvPr/>
+            </p:nvSpPr>
+            <p:spPr>
+              <a:xfrm>
+                <a:off x="7560193" y="4221088"/>
+                <a:ext cx="1017523" cy="1205458"/>
+              </a:xfrm>
+              <a:prstGeom prst="rect">
+                <a:avLst/>
+              </a:prstGeom>
+              <a:blipFill>
+                <a:blip r:embed="rId7"/>
+                <a:stretch>
+                  <a:fillRect b="-6566"/>
+                </a:stretch>
+              </a:blipFill>
+            </p:spPr>
+            <p:txBody>
+              <a:bodyPr/>
+              <a:lstStyle/>
+              <a:p>
+                <a:r>
+                  <a:rPr lang="en-US">
+                    <a:noFill/>
+                  </a:rPr>
+                  <a:t> </a:t>
+                </a:r>
+              </a:p>
+            </p:txBody>
+          </p:sp>
+        </mc:Fallback>
+      </mc:AlternateContent>
+      <mc:AlternateContent xmlns:mc="http://schemas.openxmlformats.org/markup-compatibility/2006">
+        <mc:Choice xmlns:a14="http://schemas.microsoft.com/office/drawing/2010/main" Requires="a14">
+          <p:sp>
+            <p:nvSpPr>
+              <p:cNvPr id="10" name="TextBox 9">
+                <a:extLst>
+                  <a:ext uri="{FF2B5EF4-FFF2-40B4-BE49-F238E27FC236}">
+                    <a16:creationId xmlns:a16="http://schemas.microsoft.com/office/drawing/2014/main" id="{5E84111D-5937-7450-21C3-A8F8772D8C87}"/>
+                  </a:ext>
+                </a:extLst>
+              </p:cNvPr>
+              <p:cNvSpPr txBox="1"/>
+              <p:nvPr/>
+            </p:nvSpPr>
+            <p:spPr>
+              <a:xfrm>
+                <a:off x="175531" y="3926953"/>
+                <a:ext cx="4101405" cy="2098331"/>
+              </a:xfrm>
+              <a:prstGeom prst="rect">
+                <a:avLst/>
+              </a:prstGeom>
+              <a:noFill/>
+            </p:spPr>
+            <p:txBody>
+              <a:bodyPr wrap="square" rtlCol="0">
+                <a:spAutoFit/>
+              </a:bodyPr>
+              <a:lstStyle/>
+              <a:p>
+                <a:pPr marL="285750" indent="-285750">
+                  <a:lnSpc>
+                    <a:spcPct val="100000"/>
+                  </a:lnSpc>
+                  <a:buFont typeface="Arial" panose="020B0604020202020204" pitchFamily="34" charset="0"/>
+                  <a:buChar char="•"/>
+                </a:pPr>
+                <a:r>
+                  <a:rPr lang="en-US" sz="1800" dirty="0"/>
+                  <a:t>Reduction of </a:t>
+                </a:r>
+                <a14:m>
+                  <m:oMath xmlns:m="http://schemas.openxmlformats.org/officeDocument/2006/math">
+                    <m:sSub>
+                      <m:sSubPr>
+                        <m:ctrlPr>
+                          <a:rPr lang="en-US" sz="1800" b="0" i="1" smtClean="0">
+                            <a:latin typeface="Cambria Math" panose="02040503050406030204" pitchFamily="18" charset="0"/>
+                          </a:rPr>
+                        </m:ctrlPr>
+                      </m:sSubPr>
+                      <m:e>
+                        <m:r>
+                          <a:rPr lang="en-US" sz="1800" b="0" i="1" smtClean="0">
+                            <a:latin typeface="Cambria Math" panose="02040503050406030204" pitchFamily="18" charset="0"/>
+                          </a:rPr>
+                          <m:t>𝑇</m:t>
+                        </m:r>
+                      </m:e>
+                      <m:sub>
+                        <m:r>
+                          <a:rPr lang="en-US" sz="1800" b="0" i="1" smtClean="0">
+                            <a:latin typeface="Cambria Math" panose="02040503050406030204" pitchFamily="18" charset="0"/>
+                          </a:rPr>
+                          <m:t>𝑠</m:t>
+                        </m:r>
+                      </m:sub>
+                    </m:sSub>
+                  </m:oMath>
+                </a14:m>
+                <a:r>
+                  <a:rPr lang="en-US" sz="1800" dirty="0"/>
+                  <a:t> and </a:t>
+                </a:r>
+                <a14:m>
+                  <m:oMath xmlns:m="http://schemas.openxmlformats.org/officeDocument/2006/math">
+                    <m:sSub>
+                      <m:sSubPr>
+                        <m:ctrlPr>
+                          <a:rPr lang="en-US" sz="1800" i="1">
+                            <a:latin typeface="Cambria Math" panose="02040503050406030204" pitchFamily="18" charset="0"/>
+                          </a:rPr>
+                        </m:ctrlPr>
+                      </m:sSubPr>
+                      <m:e>
+                        <m:r>
+                          <a:rPr lang="en-US" sz="1800" i="1">
+                            <a:latin typeface="Cambria Math" panose="02040503050406030204" pitchFamily="18" charset="0"/>
+                          </a:rPr>
+                          <m:t>𝐶</m:t>
+                        </m:r>
+                      </m:e>
+                      <m:sub>
+                        <m:r>
+                          <a:rPr lang="en-US" sz="1800" i="1">
+                            <a:latin typeface="Cambria Math" panose="02040503050406030204" pitchFamily="18" charset="0"/>
+                          </a:rPr>
+                          <m:t>𝑠</m:t>
+                        </m:r>
+                      </m:sub>
+                    </m:sSub>
+                  </m:oMath>
+                </a14:m>
+                <a:r>
+                  <a:rPr lang="en-US" sz="1800" dirty="0"/>
+                  <a:t> allow higher response time even when utilization becomes</a:t>
+                </a:r>
+                <a14:m>
+                  <m:oMath xmlns:m="http://schemas.openxmlformats.org/officeDocument/2006/math">
+                    <m:r>
+                      <a:rPr lang="en-US" sz="1800" b="0" i="0" smtClean="0">
+                        <a:latin typeface="Cambria Math" panose="02040503050406030204" pitchFamily="18" charset="0"/>
+                      </a:rPr>
+                      <m:t> </m:t>
+                    </m:r>
+                    <m:sSub>
+                      <m:sSubPr>
+                        <m:ctrlPr>
+                          <a:rPr lang="en-US" sz="1800" i="1">
+                            <a:latin typeface="Cambria Math" panose="02040503050406030204" pitchFamily="18" charset="0"/>
+                          </a:rPr>
+                        </m:ctrlPr>
+                      </m:sSubPr>
+                      <m:e>
+                        <m:r>
+                          <a:rPr lang="en-US" sz="1800" b="0" i="1" smtClean="0">
+                            <a:latin typeface="Cambria Math" panose="02040503050406030204" pitchFamily="18" charset="0"/>
+                          </a:rPr>
+                          <m:t>𝑈</m:t>
+                        </m:r>
+                      </m:e>
+                      <m:sub>
+                        <m:r>
+                          <a:rPr lang="en-US" sz="1800" i="1">
+                            <a:latin typeface="Cambria Math" panose="02040503050406030204" pitchFamily="18" charset="0"/>
+                          </a:rPr>
+                          <m:t>𝑠</m:t>
+                        </m:r>
+                      </m:sub>
+                    </m:sSub>
+                    <m:r>
+                      <a:rPr lang="en-US" sz="1800" b="0" i="1" smtClean="0">
+                        <a:latin typeface="Cambria Math" panose="02040503050406030204" pitchFamily="18" charset="0"/>
+                      </a:rPr>
+                      <m:t>&lt;</m:t>
+                    </m:r>
+                    <m:sSub>
+                      <m:sSubPr>
+                        <m:ctrlPr>
+                          <a:rPr lang="en-US" sz="1800" b="0" i="1" smtClean="0">
+                            <a:latin typeface="Cambria Math" panose="02040503050406030204" pitchFamily="18" charset="0"/>
+                          </a:rPr>
+                        </m:ctrlPr>
+                      </m:sSubPr>
+                      <m:e>
+                        <m:sSub>
+                          <m:sSubPr>
+                            <m:ctrlPr>
+                              <a:rPr lang="en-US" sz="1800" i="1">
+                                <a:latin typeface="Cambria Math" panose="02040503050406030204" pitchFamily="18" charset="0"/>
+                              </a:rPr>
+                            </m:ctrlPr>
+                          </m:sSubPr>
+                          <m:e>
+                            <m:r>
+                              <a:rPr lang="en-US" sz="1800" i="1">
+                                <a:latin typeface="Cambria Math" panose="02040503050406030204" pitchFamily="18" charset="0"/>
+                              </a:rPr>
+                              <m:t>𝑈</m:t>
+                            </m:r>
+                          </m:e>
+                          <m:sub>
+                            <m:r>
+                              <a:rPr lang="en-US" sz="1800" i="1">
+                                <a:latin typeface="Cambria Math" panose="02040503050406030204" pitchFamily="18" charset="0"/>
+                              </a:rPr>
+                              <m:t>𝑠</m:t>
+                            </m:r>
+                          </m:sub>
+                        </m:sSub>
+                      </m:e>
+                      <m:sub>
+                        <m:r>
+                          <a:rPr lang="en-US" sz="1800" b="0" i="1" smtClean="0">
+                            <a:latin typeface="Cambria Math" panose="02040503050406030204" pitchFamily="18" charset="0"/>
+                          </a:rPr>
+                          <m:t>𝑚𝑎𝑥</m:t>
+                        </m:r>
+                      </m:sub>
+                    </m:sSub>
+                  </m:oMath>
+                </a14:m>
+                <a:endParaRPr lang="en-US" sz="1800" b="0" dirty="0"/>
+              </a:p>
+              <a:p>
+                <a:pPr marL="285750" indent="-285750">
+                  <a:lnSpc>
+                    <a:spcPct val="100000"/>
+                  </a:lnSpc>
+                  <a:buFont typeface="Arial" panose="020B0604020202020204" pitchFamily="34" charset="0"/>
+                  <a:buChar char="•"/>
+                </a:pPr>
+                <a:r>
+                  <a:rPr lang="en-US" sz="1800" dirty="0"/>
+                  <a:t>However, when </a:t>
+                </a:r>
+                <a14:m>
+                  <m:oMath xmlns:m="http://schemas.openxmlformats.org/officeDocument/2006/math">
+                    <m:sSub>
+                      <m:sSubPr>
+                        <m:ctrlPr>
+                          <a:rPr lang="en-US" sz="1800" i="1">
+                            <a:latin typeface="Cambria Math" panose="02040503050406030204" pitchFamily="18" charset="0"/>
+                          </a:rPr>
+                        </m:ctrlPr>
+                      </m:sSubPr>
+                      <m:e>
+                        <m:r>
+                          <a:rPr lang="en-US" sz="1800" b="0" i="1" smtClean="0">
+                            <a:latin typeface="Cambria Math" panose="02040503050406030204" pitchFamily="18" charset="0"/>
+                          </a:rPr>
+                          <m:t>𝐶</m:t>
+                        </m:r>
+                      </m:e>
+                      <m:sub>
+                        <m:r>
+                          <a:rPr lang="en-US" sz="1800" i="1">
+                            <a:latin typeface="Cambria Math" panose="02040503050406030204" pitchFamily="18" charset="0"/>
+                          </a:rPr>
+                          <m:t>𝑠</m:t>
+                        </m:r>
+                      </m:sub>
+                    </m:sSub>
+                  </m:oMath>
+                </a14:m>
+                <a:r>
+                  <a:rPr lang="en-US" sz="1800" dirty="0"/>
+                  <a:t> becomes smaller than task execution time, it introduces additional delay due to budget exhaustion. </a:t>
+                </a:r>
+              </a:p>
+            </p:txBody>
+          </p:sp>
+        </mc:Choice>
+        <mc:Fallback>
+          <p:sp>
+            <p:nvSpPr>
+              <p:cNvPr id="10" name="TextBox 9">
+                <a:extLst>
+                  <a:ext uri="{FF2B5EF4-FFF2-40B4-BE49-F238E27FC236}">
+                    <a16:creationId xmlns:a16="http://schemas.microsoft.com/office/drawing/2014/main" id="{5E84111D-5937-7450-21C3-A8F8772D8C87}"/>
+                  </a:ext>
+                </a:extLst>
+              </p:cNvPr>
+              <p:cNvSpPr txBox="1">
+                <a:spLocks noRot="1" noChangeAspect="1" noMove="1" noResize="1" noEditPoints="1" noAdjustHandles="1" noChangeArrowheads="1" noChangeShapeType="1" noTextEdit="1"/>
+              </p:cNvSpPr>
+              <p:nvPr/>
+            </p:nvSpPr>
+            <p:spPr>
+              <a:xfrm>
+                <a:off x="175531" y="3926953"/>
+                <a:ext cx="4101405" cy="2098331"/>
+              </a:xfrm>
+              <a:prstGeom prst="rect">
+                <a:avLst/>
+              </a:prstGeom>
+              <a:blipFill>
+                <a:blip r:embed="rId8"/>
+                <a:stretch>
+                  <a:fillRect l="-149" t="-1453" r="-2229" b="-3779"/>
+                </a:stretch>
+              </a:blipFill>
+            </p:spPr>
+            <p:txBody>
+              <a:bodyPr/>
+              <a:lstStyle/>
+              <a:p>
+                <a:r>
+                  <a:rPr lang="en-US">
+                    <a:noFill/>
+                  </a:rPr>
+                  <a:t> </a:t>
+                </a:r>
+              </a:p>
+            </p:txBody>
+          </p:sp>
+        </mc:Fallback>
+      </mc:AlternateContent>
+    </p:spTree>
+    <p:extLst>
+      <p:ext uri="{BB962C8B-B14F-4D97-AF65-F5344CB8AC3E}">
+        <p14:creationId xmlns:p14="http://schemas.microsoft.com/office/powerpoint/2010/main" val="1661255135"/>
+      </p:ext>
+    </p:extLst>
+  </p:cSld>
+  <p:clrMapOvr>
+    <a:masterClrMapping/>
+  </p:clrMapOvr>
+</p:sld>
+</file>
+
+<file path=ppt/slides/slide7.xml><?xml version="1.0" encoding="utf-8"?>
+<p:sld xmlns:a="http://schemas.openxmlformats.org/drawingml/2006/main" xmlns:r="http://schemas.openxmlformats.org/officeDocument/2006/relationships" xmlns:p="http://schemas.openxmlformats.org/presentationml/2006/main">
+  <p:cSld>
+    <p:spTree>
+      <p:nvGrpSpPr>
+        <p:cNvPr id="1" name="">
+          <a:extLst>
+            <a:ext uri="{FF2B5EF4-FFF2-40B4-BE49-F238E27FC236}">
+              <a16:creationId xmlns:a16="http://schemas.microsoft.com/office/drawing/2014/main" id="{94F51CD7-3AC1-1C8A-2971-20B64305E065}"/>
+            </a:ext>
+          </a:extLst>
+        </p:cNvPr>
+        <p:cNvGrpSpPr/>
+        <p:nvPr/>
+      </p:nvGrpSpPr>
+      <p:grpSpPr>
+        <a:xfrm>
+          <a:off x="0" y="0"/>
+          <a:ext cx="0" cy="0"/>
+          <a:chOff x="0" y="0"/>
+          <a:chExt cx="0" cy="0"/>
+        </a:xfrm>
+      </p:grpSpPr>
+      <p:sp>
+        <p:nvSpPr>
+          <p:cNvPr id="4" name="Нижний колонтитул 3">
+            <a:extLst>
+              <a:ext uri="{FF2B5EF4-FFF2-40B4-BE49-F238E27FC236}">
+                <a16:creationId xmlns:a16="http://schemas.microsoft.com/office/drawing/2014/main" id="{F1EE46A5-2617-2A2A-CBB7-8C0A44BF97FA}"/>
+              </a:ext>
+            </a:extLst>
+          </p:cNvPr>
+          <p:cNvSpPr>
+            <a:spLocks noGrp="1"/>
+          </p:cNvSpPr>
+          <p:nvPr>
+            <p:ph type="ftr" sz="quarter" idx="10"/>
+          </p:nvPr>
+        </p:nvSpPr>
+        <p:spPr/>
+        <p:txBody>
+          <a:bodyPr/>
+          <a:lstStyle/>
+          <a:p>
+            <a:pPr>
+              <a:defRPr/>
+            </a:pPr>
+            <a:r>
+              <a:rPr lang="de-DE" dirty="0"/>
+              <a:t>Oleg Kelner – University </a:t>
+            </a:r>
+            <a:r>
+              <a:rPr lang="de-DE" dirty="0" err="1"/>
+              <a:t>of</a:t>
+            </a:r>
+            <a:r>
+              <a:rPr lang="de-DE" dirty="0"/>
+              <a:t> Applied Sciences Hamm-Lippstadt</a:t>
+            </a:r>
+          </a:p>
+        </p:txBody>
+      </p:sp>
+      <p:sp>
+        <p:nvSpPr>
+          <p:cNvPr id="5" name="Дата 4">
+            <a:extLst>
+              <a:ext uri="{FF2B5EF4-FFF2-40B4-BE49-F238E27FC236}">
+                <a16:creationId xmlns:a16="http://schemas.microsoft.com/office/drawing/2014/main" id="{D351F8EA-599A-FA77-6B9A-A35A1D440855}"/>
+              </a:ext>
+            </a:extLst>
+          </p:cNvPr>
+          <p:cNvSpPr>
+            <a:spLocks noGrp="1"/>
+          </p:cNvSpPr>
+          <p:nvPr>
+            <p:ph type="dt" sz="half" idx="12"/>
+          </p:nvPr>
+        </p:nvSpPr>
+        <p:spPr/>
+        <p:txBody>
+          <a:bodyPr/>
+          <a:lstStyle/>
+          <a:p>
+            <a:pPr>
+              <a:defRPr/>
+            </a:pPr>
+            <a:fld id="{D1C5E747-687F-9C49-A498-1184E7908D39}" type="datetime1">
+              <a:rPr lang="de-DE" smtClean="0"/>
+              <a:t>21.06.2026</a:t>
+            </a:fld>
+            <a:endParaRPr lang="de-DE"/>
+          </a:p>
+        </p:txBody>
+      </p:sp>
+      <p:sp>
+        <p:nvSpPr>
+          <p:cNvPr id="6" name="Номер слайда 5">
+            <a:extLst>
+              <a:ext uri="{FF2B5EF4-FFF2-40B4-BE49-F238E27FC236}">
+                <a16:creationId xmlns:a16="http://schemas.microsoft.com/office/drawing/2014/main" id="{738601E2-1C50-D0E6-0E0E-9FA36F04777E}"/>
+              </a:ext>
+            </a:extLst>
+          </p:cNvPr>
+          <p:cNvSpPr>
+            <a:spLocks noGrp="1"/>
+          </p:cNvSpPr>
+          <p:nvPr>
+            <p:ph type="sldNum" sz="quarter" idx="13"/>
+          </p:nvPr>
+        </p:nvSpPr>
+        <p:spPr/>
+        <p:txBody>
+          <a:bodyPr/>
+          <a:lstStyle/>
+          <a:p>
+            <a:pPr>
+              <a:defRPr/>
+            </a:pPr>
+            <a:r>
+              <a:rPr lang="de-DE"/>
+              <a:t>&lt; </a:t>
+            </a:r>
+            <a:fld id="{1A61C92B-C297-4AC9-B551-2D8A658A0122}" type="slidenum">
+              <a:rPr lang="de-DE" smtClean="0"/>
+              <a:pPr>
+                <a:defRPr/>
+              </a:pPr>
+              <a:t>7</a:t>
+            </a:fld>
+            <a:r>
+              <a:rPr lang="de-DE"/>
+              <a:t> &gt;</a:t>
+            </a:r>
+            <a:endParaRPr lang="de-DE" dirty="0"/>
+          </a:p>
+        </p:txBody>
+      </p:sp>
+      <p:sp>
+        <p:nvSpPr>
+          <p:cNvPr id="7" name="Заголовок 1">
+            <a:extLst>
+              <a:ext uri="{FF2B5EF4-FFF2-40B4-BE49-F238E27FC236}">
+                <a16:creationId xmlns:a16="http://schemas.microsoft.com/office/drawing/2014/main" id="{C8813ED2-CCD4-0524-BE46-7405080921FF}"/>
+              </a:ext>
+            </a:extLst>
+          </p:cNvPr>
+          <p:cNvSpPr>
+            <a:spLocks noGrp="1"/>
+          </p:cNvSpPr>
+          <p:nvPr>
+            <p:ph type="ctrTitle"/>
+          </p:nvPr>
+        </p:nvSpPr>
+        <p:spPr>
+          <a:xfrm>
+            <a:off x="395536" y="188640"/>
+            <a:ext cx="7324934" cy="492443"/>
+          </a:xfrm>
+        </p:spPr>
+        <p:txBody>
+          <a:bodyPr/>
+          <a:lstStyle/>
+          <a:p>
+            <a:r>
+              <a:rPr lang="en-US" sz="3200" dirty="0"/>
+              <a:t>Implementation</a:t>
+            </a:r>
+          </a:p>
+        </p:txBody>
+      </p:sp>
+      <p:pic>
+        <p:nvPicPr>
+          <p:cNvPr id="9" name="Рисунок 8">
+            <a:extLst>
+              <a:ext uri="{FF2B5EF4-FFF2-40B4-BE49-F238E27FC236}">
+                <a16:creationId xmlns:a16="http://schemas.microsoft.com/office/drawing/2014/main" id="{687D3450-1E77-AAE7-E576-C74BBEB2E6FF}"/>
+              </a:ext>
+            </a:extLst>
+          </p:cNvPr>
+          <p:cNvPicPr>
+            <a:picLocks noChangeAspect="1"/>
+          </p:cNvPicPr>
+          <p:nvPr/>
+        </p:nvPicPr>
+        <p:blipFill>
+          <a:blip r:embed="rId2">
+            <a:extLst>
+              <a:ext uri="{28A0092B-C50C-407E-A947-70E740481C1C}">
+                <a14:useLocalDpi xmlns:a14="http://schemas.microsoft.com/office/drawing/2010/main" val="0"/>
+              </a:ext>
+            </a:extLst>
+          </a:blip>
+          <a:stretch>
+            <a:fillRect/>
+          </a:stretch>
+        </p:blipFill>
+        <p:spPr>
+          <a:xfrm>
+            <a:off x="0" y="836712"/>
+            <a:ext cx="4572000" cy="2743200"/>
+          </a:xfrm>
+          <a:prstGeom prst="rect">
+            <a:avLst/>
+          </a:prstGeom>
+        </p:spPr>
+      </p:pic>
+      <mc:AlternateContent xmlns:mc="http://schemas.openxmlformats.org/markup-compatibility/2006">
+        <mc:Choice xmlns:a14="http://schemas.microsoft.com/office/drawing/2010/main" Requires="a14">
+          <p:sp>
+            <p:nvSpPr>
+              <p:cNvPr id="16" name="TextBox 15">
+                <a:extLst>
+                  <a:ext uri="{FF2B5EF4-FFF2-40B4-BE49-F238E27FC236}">
+                    <a16:creationId xmlns:a16="http://schemas.microsoft.com/office/drawing/2014/main" id="{7634AEC8-57BF-6391-2BFC-513D76E6E0B9}"/>
+                  </a:ext>
+                </a:extLst>
+              </p:cNvPr>
+              <p:cNvSpPr txBox="1"/>
+              <p:nvPr/>
+            </p:nvSpPr>
+            <p:spPr>
+              <a:xfrm>
+                <a:off x="182563" y="3695147"/>
+                <a:ext cx="1073627" cy="436081"/>
+              </a:xfrm>
+              <a:prstGeom prst="rect">
+                <a:avLst/>
+              </a:prstGeom>
+              <a:noFill/>
+            </p:spPr>
+            <p:txBody>
+              <a:bodyPr wrap="none" lIns="0" tIns="0" rIns="0" bIns="0" rtlCol="0">
+                <a:spAutoFit/>
+              </a:bodyPr>
+              <a:lstStyle/>
+              <a:p>
+                <a:pPr/>
+                <a14:m>
+                  <m:oMathPara xmlns:m="http://schemas.openxmlformats.org/officeDocument/2006/math">
+                    <m:oMathParaPr>
+                      <m:jc m:val="centerGroup"/>
+                    </m:oMathParaPr>
+                    <m:oMath xmlns:m="http://schemas.openxmlformats.org/officeDocument/2006/math">
+                      <m:sSub>
+                        <m:sSubPr>
+                          <m:ctrlPr>
+                            <a:rPr lang="en-US" b="0" i="1" smtClean="0">
+                              <a:latin typeface="Cambria Math" panose="02040503050406030204" pitchFamily="18" charset="0"/>
+                            </a:rPr>
+                          </m:ctrlPr>
+                        </m:sSubPr>
+                        <m:e>
+                          <m:r>
+                            <a:rPr lang="en-US" b="0" i="1" smtClean="0">
+                              <a:latin typeface="Cambria Math" panose="02040503050406030204" pitchFamily="18" charset="0"/>
+                            </a:rPr>
+                            <m:t>𝐶</m:t>
+                          </m:r>
+                        </m:e>
+                        <m:sub>
+                          <m:r>
+                            <a:rPr lang="en-US" b="0" i="1" smtClean="0">
+                              <a:latin typeface="Cambria Math" panose="02040503050406030204" pitchFamily="18" charset="0"/>
+                            </a:rPr>
+                            <m:t>𝑠</m:t>
+                          </m:r>
+                        </m:sub>
+                      </m:sSub>
+                      <m:r>
+                        <a:rPr lang="en-US" b="0" i="1" smtClean="0">
+                          <a:latin typeface="Cambria Math" panose="02040503050406030204" pitchFamily="18" charset="0"/>
+                        </a:rPr>
+                        <m:t>=12</m:t>
+                      </m:r>
+                      <m:r>
+                        <a:rPr lang="en-US" b="0" i="1" smtClean="0">
+                          <a:latin typeface="Cambria Math" panose="02040503050406030204" pitchFamily="18" charset="0"/>
+                        </a:rPr>
+                        <m:t>𝑚𝑠</m:t>
+                      </m:r>
+                    </m:oMath>
+                  </m:oMathPara>
+                </a14:m>
+                <a:br>
+                  <a:rPr lang="en-US" b="0" i="1" dirty="0">
+                    <a:latin typeface="Cambria Math" panose="02040503050406030204" pitchFamily="18" charset="0"/>
+                  </a:rPr>
+                </a:br>
+                <a:endParaRPr lang="en-US" i="1" dirty="0">
+                  <a:latin typeface="Cambria Math" panose="02040503050406030204" pitchFamily="18" charset="0"/>
+                </a:endParaRPr>
+              </a:p>
+              <a:p>
+                <a:pPr/>
+                <a14:m>
+                  <m:oMathPara xmlns:m="http://schemas.openxmlformats.org/officeDocument/2006/math">
+                    <m:oMathParaPr>
+                      <m:jc m:val="centerGroup"/>
+                    </m:oMathParaPr>
+                    <m:oMath xmlns:m="http://schemas.openxmlformats.org/officeDocument/2006/math">
+                      <m:sSub>
+                        <m:sSubPr>
+                          <m:ctrlPr>
+                            <a:rPr lang="en-US" b="0" i="1" smtClean="0">
+                              <a:latin typeface="Cambria Math" panose="02040503050406030204" pitchFamily="18" charset="0"/>
+                            </a:rPr>
+                          </m:ctrlPr>
+                        </m:sSubPr>
+                        <m:e>
+                          <m:r>
+                            <a:rPr lang="en-US" b="0" i="1" smtClean="0">
+                              <a:latin typeface="Cambria Math" panose="02040503050406030204" pitchFamily="18" charset="0"/>
+                            </a:rPr>
+                            <m:t>𝑇</m:t>
+                          </m:r>
+                        </m:e>
+                        <m:sub>
+                          <m:r>
+                            <a:rPr lang="en-US" b="0" i="1" smtClean="0">
+                              <a:latin typeface="Cambria Math" panose="02040503050406030204" pitchFamily="18" charset="0"/>
+                            </a:rPr>
+                            <m:t>𝑠</m:t>
+                          </m:r>
+                        </m:sub>
+                      </m:sSub>
+                      <m:r>
+                        <a:rPr lang="en-US" b="0" i="1" smtClean="0">
+                          <a:latin typeface="Cambria Math" panose="02040503050406030204" pitchFamily="18" charset="0"/>
+                        </a:rPr>
+                        <m:t>=25</m:t>
+                      </m:r>
+                      <m:r>
+                        <a:rPr lang="en-US" b="0" i="1" smtClean="0">
+                          <a:latin typeface="Cambria Math" panose="02040503050406030204" pitchFamily="18" charset="0"/>
+                        </a:rPr>
+                        <m:t>𝑚𝑠</m:t>
+                      </m:r>
+                    </m:oMath>
+                  </m:oMathPara>
+                </a14:m>
+                <a:br>
+                  <a:rPr lang="en-US" b="0" i="1" dirty="0">
+                    <a:latin typeface="Cambria Math" panose="02040503050406030204" pitchFamily="18" charset="0"/>
+                  </a:rPr>
+                </a:br>
+                <a:endParaRPr lang="en-US" b="0" i="1" dirty="0">
+                  <a:latin typeface="Cambria Math" panose="02040503050406030204" pitchFamily="18" charset="0"/>
+                </a:endParaRPr>
+              </a:p>
+            </p:txBody>
+          </p:sp>
+        </mc:Choice>
+        <mc:Fallback>
+          <p:sp>
+            <p:nvSpPr>
+              <p:cNvPr id="16" name="TextBox 15">
+                <a:extLst>
+                  <a:ext uri="{FF2B5EF4-FFF2-40B4-BE49-F238E27FC236}">
+                    <a16:creationId xmlns:a16="http://schemas.microsoft.com/office/drawing/2014/main" id="{7634AEC8-57BF-6391-2BFC-513D76E6E0B9}"/>
+                  </a:ext>
+                </a:extLst>
+              </p:cNvPr>
+              <p:cNvSpPr txBox="1">
+                <a:spLocks noRot="1" noChangeAspect="1" noMove="1" noResize="1" noEditPoints="1" noAdjustHandles="1" noChangeArrowheads="1" noChangeShapeType="1" noTextEdit="1"/>
+              </p:cNvSpPr>
+              <p:nvPr/>
+            </p:nvSpPr>
+            <p:spPr>
+              <a:xfrm>
+                <a:off x="182563" y="3695147"/>
+                <a:ext cx="1073627" cy="436081"/>
+              </a:xfrm>
+              <a:prstGeom prst="rect">
+                <a:avLst/>
+              </a:prstGeom>
+              <a:blipFill>
+                <a:blip r:embed="rId3"/>
+                <a:stretch>
+                  <a:fillRect l="-1136" b="-6944"/>
+                </a:stretch>
+              </a:blipFill>
+            </p:spPr>
+            <p:txBody>
+              <a:bodyPr/>
+              <a:lstStyle/>
+              <a:p>
+                <a:r>
+                  <a:rPr lang="en-US">
+                    <a:noFill/>
+                  </a:rPr>
+                  <a:t> </a:t>
+                </a:r>
+              </a:p>
+            </p:txBody>
+          </p:sp>
+        </mc:Fallback>
+      </mc:AlternateContent>
+      <mc:AlternateContent xmlns:mc="http://schemas.openxmlformats.org/markup-compatibility/2006">
+        <mc:Choice xmlns:a14="http://schemas.microsoft.com/office/drawing/2010/main" Requires="a14">
+          <p:sp>
+            <p:nvSpPr>
+              <p:cNvPr id="2" name="TextBox 1">
+                <a:extLst>
+                  <a:ext uri="{FF2B5EF4-FFF2-40B4-BE49-F238E27FC236}">
+                    <a16:creationId xmlns:a16="http://schemas.microsoft.com/office/drawing/2014/main" id="{9C947468-2A8E-CA14-2B96-5BB53F34613D}"/>
+                  </a:ext>
+                </a:extLst>
+              </p:cNvPr>
+              <p:cNvSpPr txBox="1"/>
+              <p:nvPr/>
+            </p:nvSpPr>
+            <p:spPr>
+              <a:xfrm>
+                <a:off x="3053255" y="2080072"/>
+                <a:ext cx="991232" cy="256480"/>
+              </a:xfrm>
+              <a:prstGeom prst="rect">
+                <a:avLst/>
+              </a:prstGeom>
+              <a:noFill/>
+            </p:spPr>
+            <p:txBody>
+              <a:bodyPr wrap="none" lIns="0" tIns="0" rIns="0" bIns="0" rtlCol="0">
+                <a:spAutoFit/>
+              </a:bodyPr>
+              <a:lstStyle/>
+              <a:p>
+                <a14:m>
+                  <m:oMathPara xmlns:m="http://schemas.openxmlformats.org/officeDocument/2006/math">
+                    <m:oMathParaPr>
+                      <m:jc m:val="centerGroup"/>
+                    </m:oMathParaPr>
+                    <m:oMath xmlns:m="http://schemas.openxmlformats.org/officeDocument/2006/math">
+                      <m:sSub>
+                        <m:sSubPr>
+                          <m:ctrlPr>
+                            <a:rPr lang="en-US" b="0" i="1" smtClean="0">
+                              <a:latin typeface="Cambria Math" panose="02040503050406030204" pitchFamily="18" charset="0"/>
+                            </a:rPr>
+                          </m:ctrlPr>
+                        </m:sSubPr>
+                        <m:e>
+                          <m:r>
+                            <a:rPr lang="en-US" b="0" i="1" smtClean="0">
+                              <a:latin typeface="Cambria Math" panose="02040503050406030204" pitchFamily="18" charset="0"/>
+                            </a:rPr>
+                            <m:t>𝐹</m:t>
+                          </m:r>
+                        </m:e>
+                        <m:sub>
+                          <m:r>
+                            <a:rPr lang="en-US" b="0" i="1" smtClean="0">
+                              <a:latin typeface="Cambria Math" panose="02040503050406030204" pitchFamily="18" charset="0"/>
+                            </a:rPr>
+                            <m:t>𝑠</m:t>
+                          </m:r>
+                        </m:sub>
+                      </m:sSub>
+                      <m:r>
+                        <a:rPr lang="en-US" b="0" i="1" smtClean="0">
+                          <a:latin typeface="Cambria Math" panose="02040503050406030204" pitchFamily="18" charset="0"/>
+                        </a:rPr>
+                        <m:t>=0.025</m:t>
+                      </m:r>
+                    </m:oMath>
+                  </m:oMathPara>
+                </a14:m>
+                <a:endParaRPr lang="en-US" b="0" dirty="0"/>
+              </a:p>
+            </p:txBody>
+          </p:sp>
+        </mc:Choice>
+        <mc:Fallback>
+          <p:sp>
+            <p:nvSpPr>
+              <p:cNvPr id="2" name="TextBox 1">
+                <a:extLst>
+                  <a:ext uri="{FF2B5EF4-FFF2-40B4-BE49-F238E27FC236}">
+                    <a16:creationId xmlns:a16="http://schemas.microsoft.com/office/drawing/2014/main" id="{9C947468-2A8E-CA14-2B96-5BB53F34613D}"/>
+                  </a:ext>
+                </a:extLst>
+              </p:cNvPr>
+              <p:cNvSpPr txBox="1">
+                <a:spLocks noRot="1" noChangeAspect="1" noMove="1" noResize="1" noEditPoints="1" noAdjustHandles="1" noChangeArrowheads="1" noChangeShapeType="1" noTextEdit="1"/>
+              </p:cNvSpPr>
+              <p:nvPr/>
+            </p:nvSpPr>
+            <p:spPr>
+              <a:xfrm>
+                <a:off x="3053255" y="2080072"/>
+                <a:ext cx="991232" cy="256480"/>
+              </a:xfrm>
+              <a:prstGeom prst="rect">
+                <a:avLst/>
+              </a:prstGeom>
+              <a:blipFill>
+                <a:blip r:embed="rId4"/>
+                <a:stretch>
+                  <a:fillRect l="-4321" t="-2381" r="-3704"/>
+                </a:stretch>
+              </a:blipFill>
+            </p:spPr>
+            <p:txBody>
+              <a:bodyPr/>
+              <a:lstStyle/>
+              <a:p>
+                <a:r>
+                  <a:rPr lang="en-US">
+                    <a:noFill/>
+                  </a:rPr>
+                  <a:t> </a:t>
+                </a:r>
+              </a:p>
+            </p:txBody>
+          </p:sp>
+        </mc:Fallback>
+      </mc:AlternateContent>
+      <p:pic>
+        <p:nvPicPr>
+          <p:cNvPr id="8" name="Рисунок 7">
+            <a:extLst>
+              <a:ext uri="{FF2B5EF4-FFF2-40B4-BE49-F238E27FC236}">
+                <a16:creationId xmlns:a16="http://schemas.microsoft.com/office/drawing/2014/main" id="{D8B28695-829E-5853-C278-5E5E32CA1E2E}"/>
+              </a:ext>
+            </a:extLst>
+          </p:cNvPr>
+          <p:cNvPicPr>
+            <a:picLocks noChangeAspect="1"/>
+          </p:cNvPicPr>
+          <p:nvPr/>
+        </p:nvPicPr>
+        <p:blipFill>
+          <a:blip r:embed="rId5">
+            <a:extLst>
+              <a:ext uri="{28A0092B-C50C-407E-A947-70E740481C1C}">
+                <a14:useLocalDpi xmlns:a14="http://schemas.microsoft.com/office/drawing/2010/main" val="0"/>
+              </a:ext>
+            </a:extLst>
+          </a:blip>
+          <a:stretch>
+            <a:fillRect/>
+          </a:stretch>
+        </p:blipFill>
+        <p:spPr>
+          <a:xfrm>
+            <a:off x="4572020" y="836712"/>
+            <a:ext cx="4572000" cy="2743200"/>
+          </a:xfrm>
+          <a:prstGeom prst="rect">
+            <a:avLst/>
+          </a:prstGeom>
+        </p:spPr>
+      </p:pic>
+      <p:pic>
+        <p:nvPicPr>
+          <p:cNvPr id="12" name="Рисунок 11">
+            <a:extLst>
+              <a:ext uri="{FF2B5EF4-FFF2-40B4-BE49-F238E27FC236}">
+                <a16:creationId xmlns:a16="http://schemas.microsoft.com/office/drawing/2014/main" id="{B6C3323E-90FF-8B3D-E5AF-11C7F6D92DD0}"/>
+              </a:ext>
+            </a:extLst>
+          </p:cNvPr>
+          <p:cNvPicPr>
+            <a:picLocks noChangeAspect="1"/>
+          </p:cNvPicPr>
+          <p:nvPr/>
+        </p:nvPicPr>
+        <p:blipFill>
+          <a:blip r:embed="rId6">
+            <a:extLst>
+              <a:ext uri="{28A0092B-C50C-407E-A947-70E740481C1C}">
+                <a14:useLocalDpi xmlns:a14="http://schemas.microsoft.com/office/drawing/2010/main" val="0"/>
+              </a:ext>
+            </a:extLst>
+          </a:blip>
+          <a:stretch>
+            <a:fillRect/>
+          </a:stretch>
+        </p:blipFill>
+        <p:spPr>
+          <a:xfrm>
+            <a:off x="4573920" y="3579912"/>
+            <a:ext cx="4572000" cy="2743200"/>
+          </a:xfrm>
+          <a:prstGeom prst="rect">
+            <a:avLst/>
+          </a:prstGeom>
+        </p:spPr>
+      </p:pic>
+      <mc:AlternateContent xmlns:mc="http://schemas.openxmlformats.org/markup-compatibility/2006">
+        <mc:Choice xmlns:a14="http://schemas.microsoft.com/office/drawing/2010/main" Requires="a14">
+          <p:sp>
+            <p:nvSpPr>
+              <p:cNvPr id="14" name="TextBox 13">
+                <a:extLst>
+                  <a:ext uri="{FF2B5EF4-FFF2-40B4-BE49-F238E27FC236}">
+                    <a16:creationId xmlns:a16="http://schemas.microsoft.com/office/drawing/2014/main" id="{8C92F6C5-3944-2A93-9BB1-E364E7E99178}"/>
+                  </a:ext>
+                </a:extLst>
+              </p:cNvPr>
+              <p:cNvSpPr txBox="1"/>
+              <p:nvPr/>
+            </p:nvSpPr>
+            <p:spPr>
+              <a:xfrm>
+                <a:off x="7919250" y="2080072"/>
+                <a:ext cx="877420" cy="256480"/>
+              </a:xfrm>
+              <a:prstGeom prst="rect">
+                <a:avLst/>
+              </a:prstGeom>
+              <a:noFill/>
+            </p:spPr>
+            <p:txBody>
+              <a:bodyPr wrap="none" lIns="0" tIns="0" rIns="0" bIns="0" rtlCol="0">
+                <a:spAutoFit/>
+              </a:bodyPr>
+              <a:lstStyle/>
+              <a:p>
+                <a14:m>
+                  <m:oMathPara xmlns:m="http://schemas.openxmlformats.org/officeDocument/2006/math">
+                    <m:oMathParaPr>
+                      <m:jc m:val="centerGroup"/>
+                    </m:oMathParaPr>
+                    <m:oMath xmlns:m="http://schemas.openxmlformats.org/officeDocument/2006/math">
+                      <m:sSub>
+                        <m:sSubPr>
+                          <m:ctrlPr>
+                            <a:rPr lang="en-US" b="0" i="1" smtClean="0">
+                              <a:latin typeface="Cambria Math" panose="02040503050406030204" pitchFamily="18" charset="0"/>
+                            </a:rPr>
+                          </m:ctrlPr>
+                        </m:sSubPr>
+                        <m:e>
+                          <m:r>
+                            <a:rPr lang="en-US" b="0" i="1" smtClean="0">
+                              <a:latin typeface="Cambria Math" panose="02040503050406030204" pitchFamily="18" charset="0"/>
+                            </a:rPr>
+                            <m:t>𝐹</m:t>
+                          </m:r>
+                        </m:e>
+                        <m:sub>
+                          <m:r>
+                            <a:rPr lang="en-US" b="0" i="1" smtClean="0">
+                              <a:latin typeface="Cambria Math" panose="02040503050406030204" pitchFamily="18" charset="0"/>
+                            </a:rPr>
+                            <m:t>𝑠</m:t>
+                          </m:r>
+                        </m:sub>
+                      </m:sSub>
+                      <m:r>
+                        <a:rPr lang="en-US" b="0" i="1" smtClean="0">
+                          <a:latin typeface="Cambria Math" panose="02040503050406030204" pitchFamily="18" charset="0"/>
+                        </a:rPr>
+                        <m:t>=0.05</m:t>
+                      </m:r>
+                    </m:oMath>
+                  </m:oMathPara>
+                </a14:m>
+                <a:endParaRPr lang="en-US" b="0" dirty="0"/>
+              </a:p>
+            </p:txBody>
+          </p:sp>
+        </mc:Choice>
+        <mc:Fallback>
+          <p:sp>
+            <p:nvSpPr>
+              <p:cNvPr id="14" name="TextBox 13">
+                <a:extLst>
+                  <a:ext uri="{FF2B5EF4-FFF2-40B4-BE49-F238E27FC236}">
+                    <a16:creationId xmlns:a16="http://schemas.microsoft.com/office/drawing/2014/main" id="{8C92F6C5-3944-2A93-9BB1-E364E7E99178}"/>
+                  </a:ext>
+                </a:extLst>
+              </p:cNvPr>
+              <p:cNvSpPr txBox="1">
+                <a:spLocks noRot="1" noChangeAspect="1" noMove="1" noResize="1" noEditPoints="1" noAdjustHandles="1" noChangeArrowheads="1" noChangeShapeType="1" noTextEdit="1"/>
+              </p:cNvSpPr>
+              <p:nvPr/>
+            </p:nvSpPr>
+            <p:spPr>
+              <a:xfrm>
+                <a:off x="7919250" y="2080072"/>
+                <a:ext cx="877420" cy="256480"/>
+              </a:xfrm>
+              <a:prstGeom prst="rect">
+                <a:avLst/>
+              </a:prstGeom>
+              <a:blipFill>
+                <a:blip r:embed="rId7"/>
+                <a:stretch>
+                  <a:fillRect l="-4167" t="-2381" r="-4167"/>
+                </a:stretch>
+              </a:blipFill>
+            </p:spPr>
+            <p:txBody>
+              <a:bodyPr/>
+              <a:lstStyle/>
+              <a:p>
+                <a:r>
+                  <a:rPr lang="en-US">
+                    <a:noFill/>
+                  </a:rPr>
+                  <a:t> </a:t>
+                </a:r>
+              </a:p>
+            </p:txBody>
+          </p:sp>
+        </mc:Fallback>
+      </mc:AlternateContent>
+      <mc:AlternateContent xmlns:mc="http://schemas.openxmlformats.org/markup-compatibility/2006">
+        <mc:Choice xmlns:a14="http://schemas.microsoft.com/office/drawing/2010/main" Requires="a14">
+          <p:sp>
+            <p:nvSpPr>
+              <p:cNvPr id="20" name="TextBox 19">
+                <a:extLst>
+                  <a:ext uri="{FF2B5EF4-FFF2-40B4-BE49-F238E27FC236}">
+                    <a16:creationId xmlns:a16="http://schemas.microsoft.com/office/drawing/2014/main" id="{C1BAFEC0-8B12-5753-E70A-6F0E9675E252}"/>
+                  </a:ext>
+                </a:extLst>
+              </p:cNvPr>
+              <p:cNvSpPr txBox="1"/>
+              <p:nvPr/>
+            </p:nvSpPr>
+            <p:spPr>
+              <a:xfrm>
+                <a:off x="7919250" y="4861670"/>
+                <a:ext cx="763607" cy="256480"/>
+              </a:xfrm>
+              <a:prstGeom prst="rect">
+                <a:avLst/>
+              </a:prstGeom>
+              <a:noFill/>
+            </p:spPr>
+            <p:txBody>
+              <a:bodyPr wrap="none" lIns="0" tIns="0" rIns="0" bIns="0" rtlCol="0">
+                <a:spAutoFit/>
+              </a:bodyPr>
+              <a:lstStyle/>
+              <a:p>
+                <a14:m>
+                  <m:oMathPara xmlns:m="http://schemas.openxmlformats.org/officeDocument/2006/math">
+                    <m:oMathParaPr>
+                      <m:jc m:val="centerGroup"/>
+                    </m:oMathParaPr>
+                    <m:oMath xmlns:m="http://schemas.openxmlformats.org/officeDocument/2006/math">
+                      <m:sSub>
+                        <m:sSubPr>
+                          <m:ctrlPr>
+                            <a:rPr lang="en-US" b="0" i="1" smtClean="0">
+                              <a:latin typeface="Cambria Math" panose="02040503050406030204" pitchFamily="18" charset="0"/>
+                            </a:rPr>
+                          </m:ctrlPr>
+                        </m:sSubPr>
+                        <m:e>
+                          <m:r>
+                            <a:rPr lang="en-US" b="0" i="1" smtClean="0">
+                              <a:latin typeface="Cambria Math" panose="02040503050406030204" pitchFamily="18" charset="0"/>
+                            </a:rPr>
+                            <m:t>𝐹</m:t>
+                          </m:r>
+                        </m:e>
+                        <m:sub>
+                          <m:r>
+                            <a:rPr lang="en-US" b="0" i="1" smtClean="0">
+                              <a:latin typeface="Cambria Math" panose="02040503050406030204" pitchFamily="18" charset="0"/>
+                            </a:rPr>
+                            <m:t>𝑠</m:t>
+                          </m:r>
+                        </m:sub>
+                      </m:sSub>
+                      <m:r>
+                        <a:rPr lang="en-US" b="0" i="1" smtClean="0">
+                          <a:latin typeface="Cambria Math" panose="02040503050406030204" pitchFamily="18" charset="0"/>
+                        </a:rPr>
+                        <m:t>=0.1</m:t>
+                      </m:r>
+                    </m:oMath>
+                  </m:oMathPara>
+                </a14:m>
+                <a:endParaRPr lang="en-US" b="0" dirty="0"/>
+              </a:p>
+            </p:txBody>
+          </p:sp>
+        </mc:Choice>
+        <mc:Fallback>
+          <p:sp>
+            <p:nvSpPr>
+              <p:cNvPr id="20" name="TextBox 19">
+                <a:extLst>
+                  <a:ext uri="{FF2B5EF4-FFF2-40B4-BE49-F238E27FC236}">
+                    <a16:creationId xmlns:a16="http://schemas.microsoft.com/office/drawing/2014/main" id="{C1BAFEC0-8B12-5753-E70A-6F0E9675E252}"/>
+                  </a:ext>
+                </a:extLst>
+              </p:cNvPr>
+              <p:cNvSpPr txBox="1">
+                <a:spLocks noRot="1" noChangeAspect="1" noMove="1" noResize="1" noEditPoints="1" noAdjustHandles="1" noChangeArrowheads="1" noChangeShapeType="1" noTextEdit="1"/>
+              </p:cNvSpPr>
+              <p:nvPr/>
+            </p:nvSpPr>
+            <p:spPr>
+              <a:xfrm>
+                <a:off x="7919250" y="4861670"/>
+                <a:ext cx="763607" cy="256480"/>
+              </a:xfrm>
+              <a:prstGeom prst="rect">
+                <a:avLst/>
+              </a:prstGeom>
+              <a:blipFill>
+                <a:blip r:embed="rId8"/>
+                <a:stretch>
+                  <a:fillRect l="-4800" r="-5600"/>
+                </a:stretch>
+              </a:blipFill>
+            </p:spPr>
+            <p:txBody>
+              <a:bodyPr/>
+              <a:lstStyle/>
+              <a:p>
+                <a:r>
+                  <a:rPr lang="en-US">
+                    <a:noFill/>
+                  </a:rPr>
+                  <a:t> </a:t>
+                </a:r>
+              </a:p>
+            </p:txBody>
+          </p:sp>
+        </mc:Fallback>
+      </mc:AlternateContent>
+      <p:sp>
+        <p:nvSpPr>
+          <p:cNvPr id="21" name="TextBox 20">
+            <a:extLst>
+              <a:ext uri="{FF2B5EF4-FFF2-40B4-BE49-F238E27FC236}">
+                <a16:creationId xmlns:a16="http://schemas.microsoft.com/office/drawing/2014/main" id="{9387B188-F742-A09C-D91E-344A099E4B9A}"/>
+              </a:ext>
+            </a:extLst>
+          </p:cNvPr>
+          <p:cNvSpPr txBox="1"/>
+          <p:nvPr/>
+        </p:nvSpPr>
+        <p:spPr>
+          <a:xfrm>
+            <a:off x="182563" y="4581128"/>
+            <a:ext cx="4101405" cy="1200329"/>
+          </a:xfrm>
+          <a:prstGeom prst="rect">
+            <a:avLst/>
+          </a:prstGeom>
+          <a:noFill/>
+        </p:spPr>
+        <p:txBody>
+          <a:bodyPr wrap="square" rtlCol="0">
+            <a:spAutoFit/>
+          </a:bodyPr>
+          <a:lstStyle/>
+          <a:p>
+            <a:pPr marL="285750" indent="-285750">
+              <a:lnSpc>
+                <a:spcPct val="100000"/>
+              </a:lnSpc>
+              <a:buFont typeface="Arial" panose="020B0604020202020204" pitchFamily="34" charset="0"/>
+              <a:buChar char="•"/>
+            </a:pPr>
+            <a:r>
+              <a:rPr lang="en-US" sz="1800" dirty="0"/>
+              <a:t>For the increased frequency of aperiodic task generation, it is clear, that at some point the performance of DSS decreases.</a:t>
+            </a:r>
           </a:p>
         </p:txBody>
       </p:sp>
     </p:spTree>
     <p:extLst>
       <p:ext uri="{BB962C8B-B14F-4D97-AF65-F5344CB8AC3E}">
-        <p14:creationId xmlns:p14="http://schemas.microsoft.com/office/powerpoint/2010/main" val="2047355013"/>
+        <p14:creationId xmlns:p14="http://schemas.microsoft.com/office/powerpoint/2010/main" val="22680542"/>
+      </p:ext>
+    </p:extLst>
+  </p:cSld>
+  <p:clrMapOvr>
+    <a:masterClrMapping/>
+  </p:clrMapOvr>
+</p:sld>
+</file>
+
+<file path=ppt/slides/slide8.xml><?xml version="1.0" encoding="utf-8"?>
+<p:sld xmlns:a="http://schemas.openxmlformats.org/drawingml/2006/main" xmlns:r="http://schemas.openxmlformats.org/officeDocument/2006/relationships" xmlns:p="http://schemas.openxmlformats.org/presentationml/2006/main">
+  <p:cSld>
+    <p:spTree>
+      <p:nvGrpSpPr>
+        <p:cNvPr id="1" name="">
+          <a:extLst>
+            <a:ext uri="{FF2B5EF4-FFF2-40B4-BE49-F238E27FC236}">
+              <a16:creationId xmlns:a16="http://schemas.microsoft.com/office/drawing/2014/main" id="{4B2A3DCF-508E-B2FB-A957-8EC6446C46BF}"/>
+            </a:ext>
+          </a:extLst>
+        </p:cNvPr>
+        <p:cNvGrpSpPr/>
+        <p:nvPr/>
+      </p:nvGrpSpPr>
+      <p:grpSpPr>
+        <a:xfrm>
+          <a:off x="0" y="0"/>
+          <a:ext cx="0" cy="0"/>
+          <a:chOff x="0" y="0"/>
+          <a:chExt cx="0" cy="0"/>
+        </a:xfrm>
+      </p:grpSpPr>
+      <p:sp>
+        <p:nvSpPr>
+          <p:cNvPr id="4" name="Нижний колонтитул 3">
+            <a:extLst>
+              <a:ext uri="{FF2B5EF4-FFF2-40B4-BE49-F238E27FC236}">
+                <a16:creationId xmlns:a16="http://schemas.microsoft.com/office/drawing/2014/main" id="{6BBB6C7D-732C-5C79-FDC3-C76542D23265}"/>
+              </a:ext>
+            </a:extLst>
+          </p:cNvPr>
+          <p:cNvSpPr>
+            <a:spLocks noGrp="1"/>
+          </p:cNvSpPr>
+          <p:nvPr>
+            <p:ph type="ftr" sz="quarter" idx="10"/>
+          </p:nvPr>
+        </p:nvSpPr>
+        <p:spPr/>
+        <p:txBody>
+          <a:bodyPr/>
+          <a:lstStyle/>
+          <a:p>
+            <a:pPr>
+              <a:defRPr/>
+            </a:pPr>
+            <a:r>
+              <a:rPr lang="de-DE" dirty="0"/>
+              <a:t>Oleg Kelner – University </a:t>
+            </a:r>
+            <a:r>
+              <a:rPr lang="de-DE" dirty="0" err="1"/>
+              <a:t>of</a:t>
+            </a:r>
+            <a:r>
+              <a:rPr lang="de-DE" dirty="0"/>
+              <a:t> Applied Sciences Hamm-Lippstadt</a:t>
+            </a:r>
+          </a:p>
+        </p:txBody>
+      </p:sp>
+      <p:sp>
+        <p:nvSpPr>
+          <p:cNvPr id="5" name="Дата 4">
+            <a:extLst>
+              <a:ext uri="{FF2B5EF4-FFF2-40B4-BE49-F238E27FC236}">
+                <a16:creationId xmlns:a16="http://schemas.microsoft.com/office/drawing/2014/main" id="{DAFC4770-E0FD-719C-7A8E-604F6D27294C}"/>
+              </a:ext>
+            </a:extLst>
+          </p:cNvPr>
+          <p:cNvSpPr>
+            <a:spLocks noGrp="1"/>
+          </p:cNvSpPr>
+          <p:nvPr>
+            <p:ph type="dt" sz="half" idx="12"/>
+          </p:nvPr>
+        </p:nvSpPr>
+        <p:spPr/>
+        <p:txBody>
+          <a:bodyPr/>
+          <a:lstStyle/>
+          <a:p>
+            <a:pPr>
+              <a:defRPr/>
+            </a:pPr>
+            <a:fld id="{D1C5E747-687F-9C49-A498-1184E7908D39}" type="datetime1">
+              <a:rPr lang="de-DE" smtClean="0"/>
+              <a:t>21.06.2026</a:t>
+            </a:fld>
+            <a:endParaRPr lang="de-DE"/>
+          </a:p>
+        </p:txBody>
+      </p:sp>
+      <p:sp>
+        <p:nvSpPr>
+          <p:cNvPr id="6" name="Номер слайда 5">
+            <a:extLst>
+              <a:ext uri="{FF2B5EF4-FFF2-40B4-BE49-F238E27FC236}">
+                <a16:creationId xmlns:a16="http://schemas.microsoft.com/office/drawing/2014/main" id="{0DF7045B-7EF2-499A-F96C-5FC0857AF102}"/>
+              </a:ext>
+            </a:extLst>
+          </p:cNvPr>
+          <p:cNvSpPr>
+            <a:spLocks noGrp="1"/>
+          </p:cNvSpPr>
+          <p:nvPr>
+            <p:ph type="sldNum" sz="quarter" idx="13"/>
+          </p:nvPr>
+        </p:nvSpPr>
+        <p:spPr/>
+        <p:txBody>
+          <a:bodyPr/>
+          <a:lstStyle/>
+          <a:p>
+            <a:pPr>
+              <a:defRPr/>
+            </a:pPr>
+            <a:r>
+              <a:rPr lang="de-DE"/>
+              <a:t>&lt; </a:t>
+            </a:r>
+            <a:fld id="{1A61C92B-C297-4AC9-B551-2D8A658A0122}" type="slidenum">
+              <a:rPr lang="de-DE" smtClean="0"/>
+              <a:pPr>
+                <a:defRPr/>
+              </a:pPr>
+              <a:t>8</a:t>
+            </a:fld>
+            <a:r>
+              <a:rPr lang="de-DE"/>
+              <a:t> &gt;</a:t>
+            </a:r>
+            <a:endParaRPr lang="de-DE" dirty="0"/>
+          </a:p>
+        </p:txBody>
+      </p:sp>
+      <p:sp>
+        <p:nvSpPr>
+          <p:cNvPr id="7" name="Заголовок 1">
+            <a:extLst>
+              <a:ext uri="{FF2B5EF4-FFF2-40B4-BE49-F238E27FC236}">
+                <a16:creationId xmlns:a16="http://schemas.microsoft.com/office/drawing/2014/main" id="{DDF0EE4D-5E5D-CCB9-8E8A-809BB9A0B745}"/>
+              </a:ext>
+            </a:extLst>
+          </p:cNvPr>
+          <p:cNvSpPr>
+            <a:spLocks noGrp="1"/>
+          </p:cNvSpPr>
+          <p:nvPr>
+            <p:ph type="ctrTitle"/>
+          </p:nvPr>
+        </p:nvSpPr>
+        <p:spPr>
+          <a:xfrm>
+            <a:off x="395536" y="188640"/>
+            <a:ext cx="7324934" cy="492443"/>
+          </a:xfrm>
+        </p:spPr>
+        <p:txBody>
+          <a:bodyPr/>
+          <a:lstStyle/>
+          <a:p>
+            <a:r>
+              <a:rPr lang="en-US" sz="3200" dirty="0"/>
+              <a:t>Implementation</a:t>
+            </a:r>
+          </a:p>
+        </p:txBody>
+      </p:sp>
+    </p:spTree>
+    <p:extLst>
+      <p:ext uri="{BB962C8B-B14F-4D97-AF65-F5344CB8AC3E}">
+        <p14:creationId xmlns:p14="http://schemas.microsoft.com/office/powerpoint/2010/main" val="3770422993"/>
       </p:ext>
     </p:extLst>
   </p:cSld>

--- a/DSS_Presentation/DSS_Presentation.pptx
+++ b/DSS_Presentation/DSS_Presentation.pptx
@@ -5,20 +5,24 @@
     <p:sldMasterId id="2147483900" r:id="rId1"/>
   </p:sldMasterIdLst>
   <p:notesMasterIdLst>
-    <p:notesMasterId r:id="rId10"/>
+    <p:notesMasterId r:id="rId14"/>
   </p:notesMasterIdLst>
   <p:handoutMasterIdLst>
-    <p:handoutMasterId r:id="rId11"/>
+    <p:handoutMasterId r:id="rId15"/>
   </p:handoutMasterIdLst>
   <p:sldIdLst>
     <p:sldId id="258" r:id="rId2"/>
-    <p:sldId id="259" r:id="rId3"/>
-    <p:sldId id="260" r:id="rId4"/>
-    <p:sldId id="269" r:id="rId5"/>
-    <p:sldId id="265" r:id="rId6"/>
-    <p:sldId id="270" r:id="rId7"/>
-    <p:sldId id="271" r:id="rId8"/>
-    <p:sldId id="268" r:id="rId9"/>
+    <p:sldId id="272" r:id="rId3"/>
+    <p:sldId id="274" r:id="rId4"/>
+    <p:sldId id="259" r:id="rId5"/>
+    <p:sldId id="260" r:id="rId6"/>
+    <p:sldId id="269" r:id="rId7"/>
+    <p:sldId id="265" r:id="rId8"/>
+    <p:sldId id="270" r:id="rId9"/>
+    <p:sldId id="271" r:id="rId10"/>
+    <p:sldId id="268" r:id="rId11"/>
+    <p:sldId id="273" r:id="rId12"/>
+    <p:sldId id="275" r:id="rId13"/>
   </p:sldIdLst>
   <p:sldSz cx="9144000" cy="6858000" type="screen4x3"/>
   <p:notesSz cx="6797675" cy="9926638"/>
@@ -453,14 +457,14 @@
           </a:ln>
           <a:extLst>
             <a:ext uri="{909E8E84-426E-40dd-AFC4-6F175D3DCCD1}">
-              <a14:hiddenFill xmlns:a14="http://schemas.microsoft.com/office/drawing/2010/main" xmlns="">
+              <a14:hiddenFill xmlns="" xmlns:a14="http://schemas.microsoft.com/office/drawing/2010/main">
                 <a:solidFill>
                   <a:srgbClr val="FFFFFF"/>
                 </a:solidFill>
               </a14:hiddenFill>
             </a:ext>
             <a:ext uri="{91240B29-F687-4f45-9708-019B960494DF}">
-              <a14:hiddenLine xmlns:a14="http://schemas.microsoft.com/office/drawing/2010/main" xmlns="" w="9525">
+              <a14:hiddenLine xmlns="" xmlns:a14="http://schemas.microsoft.com/office/drawing/2010/main" w="9525">
                 <a:solidFill>
                   <a:srgbClr val="000000"/>
                 </a:solidFill>
@@ -513,14 +517,14 @@
           </a:ln>
           <a:extLst>
             <a:ext uri="{909E8E84-426E-40dd-AFC4-6F175D3DCCD1}">
-              <a14:hiddenFill xmlns:a14="http://schemas.microsoft.com/office/drawing/2010/main" xmlns="">
+              <a14:hiddenFill xmlns="" xmlns:a14="http://schemas.microsoft.com/office/drawing/2010/main">
                 <a:solidFill>
                   <a:srgbClr val="FFFFFF"/>
                 </a:solidFill>
               </a14:hiddenFill>
             </a:ext>
             <a:ext uri="{91240B29-F687-4f45-9708-019B960494DF}">
-              <a14:hiddenLine xmlns:a14="http://schemas.microsoft.com/office/drawing/2010/main" xmlns="" w="9525">
+              <a14:hiddenLine xmlns="" xmlns:a14="http://schemas.microsoft.com/office/drawing/2010/main" w="9525">
                 <a:solidFill>
                   <a:srgbClr val="000000"/>
                 </a:solidFill>
@@ -594,7 +598,7 @@
           </a:ln>
           <a:extLst>
             <a:ext uri="{909E8E84-426E-40dd-AFC4-6F175D3DCCD1}">
-              <a14:hiddenFill xmlns:a14="http://schemas.microsoft.com/office/drawing/2010/main" xmlns="">
+              <a14:hiddenFill xmlns="" xmlns:a14="http://schemas.microsoft.com/office/drawing/2010/main">
                 <a:noFill/>
               </a14:hiddenFill>
             </a:ext>
@@ -634,7 +638,7 @@
           </a:ln>
           <a:extLst>
             <a:ext uri="{91240B29-F687-4f45-9708-019B960494DF}">
-              <a14:hiddenLine xmlns:a14="http://schemas.microsoft.com/office/drawing/2010/main" xmlns="" w="9525">
+              <a14:hiddenLine xmlns="" xmlns:a14="http://schemas.microsoft.com/office/drawing/2010/main" w="9525">
                 <a:solidFill>
                   <a:srgbClr val="000000"/>
                 </a:solidFill>
@@ -680,7 +684,7 @@
           </a:ln>
           <a:extLst>
             <a:ext uri="{909E8E84-426E-40dd-AFC4-6F175D3DCCD1}">
-              <a14:hiddenFill xmlns:a14="http://schemas.microsoft.com/office/drawing/2010/main" xmlns="">
+              <a14:hiddenFill xmlns="" xmlns:a14="http://schemas.microsoft.com/office/drawing/2010/main">
                 <a:noFill/>
               </a14:hiddenFill>
             </a:ext>
@@ -721,7 +725,7 @@
           </a:ln>
           <a:extLst>
             <a:ext uri="{909E8E84-426E-40dd-AFC4-6F175D3DCCD1}">
-              <a14:hiddenFill xmlns:a14="http://schemas.microsoft.com/office/drawing/2010/main" xmlns="">
+              <a14:hiddenFill xmlns="" xmlns:a14="http://schemas.microsoft.com/office/drawing/2010/main">
                 <a:noFill/>
               </a14:hiddenFill>
             </a:ext>
@@ -770,14 +774,14 @@
           </a:ln>
           <a:extLst>
             <a:ext uri="{909E8E84-426E-40dd-AFC4-6F175D3DCCD1}">
-              <a14:hiddenFill xmlns:a14="http://schemas.microsoft.com/office/drawing/2010/main" xmlns="">
+              <a14:hiddenFill xmlns="" xmlns:a14="http://schemas.microsoft.com/office/drawing/2010/main">
                 <a:solidFill>
                   <a:srgbClr val="FFFFFF"/>
                 </a:solidFill>
               </a14:hiddenFill>
             </a:ext>
             <a:ext uri="{91240B29-F687-4f45-9708-019B960494DF}">
-              <a14:hiddenLine xmlns:a14="http://schemas.microsoft.com/office/drawing/2010/main" xmlns="" w="9525">
+              <a14:hiddenLine xmlns="" xmlns:a14="http://schemas.microsoft.com/office/drawing/2010/main" w="9525">
                 <a:solidFill>
                   <a:srgbClr val="000000"/>
                 </a:solidFill>
@@ -855,7 +859,7 @@
           </a:ln>
           <a:extLst>
             <a:ext uri="{909E8E84-426E-40dd-AFC4-6F175D3DCCD1}">
-              <a14:hiddenFill xmlns:a14="http://schemas.microsoft.com/office/drawing/2010/main" xmlns="">
+              <a14:hiddenFill xmlns="" xmlns:a14="http://schemas.microsoft.com/office/drawing/2010/main">
                 <a:solidFill>
                   <a:srgbClr val="FFFFFF"/>
                 </a:solidFill>
@@ -1083,14 +1087,14 @@
           </a:ln>
           <a:extLst>
             <a:ext uri="{909E8E84-426E-40dd-AFC4-6F175D3DCCD1}">
-              <a14:hiddenFill xmlns:a14="http://schemas.microsoft.com/office/drawing/2010/main" xmlns="">
+              <a14:hiddenFill xmlns="" xmlns:a14="http://schemas.microsoft.com/office/drawing/2010/main">
                 <a:solidFill>
                   <a:srgbClr val="FFFFFF"/>
                 </a:solidFill>
               </a14:hiddenFill>
             </a:ext>
             <a:ext uri="{91240B29-F687-4f45-9708-019B960494DF}">
-              <a14:hiddenLine xmlns:a14="http://schemas.microsoft.com/office/drawing/2010/main" xmlns="" w="9525">
+              <a14:hiddenLine xmlns="" xmlns:a14="http://schemas.microsoft.com/office/drawing/2010/main" w="9525">
                 <a:solidFill>
                   <a:srgbClr val="000000"/>
                 </a:solidFill>
@@ -1145,14 +1149,14 @@
           </a:ln>
           <a:extLst>
             <a:ext uri="{909E8E84-426E-40dd-AFC4-6F175D3DCCD1}">
-              <a14:hiddenFill xmlns:a14="http://schemas.microsoft.com/office/drawing/2010/main" xmlns="">
+              <a14:hiddenFill xmlns="" xmlns:a14="http://schemas.microsoft.com/office/drawing/2010/main">
                 <a:solidFill>
                   <a:srgbClr val="FFFFFF"/>
                 </a:solidFill>
               </a14:hiddenFill>
             </a:ext>
             <a:ext uri="{91240B29-F687-4f45-9708-019B960494DF}">
-              <a14:hiddenLine xmlns:a14="http://schemas.microsoft.com/office/drawing/2010/main" xmlns="" w="9525">
+              <a14:hiddenLine xmlns="" xmlns:a14="http://schemas.microsoft.com/office/drawing/2010/main" w="9525">
                 <a:solidFill>
                   <a:srgbClr val="000000"/>
                 </a:solidFill>
@@ -1230,7 +1234,7 @@
           </a:ln>
           <a:extLst>
             <a:ext uri="{909E8E84-426E-40dd-AFC4-6F175D3DCCD1}">
-              <a14:hiddenFill xmlns:a14="http://schemas.microsoft.com/office/drawing/2010/main" xmlns="">
+              <a14:hiddenFill xmlns="" xmlns:a14="http://schemas.microsoft.com/office/drawing/2010/main">
                 <a:noFill/>
               </a14:hiddenFill>
             </a:ext>
@@ -1270,7 +1274,7 @@
           </a:ln>
           <a:extLst>
             <a:ext uri="{91240B29-F687-4f45-9708-019B960494DF}">
-              <a14:hiddenLine xmlns:a14="http://schemas.microsoft.com/office/drawing/2010/main" xmlns="" w="9525">
+              <a14:hiddenLine xmlns="" xmlns:a14="http://schemas.microsoft.com/office/drawing/2010/main" w="9525">
                 <a:solidFill>
                   <a:srgbClr val="000000"/>
                 </a:solidFill>
@@ -1316,7 +1320,7 @@
           </a:ln>
           <a:extLst>
             <a:ext uri="{909E8E84-426E-40dd-AFC4-6F175D3DCCD1}">
-              <a14:hiddenFill xmlns:a14="http://schemas.microsoft.com/office/drawing/2010/main" xmlns="">
+              <a14:hiddenFill xmlns="" xmlns:a14="http://schemas.microsoft.com/office/drawing/2010/main">
                 <a:noFill/>
               </a14:hiddenFill>
             </a:ext>
@@ -1357,7 +1361,7 @@
           </a:ln>
           <a:extLst>
             <a:ext uri="{909E8E84-426E-40dd-AFC4-6F175D3DCCD1}">
-              <a14:hiddenFill xmlns:a14="http://schemas.microsoft.com/office/drawing/2010/main" xmlns="">
+              <a14:hiddenFill xmlns="" xmlns:a14="http://schemas.microsoft.com/office/drawing/2010/main">
                 <a:noFill/>
               </a14:hiddenFill>
             </a:ext>
@@ -1406,14 +1410,14 @@
           </a:ln>
           <a:extLst>
             <a:ext uri="{909E8E84-426E-40dd-AFC4-6F175D3DCCD1}">
-              <a14:hiddenFill xmlns:a14="http://schemas.microsoft.com/office/drawing/2010/main" xmlns="">
+              <a14:hiddenFill xmlns="" xmlns:a14="http://schemas.microsoft.com/office/drawing/2010/main">
                 <a:solidFill>
                   <a:srgbClr val="FFFFFF"/>
                 </a:solidFill>
               </a14:hiddenFill>
             </a:ext>
             <a:ext uri="{91240B29-F687-4f45-9708-019B960494DF}">
-              <a14:hiddenLine xmlns:a14="http://schemas.microsoft.com/office/drawing/2010/main" xmlns="" w="9525">
+              <a14:hiddenLine xmlns="" xmlns:a14="http://schemas.microsoft.com/office/drawing/2010/main" w="9525">
                 <a:solidFill>
                   <a:srgbClr val="000000"/>
                 </a:solidFill>
@@ -1603,7 +1607,7 @@
           </a:ln>
           <a:extLst>
             <a:ext uri="{909E8E84-426E-40dd-AFC4-6F175D3DCCD1}">
-              <a14:hiddenFill xmlns:a14="http://schemas.microsoft.com/office/drawing/2010/main" xmlns="">
+              <a14:hiddenFill xmlns="" xmlns:a14="http://schemas.microsoft.com/office/drawing/2010/main">
                 <a:noFill/>
               </a14:hiddenFill>
             </a:ext>
@@ -3715,14 +3719,14 @@
           </a:ln>
           <a:extLst>
             <a:ext uri="{909E8E84-426E-40dd-AFC4-6F175D3DCCD1}">
-              <a14:hiddenFill xmlns:a14="http://schemas.microsoft.com/office/drawing/2010/main" xmlns="">
+              <a14:hiddenFill xmlns="" xmlns:a14="http://schemas.microsoft.com/office/drawing/2010/main">
                 <a:solidFill>
                   <a:srgbClr val="FFFFFF"/>
                 </a:solidFill>
               </a14:hiddenFill>
             </a:ext>
             <a:ext uri="{91240B29-F687-4f45-9708-019B960494DF}">
-              <a14:hiddenLine xmlns:a14="http://schemas.microsoft.com/office/drawing/2010/main" xmlns="" w="9525">
+              <a14:hiddenLine xmlns="" xmlns:a14="http://schemas.microsoft.com/office/drawing/2010/main" w="9525">
                 <a:solidFill>
                   <a:srgbClr val="000000"/>
                 </a:solidFill>
@@ -3773,14 +3777,14 @@
           </a:ln>
           <a:extLst>
             <a:ext uri="{909E8E84-426E-40dd-AFC4-6F175D3DCCD1}">
-              <a14:hiddenFill xmlns:a14="http://schemas.microsoft.com/office/drawing/2010/main" xmlns="">
+              <a14:hiddenFill xmlns="" xmlns:a14="http://schemas.microsoft.com/office/drawing/2010/main">
                 <a:solidFill>
                   <a:srgbClr val="FFFFFF"/>
                 </a:solidFill>
               </a14:hiddenFill>
             </a:ext>
             <a:ext uri="{91240B29-F687-4f45-9708-019B960494DF}">
-              <a14:hiddenLine xmlns:a14="http://schemas.microsoft.com/office/drawing/2010/main" xmlns="" w="9525">
+              <a14:hiddenLine xmlns="" xmlns:a14="http://schemas.microsoft.com/office/drawing/2010/main" w="9525">
                 <a:solidFill>
                   <a:srgbClr val="000000"/>
                 </a:solidFill>
@@ -4017,7 +4021,7 @@
           </a:ln>
           <a:extLst>
             <a:ext uri="{909E8E84-426E-40dd-AFC4-6F175D3DCCD1}">
-              <a14:hiddenFill xmlns:a14="http://schemas.microsoft.com/office/drawing/2010/main" xmlns="">
+              <a14:hiddenFill xmlns="" xmlns:a14="http://schemas.microsoft.com/office/drawing/2010/main">
                 <a:noFill/>
               </a14:hiddenFill>
             </a:ext>
@@ -4840,7 +4844,2136 @@
 </p:sld>
 </file>
 
+<file path=ppt/slides/slide10.xml><?xml version="1.0" encoding="utf-8"?>
+<p:sld xmlns:a="http://schemas.openxmlformats.org/drawingml/2006/main" xmlns:r="http://schemas.openxmlformats.org/officeDocument/2006/relationships" xmlns:p="http://schemas.openxmlformats.org/presentationml/2006/main">
+  <p:cSld>
+    <p:spTree>
+      <p:nvGrpSpPr>
+        <p:cNvPr id="1" name="">
+          <a:extLst>
+            <a:ext uri="{FF2B5EF4-FFF2-40B4-BE49-F238E27FC236}">
+              <a16:creationId xmlns:a16="http://schemas.microsoft.com/office/drawing/2014/main" id="{4B2A3DCF-508E-B2FB-A957-8EC6446C46BF}"/>
+            </a:ext>
+          </a:extLst>
+        </p:cNvPr>
+        <p:cNvGrpSpPr/>
+        <p:nvPr/>
+      </p:nvGrpSpPr>
+      <p:grpSpPr>
+        <a:xfrm>
+          <a:off x="0" y="0"/>
+          <a:ext cx="0" cy="0"/>
+          <a:chOff x="0" y="0"/>
+          <a:chExt cx="0" cy="0"/>
+        </a:xfrm>
+      </p:grpSpPr>
+      <p:sp>
+        <p:nvSpPr>
+          <p:cNvPr id="4" name="Нижний колонтитул 3">
+            <a:extLst>
+              <a:ext uri="{FF2B5EF4-FFF2-40B4-BE49-F238E27FC236}">
+                <a16:creationId xmlns:a16="http://schemas.microsoft.com/office/drawing/2014/main" id="{6BBB6C7D-732C-5C79-FDC3-C76542D23265}"/>
+              </a:ext>
+            </a:extLst>
+          </p:cNvPr>
+          <p:cNvSpPr>
+            <a:spLocks noGrp="1"/>
+          </p:cNvSpPr>
+          <p:nvPr>
+            <p:ph type="ftr" sz="quarter" idx="10"/>
+          </p:nvPr>
+        </p:nvSpPr>
+        <p:spPr/>
+        <p:txBody>
+          <a:bodyPr/>
+          <a:lstStyle/>
+          <a:p>
+            <a:pPr>
+              <a:defRPr/>
+            </a:pPr>
+            <a:r>
+              <a:rPr lang="de-DE" dirty="0"/>
+              <a:t>Oleg Kelner – University </a:t>
+            </a:r>
+            <a:r>
+              <a:rPr lang="de-DE" dirty="0" err="1"/>
+              <a:t>of</a:t>
+            </a:r>
+            <a:r>
+              <a:rPr lang="de-DE" dirty="0"/>
+              <a:t> Applied Sciences Hamm-Lippstadt</a:t>
+            </a:r>
+          </a:p>
+        </p:txBody>
+      </p:sp>
+      <p:sp>
+        <p:nvSpPr>
+          <p:cNvPr id="5" name="Дата 4">
+            <a:extLst>
+              <a:ext uri="{FF2B5EF4-FFF2-40B4-BE49-F238E27FC236}">
+                <a16:creationId xmlns:a16="http://schemas.microsoft.com/office/drawing/2014/main" id="{DAFC4770-E0FD-719C-7A8E-604F6D27294C}"/>
+              </a:ext>
+            </a:extLst>
+          </p:cNvPr>
+          <p:cNvSpPr>
+            <a:spLocks noGrp="1"/>
+          </p:cNvSpPr>
+          <p:nvPr>
+            <p:ph type="dt" sz="half" idx="12"/>
+          </p:nvPr>
+        </p:nvSpPr>
+        <p:spPr/>
+        <p:txBody>
+          <a:bodyPr/>
+          <a:lstStyle/>
+          <a:p>
+            <a:pPr>
+              <a:defRPr/>
+            </a:pPr>
+            <a:fld id="{D1C5E747-687F-9C49-A498-1184E7908D39}" type="datetime1">
+              <a:rPr lang="de-DE" smtClean="0"/>
+              <a:t>21.06.2026</a:t>
+            </a:fld>
+            <a:endParaRPr lang="de-DE"/>
+          </a:p>
+        </p:txBody>
+      </p:sp>
+      <p:sp>
+        <p:nvSpPr>
+          <p:cNvPr id="6" name="Номер слайда 5">
+            <a:extLst>
+              <a:ext uri="{FF2B5EF4-FFF2-40B4-BE49-F238E27FC236}">
+                <a16:creationId xmlns:a16="http://schemas.microsoft.com/office/drawing/2014/main" id="{0DF7045B-7EF2-499A-F96C-5FC0857AF102}"/>
+              </a:ext>
+            </a:extLst>
+          </p:cNvPr>
+          <p:cNvSpPr>
+            <a:spLocks noGrp="1"/>
+          </p:cNvSpPr>
+          <p:nvPr>
+            <p:ph type="sldNum" sz="quarter" idx="13"/>
+          </p:nvPr>
+        </p:nvSpPr>
+        <p:spPr/>
+        <p:txBody>
+          <a:bodyPr/>
+          <a:lstStyle/>
+          <a:p>
+            <a:pPr>
+              <a:defRPr/>
+            </a:pPr>
+            <a:r>
+              <a:rPr lang="de-DE"/>
+              <a:t>&lt; </a:t>
+            </a:r>
+            <a:fld id="{1A61C92B-C297-4AC9-B551-2D8A658A0122}" type="slidenum">
+              <a:rPr lang="de-DE" smtClean="0"/>
+              <a:pPr>
+                <a:defRPr/>
+              </a:pPr>
+              <a:t>10</a:t>
+            </a:fld>
+            <a:r>
+              <a:rPr lang="de-DE"/>
+              <a:t> &gt;</a:t>
+            </a:r>
+            <a:endParaRPr lang="de-DE" dirty="0"/>
+          </a:p>
+        </p:txBody>
+      </p:sp>
+      <p:sp>
+        <p:nvSpPr>
+          <p:cNvPr id="7" name="Заголовок 1">
+            <a:extLst>
+              <a:ext uri="{FF2B5EF4-FFF2-40B4-BE49-F238E27FC236}">
+                <a16:creationId xmlns:a16="http://schemas.microsoft.com/office/drawing/2014/main" id="{DDF0EE4D-5E5D-CCB9-8E8A-809BB9A0B745}"/>
+              </a:ext>
+            </a:extLst>
+          </p:cNvPr>
+          <p:cNvSpPr>
+            <a:spLocks noGrp="1"/>
+          </p:cNvSpPr>
+          <p:nvPr>
+            <p:ph type="ctrTitle"/>
+          </p:nvPr>
+        </p:nvSpPr>
+        <p:spPr>
+          <a:xfrm>
+            <a:off x="395536" y="188640"/>
+            <a:ext cx="7324934" cy="492443"/>
+          </a:xfrm>
+        </p:spPr>
+        <p:txBody>
+          <a:bodyPr/>
+          <a:lstStyle/>
+          <a:p>
+            <a:r>
+              <a:rPr lang="en-US" sz="3200" dirty="0"/>
+              <a:t>Conclusion</a:t>
+            </a:r>
+          </a:p>
+        </p:txBody>
+      </p:sp>
+      <p:sp>
+        <p:nvSpPr>
+          <p:cNvPr id="3" name="TextBox 2">
+            <a:extLst>
+              <a:ext uri="{FF2B5EF4-FFF2-40B4-BE49-F238E27FC236}">
+                <a16:creationId xmlns:a16="http://schemas.microsoft.com/office/drawing/2014/main" id="{54D8605C-04C0-97E6-5812-D584E1482374}"/>
+              </a:ext>
+            </a:extLst>
+          </p:cNvPr>
+          <p:cNvSpPr txBox="1"/>
+          <p:nvPr/>
+        </p:nvSpPr>
+        <p:spPr>
+          <a:xfrm>
+            <a:off x="506157" y="2290226"/>
+            <a:ext cx="8131686" cy="2277547"/>
+          </a:xfrm>
+          <a:prstGeom prst="rect">
+            <a:avLst/>
+          </a:prstGeom>
+          <a:noFill/>
+        </p:spPr>
+        <p:txBody>
+          <a:bodyPr wrap="square" rtlCol="0">
+            <a:spAutoFit/>
+          </a:bodyPr>
+          <a:lstStyle/>
+          <a:p>
+            <a:pPr marL="285750" indent="-285750">
+              <a:lnSpc>
+                <a:spcPct val="100000"/>
+              </a:lnSpc>
+              <a:spcBef>
+                <a:spcPts val="1200"/>
+              </a:spcBef>
+              <a:spcAft>
+                <a:spcPts val="600"/>
+              </a:spcAft>
+              <a:buFont typeface="Arial" panose="020B0604020202020204" pitchFamily="34" charset="0"/>
+              <a:buChar char="•"/>
+            </a:pPr>
+            <a:r>
+              <a:rPr lang="en-US" sz="2800" dirty="0"/>
+              <a:t>Achieves low response times with proper configuration</a:t>
+            </a:r>
+          </a:p>
+          <a:p>
+            <a:pPr marL="285750" indent="-285750">
+              <a:lnSpc>
+                <a:spcPct val="100000"/>
+              </a:lnSpc>
+              <a:spcBef>
+                <a:spcPts val="1200"/>
+              </a:spcBef>
+              <a:spcAft>
+                <a:spcPts val="600"/>
+              </a:spcAft>
+              <a:buFont typeface="Arial" panose="020B0604020202020204" pitchFamily="34" charset="0"/>
+              <a:buChar char="•"/>
+            </a:pPr>
+            <a:r>
+              <a:rPr lang="en-US" sz="2800" dirty="0"/>
+              <a:t>Although the calibration is highly fiddly</a:t>
+            </a:r>
+          </a:p>
+          <a:p>
+            <a:pPr marL="285750" indent="-285750">
+              <a:lnSpc>
+                <a:spcPct val="100000"/>
+              </a:lnSpc>
+              <a:spcBef>
+                <a:spcPts val="1200"/>
+              </a:spcBef>
+              <a:spcAft>
+                <a:spcPts val="600"/>
+              </a:spcAft>
+              <a:buFont typeface="Arial" panose="020B0604020202020204" pitchFamily="34" charset="0"/>
+              <a:buChar char="•"/>
+            </a:pPr>
+            <a:r>
+              <a:rPr lang="en-US" sz="2800" dirty="0"/>
+              <a:t>Behaves great with low aperiodic task frequency</a:t>
+            </a:r>
+          </a:p>
+        </p:txBody>
+      </p:sp>
+    </p:spTree>
+    <p:extLst>
+      <p:ext uri="{BB962C8B-B14F-4D97-AF65-F5344CB8AC3E}">
+        <p14:creationId xmlns:p14="http://schemas.microsoft.com/office/powerpoint/2010/main" val="3770422993"/>
+      </p:ext>
+    </p:extLst>
+  </p:cSld>
+  <p:clrMapOvr>
+    <a:masterClrMapping/>
+  </p:clrMapOvr>
+</p:sld>
+</file>
+
+<file path=ppt/slides/slide11.xml><?xml version="1.0" encoding="utf-8"?>
+<p:sld xmlns:a="http://schemas.openxmlformats.org/drawingml/2006/main" xmlns:r="http://schemas.openxmlformats.org/officeDocument/2006/relationships" xmlns:p="http://schemas.openxmlformats.org/presentationml/2006/main">
+  <p:cSld>
+    <p:spTree>
+      <p:nvGrpSpPr>
+        <p:cNvPr id="1" name="">
+          <a:extLst>
+            <a:ext uri="{FF2B5EF4-FFF2-40B4-BE49-F238E27FC236}">
+              <a16:creationId xmlns:a16="http://schemas.microsoft.com/office/drawing/2014/main" id="{9300D156-931B-5E93-7F4E-1AA42C486237}"/>
+            </a:ext>
+          </a:extLst>
+        </p:cNvPr>
+        <p:cNvGrpSpPr/>
+        <p:nvPr/>
+      </p:nvGrpSpPr>
+      <p:grpSpPr>
+        <a:xfrm>
+          <a:off x="0" y="0"/>
+          <a:ext cx="0" cy="0"/>
+          <a:chOff x="0" y="0"/>
+          <a:chExt cx="0" cy="0"/>
+        </a:xfrm>
+      </p:grpSpPr>
+      <p:sp>
+        <p:nvSpPr>
+          <p:cNvPr id="4" name="Нижний колонтитул 3">
+            <a:extLst>
+              <a:ext uri="{FF2B5EF4-FFF2-40B4-BE49-F238E27FC236}">
+                <a16:creationId xmlns:a16="http://schemas.microsoft.com/office/drawing/2014/main" id="{F5D6AF9B-CA16-9C49-C8ED-5262BF3FED9E}"/>
+              </a:ext>
+            </a:extLst>
+          </p:cNvPr>
+          <p:cNvSpPr>
+            <a:spLocks noGrp="1"/>
+          </p:cNvSpPr>
+          <p:nvPr>
+            <p:ph type="ftr" sz="quarter" idx="10"/>
+          </p:nvPr>
+        </p:nvSpPr>
+        <p:spPr/>
+        <p:txBody>
+          <a:bodyPr/>
+          <a:lstStyle/>
+          <a:p>
+            <a:pPr>
+              <a:defRPr/>
+            </a:pPr>
+            <a:r>
+              <a:rPr lang="de-DE" dirty="0"/>
+              <a:t>Oleg Kelner – University </a:t>
+            </a:r>
+            <a:r>
+              <a:rPr lang="de-DE" dirty="0" err="1"/>
+              <a:t>of</a:t>
+            </a:r>
+            <a:r>
+              <a:rPr lang="de-DE" dirty="0"/>
+              <a:t> Applied Sciences Hamm-Lippstadt</a:t>
+            </a:r>
+          </a:p>
+        </p:txBody>
+      </p:sp>
+      <p:sp>
+        <p:nvSpPr>
+          <p:cNvPr id="5" name="Дата 4">
+            <a:extLst>
+              <a:ext uri="{FF2B5EF4-FFF2-40B4-BE49-F238E27FC236}">
+                <a16:creationId xmlns:a16="http://schemas.microsoft.com/office/drawing/2014/main" id="{338B5FE7-2A2B-D113-1989-99C5D9345354}"/>
+              </a:ext>
+            </a:extLst>
+          </p:cNvPr>
+          <p:cNvSpPr>
+            <a:spLocks noGrp="1"/>
+          </p:cNvSpPr>
+          <p:nvPr>
+            <p:ph type="dt" sz="half" idx="12"/>
+          </p:nvPr>
+        </p:nvSpPr>
+        <p:spPr/>
+        <p:txBody>
+          <a:bodyPr/>
+          <a:lstStyle/>
+          <a:p>
+            <a:pPr>
+              <a:defRPr/>
+            </a:pPr>
+            <a:fld id="{D1C5E747-687F-9C49-A498-1184E7908D39}" type="datetime1">
+              <a:rPr lang="de-DE" smtClean="0"/>
+              <a:t>21.06.2026</a:t>
+            </a:fld>
+            <a:endParaRPr lang="de-DE"/>
+          </a:p>
+        </p:txBody>
+      </p:sp>
+      <p:sp>
+        <p:nvSpPr>
+          <p:cNvPr id="6" name="Номер слайда 5">
+            <a:extLst>
+              <a:ext uri="{FF2B5EF4-FFF2-40B4-BE49-F238E27FC236}">
+                <a16:creationId xmlns:a16="http://schemas.microsoft.com/office/drawing/2014/main" id="{D726C31A-9B21-A5BD-3E62-E9A23410E1D8}"/>
+              </a:ext>
+            </a:extLst>
+          </p:cNvPr>
+          <p:cNvSpPr>
+            <a:spLocks noGrp="1"/>
+          </p:cNvSpPr>
+          <p:nvPr>
+            <p:ph type="sldNum" sz="quarter" idx="13"/>
+          </p:nvPr>
+        </p:nvSpPr>
+        <p:spPr/>
+        <p:txBody>
+          <a:bodyPr/>
+          <a:lstStyle/>
+          <a:p>
+            <a:pPr>
+              <a:defRPr/>
+            </a:pPr>
+            <a:r>
+              <a:rPr lang="de-DE"/>
+              <a:t>&lt; </a:t>
+            </a:r>
+            <a:fld id="{1A61C92B-C297-4AC9-B551-2D8A658A0122}" type="slidenum">
+              <a:rPr lang="de-DE" smtClean="0"/>
+              <a:pPr>
+                <a:defRPr/>
+              </a:pPr>
+              <a:t>11</a:t>
+            </a:fld>
+            <a:r>
+              <a:rPr lang="de-DE"/>
+              <a:t> &gt;</a:t>
+            </a:r>
+            <a:endParaRPr lang="de-DE" dirty="0"/>
+          </a:p>
+        </p:txBody>
+      </p:sp>
+      <p:sp>
+        <p:nvSpPr>
+          <p:cNvPr id="7" name="Заголовок 1">
+            <a:extLst>
+              <a:ext uri="{FF2B5EF4-FFF2-40B4-BE49-F238E27FC236}">
+                <a16:creationId xmlns:a16="http://schemas.microsoft.com/office/drawing/2014/main" id="{A8FB4653-96F7-C0A9-23F9-304988710DA7}"/>
+              </a:ext>
+            </a:extLst>
+          </p:cNvPr>
+          <p:cNvSpPr>
+            <a:spLocks noGrp="1"/>
+          </p:cNvSpPr>
+          <p:nvPr>
+            <p:ph type="ctrTitle"/>
+          </p:nvPr>
+        </p:nvSpPr>
+        <p:spPr>
+          <a:xfrm>
+            <a:off x="395536" y="188640"/>
+            <a:ext cx="7324934" cy="492443"/>
+          </a:xfrm>
+        </p:spPr>
+        <p:txBody>
+          <a:bodyPr/>
+          <a:lstStyle/>
+          <a:p>
+            <a:r>
+              <a:rPr lang="en-US" sz="3200" dirty="0"/>
+              <a:t>References</a:t>
+            </a:r>
+          </a:p>
+        </p:txBody>
+      </p:sp>
+      <p:sp>
+        <p:nvSpPr>
+          <p:cNvPr id="2" name="TextBox 1">
+            <a:extLst>
+              <a:ext uri="{FF2B5EF4-FFF2-40B4-BE49-F238E27FC236}">
+                <a16:creationId xmlns:a16="http://schemas.microsoft.com/office/drawing/2014/main" id="{EBBC5FF4-CACB-A3EB-8C0D-2099828F9727}"/>
+              </a:ext>
+            </a:extLst>
+          </p:cNvPr>
+          <p:cNvSpPr txBox="1"/>
+          <p:nvPr/>
+        </p:nvSpPr>
+        <p:spPr>
+          <a:xfrm>
+            <a:off x="325053" y="1268760"/>
+            <a:ext cx="8493893" cy="4565352"/>
+          </a:xfrm>
+          <a:prstGeom prst="rect">
+            <a:avLst/>
+          </a:prstGeom>
+          <a:noFill/>
+        </p:spPr>
+        <p:txBody>
+          <a:bodyPr wrap="square" rtlCol="0">
+            <a:spAutoFit/>
+          </a:bodyPr>
+          <a:lstStyle/>
+          <a:p>
+            <a:pPr marL="285750" indent="-285750">
+              <a:lnSpc>
+                <a:spcPct val="100000"/>
+              </a:lnSpc>
+              <a:spcBef>
+                <a:spcPts val="1200"/>
+              </a:spcBef>
+              <a:buFont typeface="Arial" panose="020B0604020202020204" pitchFamily="34" charset="0"/>
+              <a:buChar char="•"/>
+            </a:pPr>
+            <a:r>
+              <a:rPr lang="en-US" dirty="0"/>
+              <a:t>L. Abeni and G. </a:t>
+            </a:r>
+            <a:r>
+              <a:rPr lang="en-US" dirty="0" err="1"/>
+              <a:t>Buttazzo</a:t>
+            </a:r>
+            <a:r>
+              <a:rPr lang="en-US" dirty="0"/>
+              <a:t>, ‘Integrating multimedia applications in hard real-time systems’, </a:t>
+            </a:r>
+            <a:r>
+              <a:rPr lang="en-US" i="1" dirty="0"/>
+              <a:t>Proceedings - Real-Time Systems Symposium</a:t>
+            </a:r>
+            <a:r>
+              <a:rPr lang="en-US" dirty="0"/>
+              <a:t>, pp. 4–13, 1998, </a:t>
+            </a:r>
+            <a:r>
+              <a:rPr lang="en-US" dirty="0" err="1"/>
+              <a:t>doi</a:t>
+            </a:r>
+            <a:r>
+              <a:rPr lang="en-US" dirty="0"/>
+              <a:t>: 10.1109/REAL.1998.739726.</a:t>
+            </a:r>
+          </a:p>
+          <a:p>
+            <a:pPr marL="285750" indent="-285750">
+              <a:lnSpc>
+                <a:spcPct val="100000"/>
+              </a:lnSpc>
+              <a:spcBef>
+                <a:spcPts val="1200"/>
+              </a:spcBef>
+              <a:buFont typeface="Arial" panose="020B0604020202020204" pitchFamily="34" charset="0"/>
+              <a:buChar char="•"/>
+            </a:pPr>
+            <a:r>
+              <a:rPr lang="en-US" dirty="0"/>
+              <a:t>B. Sprunt, L. Sha, and J. Lehoczky, ‘Aperiodic task scheduling for Hard-Real-Time systems’, </a:t>
+            </a:r>
+            <a:r>
+              <a:rPr lang="en-US" i="1" dirty="0"/>
+              <a:t>Real-Time Systems 1989 1:1</a:t>
+            </a:r>
+            <a:r>
+              <a:rPr lang="en-US" dirty="0"/>
+              <a:t>, vol. 1, no. 1, pp. 27–60, 1989, </a:t>
+            </a:r>
+            <a:r>
+              <a:rPr lang="en-US" dirty="0" err="1"/>
+              <a:t>doi</a:t>
+            </a:r>
+            <a:r>
+              <a:rPr lang="en-US" dirty="0"/>
+              <a:t>: 10.1007/BF02341920.</a:t>
+            </a:r>
+          </a:p>
+          <a:p>
+            <a:pPr marL="285750" indent="-285750">
+              <a:lnSpc>
+                <a:spcPct val="100000"/>
+              </a:lnSpc>
+              <a:spcBef>
+                <a:spcPts val="1200"/>
+              </a:spcBef>
+              <a:buFont typeface="Arial" panose="020B0604020202020204" pitchFamily="34" charset="0"/>
+              <a:buChar char="•"/>
+            </a:pPr>
+            <a:r>
+              <a:rPr lang="en-US" dirty="0"/>
+              <a:t>J. K. Strosnider, J. P. Lehoczky, and L. Sha, ‘The Deferrable Server Algorithm for Enhanced Aperiodic Responsiveness in Hard Real-Time Environments’, </a:t>
+            </a:r>
+            <a:r>
+              <a:rPr lang="en-US" i="1" dirty="0"/>
+              <a:t>IEEE Transactions on Computers</a:t>
+            </a:r>
+            <a:r>
+              <a:rPr lang="en-US" dirty="0"/>
+              <a:t>, vol. 44, no. 1, pp. 73–91, 1995, </a:t>
+            </a:r>
+            <a:r>
+              <a:rPr lang="en-US" dirty="0" err="1"/>
+              <a:t>doi</a:t>
+            </a:r>
+            <a:r>
+              <a:rPr lang="en-US" dirty="0"/>
+              <a:t>: 10.1109/12.368008.</a:t>
+            </a:r>
+          </a:p>
+          <a:p>
+            <a:pPr marL="285750" indent="-285750">
+              <a:lnSpc>
+                <a:spcPct val="100000"/>
+              </a:lnSpc>
+              <a:spcBef>
+                <a:spcPts val="1200"/>
+              </a:spcBef>
+              <a:buFont typeface="Arial" panose="020B0604020202020204" pitchFamily="34" charset="0"/>
+              <a:buChar char="•"/>
+            </a:pPr>
+            <a:r>
+              <a:rPr lang="en-US" dirty="0"/>
+              <a:t>M. </a:t>
+            </a:r>
+            <a:r>
+              <a:rPr lang="en-US" dirty="0" err="1"/>
+              <a:t>Spuri</a:t>
+            </a:r>
+            <a:r>
+              <a:rPr lang="en-US" dirty="0"/>
+              <a:t> and G. </a:t>
+            </a:r>
+            <a:r>
+              <a:rPr lang="en-US" dirty="0" err="1"/>
+              <a:t>Buttazzo</a:t>
+            </a:r>
+            <a:r>
+              <a:rPr lang="en-US" dirty="0"/>
+              <a:t>, ‘Scheduling aperiodic tasks in dynamic priority systems’, </a:t>
+            </a:r>
+            <a:r>
+              <a:rPr lang="en-US" i="1" dirty="0"/>
+              <a:t>Real-Time Systems</a:t>
+            </a:r>
+            <a:r>
+              <a:rPr lang="en-US" dirty="0"/>
+              <a:t>, vol. 10, no. 2, pp. 179–210, Mar. 1996, </a:t>
+            </a:r>
+            <a:r>
+              <a:rPr lang="en-US" dirty="0" err="1"/>
+              <a:t>doi</a:t>
+            </a:r>
+            <a:r>
+              <a:rPr lang="en-US" dirty="0"/>
+              <a:t>: 10.1007/BF00360340.</a:t>
+            </a:r>
+          </a:p>
+          <a:p>
+            <a:pPr marL="285750" indent="-285750">
+              <a:lnSpc>
+                <a:spcPct val="100000"/>
+              </a:lnSpc>
+              <a:spcBef>
+                <a:spcPts val="1200"/>
+              </a:spcBef>
+              <a:buFont typeface="Arial" panose="020B0604020202020204" pitchFamily="34" charset="0"/>
+              <a:buChar char="•"/>
+            </a:pPr>
+            <a:r>
+              <a:rPr lang="en-US" dirty="0"/>
+              <a:t>ChatGPT (OpenAI, GPT-5.5) was used to assist in the development of the simulation code, literature analysis, and drafting of non-technical text. All generated content was reviewed and validated by the authors.</a:t>
+            </a:r>
+          </a:p>
+          <a:p>
+            <a:endParaRPr lang="en-US" dirty="0"/>
+          </a:p>
+        </p:txBody>
+      </p:sp>
+    </p:spTree>
+    <p:extLst>
+      <p:ext uri="{BB962C8B-B14F-4D97-AF65-F5344CB8AC3E}">
+        <p14:creationId xmlns:p14="http://schemas.microsoft.com/office/powerpoint/2010/main" val="1360519033"/>
+      </p:ext>
+    </p:extLst>
+  </p:cSld>
+  <p:clrMapOvr>
+    <a:masterClrMapping/>
+  </p:clrMapOvr>
+</p:sld>
+</file>
+
+<file path=ppt/slides/slide12.xml><?xml version="1.0" encoding="utf-8"?>
+<p:sld xmlns:a="http://schemas.openxmlformats.org/drawingml/2006/main" xmlns:r="http://schemas.openxmlformats.org/officeDocument/2006/relationships" xmlns:p="http://schemas.openxmlformats.org/presentationml/2006/main">
+  <p:cSld>
+    <p:spTree>
+      <p:nvGrpSpPr>
+        <p:cNvPr id="1" name="">
+          <a:extLst>
+            <a:ext uri="{FF2B5EF4-FFF2-40B4-BE49-F238E27FC236}">
+              <a16:creationId xmlns:a16="http://schemas.microsoft.com/office/drawing/2014/main" id="{0754ADB1-04ED-ACC2-952B-BA63C642D8C1}"/>
+            </a:ext>
+          </a:extLst>
+        </p:cNvPr>
+        <p:cNvGrpSpPr/>
+        <p:nvPr/>
+      </p:nvGrpSpPr>
+      <p:grpSpPr>
+        <a:xfrm>
+          <a:off x="0" y="0"/>
+          <a:ext cx="0" cy="0"/>
+          <a:chOff x="0" y="0"/>
+          <a:chExt cx="0" cy="0"/>
+        </a:xfrm>
+      </p:grpSpPr>
+      <p:sp>
+        <p:nvSpPr>
+          <p:cNvPr id="4" name="Нижний колонтитул 3">
+            <a:extLst>
+              <a:ext uri="{FF2B5EF4-FFF2-40B4-BE49-F238E27FC236}">
+                <a16:creationId xmlns:a16="http://schemas.microsoft.com/office/drawing/2014/main" id="{797247CD-F39D-92B9-AA4D-3FEBCD718D62}"/>
+              </a:ext>
+            </a:extLst>
+          </p:cNvPr>
+          <p:cNvSpPr>
+            <a:spLocks noGrp="1"/>
+          </p:cNvSpPr>
+          <p:nvPr>
+            <p:ph type="ftr" sz="quarter" idx="10"/>
+          </p:nvPr>
+        </p:nvSpPr>
+        <p:spPr/>
+        <p:txBody>
+          <a:bodyPr/>
+          <a:lstStyle/>
+          <a:p>
+            <a:pPr>
+              <a:defRPr/>
+            </a:pPr>
+            <a:r>
+              <a:rPr lang="de-DE" dirty="0"/>
+              <a:t>Oleg Kelner – University </a:t>
+            </a:r>
+            <a:r>
+              <a:rPr lang="de-DE" dirty="0" err="1"/>
+              <a:t>of</a:t>
+            </a:r>
+            <a:r>
+              <a:rPr lang="de-DE" dirty="0"/>
+              <a:t> Applied Sciences Hamm-Lippstadt</a:t>
+            </a:r>
+          </a:p>
+        </p:txBody>
+      </p:sp>
+      <p:sp>
+        <p:nvSpPr>
+          <p:cNvPr id="5" name="Дата 4">
+            <a:extLst>
+              <a:ext uri="{FF2B5EF4-FFF2-40B4-BE49-F238E27FC236}">
+                <a16:creationId xmlns:a16="http://schemas.microsoft.com/office/drawing/2014/main" id="{BCA3B728-0B9F-CAE3-3EE7-6165420D4167}"/>
+              </a:ext>
+            </a:extLst>
+          </p:cNvPr>
+          <p:cNvSpPr>
+            <a:spLocks noGrp="1"/>
+          </p:cNvSpPr>
+          <p:nvPr>
+            <p:ph type="dt" sz="half" idx="12"/>
+          </p:nvPr>
+        </p:nvSpPr>
+        <p:spPr/>
+        <p:txBody>
+          <a:bodyPr/>
+          <a:lstStyle/>
+          <a:p>
+            <a:pPr>
+              <a:defRPr/>
+            </a:pPr>
+            <a:fld id="{D1C5E747-687F-9C49-A498-1184E7908D39}" type="datetime1">
+              <a:rPr lang="de-DE" smtClean="0"/>
+              <a:t>21.06.2026</a:t>
+            </a:fld>
+            <a:endParaRPr lang="de-DE"/>
+          </a:p>
+        </p:txBody>
+      </p:sp>
+      <p:sp>
+        <p:nvSpPr>
+          <p:cNvPr id="6" name="Номер слайда 5">
+            <a:extLst>
+              <a:ext uri="{FF2B5EF4-FFF2-40B4-BE49-F238E27FC236}">
+                <a16:creationId xmlns:a16="http://schemas.microsoft.com/office/drawing/2014/main" id="{7BCCA7ED-17D9-EA2E-3EF9-7B36A6AD0C73}"/>
+              </a:ext>
+            </a:extLst>
+          </p:cNvPr>
+          <p:cNvSpPr>
+            <a:spLocks noGrp="1"/>
+          </p:cNvSpPr>
+          <p:nvPr>
+            <p:ph type="sldNum" sz="quarter" idx="13"/>
+          </p:nvPr>
+        </p:nvSpPr>
+        <p:spPr/>
+        <p:txBody>
+          <a:bodyPr/>
+          <a:lstStyle/>
+          <a:p>
+            <a:pPr>
+              <a:defRPr/>
+            </a:pPr>
+            <a:r>
+              <a:rPr lang="de-DE"/>
+              <a:t>&lt; </a:t>
+            </a:r>
+            <a:fld id="{1A61C92B-C297-4AC9-B551-2D8A658A0122}" type="slidenum">
+              <a:rPr lang="de-DE" smtClean="0"/>
+              <a:pPr>
+                <a:defRPr/>
+              </a:pPr>
+              <a:t>12</a:t>
+            </a:fld>
+            <a:r>
+              <a:rPr lang="de-DE"/>
+              <a:t> &gt;</a:t>
+            </a:r>
+            <a:endParaRPr lang="de-DE" dirty="0"/>
+          </a:p>
+        </p:txBody>
+      </p:sp>
+      <p:pic>
+        <p:nvPicPr>
+          <p:cNvPr id="10" name="Рисунок 9">
+            <a:extLst>
+              <a:ext uri="{FF2B5EF4-FFF2-40B4-BE49-F238E27FC236}">
+                <a16:creationId xmlns:a16="http://schemas.microsoft.com/office/drawing/2014/main" id="{BFF10F6D-8750-D564-C2EA-EA58FD383169}"/>
+              </a:ext>
+            </a:extLst>
+          </p:cNvPr>
+          <p:cNvPicPr>
+            <a:picLocks noChangeAspect="1"/>
+          </p:cNvPicPr>
+          <p:nvPr/>
+        </p:nvPicPr>
+        <p:blipFill>
+          <a:blip r:embed="rId2"/>
+          <a:stretch>
+            <a:fillRect/>
+          </a:stretch>
+        </p:blipFill>
+        <p:spPr>
+          <a:xfrm>
+            <a:off x="670222" y="1600041"/>
+            <a:ext cx="7803556" cy="3657917"/>
+          </a:xfrm>
+          <a:prstGeom prst="rect">
+            <a:avLst/>
+          </a:prstGeom>
+        </p:spPr>
+      </p:pic>
+    </p:spTree>
+    <p:extLst>
+      <p:ext uri="{BB962C8B-B14F-4D97-AF65-F5344CB8AC3E}">
+        <p14:creationId xmlns:p14="http://schemas.microsoft.com/office/powerpoint/2010/main" val="1888722007"/>
+      </p:ext>
+    </p:extLst>
+  </p:cSld>
+  <p:clrMapOvr>
+    <a:masterClrMapping/>
+  </p:clrMapOvr>
+</p:sld>
+</file>
+
 <file path=ppt/slides/slide2.xml><?xml version="1.0" encoding="utf-8"?>
+<p:sld xmlns:a="http://schemas.openxmlformats.org/drawingml/2006/main" xmlns:r="http://schemas.openxmlformats.org/officeDocument/2006/relationships" xmlns:p="http://schemas.openxmlformats.org/presentationml/2006/main">
+  <p:cSld>
+    <p:spTree>
+      <p:nvGrpSpPr>
+        <p:cNvPr id="1" name="">
+          <a:extLst>
+            <a:ext uri="{FF2B5EF4-FFF2-40B4-BE49-F238E27FC236}">
+              <a16:creationId xmlns:a16="http://schemas.microsoft.com/office/drawing/2014/main" id="{E33F3E24-5234-5DC8-21A2-C995B4489555}"/>
+            </a:ext>
+          </a:extLst>
+        </p:cNvPr>
+        <p:cNvGrpSpPr/>
+        <p:nvPr/>
+      </p:nvGrpSpPr>
+      <p:grpSpPr>
+        <a:xfrm>
+          <a:off x="0" y="0"/>
+          <a:ext cx="0" cy="0"/>
+          <a:chOff x="0" y="0"/>
+          <a:chExt cx="0" cy="0"/>
+        </a:xfrm>
+      </p:grpSpPr>
+      <p:sp>
+        <p:nvSpPr>
+          <p:cNvPr id="4" name="Нижний колонтитул 3">
+            <a:extLst>
+              <a:ext uri="{FF2B5EF4-FFF2-40B4-BE49-F238E27FC236}">
+                <a16:creationId xmlns:a16="http://schemas.microsoft.com/office/drawing/2014/main" id="{E46544D2-7801-6CF0-A011-5CF5413C1080}"/>
+              </a:ext>
+            </a:extLst>
+          </p:cNvPr>
+          <p:cNvSpPr>
+            <a:spLocks noGrp="1"/>
+          </p:cNvSpPr>
+          <p:nvPr>
+            <p:ph type="ftr" sz="quarter" idx="10"/>
+          </p:nvPr>
+        </p:nvSpPr>
+        <p:spPr/>
+        <p:txBody>
+          <a:bodyPr/>
+          <a:lstStyle/>
+          <a:p>
+            <a:pPr>
+              <a:defRPr/>
+            </a:pPr>
+            <a:r>
+              <a:rPr lang="de-DE" dirty="0"/>
+              <a:t>Oleg Kelner – University </a:t>
+            </a:r>
+            <a:r>
+              <a:rPr lang="de-DE" dirty="0" err="1"/>
+              <a:t>of</a:t>
+            </a:r>
+            <a:r>
+              <a:rPr lang="de-DE" dirty="0"/>
+              <a:t> Applied Sciences Hamm-Lippstadt</a:t>
+            </a:r>
+          </a:p>
+        </p:txBody>
+      </p:sp>
+      <p:sp>
+        <p:nvSpPr>
+          <p:cNvPr id="5" name="Дата 4">
+            <a:extLst>
+              <a:ext uri="{FF2B5EF4-FFF2-40B4-BE49-F238E27FC236}">
+                <a16:creationId xmlns:a16="http://schemas.microsoft.com/office/drawing/2014/main" id="{A07187C8-6437-1CDF-59CD-4358E6CEE9CE}"/>
+              </a:ext>
+            </a:extLst>
+          </p:cNvPr>
+          <p:cNvSpPr>
+            <a:spLocks noGrp="1"/>
+          </p:cNvSpPr>
+          <p:nvPr>
+            <p:ph type="dt" sz="half" idx="12"/>
+          </p:nvPr>
+        </p:nvSpPr>
+        <p:spPr/>
+        <p:txBody>
+          <a:bodyPr/>
+          <a:lstStyle/>
+          <a:p>
+            <a:pPr>
+              <a:defRPr/>
+            </a:pPr>
+            <a:fld id="{D1C5E747-687F-9C49-A498-1184E7908D39}" type="datetime1">
+              <a:rPr lang="de-DE" smtClean="0"/>
+              <a:t>21.06.2026</a:t>
+            </a:fld>
+            <a:endParaRPr lang="de-DE"/>
+          </a:p>
+        </p:txBody>
+      </p:sp>
+      <p:sp>
+        <p:nvSpPr>
+          <p:cNvPr id="6" name="Номер слайда 5">
+            <a:extLst>
+              <a:ext uri="{FF2B5EF4-FFF2-40B4-BE49-F238E27FC236}">
+                <a16:creationId xmlns:a16="http://schemas.microsoft.com/office/drawing/2014/main" id="{50128BED-D2AF-E573-617B-0DFE3ADD8EA5}"/>
+              </a:ext>
+            </a:extLst>
+          </p:cNvPr>
+          <p:cNvSpPr>
+            <a:spLocks noGrp="1"/>
+          </p:cNvSpPr>
+          <p:nvPr>
+            <p:ph type="sldNum" sz="quarter" idx="13"/>
+          </p:nvPr>
+        </p:nvSpPr>
+        <p:spPr/>
+        <p:txBody>
+          <a:bodyPr/>
+          <a:lstStyle/>
+          <a:p>
+            <a:pPr>
+              <a:defRPr/>
+            </a:pPr>
+            <a:r>
+              <a:rPr lang="de-DE"/>
+              <a:t>&lt; </a:t>
+            </a:r>
+            <a:fld id="{1A61C92B-C297-4AC9-B551-2D8A658A0122}" type="slidenum">
+              <a:rPr lang="de-DE" smtClean="0"/>
+              <a:pPr>
+                <a:defRPr/>
+              </a:pPr>
+              <a:t>2</a:t>
+            </a:fld>
+            <a:r>
+              <a:rPr lang="de-DE"/>
+              <a:t> &gt;</a:t>
+            </a:r>
+            <a:endParaRPr lang="de-DE" dirty="0"/>
+          </a:p>
+        </p:txBody>
+      </p:sp>
+      <p:sp>
+        <p:nvSpPr>
+          <p:cNvPr id="11" name="Заголовок 1">
+            <a:extLst>
+              <a:ext uri="{FF2B5EF4-FFF2-40B4-BE49-F238E27FC236}">
+                <a16:creationId xmlns:a16="http://schemas.microsoft.com/office/drawing/2014/main" id="{E1AB2EEC-6E03-1F7F-AC2A-3BE3209FE22B}"/>
+              </a:ext>
+            </a:extLst>
+          </p:cNvPr>
+          <p:cNvSpPr>
+            <a:spLocks noGrp="1"/>
+          </p:cNvSpPr>
+          <p:nvPr>
+            <p:ph type="ctrTitle"/>
+          </p:nvPr>
+        </p:nvSpPr>
+        <p:spPr>
+          <a:xfrm>
+            <a:off x="395536" y="188640"/>
+            <a:ext cx="7324934" cy="492443"/>
+          </a:xfrm>
+        </p:spPr>
+        <p:txBody>
+          <a:bodyPr/>
+          <a:lstStyle/>
+          <a:p>
+            <a:r>
+              <a:rPr lang="en-US" sz="3200" dirty="0"/>
+              <a:t>Algorithm</a:t>
+            </a:r>
+          </a:p>
+        </p:txBody>
+      </p:sp>
+      <mc:AlternateContent xmlns:mc="http://schemas.openxmlformats.org/markup-compatibility/2006">
+        <mc:Choice xmlns:a14="http://schemas.microsoft.com/office/drawing/2010/main" Requires="a14">
+          <p:sp>
+            <p:nvSpPr>
+              <p:cNvPr id="12" name="TextBox 11">
+                <a:extLst>
+                  <a:ext uri="{FF2B5EF4-FFF2-40B4-BE49-F238E27FC236}">
+                    <a16:creationId xmlns:a16="http://schemas.microsoft.com/office/drawing/2014/main" id="{AA0E2CCF-775B-C855-503B-5C0908E3FEFC}"/>
+                  </a:ext>
+                </a:extLst>
+              </p:cNvPr>
+              <p:cNvSpPr txBox="1"/>
+              <p:nvPr/>
+            </p:nvSpPr>
+            <p:spPr>
+              <a:xfrm>
+                <a:off x="1115715" y="1756673"/>
+                <a:ext cx="6912570" cy="3824124"/>
+              </a:xfrm>
+              <a:prstGeom prst="rect">
+                <a:avLst/>
+              </a:prstGeom>
+              <a:noFill/>
+            </p:spPr>
+            <p:txBody>
+              <a:bodyPr wrap="square" rtlCol="0">
+                <a:spAutoFit/>
+              </a:bodyPr>
+              <a:lstStyle/>
+              <a:p>
+                <a:pPr marL="285750" indent="-285750">
+                  <a:lnSpc>
+                    <a:spcPct val="150000"/>
+                  </a:lnSpc>
+                  <a:buFont typeface="Arial" panose="020B0604020202020204" pitchFamily="34" charset="0"/>
+                  <a:buChar char="•"/>
+                </a:pPr>
+                <a:r>
+                  <a:rPr lang="en-US" sz="1800" dirty="0"/>
+                  <a:t>Dynamic Sporadic Server (DSS) – proxy framework for all aperiodic tasks</a:t>
+                </a:r>
+              </a:p>
+              <a:p>
+                <a:pPr marL="285750" indent="-285750">
+                  <a:lnSpc>
+                    <a:spcPct val="150000"/>
+                  </a:lnSpc>
+                  <a:buFont typeface="Arial" panose="020B0604020202020204" pitchFamily="34" charset="0"/>
+                  <a:buChar char="•"/>
+                </a:pPr>
+                <a:r>
+                  <a:rPr lang="en-US" sz="1800" dirty="0"/>
+                  <a:t>Server </a:t>
+                </a:r>
+                <a:r>
+                  <a:rPr lang="en-US" sz="1800" i="1" dirty="0"/>
+                  <a:t>budget </a:t>
+                </a:r>
+                <a14:m>
+                  <m:oMath xmlns:m="http://schemas.openxmlformats.org/officeDocument/2006/math">
+                    <m:sSub>
+                      <m:sSubPr>
+                        <m:ctrlPr>
+                          <a:rPr lang="en-US" sz="1800" b="0" i="1" smtClean="0">
+                            <a:latin typeface="Cambria Math" panose="02040503050406030204" pitchFamily="18" charset="0"/>
+                          </a:rPr>
+                        </m:ctrlPr>
+                      </m:sSubPr>
+                      <m:e>
+                        <m:r>
+                          <a:rPr lang="en-US" sz="1800" b="0" i="1" smtClean="0">
+                            <a:latin typeface="Cambria Math" panose="02040503050406030204" pitchFamily="18" charset="0"/>
+                          </a:rPr>
+                          <m:t>𝐶</m:t>
+                        </m:r>
+                      </m:e>
+                      <m:sub>
+                        <m:r>
+                          <a:rPr lang="en-US" sz="1800" b="0" i="1" smtClean="0">
+                            <a:latin typeface="Cambria Math" panose="02040503050406030204" pitchFamily="18" charset="0"/>
+                          </a:rPr>
+                          <m:t>𝑠</m:t>
+                        </m:r>
+                      </m:sub>
+                    </m:sSub>
+                  </m:oMath>
+                </a14:m>
+                <a:r>
+                  <a:rPr lang="en-US" sz="1800" i="1" dirty="0"/>
+                  <a:t> </a:t>
+                </a:r>
+                <a:r>
+                  <a:rPr lang="en-US" sz="1800" dirty="0"/>
+                  <a:t>– the maximum execution budget</a:t>
+                </a:r>
+              </a:p>
+              <a:p>
+                <a:pPr marL="285750" indent="-285750">
+                  <a:lnSpc>
+                    <a:spcPct val="150000"/>
+                  </a:lnSpc>
+                  <a:buFont typeface="Arial" panose="020B0604020202020204" pitchFamily="34" charset="0"/>
+                  <a:buChar char="•"/>
+                </a:pPr>
+                <a:r>
+                  <a:rPr lang="en-US" sz="1800" dirty="0"/>
+                  <a:t>Period </a:t>
+                </a:r>
+                <a14:m>
+                  <m:oMath xmlns:m="http://schemas.openxmlformats.org/officeDocument/2006/math">
+                    <m:sSub>
+                      <m:sSubPr>
+                        <m:ctrlPr>
+                          <a:rPr lang="en-US" sz="1800" b="0" i="1" smtClean="0">
+                            <a:latin typeface="Cambria Math" panose="02040503050406030204" pitchFamily="18" charset="0"/>
+                          </a:rPr>
+                        </m:ctrlPr>
+                      </m:sSubPr>
+                      <m:e>
+                        <m:r>
+                          <a:rPr lang="en-US" sz="1800" b="0" i="1" smtClean="0">
+                            <a:latin typeface="Cambria Math" panose="02040503050406030204" pitchFamily="18" charset="0"/>
+                          </a:rPr>
+                          <m:t>𝑇</m:t>
+                        </m:r>
+                      </m:e>
+                      <m:sub>
+                        <m:r>
+                          <a:rPr lang="en-US" sz="1800" b="0" i="1" smtClean="0">
+                            <a:latin typeface="Cambria Math" panose="02040503050406030204" pitchFamily="18" charset="0"/>
+                          </a:rPr>
+                          <m:t>𝑠</m:t>
+                        </m:r>
+                      </m:sub>
+                    </m:sSub>
+                  </m:oMath>
+                </a14:m>
+                <a:endParaRPr lang="en-US" sz="1800" dirty="0"/>
+              </a:p>
+              <a:p>
+                <a:pPr marL="285750" indent="-285750">
+                  <a:lnSpc>
+                    <a:spcPct val="150000"/>
+                  </a:lnSpc>
+                  <a:buFont typeface="Arial" panose="020B0604020202020204" pitchFamily="34" charset="0"/>
+                  <a:buChar char="•"/>
+                </a:pPr>
+                <a:r>
+                  <a:rPr lang="en-US" sz="1800" dirty="0"/>
+                  <a:t>CPU utilization given by </a:t>
+                </a:r>
+                <a14:m>
+                  <m:oMath xmlns:m="http://schemas.openxmlformats.org/officeDocument/2006/math">
+                    <m:sSub>
+                      <m:sSubPr>
+                        <m:ctrlPr>
+                          <a:rPr lang="en-US" sz="1800" b="0" i="1" smtClean="0">
+                            <a:latin typeface="Cambria Math" panose="02040503050406030204" pitchFamily="18" charset="0"/>
+                          </a:rPr>
+                        </m:ctrlPr>
+                      </m:sSubPr>
+                      <m:e>
+                        <m:r>
+                          <a:rPr lang="en-US" sz="1800" b="0" i="1" smtClean="0">
+                            <a:latin typeface="Cambria Math" panose="02040503050406030204" pitchFamily="18" charset="0"/>
+                          </a:rPr>
+                          <m:t>𝑈</m:t>
+                        </m:r>
+                      </m:e>
+                      <m:sub>
+                        <m:r>
+                          <a:rPr lang="en-US" sz="1800" b="0" i="1" smtClean="0">
+                            <a:latin typeface="Cambria Math" panose="02040503050406030204" pitchFamily="18" charset="0"/>
+                          </a:rPr>
+                          <m:t>𝑠</m:t>
+                        </m:r>
+                      </m:sub>
+                    </m:sSub>
+                    <m:r>
+                      <a:rPr lang="en-US" sz="1800" b="0" i="1" smtClean="0">
+                        <a:latin typeface="Cambria Math" panose="02040503050406030204" pitchFamily="18" charset="0"/>
+                      </a:rPr>
+                      <m:t>=</m:t>
+                    </m:r>
+                    <m:f>
+                      <m:fPr>
+                        <m:ctrlPr>
+                          <a:rPr lang="en-US" sz="1800" b="0" i="1" smtClean="0">
+                            <a:latin typeface="Cambria Math" panose="02040503050406030204" pitchFamily="18" charset="0"/>
+                          </a:rPr>
+                        </m:ctrlPr>
+                      </m:fPr>
+                      <m:num>
+                        <m:sSub>
+                          <m:sSubPr>
+                            <m:ctrlPr>
+                              <a:rPr lang="en-US" sz="1800" b="0" i="1" smtClean="0">
+                                <a:latin typeface="Cambria Math" panose="02040503050406030204" pitchFamily="18" charset="0"/>
+                              </a:rPr>
+                            </m:ctrlPr>
+                          </m:sSubPr>
+                          <m:e>
+                            <m:r>
+                              <a:rPr lang="en-US" sz="1800" b="0" i="1" smtClean="0">
+                                <a:latin typeface="Cambria Math" panose="02040503050406030204" pitchFamily="18" charset="0"/>
+                              </a:rPr>
+                              <m:t>𝐶</m:t>
+                            </m:r>
+                          </m:e>
+                          <m:sub>
+                            <m:r>
+                              <a:rPr lang="en-US" sz="1800" b="0" i="1" smtClean="0">
+                                <a:latin typeface="Cambria Math" panose="02040503050406030204" pitchFamily="18" charset="0"/>
+                              </a:rPr>
+                              <m:t>𝑠</m:t>
+                            </m:r>
+                          </m:sub>
+                        </m:sSub>
+                      </m:num>
+                      <m:den>
+                        <m:sSub>
+                          <m:sSubPr>
+                            <m:ctrlPr>
+                              <a:rPr lang="en-US" sz="1800" b="0" i="1" smtClean="0">
+                                <a:latin typeface="Cambria Math" panose="02040503050406030204" pitchFamily="18" charset="0"/>
+                              </a:rPr>
+                            </m:ctrlPr>
+                          </m:sSubPr>
+                          <m:e>
+                            <m:r>
+                              <a:rPr lang="en-US" sz="1800" b="0" i="1" smtClean="0">
+                                <a:latin typeface="Cambria Math" panose="02040503050406030204" pitchFamily="18" charset="0"/>
+                              </a:rPr>
+                              <m:t>𝑇</m:t>
+                            </m:r>
+                          </m:e>
+                          <m:sub>
+                            <m:r>
+                              <a:rPr lang="en-US" sz="1800" b="0" i="1" smtClean="0">
+                                <a:latin typeface="Cambria Math" panose="02040503050406030204" pitchFamily="18" charset="0"/>
+                              </a:rPr>
+                              <m:t>𝑠</m:t>
+                            </m:r>
+                          </m:sub>
+                        </m:sSub>
+                      </m:den>
+                    </m:f>
+                  </m:oMath>
+                </a14:m>
+                <a:endParaRPr lang="en-US" sz="1800" dirty="0"/>
+              </a:p>
+              <a:p>
+                <a:pPr marL="285750" indent="-285750">
+                  <a:lnSpc>
+                    <a:spcPct val="150000"/>
+                  </a:lnSpc>
+                  <a:buFont typeface="Arial" panose="020B0604020202020204" pitchFamily="34" charset="0"/>
+                  <a:buChar char="•"/>
+                </a:pPr>
+                <a:r>
+                  <a:rPr lang="en-US" sz="1800" dirty="0"/>
+                  <a:t>Deadline Assignment:	</a:t>
+                </a:r>
+                <a14:m>
+                  <m:oMath xmlns:m="http://schemas.openxmlformats.org/officeDocument/2006/math">
+                    <m:r>
+                      <a:rPr lang="en-US" sz="1800" i="1" dirty="0" smtClean="0">
+                        <a:latin typeface="Cambria Math" panose="02040503050406030204" pitchFamily="18" charset="0"/>
+                      </a:rPr>
+                      <m:t>𝑑</m:t>
+                    </m:r>
+                    <m:r>
+                      <a:rPr lang="en-US" sz="1800" i="1" dirty="0" smtClean="0">
+                        <a:latin typeface="Cambria Math" panose="02040503050406030204" pitchFamily="18" charset="0"/>
+                      </a:rPr>
+                      <m:t>=</m:t>
+                    </m:r>
+                    <m:r>
+                      <a:rPr lang="en-US" sz="1800" i="1" dirty="0" smtClean="0">
+                        <a:latin typeface="Cambria Math" panose="02040503050406030204" pitchFamily="18" charset="0"/>
+                      </a:rPr>
+                      <m:t>𝑡</m:t>
+                    </m:r>
+                    <m:r>
+                      <a:rPr lang="en-US" sz="1800" i="1" dirty="0" smtClean="0">
+                        <a:latin typeface="Cambria Math" panose="02040503050406030204" pitchFamily="18" charset="0"/>
+                      </a:rPr>
+                      <m:t>+</m:t>
+                    </m:r>
+                    <m:sSub>
+                      <m:sSubPr>
+                        <m:ctrlPr>
+                          <a:rPr lang="en-US" sz="1800" b="0" i="1" dirty="0" smtClean="0">
+                            <a:latin typeface="Cambria Math" panose="02040503050406030204" pitchFamily="18" charset="0"/>
+                          </a:rPr>
+                        </m:ctrlPr>
+                      </m:sSubPr>
+                      <m:e>
+                        <m:r>
+                          <a:rPr lang="en-US" sz="1800" i="1" dirty="0" smtClean="0">
+                            <a:latin typeface="Cambria Math" panose="02040503050406030204" pitchFamily="18" charset="0"/>
+                          </a:rPr>
+                          <m:t>𝑇</m:t>
+                        </m:r>
+                      </m:e>
+                      <m:sub>
+                        <m:r>
+                          <a:rPr lang="en-US" sz="1800" i="1" dirty="0" smtClean="0">
+                            <a:latin typeface="Cambria Math" panose="02040503050406030204" pitchFamily="18" charset="0"/>
+                          </a:rPr>
+                          <m:t>𝑠</m:t>
+                        </m:r>
+                      </m:sub>
+                    </m:sSub>
+                    <m:r>
+                      <a:rPr lang="en-US" sz="1800" i="1" dirty="0" smtClean="0">
+                        <a:latin typeface="Cambria Math" panose="02040503050406030204" pitchFamily="18" charset="0"/>
+                      </a:rPr>
+                      <m:t> </m:t>
+                    </m:r>
+                  </m:oMath>
+                </a14:m>
+                <a:r>
+                  <a:rPr lang="en-US" sz="1800" dirty="0"/>
+                  <a:t> and </a:t>
+                </a:r>
+                <a14:m>
+                  <m:oMath xmlns:m="http://schemas.openxmlformats.org/officeDocument/2006/math">
+                    <m:r>
+                      <a:rPr lang="en-US" sz="1800" b="0" i="1" smtClean="0">
+                        <a:latin typeface="Cambria Math" panose="02040503050406030204" pitchFamily="18" charset="0"/>
+                      </a:rPr>
+                      <m:t>→</m:t>
+                    </m:r>
+                  </m:oMath>
+                </a14:m>
+                <a:r>
+                  <a:rPr lang="en-US" sz="1800" dirty="0"/>
+                  <a:t> EDF</a:t>
+                </a:r>
+              </a:p>
+              <a:p>
+                <a:pPr marL="285750" indent="-285750">
+                  <a:lnSpc>
+                    <a:spcPct val="150000"/>
+                  </a:lnSpc>
+                  <a:buFont typeface="Arial" panose="020B0604020202020204" pitchFamily="34" charset="0"/>
+                  <a:buChar char="•"/>
+                </a:pPr>
+                <a:r>
+                  <a:rPr lang="en-US" sz="1800" dirty="0" err="1"/>
+                  <a:t>Schedulability</a:t>
+                </a:r>
+                <a:r>
+                  <a:rPr lang="en-US" sz="1800" dirty="0"/>
+                  <a:t> Analysis: </a:t>
+                </a:r>
+                <a14:m>
+                  <m:oMath xmlns:m="http://schemas.openxmlformats.org/officeDocument/2006/math">
+                    <m:sSub>
+                      <m:sSubPr>
+                        <m:ctrlPr>
+                          <a:rPr lang="en-US" sz="1800" b="0" i="1" dirty="0" smtClean="0">
+                            <a:latin typeface="Cambria Math" panose="02040503050406030204" pitchFamily="18" charset="0"/>
+                          </a:rPr>
+                        </m:ctrlPr>
+                      </m:sSubPr>
+                      <m:e>
+                        <m:r>
+                          <a:rPr lang="en-US" sz="1800" i="1" dirty="0" smtClean="0">
+                            <a:latin typeface="Cambria Math" panose="02040503050406030204" pitchFamily="18" charset="0"/>
+                          </a:rPr>
+                          <m:t>𝑈</m:t>
+                        </m:r>
+                      </m:e>
+                      <m:sub>
+                        <m:r>
+                          <a:rPr lang="en-US" sz="1800" i="1" dirty="0" smtClean="0">
+                            <a:latin typeface="Cambria Math" panose="02040503050406030204" pitchFamily="18" charset="0"/>
+                          </a:rPr>
+                          <m:t>𝑝</m:t>
+                        </m:r>
+                      </m:sub>
+                    </m:sSub>
+                    <m:r>
+                      <a:rPr lang="en-US" sz="1800" i="1" dirty="0" smtClean="0">
+                        <a:latin typeface="Cambria Math" panose="02040503050406030204" pitchFamily="18" charset="0"/>
+                      </a:rPr>
+                      <m:t>+</m:t>
+                    </m:r>
+                    <m:sSub>
+                      <m:sSubPr>
+                        <m:ctrlPr>
+                          <a:rPr lang="en-US" sz="1800" b="0" i="1" dirty="0" smtClean="0">
+                            <a:latin typeface="Cambria Math" panose="02040503050406030204" pitchFamily="18" charset="0"/>
+                          </a:rPr>
+                        </m:ctrlPr>
+                      </m:sSubPr>
+                      <m:e>
+                        <m:r>
+                          <a:rPr lang="en-US" sz="1800" b="0" i="1" dirty="0" smtClean="0">
+                            <a:latin typeface="Cambria Math" panose="02040503050406030204" pitchFamily="18" charset="0"/>
+                          </a:rPr>
+                          <m:t>𝑈</m:t>
+                        </m:r>
+                      </m:e>
+                      <m:sub>
+                        <m:r>
+                          <a:rPr lang="en-US" sz="1800" i="1" dirty="0" smtClean="0">
+                            <a:latin typeface="Cambria Math" panose="02040503050406030204" pitchFamily="18" charset="0"/>
+                          </a:rPr>
+                          <m:t>𝑠</m:t>
+                        </m:r>
+                      </m:sub>
+                    </m:sSub>
+                    <m:r>
+                      <a:rPr lang="en-US" sz="1800" i="1" dirty="0" smtClean="0">
+                        <a:latin typeface="Cambria Math" panose="02040503050406030204" pitchFamily="18" charset="0"/>
+                      </a:rPr>
+                      <m:t>≤1</m:t>
+                    </m:r>
+                  </m:oMath>
+                </a14:m>
+              </a:p>
+              <a:p>
+                <a:pPr marL="285750" indent="-285750">
+                  <a:lnSpc>
+                    <a:spcPct val="150000"/>
+                  </a:lnSpc>
+                  <a:buFont typeface="Arial" panose="020B0604020202020204" pitchFamily="34" charset="0"/>
+                  <a:buChar char="•"/>
+                </a:pPr>
+                <a:endParaRPr lang="en-US" sz="1800" i="1" dirty="0"/>
+              </a:p>
+            </p:txBody>
+          </p:sp>
+        </mc:Choice>
+        <mc:Fallback>
+          <p:sp>
+            <p:nvSpPr>
+              <p:cNvPr id="12" name="TextBox 11">
+                <a:extLst>
+                  <a:ext uri="{FF2B5EF4-FFF2-40B4-BE49-F238E27FC236}">
+                    <a16:creationId xmlns:a16="http://schemas.microsoft.com/office/drawing/2014/main" id="{AA0E2CCF-775B-C855-503B-5C0908E3FEFC}"/>
+                  </a:ext>
+                </a:extLst>
+              </p:cNvPr>
+              <p:cNvSpPr txBox="1">
+                <a:spLocks noRot="1" noChangeAspect="1" noMove="1" noResize="1" noEditPoints="1" noAdjustHandles="1" noChangeArrowheads="1" noChangeShapeType="1" noTextEdit="1"/>
+              </p:cNvSpPr>
+              <p:nvPr/>
+            </p:nvSpPr>
+            <p:spPr>
+              <a:xfrm>
+                <a:off x="1115715" y="1756673"/>
+                <a:ext cx="6912570" cy="3824124"/>
+              </a:xfrm>
+              <a:prstGeom prst="rect">
+                <a:avLst/>
+              </a:prstGeom>
+              <a:blipFill>
+                <a:blip r:embed="rId2"/>
+                <a:stretch>
+                  <a:fillRect/>
+                </a:stretch>
+              </a:blipFill>
+            </p:spPr>
+            <p:txBody>
+              <a:bodyPr/>
+              <a:lstStyle/>
+              <a:p>
+                <a:r>
+                  <a:rPr lang="en-US">
+                    <a:noFill/>
+                  </a:rPr>
+                  <a:t> </a:t>
+                </a:r>
+              </a:p>
+            </p:txBody>
+          </p:sp>
+        </mc:Fallback>
+      </mc:AlternateContent>
+    </p:spTree>
+    <p:extLst>
+      <p:ext uri="{BB962C8B-B14F-4D97-AF65-F5344CB8AC3E}">
+        <p14:creationId xmlns:p14="http://schemas.microsoft.com/office/powerpoint/2010/main" val="773067824"/>
+      </p:ext>
+    </p:extLst>
+  </p:cSld>
+  <p:clrMapOvr>
+    <a:masterClrMapping/>
+  </p:clrMapOvr>
+</p:sld>
+</file>
+
+<file path=ppt/slides/slide3.xml><?xml version="1.0" encoding="utf-8"?>
+<p:sld xmlns:a="http://schemas.openxmlformats.org/drawingml/2006/main" xmlns:r="http://schemas.openxmlformats.org/officeDocument/2006/relationships" xmlns:p="http://schemas.openxmlformats.org/presentationml/2006/main">
+  <p:cSld>
+    <p:spTree>
+      <p:nvGrpSpPr>
+        <p:cNvPr id="1" name="">
+          <a:extLst>
+            <a:ext uri="{FF2B5EF4-FFF2-40B4-BE49-F238E27FC236}">
+              <a16:creationId xmlns:a16="http://schemas.microsoft.com/office/drawing/2014/main" id="{9B426BE5-E4BB-1C21-0865-2698E5786EC5}"/>
+            </a:ext>
+          </a:extLst>
+        </p:cNvPr>
+        <p:cNvGrpSpPr/>
+        <p:nvPr/>
+      </p:nvGrpSpPr>
+      <p:grpSpPr>
+        <a:xfrm>
+          <a:off x="0" y="0"/>
+          <a:ext cx="0" cy="0"/>
+          <a:chOff x="0" y="0"/>
+          <a:chExt cx="0" cy="0"/>
+        </a:xfrm>
+      </p:grpSpPr>
+      <p:sp>
+        <p:nvSpPr>
+          <p:cNvPr id="4" name="Нижний колонтитул 3">
+            <a:extLst>
+              <a:ext uri="{FF2B5EF4-FFF2-40B4-BE49-F238E27FC236}">
+                <a16:creationId xmlns:a16="http://schemas.microsoft.com/office/drawing/2014/main" id="{61C57BE0-A40F-1DDA-2802-1E7F9ED2A50E}"/>
+              </a:ext>
+            </a:extLst>
+          </p:cNvPr>
+          <p:cNvSpPr>
+            <a:spLocks noGrp="1"/>
+          </p:cNvSpPr>
+          <p:nvPr>
+            <p:ph type="ftr" sz="quarter" idx="10"/>
+          </p:nvPr>
+        </p:nvSpPr>
+        <p:spPr/>
+        <p:txBody>
+          <a:bodyPr/>
+          <a:lstStyle/>
+          <a:p>
+            <a:pPr>
+              <a:defRPr/>
+            </a:pPr>
+            <a:r>
+              <a:rPr lang="de-DE" dirty="0"/>
+              <a:t>Oleg Kelner – University </a:t>
+            </a:r>
+            <a:r>
+              <a:rPr lang="de-DE" dirty="0" err="1"/>
+              <a:t>of</a:t>
+            </a:r>
+            <a:r>
+              <a:rPr lang="de-DE" dirty="0"/>
+              <a:t> Applied Sciences Hamm-Lippstadt</a:t>
+            </a:r>
+          </a:p>
+        </p:txBody>
+      </p:sp>
+      <p:sp>
+        <p:nvSpPr>
+          <p:cNvPr id="5" name="Дата 4">
+            <a:extLst>
+              <a:ext uri="{FF2B5EF4-FFF2-40B4-BE49-F238E27FC236}">
+                <a16:creationId xmlns:a16="http://schemas.microsoft.com/office/drawing/2014/main" id="{C504B3E1-77B3-67B4-D25D-CC1B9B37FF9F}"/>
+              </a:ext>
+            </a:extLst>
+          </p:cNvPr>
+          <p:cNvSpPr>
+            <a:spLocks noGrp="1"/>
+          </p:cNvSpPr>
+          <p:nvPr>
+            <p:ph type="dt" sz="half" idx="12"/>
+          </p:nvPr>
+        </p:nvSpPr>
+        <p:spPr/>
+        <p:txBody>
+          <a:bodyPr/>
+          <a:lstStyle/>
+          <a:p>
+            <a:pPr>
+              <a:defRPr/>
+            </a:pPr>
+            <a:fld id="{D1C5E747-687F-9C49-A498-1184E7908D39}" type="datetime1">
+              <a:rPr lang="de-DE" smtClean="0"/>
+              <a:t>21.06.2026</a:t>
+            </a:fld>
+            <a:endParaRPr lang="de-DE"/>
+          </a:p>
+        </p:txBody>
+      </p:sp>
+      <p:sp>
+        <p:nvSpPr>
+          <p:cNvPr id="6" name="Номер слайда 5">
+            <a:extLst>
+              <a:ext uri="{FF2B5EF4-FFF2-40B4-BE49-F238E27FC236}">
+                <a16:creationId xmlns:a16="http://schemas.microsoft.com/office/drawing/2014/main" id="{4196731F-2A22-DC92-C7A4-1104DE5BFABA}"/>
+              </a:ext>
+            </a:extLst>
+          </p:cNvPr>
+          <p:cNvSpPr>
+            <a:spLocks noGrp="1"/>
+          </p:cNvSpPr>
+          <p:nvPr>
+            <p:ph type="sldNum" sz="quarter" idx="13"/>
+          </p:nvPr>
+        </p:nvSpPr>
+        <p:spPr/>
+        <p:txBody>
+          <a:bodyPr/>
+          <a:lstStyle/>
+          <a:p>
+            <a:pPr>
+              <a:defRPr/>
+            </a:pPr>
+            <a:r>
+              <a:rPr lang="de-DE"/>
+              <a:t>&lt; </a:t>
+            </a:r>
+            <a:fld id="{1A61C92B-C297-4AC9-B551-2D8A658A0122}" type="slidenum">
+              <a:rPr lang="de-DE" smtClean="0"/>
+              <a:pPr>
+                <a:defRPr/>
+              </a:pPr>
+              <a:t>3</a:t>
+            </a:fld>
+            <a:r>
+              <a:rPr lang="de-DE"/>
+              <a:t> &gt;</a:t>
+            </a:r>
+            <a:endParaRPr lang="de-DE" dirty="0"/>
+          </a:p>
+        </p:txBody>
+      </p:sp>
+      <p:sp>
+        <p:nvSpPr>
+          <p:cNvPr id="11" name="Заголовок 1">
+            <a:extLst>
+              <a:ext uri="{FF2B5EF4-FFF2-40B4-BE49-F238E27FC236}">
+                <a16:creationId xmlns:a16="http://schemas.microsoft.com/office/drawing/2014/main" id="{3CCA5C36-2975-E5B1-B55B-BDB2F4D3CB4C}"/>
+              </a:ext>
+            </a:extLst>
+          </p:cNvPr>
+          <p:cNvSpPr>
+            <a:spLocks noGrp="1"/>
+          </p:cNvSpPr>
+          <p:nvPr>
+            <p:ph type="ctrTitle"/>
+          </p:nvPr>
+        </p:nvSpPr>
+        <p:spPr>
+          <a:xfrm>
+            <a:off x="395536" y="188640"/>
+            <a:ext cx="7324934" cy="492443"/>
+          </a:xfrm>
+        </p:spPr>
+        <p:txBody>
+          <a:bodyPr/>
+          <a:lstStyle/>
+          <a:p>
+            <a:r>
+              <a:rPr lang="en-US" sz="3200" dirty="0"/>
+              <a:t>State Transitions</a:t>
+            </a:r>
+          </a:p>
+        </p:txBody>
+      </p:sp>
+      <mc:AlternateContent xmlns:mc="http://schemas.openxmlformats.org/markup-compatibility/2006">
+        <mc:Choice xmlns:a14="http://schemas.microsoft.com/office/drawing/2010/main" Requires="a14">
+          <p:sp>
+            <p:nvSpPr>
+              <p:cNvPr id="12" name="TextBox 11">
+                <a:extLst>
+                  <a:ext uri="{FF2B5EF4-FFF2-40B4-BE49-F238E27FC236}">
+                    <a16:creationId xmlns:a16="http://schemas.microsoft.com/office/drawing/2014/main" id="{A81C7CCB-AF99-C681-3B52-15377CBD15F1}"/>
+                  </a:ext>
+                </a:extLst>
+              </p:cNvPr>
+              <p:cNvSpPr txBox="1"/>
+              <p:nvPr/>
+            </p:nvSpPr>
+            <p:spPr>
+              <a:xfrm>
+                <a:off x="1115715" y="1736812"/>
+                <a:ext cx="6912570" cy="3595856"/>
+              </a:xfrm>
+              <a:prstGeom prst="rect">
+                <a:avLst/>
+              </a:prstGeom>
+              <a:noFill/>
+            </p:spPr>
+            <p:txBody>
+              <a:bodyPr wrap="square" rtlCol="0">
+                <a:spAutoFit/>
+              </a:bodyPr>
+              <a:lstStyle/>
+              <a:p>
+                <a:pPr marL="285750" indent="-285750">
+                  <a:lnSpc>
+                    <a:spcPct val="150000"/>
+                  </a:lnSpc>
+                  <a:buFont typeface="Arial" panose="020B0604020202020204" pitchFamily="34" charset="0"/>
+                  <a:buChar char="•"/>
+                </a:pPr>
+                <a:r>
+                  <a:rPr lang="en-US" sz="1800" b="1" dirty="0"/>
+                  <a:t>IDLE </a:t>
+                </a:r>
+                <a14:m>
+                  <m:oMath xmlns:m="http://schemas.openxmlformats.org/officeDocument/2006/math">
+                    <m:r>
+                      <a:rPr lang="en-US" sz="1800" b="1" i="1" smtClean="0">
+                        <a:latin typeface="Cambria Math" panose="02040503050406030204" pitchFamily="18" charset="0"/>
+                      </a:rPr>
+                      <m:t>→</m:t>
+                    </m:r>
+                  </m:oMath>
+                </a14:m>
+                <a:r>
+                  <a:rPr lang="en-US" sz="1800" b="1" dirty="0"/>
+                  <a:t> READY: </a:t>
+                </a:r>
+              </a:p>
+              <a:p>
+                <a:pPr lvl="1">
+                  <a:lnSpc>
+                    <a:spcPct val="150000"/>
+                  </a:lnSpc>
+                </a:pPr>
+                <a14:m>
+                  <m:oMath xmlns:m="http://schemas.openxmlformats.org/officeDocument/2006/math">
+                    <m:r>
+                      <m:rPr>
+                        <m:nor/>
+                      </m:rPr>
+                      <a:rPr lang="en-US" sz="1800" dirty="0"/>
+                      <m:t>if</m:t>
+                    </m:r>
+                    <m:r>
+                      <m:rPr>
+                        <m:nor/>
+                      </m:rPr>
+                      <a:rPr lang="en-US" sz="1800" dirty="0"/>
+                      <m:t>(</m:t>
+                    </m:r>
+                    <m:sSub>
+                      <m:sSubPr>
+                        <m:ctrlPr>
+                          <a:rPr lang="en-US" sz="1800" i="1" dirty="0">
+                            <a:latin typeface="Cambria Math" panose="02040503050406030204" pitchFamily="18" charset="0"/>
+                          </a:rPr>
+                        </m:ctrlPr>
+                      </m:sSubPr>
+                      <m:e>
+                        <m:r>
+                          <a:rPr lang="en-US" sz="1800" i="1" dirty="0">
+                            <a:latin typeface="Cambria Math" panose="02040503050406030204" pitchFamily="18" charset="0"/>
+                          </a:rPr>
+                          <m:t>𝐶</m:t>
+                        </m:r>
+                      </m:e>
+                      <m:sub>
+                        <m:r>
+                          <a:rPr lang="en-US" sz="1800" i="1" dirty="0">
+                            <a:latin typeface="Cambria Math" panose="02040503050406030204" pitchFamily="18" charset="0"/>
+                          </a:rPr>
+                          <m:t>𝑠</m:t>
+                        </m:r>
+                      </m:sub>
+                    </m:sSub>
+                    <m:r>
+                      <a:rPr lang="en-US" sz="1800" i="1" dirty="0">
+                        <a:latin typeface="Cambria Math" panose="02040503050406030204" pitchFamily="18" charset="0"/>
+                      </a:rPr>
+                      <m:t> &gt; 0</m:t>
+                    </m:r>
+                    <m:r>
+                      <a:rPr lang="en-US" sz="1800" b="0" i="1" dirty="0" smtClean="0">
+                        <a:latin typeface="Cambria Math" panose="02040503050406030204" pitchFamily="18" charset="0"/>
+                      </a:rPr>
+                      <m:t> &amp;&amp; </m:t>
+                    </m:r>
+                    <m:r>
+                      <a:rPr lang="en-US" sz="1800" b="0" i="1" dirty="0" smtClean="0">
+                        <a:latin typeface="Cambria Math" panose="02040503050406030204" pitchFamily="18" charset="0"/>
+                      </a:rPr>
+                      <m:t>𝑝𝑒𝑛𝑑𝑖𝑛𝑔</m:t>
+                    </m:r>
+                    <m:r>
+                      <a:rPr lang="en-US" sz="1800" b="0" i="1" dirty="0" smtClean="0">
+                        <a:latin typeface="Cambria Math" panose="02040503050406030204" pitchFamily="18" charset="0"/>
+                      </a:rPr>
+                      <m:t>_</m:t>
+                    </m:r>
+                    <m:r>
+                      <a:rPr lang="en-US" sz="1800" b="0" i="1" dirty="0" smtClean="0">
+                        <a:latin typeface="Cambria Math" panose="02040503050406030204" pitchFamily="18" charset="0"/>
+                      </a:rPr>
+                      <m:t>𝑡𝑎𝑠𝑘</m:t>
+                    </m:r>
+                    <m:r>
+                      <a:rPr lang="en-US" sz="1800" b="0" i="1" dirty="0" smtClean="0">
+                        <a:latin typeface="Cambria Math" panose="02040503050406030204" pitchFamily="18" charset="0"/>
+                      </a:rPr>
+                      <m:t>()</m:t>
+                    </m:r>
+                  </m:oMath>
+                </a14:m>
+                <a:r>
+                  <a:rPr lang="en-US" sz="1800" dirty="0"/>
+                  <a:t>)</a:t>
+                </a:r>
+              </a:p>
+              <a:p>
+                <a:pPr lvl="2">
+                  <a:lnSpc>
+                    <a:spcPct val="150000"/>
+                  </a:lnSpc>
+                </a:pPr>
+                <a14:m>
+                  <m:oMath xmlns:m="http://schemas.openxmlformats.org/officeDocument/2006/math">
+                    <m:r>
+                      <a:rPr lang="en-US" sz="1800" i="1" dirty="0" smtClean="0">
+                        <a:latin typeface="Cambria Math" panose="02040503050406030204" pitchFamily="18" charset="0"/>
+                      </a:rPr>
+                      <m:t>𝑑</m:t>
+                    </m:r>
+                    <m:r>
+                      <a:rPr lang="en-US" sz="1800" i="1" dirty="0" smtClean="0">
+                        <a:latin typeface="Cambria Math" panose="02040503050406030204" pitchFamily="18" charset="0"/>
+                      </a:rPr>
+                      <m:t> =</m:t>
+                    </m:r>
+                    <m:r>
+                      <a:rPr lang="en-US" sz="1800" i="1" dirty="0" smtClean="0">
+                        <a:latin typeface="Cambria Math" panose="02040503050406030204" pitchFamily="18" charset="0"/>
+                      </a:rPr>
+                      <m:t>𝑡</m:t>
+                    </m:r>
+                    <m:r>
+                      <a:rPr lang="en-US" sz="1800" i="1" dirty="0" smtClean="0">
+                        <a:latin typeface="Cambria Math" panose="02040503050406030204" pitchFamily="18" charset="0"/>
+                      </a:rPr>
+                      <m:t> + </m:t>
+                    </m:r>
+                    <m:sSub>
+                      <m:sSubPr>
+                        <m:ctrlPr>
+                          <a:rPr lang="en-US" sz="1800" b="0" i="1" dirty="0" smtClean="0">
+                            <a:latin typeface="Cambria Math" panose="02040503050406030204" pitchFamily="18" charset="0"/>
+                          </a:rPr>
+                        </m:ctrlPr>
+                      </m:sSubPr>
+                      <m:e>
+                        <m:r>
+                          <a:rPr lang="en-US" sz="1800" i="1" dirty="0">
+                            <a:latin typeface="Cambria Math" panose="02040503050406030204" pitchFamily="18" charset="0"/>
+                          </a:rPr>
+                          <m:t>𝑇</m:t>
+                        </m:r>
+                      </m:e>
+                      <m:sub>
+                        <m:r>
+                          <a:rPr lang="en-US" sz="1800" i="1" dirty="0">
+                            <a:latin typeface="Cambria Math" panose="02040503050406030204" pitchFamily="18" charset="0"/>
+                          </a:rPr>
+                          <m:t>𝑠</m:t>
+                        </m:r>
+                      </m:sub>
+                    </m:sSub>
+                  </m:oMath>
+                </a14:m>
+                <a:r>
+                  <a:rPr lang="en-US" sz="1800" dirty="0"/>
+                  <a:t>; </a:t>
+                </a:r>
+              </a:p>
+              <a:p>
+                <a:pPr marL="285750" indent="-285750">
+                  <a:lnSpc>
+                    <a:spcPct val="150000"/>
+                  </a:lnSpc>
+                  <a:buFont typeface="Arial" panose="020B0604020202020204" pitchFamily="34" charset="0"/>
+                  <a:buChar char="•"/>
+                </a:pPr>
+                <a:r>
+                  <a:rPr lang="en-US" sz="1800" b="1" dirty="0"/>
+                  <a:t>READY </a:t>
+                </a:r>
+                <a14:m>
+                  <m:oMath xmlns:m="http://schemas.openxmlformats.org/officeDocument/2006/math">
+                    <m:r>
+                      <a:rPr lang="en-US" sz="1800" b="1" i="1">
+                        <a:latin typeface="Cambria Math" panose="02040503050406030204" pitchFamily="18" charset="0"/>
+                      </a:rPr>
+                      <m:t>→ </m:t>
+                    </m:r>
+                  </m:oMath>
+                </a14:m>
+                <a:r>
+                  <a:rPr lang="en-US" sz="1800" b="1" dirty="0"/>
+                  <a:t>EXE: </a:t>
+                </a:r>
+                <a:r>
+                  <a:rPr lang="en-US" sz="1800" dirty="0"/>
+                  <a:t>according to EDF</a:t>
+                </a:r>
+              </a:p>
+              <a:p>
+                <a:pPr marL="285750" indent="-285750">
+                  <a:lnSpc>
+                    <a:spcPct val="150000"/>
+                  </a:lnSpc>
+                  <a:buFont typeface="Arial" panose="020B0604020202020204" pitchFamily="34" charset="0"/>
+                  <a:buChar char="•"/>
+                </a:pPr>
+                <a:r>
+                  <a:rPr lang="en-US" sz="1800" b="1" dirty="0"/>
+                  <a:t>EXE </a:t>
+                </a:r>
+                <a14:m>
+                  <m:oMath xmlns:m="http://schemas.openxmlformats.org/officeDocument/2006/math">
+                    <m:r>
+                      <a:rPr lang="en-US" sz="1800" b="1" i="1">
+                        <a:latin typeface="Cambria Math" panose="02040503050406030204" pitchFamily="18" charset="0"/>
+                      </a:rPr>
+                      <m:t>→ </m:t>
+                    </m:r>
+                  </m:oMath>
+                </a14:m>
+                <a:r>
+                  <a:rPr lang="en-US" sz="1800" b="1" dirty="0"/>
+                  <a:t>READY: </a:t>
+                </a:r>
+                <a:r>
+                  <a:rPr lang="en-US" sz="1800" dirty="0"/>
+                  <a:t>server is preempted by a periodic task with a shorter deadline.</a:t>
+                </a:r>
+              </a:p>
+              <a:p>
+                <a:pPr marL="285750" indent="-285750">
+                  <a:lnSpc>
+                    <a:spcPct val="150000"/>
+                  </a:lnSpc>
+                  <a:buFont typeface="Arial" panose="020B0604020202020204" pitchFamily="34" charset="0"/>
+                  <a:buChar char="•"/>
+                </a:pPr>
+                <a:r>
+                  <a:rPr lang="en-US" sz="1800" b="1" dirty="0"/>
+                  <a:t>EXE </a:t>
+                </a:r>
+                <a14:m>
+                  <m:oMath xmlns:m="http://schemas.openxmlformats.org/officeDocument/2006/math">
+                    <m:r>
+                      <a:rPr lang="en-US" sz="1800" b="1" i="1">
+                        <a:latin typeface="Cambria Math" panose="02040503050406030204" pitchFamily="18" charset="0"/>
+                      </a:rPr>
+                      <m:t>→ </m:t>
+                    </m:r>
+                  </m:oMath>
+                </a14:m>
+                <a:r>
+                  <a:rPr lang="en-US" sz="1800" b="1" dirty="0"/>
+                  <a:t>IDLE: </a:t>
+                </a:r>
+                <a:endParaRPr lang="en-US" sz="1800" dirty="0"/>
+              </a:p>
+              <a:p>
+                <a:pPr lvl="1">
+                  <a:lnSpc>
+                    <a:spcPct val="150000"/>
+                  </a:lnSpc>
+                </a:pPr>
+                <a:r>
+                  <a:rPr lang="en-US" sz="1800" dirty="0"/>
+                  <a:t>if</a:t>
+                </a:r>
+                <a14:m>
+                  <m:oMath xmlns:m="http://schemas.openxmlformats.org/officeDocument/2006/math">
+                    <m:r>
+                      <a:rPr lang="en-US" sz="1800" i="1" dirty="0" smtClean="0">
+                        <a:latin typeface="Cambria Math" panose="02040503050406030204" pitchFamily="18" charset="0"/>
+                      </a:rPr>
+                      <m:t>(</m:t>
+                    </m:r>
+                    <m:sSub>
+                      <m:sSubPr>
+                        <m:ctrlPr>
+                          <a:rPr lang="en-US" sz="1800" i="1" dirty="0">
+                            <a:latin typeface="Cambria Math" panose="02040503050406030204" pitchFamily="18" charset="0"/>
+                          </a:rPr>
+                        </m:ctrlPr>
+                      </m:sSubPr>
+                      <m:e>
+                        <m:r>
+                          <a:rPr lang="en-US" sz="1800" i="1" dirty="0">
+                            <a:latin typeface="Cambria Math" panose="02040503050406030204" pitchFamily="18" charset="0"/>
+                          </a:rPr>
+                          <m:t>𝐶</m:t>
+                        </m:r>
+                      </m:e>
+                      <m:sub>
+                        <m:r>
+                          <a:rPr lang="en-US" sz="1800" i="1" dirty="0">
+                            <a:latin typeface="Cambria Math" panose="02040503050406030204" pitchFamily="18" charset="0"/>
+                          </a:rPr>
+                          <m:t>𝑠</m:t>
+                        </m:r>
+                      </m:sub>
+                    </m:sSub>
+                    <m:r>
+                      <a:rPr lang="en-US" sz="1800" i="1" dirty="0">
+                        <a:latin typeface="Cambria Math" panose="02040503050406030204" pitchFamily="18" charset="0"/>
+                      </a:rPr>
+                      <m:t>= 0</m:t>
+                    </m:r>
+                    <m:r>
+                      <a:rPr lang="en-US" sz="1800" b="0" i="1" dirty="0" smtClean="0">
+                        <a:latin typeface="Cambria Math" panose="02040503050406030204" pitchFamily="18" charset="0"/>
+                      </a:rPr>
+                      <m:t> </m:t>
+                    </m:r>
+                    <m:r>
+                      <a:rPr lang="en-US" sz="1800" b="0" i="1" dirty="0" smtClean="0">
+                        <a:latin typeface="Cambria Math" panose="02040503050406030204" pitchFamily="18" charset="0"/>
+                      </a:rPr>
+                      <m:t>𝑂𝑅</m:t>
+                    </m:r>
+                    <m:r>
+                      <a:rPr lang="en-US" sz="1800" b="0" i="1" dirty="0" smtClean="0">
+                        <a:latin typeface="Cambria Math" panose="02040503050406030204" pitchFamily="18" charset="0"/>
+                      </a:rPr>
+                      <m:t> </m:t>
+                    </m:r>
+                    <m:r>
+                      <a:rPr lang="en-US" sz="1800" i="1" dirty="0" err="1" smtClean="0">
+                        <a:latin typeface="Cambria Math" panose="02040503050406030204" pitchFamily="18" charset="0"/>
+                      </a:rPr>
+                      <m:t>𝑡𝑎𝑠</m:t>
+                    </m:r>
+                    <m:r>
+                      <a:rPr lang="en-US" sz="1800" b="0" i="1" dirty="0" smtClean="0">
+                        <a:latin typeface="Cambria Math" panose="02040503050406030204" pitchFamily="18" charset="0"/>
+                      </a:rPr>
+                      <m:t>𝑘</m:t>
+                    </m:r>
+                    <m:r>
+                      <a:rPr lang="en-US" sz="1800" b="0" i="1" dirty="0" smtClean="0">
+                        <a:latin typeface="Cambria Math" panose="02040503050406030204" pitchFamily="18" charset="0"/>
+                      </a:rPr>
+                      <m:t>_</m:t>
+                    </m:r>
+                    <m:r>
+                      <a:rPr lang="en-US" sz="1800" b="0" i="1" dirty="0" smtClean="0">
+                        <a:latin typeface="Cambria Math" panose="02040503050406030204" pitchFamily="18" charset="0"/>
+                      </a:rPr>
+                      <m:t>𝑑𝑜𝑛𝑒</m:t>
+                    </m:r>
+                    <m:r>
+                      <a:rPr lang="en-US" sz="1800" b="0" i="1" dirty="0" smtClean="0">
+                        <a:latin typeface="Cambria Math" panose="02040503050406030204" pitchFamily="18" charset="0"/>
+                      </a:rPr>
+                      <m:t>())</m:t>
+                    </m:r>
+                  </m:oMath>
+                </a14:m>
+                <a:endParaRPr lang="en-US" sz="1800" dirty="0"/>
+              </a:p>
+            </p:txBody>
+          </p:sp>
+        </mc:Choice>
+        <mc:Fallback>
+          <p:sp>
+            <p:nvSpPr>
+              <p:cNvPr id="12" name="TextBox 11">
+                <a:extLst>
+                  <a:ext uri="{FF2B5EF4-FFF2-40B4-BE49-F238E27FC236}">
+                    <a16:creationId xmlns:a16="http://schemas.microsoft.com/office/drawing/2014/main" id="{A81C7CCB-AF99-C681-3B52-15377CBD15F1}"/>
+                  </a:ext>
+                </a:extLst>
+              </p:cNvPr>
+              <p:cNvSpPr txBox="1">
+                <a:spLocks noRot="1" noChangeAspect="1" noMove="1" noResize="1" noEditPoints="1" noAdjustHandles="1" noChangeArrowheads="1" noChangeShapeType="1" noTextEdit="1"/>
+              </p:cNvSpPr>
+              <p:nvPr/>
+            </p:nvSpPr>
+            <p:spPr>
+              <a:xfrm>
+                <a:off x="1115715" y="1736812"/>
+                <a:ext cx="6912570" cy="3595856"/>
+              </a:xfrm>
+              <a:prstGeom prst="rect">
+                <a:avLst/>
+              </a:prstGeom>
+              <a:blipFill>
+                <a:blip r:embed="rId2"/>
+                <a:stretch>
+                  <a:fillRect b="-1864"/>
+                </a:stretch>
+              </a:blipFill>
+            </p:spPr>
+            <p:txBody>
+              <a:bodyPr/>
+              <a:lstStyle/>
+              <a:p>
+                <a:r>
+                  <a:rPr lang="en-US">
+                    <a:noFill/>
+                  </a:rPr>
+                  <a:t> </a:t>
+                </a:r>
+              </a:p>
+            </p:txBody>
+          </p:sp>
+        </mc:Fallback>
+      </mc:AlternateContent>
+    </p:spTree>
+    <p:extLst>
+      <p:ext uri="{BB962C8B-B14F-4D97-AF65-F5344CB8AC3E}">
+        <p14:creationId xmlns:p14="http://schemas.microsoft.com/office/powerpoint/2010/main" val="2118230986"/>
+      </p:ext>
+    </p:extLst>
+  </p:cSld>
+  <p:clrMapOvr>
+    <a:masterClrMapping/>
+  </p:clrMapOvr>
+</p:sld>
+</file>
+
+<file path=ppt/slides/slide4.xml><?xml version="1.0" encoding="utf-8"?>
 <p:sld xmlns:a="http://schemas.openxmlformats.org/drawingml/2006/main" xmlns:r="http://schemas.openxmlformats.org/officeDocument/2006/relationships" xmlns:p="http://schemas.openxmlformats.org/presentationml/2006/main">
   <p:cSld>
     <p:spTree>
@@ -4961,7 +7094,7 @@
               <a:pPr>
                 <a:defRPr/>
               </a:pPr>
-              <a:t>2</a:t>
+              <a:t>4</a:t>
             </a:fld>
             <a:r>
               <a:rPr lang="de-DE"/>
@@ -5026,8 +7159,98 @@
         </p:blipFill>
         <p:spPr>
           <a:xfrm>
-            <a:off x="4463988" y="952575"/>
-            <a:ext cx="4572000" cy="2376109"/>
+            <a:off x="4950546" y="1103209"/>
+            <a:ext cx="3963611" cy="2059924"/>
+          </a:xfrm>
+          <a:prstGeom prst="rect">
+            <a:avLst/>
+          </a:prstGeom>
+        </p:spPr>
+      </p:pic>
+      <p:pic>
+        <p:nvPicPr>
+          <p:cNvPr id="11" name="Рисунок 10">
+            <a:extLst>
+              <a:ext uri="{FF2B5EF4-FFF2-40B4-BE49-F238E27FC236}">
+                <a16:creationId xmlns:a16="http://schemas.microsoft.com/office/drawing/2014/main" id="{AB11275F-C97C-3202-68FD-61878C1ABC72}"/>
+              </a:ext>
+            </a:extLst>
+          </p:cNvPr>
+          <p:cNvPicPr>
+            <a:picLocks noChangeAspect="1"/>
+          </p:cNvPicPr>
+          <p:nvPr/>
+        </p:nvPicPr>
+        <p:blipFill>
+          <a:blip r:embed="rId3"/>
+          <a:stretch>
+            <a:fillRect/>
+          </a:stretch>
+        </p:blipFill>
+        <p:spPr>
+          <a:xfrm>
+            <a:off x="11406" y="873734"/>
+            <a:ext cx="4806090" cy="2726442"/>
+          </a:xfrm>
+          <a:prstGeom prst="rect">
+            <a:avLst/>
+          </a:prstGeom>
+        </p:spPr>
+      </p:pic>
+      <p:pic>
+        <p:nvPicPr>
+          <p:cNvPr id="13" name="Рисунок 12">
+            <a:extLst>
+              <a:ext uri="{FF2B5EF4-FFF2-40B4-BE49-F238E27FC236}">
+                <a16:creationId xmlns:a16="http://schemas.microsoft.com/office/drawing/2014/main" id="{B884E466-DCAA-1AEF-F596-72B926C647F6}"/>
+              </a:ext>
+            </a:extLst>
+          </p:cNvPr>
+          <p:cNvPicPr>
+            <a:picLocks noChangeAspect="1"/>
+          </p:cNvPicPr>
+          <p:nvPr/>
+        </p:nvPicPr>
+        <p:blipFill>
+          <a:blip r:embed="rId4"/>
+          <a:stretch>
+            <a:fillRect/>
+          </a:stretch>
+        </p:blipFill>
+        <p:spPr>
+          <a:xfrm>
+            <a:off x="5381526" y="3933056"/>
+            <a:ext cx="3762473" cy="2342725"/>
+          </a:xfrm>
+          <a:prstGeom prst="rect">
+            <a:avLst/>
+          </a:prstGeom>
+        </p:spPr>
+      </p:pic>
+      <p:pic>
+        <p:nvPicPr>
+          <p:cNvPr id="3" name="Рисунок 2">
+            <a:extLst>
+              <a:ext uri="{FF2B5EF4-FFF2-40B4-BE49-F238E27FC236}">
+                <a16:creationId xmlns:a16="http://schemas.microsoft.com/office/drawing/2014/main" id="{AF6804DC-8DA5-82D2-BF91-11E126CF595B}"/>
+              </a:ext>
+            </a:extLst>
+          </p:cNvPr>
+          <p:cNvPicPr>
+            <a:picLocks noChangeAspect="1"/>
+          </p:cNvPicPr>
+          <p:nvPr/>
+        </p:nvPicPr>
+        <p:blipFill>
+          <a:blip r:embed="rId5"/>
+          <a:stretch>
+            <a:fillRect/>
+          </a:stretch>
+        </p:blipFill>
+        <p:spPr>
+          <a:xfrm>
+            <a:off x="182563" y="3694868"/>
+            <a:ext cx="5759159" cy="2726442"/>
           </a:xfrm>
           <a:prstGeom prst="rect">
             <a:avLst/>
@@ -5047,7 +7270,7 @@
 </p:sld>
 </file>
 
-<file path=ppt/slides/slide3.xml><?xml version="1.0" encoding="utf-8"?>
+<file path=ppt/slides/slide5.xml><?xml version="1.0" encoding="utf-8"?>
 <p:sld xmlns:a="http://schemas.openxmlformats.org/drawingml/2006/main" xmlns:r="http://schemas.openxmlformats.org/officeDocument/2006/relationships" xmlns:p="http://schemas.openxmlformats.org/presentationml/2006/main">
   <p:cSld>
     <p:spTree>
@@ -5174,7 +7397,7 @@
               <a:pPr>
                 <a:defRPr/>
               </a:pPr>
-              <a:t>3</a:t>
+              <a:t>5</a:t>
             </a:fld>
             <a:r>
               <a:rPr lang="de-DE"/>
@@ -5289,8 +7512,8 @@
           </a:prstGeom>
         </p:spPr>
       </p:pic>
-      <mc:AlternateContent xmlns:mc="http://schemas.openxmlformats.org/markup-compatibility/2006">
-        <mc:Choice xmlns:a14="http://schemas.microsoft.com/office/drawing/2010/main" Requires="a14">
+      <mc:AlternateContent xmlns:mc="http://schemas.openxmlformats.org/markup-compatibility/2006" xmlns:a14="http://schemas.microsoft.com/office/drawing/2010/main">
+        <mc:Choice Requires="a14">
           <p:sp>
             <p:nvSpPr>
               <p:cNvPr id="10" name="TextBox 9">
@@ -5319,6 +7542,7 @@
               </a:bodyPr>
               <a:lstStyle/>
               <a:p>
+                <a:pPr/>
                 <a14:m>
                   <m:oMathPara xmlns:m="http://schemas.openxmlformats.org/officeDocument/2006/math">
                     <m:oMathParaPr>
@@ -5409,7 +7633,7 @@
             </p:txBody>
           </p:sp>
         </mc:Choice>
-        <mc:Fallback>
+        <mc:Fallback xmlns="">
           <p:sp>
             <p:nvSpPr>
               <p:cNvPr id="10" name="TextBox 9">
@@ -5467,7 +7691,7 @@
 </p:sld>
 </file>
 
-<file path=ppt/slides/slide4.xml><?xml version="1.0" encoding="utf-8"?>
+<file path=ppt/slides/slide6.xml><?xml version="1.0" encoding="utf-8"?>
 <p:sld xmlns:a="http://schemas.openxmlformats.org/drawingml/2006/main" xmlns:r="http://schemas.openxmlformats.org/officeDocument/2006/relationships" xmlns:p="http://schemas.openxmlformats.org/presentationml/2006/main">
   <p:cSld>
     <p:spTree>
@@ -5594,7 +7818,7 @@
               <a:pPr>
                 <a:defRPr/>
               </a:pPr>
-              <a:t>4</a:t>
+              <a:t>6</a:t>
             </a:fld>
             <a:r>
               <a:rPr lang="de-DE"/>
@@ -5673,8 +7897,8 @@
           </a:prstGeom>
         </p:spPr>
       </p:pic>
-      <mc:AlternateContent xmlns:mc="http://schemas.openxmlformats.org/markup-compatibility/2006">
-        <mc:Choice xmlns:a14="http://schemas.microsoft.com/office/drawing/2010/main" Requires="a14">
+      <mc:AlternateContent xmlns:mc="http://schemas.openxmlformats.org/markup-compatibility/2006" xmlns:a14="http://schemas.microsoft.com/office/drawing/2010/main">
+        <mc:Choice Requires="a14">
           <p:sp>
             <p:nvSpPr>
               <p:cNvPr id="10" name="TextBox 9">
@@ -5760,7 +7984,6 @@
                 </a:endParaRPr>
               </a:p>
               <a:p>
-                <a:pPr/>
                 <a:endParaRPr lang="en-US" i="1" dirty="0">
                   <a:latin typeface="Cambria Math" panose="02040503050406030204" pitchFamily="18" charset="0"/>
                 </a:endParaRPr>
@@ -5823,7 +8046,6 @@
                 </a:endParaRPr>
               </a:p>
               <a:p>
-                <a:pPr/>
                 <a:endParaRPr lang="en-US" b="0" i="1" dirty="0">
                   <a:latin typeface="Cambria Math" panose="02040503050406030204" pitchFamily="18" charset="0"/>
                 </a:endParaRPr>
@@ -5900,7 +8122,7 @@
             </p:txBody>
           </p:sp>
         </mc:Choice>
-        <mc:Fallback>
+        <mc:Fallback xmlns="">
           <p:sp>
             <p:nvSpPr>
               <p:cNvPr id="10" name="TextBox 9">
@@ -5981,8 +8203,8 @@
           </a:prstGeom>
         </p:spPr>
       </p:pic>
-      <mc:AlternateContent xmlns:mc="http://schemas.openxmlformats.org/markup-compatibility/2006">
-        <mc:Choice xmlns:a14="http://schemas.microsoft.com/office/drawing/2010/main" Requires="a14">
+      <mc:AlternateContent xmlns:mc="http://schemas.openxmlformats.org/markup-compatibility/2006" xmlns:a14="http://schemas.microsoft.com/office/drawing/2010/main">
+        <mc:Choice Requires="a14">
           <p:sp>
             <p:nvSpPr>
               <p:cNvPr id="12" name="TextBox 11">
@@ -6047,13 +8269,7 @@
                         <a:rPr lang="en-US" b="0" i="1" smtClean="0">
                           <a:latin typeface="Cambria Math" panose="02040503050406030204" pitchFamily="18" charset="0"/>
                         </a:rPr>
-                        <m:t>=</m:t>
-                      </m:r>
-                      <m:r>
-                        <a:rPr lang="en-US" b="0" i="1" smtClean="0">
-                          <a:latin typeface="Cambria Math" panose="02040503050406030204" pitchFamily="18" charset="0"/>
-                        </a:rPr>
-                        <m:t>4</m:t>
+                        <m:t>=4</m:t>
                       </m:r>
                       <m:r>
                         <a:rPr lang="en-US" b="0" i="1" smtClean="0">
@@ -6074,7 +8290,6 @@
                 </a:endParaRPr>
               </a:p>
               <a:p>
-                <a:pPr/>
                 <a:endParaRPr lang="en-US" i="1" dirty="0">
                   <a:latin typeface="Cambria Math" panose="02040503050406030204" pitchFamily="18" charset="0"/>
                 </a:endParaRPr>
@@ -6116,13 +8331,7 @@
                         <a:rPr lang="en-US" b="0" i="1" smtClean="0">
                           <a:latin typeface="Cambria Math" panose="02040503050406030204" pitchFamily="18" charset="0"/>
                         </a:rPr>
-                        <m:t>=</m:t>
-                      </m:r>
-                      <m:r>
-                        <a:rPr lang="en-US" b="0" i="1" smtClean="0">
-                          <a:latin typeface="Cambria Math" panose="02040503050406030204" pitchFamily="18" charset="0"/>
-                        </a:rPr>
-                        <m:t>10</m:t>
+                        <m:t>=10</m:t>
                       </m:r>
                       <m:r>
                         <a:rPr lang="en-US" b="0" i="1" smtClean="0">
@@ -6143,7 +8352,6 @@
                 </a:endParaRPr>
               </a:p>
               <a:p>
-                <a:pPr/>
                 <a:endParaRPr lang="en-US" b="0" i="1" dirty="0">
                   <a:latin typeface="Cambria Math" panose="02040503050406030204" pitchFamily="18" charset="0"/>
                 </a:endParaRPr>
@@ -6251,7 +8459,7 @@
             </p:txBody>
           </p:sp>
         </mc:Choice>
-        <mc:Fallback>
+        <mc:Fallback xmlns="">
           <p:sp>
             <p:nvSpPr>
               <p:cNvPr id="12" name="TextBox 11">
@@ -6309,7 +8517,7 @@
 </p:sld>
 </file>
 
-<file path=ppt/slides/slide5.xml><?xml version="1.0" encoding="utf-8"?>
+<file path=ppt/slides/slide7.xml><?xml version="1.0" encoding="utf-8"?>
 <p:sld xmlns:a="http://schemas.openxmlformats.org/drawingml/2006/main" xmlns:r="http://schemas.openxmlformats.org/officeDocument/2006/relationships" xmlns:p="http://schemas.openxmlformats.org/presentationml/2006/main">
   <p:cSld>
     <p:spTree>
@@ -6436,7 +8644,7 @@
               <a:pPr>
                 <a:defRPr/>
               </a:pPr>
-              <a:t>5</a:t>
+              <a:t>7</a:t>
             </a:fld>
             <a:r>
               <a:rPr lang="de-DE"/>
@@ -6623,8 +8831,8 @@
           </a:prstGeom>
         </p:spPr>
       </p:pic>
-      <mc:AlternateContent xmlns:mc="http://schemas.openxmlformats.org/markup-compatibility/2006">
-        <mc:Choice xmlns:a14="http://schemas.microsoft.com/office/drawing/2010/main" Requires="a14">
+      <mc:AlternateContent xmlns:mc="http://schemas.openxmlformats.org/markup-compatibility/2006" xmlns:a14="http://schemas.microsoft.com/office/drawing/2010/main">
+        <mc:Choice Requires="a14">
           <p:sp>
             <p:nvSpPr>
               <p:cNvPr id="16" name="TextBox 15">
@@ -6689,13 +8897,7 @@
                         <a:rPr lang="en-US" b="0" i="1" smtClean="0">
                           <a:latin typeface="Cambria Math" panose="02040503050406030204" pitchFamily="18" charset="0"/>
                         </a:rPr>
-                        <m:t>=</m:t>
-                      </m:r>
-                      <m:r>
-                        <a:rPr lang="en-US" b="0" i="1" smtClean="0">
-                          <a:latin typeface="Cambria Math" panose="02040503050406030204" pitchFamily="18" charset="0"/>
-                        </a:rPr>
-                        <m:t>12</m:t>
+                        <m:t>=12</m:t>
                       </m:r>
                       <m:r>
                         <a:rPr lang="en-US" b="0" i="1" smtClean="0">
@@ -6716,7 +8918,6 @@
                 </a:endParaRPr>
               </a:p>
               <a:p>
-                <a:pPr/>
                 <a:endParaRPr lang="en-US" i="1" dirty="0">
                   <a:latin typeface="Cambria Math" panose="02040503050406030204" pitchFamily="18" charset="0"/>
                 </a:endParaRPr>
@@ -6758,13 +8959,7 @@
                         <a:rPr lang="en-US" b="0" i="1" smtClean="0">
                           <a:latin typeface="Cambria Math" panose="02040503050406030204" pitchFamily="18" charset="0"/>
                         </a:rPr>
-                        <m:t>=</m:t>
-                      </m:r>
-                      <m:r>
-                        <a:rPr lang="en-US" b="0" i="1" smtClean="0">
-                          <a:latin typeface="Cambria Math" panose="02040503050406030204" pitchFamily="18" charset="0"/>
-                        </a:rPr>
-                        <m:t>25</m:t>
+                        <m:t>=25</m:t>
                       </m:r>
                       <m:r>
                         <a:rPr lang="en-US" b="0" i="1" smtClean="0">
@@ -6785,7 +8980,6 @@
                 </a:endParaRPr>
               </a:p>
               <a:p>
-                <a:pPr/>
                 <a:endParaRPr lang="en-US" b="0" i="1" dirty="0">
                   <a:latin typeface="Cambria Math" panose="02040503050406030204" pitchFamily="18" charset="0"/>
                 </a:endParaRPr>
@@ -6842,13 +9036,7 @@
                             <a:rPr lang="en-US" b="0" i="1" smtClean="0">
                               <a:latin typeface="Cambria Math" panose="02040503050406030204" pitchFamily="18" charset="0"/>
                             </a:rPr>
-                            <m:t>1</m:t>
-                          </m:r>
-                          <m:r>
-                            <a:rPr lang="en-US" b="0" i="1" smtClean="0">
-                              <a:latin typeface="Cambria Math" panose="02040503050406030204" pitchFamily="18" charset="0"/>
-                            </a:rPr>
-                            <m:t>2</m:t>
+                            <m:t>12</m:t>
                           </m:r>
                         </m:num>
                         <m:den>
@@ -6868,7 +9056,7 @@
             </p:txBody>
           </p:sp>
         </mc:Choice>
-        <mc:Fallback>
+        <mc:Fallback xmlns="">
           <p:sp>
             <p:nvSpPr>
               <p:cNvPr id="16" name="TextBox 15">
@@ -6913,8 +9101,8 @@
           </p:sp>
         </mc:Fallback>
       </mc:AlternateContent>
-      <mc:AlternateContent xmlns:mc="http://schemas.openxmlformats.org/markup-compatibility/2006">
-        <mc:Choice xmlns:a14="http://schemas.microsoft.com/office/drawing/2010/main" Requires="a14">
+      <mc:AlternateContent xmlns:mc="http://schemas.openxmlformats.org/markup-compatibility/2006" xmlns:a14="http://schemas.microsoft.com/office/drawing/2010/main">
+        <mc:Choice Requires="a14">
           <p:sp>
             <p:nvSpPr>
               <p:cNvPr id="17" name="TextBox 16">
@@ -6979,13 +9167,7 @@
                         <a:rPr lang="en-US" b="0" i="1" smtClean="0">
                           <a:latin typeface="Cambria Math" panose="02040503050406030204" pitchFamily="18" charset="0"/>
                         </a:rPr>
-                        <m:t>=</m:t>
-                      </m:r>
-                      <m:r>
-                        <a:rPr lang="en-US" b="0" i="1" smtClean="0">
-                          <a:latin typeface="Cambria Math" panose="02040503050406030204" pitchFamily="18" charset="0"/>
-                        </a:rPr>
-                        <m:t>24</m:t>
+                        <m:t>=24</m:t>
                       </m:r>
                       <m:r>
                         <a:rPr lang="en-US" b="0" i="1" smtClean="0">
@@ -7006,7 +9188,6 @@
                 </a:endParaRPr>
               </a:p>
               <a:p>
-                <a:pPr/>
                 <a:endParaRPr lang="en-US" i="1" dirty="0">
                   <a:latin typeface="Cambria Math" panose="02040503050406030204" pitchFamily="18" charset="0"/>
                 </a:endParaRPr>
@@ -7048,13 +9229,7 @@
                         <a:rPr lang="en-US" b="0" i="1" smtClean="0">
                           <a:latin typeface="Cambria Math" panose="02040503050406030204" pitchFamily="18" charset="0"/>
                         </a:rPr>
-                        <m:t>=</m:t>
-                      </m:r>
-                      <m:r>
-                        <a:rPr lang="en-US" b="0" i="1" smtClean="0">
-                          <a:latin typeface="Cambria Math" panose="02040503050406030204" pitchFamily="18" charset="0"/>
-                        </a:rPr>
-                        <m:t>50</m:t>
+                        <m:t>=50</m:t>
                       </m:r>
                       <m:r>
                         <a:rPr lang="en-US" b="0" i="1" smtClean="0">
@@ -7075,7 +9250,6 @@
                 </a:endParaRPr>
               </a:p>
               <a:p>
-                <a:pPr/>
                 <a:endParaRPr lang="en-US" b="0" i="1" dirty="0">
                   <a:latin typeface="Cambria Math" panose="02040503050406030204" pitchFamily="18" charset="0"/>
                 </a:endParaRPr>
@@ -7132,13 +9306,7 @@
                             <a:rPr lang="en-US" b="0" i="1" smtClean="0">
                               <a:latin typeface="Cambria Math" panose="02040503050406030204" pitchFamily="18" charset="0"/>
                             </a:rPr>
-                            <m:t>1</m:t>
-                          </m:r>
-                          <m:r>
-                            <a:rPr lang="en-US" b="0" i="1" smtClean="0">
-                              <a:latin typeface="Cambria Math" panose="02040503050406030204" pitchFamily="18" charset="0"/>
-                            </a:rPr>
-                            <m:t>2</m:t>
+                            <m:t>12</m:t>
                           </m:r>
                         </m:num>
                         <m:den>
@@ -7158,7 +9326,7 @@
             </p:txBody>
           </p:sp>
         </mc:Choice>
-        <mc:Fallback>
+        <mc:Fallback xmlns="">
           <p:sp>
             <p:nvSpPr>
               <p:cNvPr id="17" name="TextBox 16">
@@ -7203,8 +9371,8 @@
           </p:sp>
         </mc:Fallback>
       </mc:AlternateContent>
-      <mc:AlternateContent xmlns:mc="http://schemas.openxmlformats.org/markup-compatibility/2006">
-        <mc:Choice xmlns:a14="http://schemas.microsoft.com/office/drawing/2010/main" Requires="a14">
+      <mc:AlternateContent xmlns:mc="http://schemas.openxmlformats.org/markup-compatibility/2006" xmlns:a14="http://schemas.microsoft.com/office/drawing/2010/main">
+        <mc:Choice Requires="a14">
           <p:sp>
             <p:nvSpPr>
               <p:cNvPr id="18" name="TextBox 17">
@@ -7269,13 +9437,7 @@
                         <a:rPr lang="en-US" b="0" i="1" smtClean="0">
                           <a:latin typeface="Cambria Math" panose="02040503050406030204" pitchFamily="18" charset="0"/>
                         </a:rPr>
-                        <m:t>=</m:t>
-                      </m:r>
-                      <m:r>
-                        <a:rPr lang="en-US" b="0" i="1" smtClean="0">
-                          <a:latin typeface="Cambria Math" panose="02040503050406030204" pitchFamily="18" charset="0"/>
-                        </a:rPr>
-                        <m:t>6</m:t>
+                        <m:t>=6</m:t>
                       </m:r>
                       <m:r>
                         <a:rPr lang="en-US" b="0" i="1" smtClean="0">
@@ -7296,7 +9458,6 @@
                 </a:endParaRPr>
               </a:p>
               <a:p>
-                <a:pPr/>
                 <a:endParaRPr lang="en-US" i="1" dirty="0">
                   <a:latin typeface="Cambria Math" panose="02040503050406030204" pitchFamily="18" charset="0"/>
                 </a:endParaRPr>
@@ -7338,13 +9499,7 @@
                         <a:rPr lang="en-US" b="0" i="1" smtClean="0">
                           <a:latin typeface="Cambria Math" panose="02040503050406030204" pitchFamily="18" charset="0"/>
                         </a:rPr>
-                        <m:t>=</m:t>
-                      </m:r>
-                      <m:r>
-                        <a:rPr lang="en-US" b="0" i="1" smtClean="0">
-                          <a:latin typeface="Cambria Math" panose="02040503050406030204" pitchFamily="18" charset="0"/>
-                        </a:rPr>
-                        <m:t>13</m:t>
+                        <m:t>=13</m:t>
                       </m:r>
                       <m:r>
                         <a:rPr lang="en-US" b="0" i="1" smtClean="0">
@@ -7365,7 +9520,6 @@
                 </a:endParaRPr>
               </a:p>
               <a:p>
-                <a:pPr/>
                 <a:endParaRPr lang="en-US" b="0" i="1" dirty="0">
                   <a:latin typeface="Cambria Math" panose="02040503050406030204" pitchFamily="18" charset="0"/>
                 </a:endParaRPr>
@@ -7442,7 +9596,7 @@
             </p:txBody>
           </p:sp>
         </mc:Choice>
-        <mc:Fallback>
+        <mc:Fallback xmlns="">
           <p:sp>
             <p:nvSpPr>
               <p:cNvPr id="18" name="TextBox 17">
@@ -7487,8 +9641,8 @@
           </p:sp>
         </mc:Fallback>
       </mc:AlternateContent>
-      <mc:AlternateContent xmlns:mc="http://schemas.openxmlformats.org/markup-compatibility/2006">
-        <mc:Choice xmlns:a14="http://schemas.microsoft.com/office/drawing/2010/main" Requires="a14">
+      <mc:AlternateContent xmlns:mc="http://schemas.openxmlformats.org/markup-compatibility/2006" xmlns:a14="http://schemas.microsoft.com/office/drawing/2010/main">
+        <mc:Choice Requires="a14">
           <p:sp>
             <p:nvSpPr>
               <p:cNvPr id="19" name="TextBox 18">
@@ -7553,13 +9707,7 @@
                         <a:rPr lang="en-US" b="0" i="1" smtClean="0">
                           <a:latin typeface="Cambria Math" panose="02040503050406030204" pitchFamily="18" charset="0"/>
                         </a:rPr>
-                        <m:t>=</m:t>
-                      </m:r>
-                      <m:r>
-                        <a:rPr lang="en-US" b="0" i="1" smtClean="0">
-                          <a:latin typeface="Cambria Math" panose="02040503050406030204" pitchFamily="18" charset="0"/>
-                        </a:rPr>
-                        <m:t>3</m:t>
+                        <m:t>=3</m:t>
                       </m:r>
                       <m:r>
                         <a:rPr lang="en-US" b="0" i="1" smtClean="0">
@@ -7580,7 +9728,6 @@
                 </a:endParaRPr>
               </a:p>
               <a:p>
-                <a:pPr/>
                 <a:endParaRPr lang="en-US" i="1" dirty="0">
                   <a:latin typeface="Cambria Math" panose="02040503050406030204" pitchFamily="18" charset="0"/>
                 </a:endParaRPr>
@@ -7622,13 +9769,7 @@
                         <a:rPr lang="en-US" b="0" i="1" smtClean="0">
                           <a:latin typeface="Cambria Math" panose="02040503050406030204" pitchFamily="18" charset="0"/>
                         </a:rPr>
-                        <m:t>=</m:t>
-                      </m:r>
-                      <m:r>
-                        <a:rPr lang="en-US" b="0" i="1" smtClean="0">
-                          <a:latin typeface="Cambria Math" panose="02040503050406030204" pitchFamily="18" charset="0"/>
-                        </a:rPr>
-                        <m:t>7</m:t>
+                        <m:t>=7</m:t>
                       </m:r>
                       <m:r>
                         <a:rPr lang="en-US" b="0" i="1" smtClean="0">
@@ -7649,7 +9790,6 @@
                 </a:endParaRPr>
               </a:p>
               <a:p>
-                <a:pPr/>
                 <a:endParaRPr lang="en-US" b="0" i="1" dirty="0">
                   <a:latin typeface="Cambria Math" panose="02040503050406030204" pitchFamily="18" charset="0"/>
                 </a:endParaRPr>
@@ -7726,7 +9866,7 @@
             </p:txBody>
           </p:sp>
         </mc:Choice>
-        <mc:Fallback>
+        <mc:Fallback xmlns="">
           <p:sp>
             <p:nvSpPr>
               <p:cNvPr id="19" name="TextBox 18">
@@ -7784,7 +9924,7 @@
 </p:sld>
 </file>
 
-<file path=ppt/slides/slide6.xml><?xml version="1.0" encoding="utf-8"?>
+<file path=ppt/slides/slide8.xml><?xml version="1.0" encoding="utf-8"?>
 <p:sld xmlns:a="http://schemas.openxmlformats.org/drawingml/2006/main" xmlns:r="http://schemas.openxmlformats.org/officeDocument/2006/relationships" xmlns:p="http://schemas.openxmlformats.org/presentationml/2006/main">
   <p:cSld>
     <p:spTree>
@@ -7911,7 +10051,7 @@
               <a:pPr>
                 <a:defRPr/>
               </a:pPr>
-              <a:t>6</a:t>
+              <a:t>8</a:t>
             </a:fld>
             <a:r>
               <a:rPr lang="de-DE"/>
@@ -8026,8 +10166,8 @@
           </a:prstGeom>
         </p:spPr>
       </p:pic>
-      <mc:AlternateContent xmlns:mc="http://schemas.openxmlformats.org/markup-compatibility/2006">
-        <mc:Choice xmlns:a14="http://schemas.microsoft.com/office/drawing/2010/main" Requires="a14">
+      <mc:AlternateContent xmlns:mc="http://schemas.openxmlformats.org/markup-compatibility/2006" xmlns:a14="http://schemas.microsoft.com/office/drawing/2010/main">
+        <mc:Choice Requires="a14">
           <p:sp>
             <p:nvSpPr>
               <p:cNvPr id="18" name="TextBox 17">
@@ -8251,7 +10391,7 @@
             </p:txBody>
           </p:sp>
         </mc:Choice>
-        <mc:Fallback>
+        <mc:Fallback xmlns="">
           <p:sp>
             <p:nvSpPr>
               <p:cNvPr id="18" name="TextBox 17">
@@ -8296,8 +10436,8 @@
           </p:sp>
         </mc:Fallback>
       </mc:AlternateContent>
-      <mc:AlternateContent xmlns:mc="http://schemas.openxmlformats.org/markup-compatibility/2006">
-        <mc:Choice xmlns:a14="http://schemas.microsoft.com/office/drawing/2010/main" Requires="a14">
+      <mc:AlternateContent xmlns:mc="http://schemas.openxmlformats.org/markup-compatibility/2006" xmlns:a14="http://schemas.microsoft.com/office/drawing/2010/main">
+        <mc:Choice Requires="a14">
           <p:sp>
             <p:nvSpPr>
               <p:cNvPr id="19" name="TextBox 18">
@@ -8521,7 +10661,7 @@
             </p:txBody>
           </p:sp>
         </mc:Choice>
-        <mc:Fallback>
+        <mc:Fallback xmlns="">
           <p:sp>
             <p:nvSpPr>
               <p:cNvPr id="19" name="TextBox 18">
@@ -8602,8 +10742,8 @@
           </a:prstGeom>
         </p:spPr>
       </p:pic>
-      <mc:AlternateContent xmlns:mc="http://schemas.openxmlformats.org/markup-compatibility/2006">
-        <mc:Choice xmlns:a14="http://schemas.microsoft.com/office/drawing/2010/main" Requires="a14">
+      <mc:AlternateContent xmlns:mc="http://schemas.openxmlformats.org/markup-compatibility/2006" xmlns:a14="http://schemas.microsoft.com/office/drawing/2010/main">
+        <mc:Choice Requires="a14">
           <p:sp>
             <p:nvSpPr>
               <p:cNvPr id="8" name="TextBox 7">
@@ -8668,13 +10808,7 @@
                         <a:rPr lang="en-US" b="0" i="1" smtClean="0">
                           <a:latin typeface="Cambria Math" panose="02040503050406030204" pitchFamily="18" charset="0"/>
                         </a:rPr>
-                        <m:t>=</m:t>
-                      </m:r>
-                      <m:r>
-                        <a:rPr lang="en-US" b="0" i="1" smtClean="0">
-                          <a:latin typeface="Cambria Math" panose="02040503050406030204" pitchFamily="18" charset="0"/>
-                        </a:rPr>
-                        <m:t>2</m:t>
+                        <m:t>=2</m:t>
                       </m:r>
                       <m:r>
                         <a:rPr lang="en-US" b="0" i="1" smtClean="0">
@@ -8736,13 +10870,7 @@
                         <a:rPr lang="en-US" b="0" i="1" smtClean="0">
                           <a:latin typeface="Cambria Math" panose="02040503050406030204" pitchFamily="18" charset="0"/>
                         </a:rPr>
-                        <m:t>=</m:t>
-                      </m:r>
-                      <m:r>
-                        <a:rPr lang="en-US" b="0" i="1" smtClean="0">
-                          <a:latin typeface="Cambria Math" panose="02040503050406030204" pitchFamily="18" charset="0"/>
-                        </a:rPr>
-                        <m:t>5</m:t>
+                        <m:t>=5</m:t>
                       </m:r>
                       <m:r>
                         <a:rPr lang="en-US" b="0" i="1" smtClean="0">
@@ -8839,7 +10967,7 @@
             </p:txBody>
           </p:sp>
         </mc:Choice>
-        <mc:Fallback>
+        <mc:Fallback xmlns="">
           <p:sp>
             <p:nvSpPr>
               <p:cNvPr id="8" name="TextBox 7">
@@ -8884,8 +11012,8 @@
           </p:sp>
         </mc:Fallback>
       </mc:AlternateContent>
-      <mc:AlternateContent xmlns:mc="http://schemas.openxmlformats.org/markup-compatibility/2006">
-        <mc:Choice xmlns:a14="http://schemas.microsoft.com/office/drawing/2010/main" Requires="a14">
+      <mc:AlternateContent xmlns:mc="http://schemas.openxmlformats.org/markup-compatibility/2006" xmlns:a14="http://schemas.microsoft.com/office/drawing/2010/main">
+        <mc:Choice Requires="a14">
           <p:sp>
             <p:nvSpPr>
               <p:cNvPr id="10" name="TextBox 9">
@@ -9127,7 +11255,7 @@
             </p:txBody>
           </p:sp>
         </mc:Choice>
-        <mc:Fallback>
+        <mc:Fallback xmlns="">
           <p:sp>
             <p:nvSpPr>
               <p:cNvPr id="10" name="TextBox 9">
@@ -9185,7 +11313,7 @@
 </p:sld>
 </file>
 
-<file path=ppt/slides/slide7.xml><?xml version="1.0" encoding="utf-8"?>
+<file path=ppt/slides/slide9.xml><?xml version="1.0" encoding="utf-8"?>
 <p:sld xmlns:a="http://schemas.openxmlformats.org/drawingml/2006/main" xmlns:r="http://schemas.openxmlformats.org/officeDocument/2006/relationships" xmlns:p="http://schemas.openxmlformats.org/presentationml/2006/main">
   <p:cSld>
     <p:spTree>
@@ -9312,7 +11440,7 @@
               <a:pPr>
                 <a:defRPr/>
               </a:pPr>
-              <a:t>7</a:t>
+              <a:t>9</a:t>
             </a:fld>
             <a:r>
               <a:rPr lang="de-DE"/>
@@ -9391,8 +11519,8 @@
           </a:prstGeom>
         </p:spPr>
       </p:pic>
-      <mc:AlternateContent xmlns:mc="http://schemas.openxmlformats.org/markup-compatibility/2006">
-        <mc:Choice xmlns:a14="http://schemas.microsoft.com/office/drawing/2010/main" Requires="a14">
+      <mc:AlternateContent xmlns:mc="http://schemas.openxmlformats.org/markup-compatibility/2006" xmlns:a14="http://schemas.microsoft.com/office/drawing/2010/main">
+        <mc:Choice Requires="a14">
           <p:sp>
             <p:nvSpPr>
               <p:cNvPr id="16" name="TextBox 15">
@@ -9537,7 +11665,7 @@
             </p:txBody>
           </p:sp>
         </mc:Choice>
-        <mc:Fallback>
+        <mc:Fallback xmlns="">
           <p:sp>
             <p:nvSpPr>
               <p:cNvPr id="16" name="TextBox 15">
@@ -9582,8 +11710,8 @@
           </p:sp>
         </mc:Fallback>
       </mc:AlternateContent>
-      <mc:AlternateContent xmlns:mc="http://schemas.openxmlformats.org/markup-compatibility/2006">
-        <mc:Choice xmlns:a14="http://schemas.microsoft.com/office/drawing/2010/main" Requires="a14">
+      <mc:AlternateContent xmlns:mc="http://schemas.openxmlformats.org/markup-compatibility/2006" xmlns:a14="http://schemas.microsoft.com/office/drawing/2010/main">
+        <mc:Choice Requires="a14">
           <p:sp>
             <p:nvSpPr>
               <p:cNvPr id="2" name="TextBox 1">
@@ -9612,6 +11740,7 @@
               </a:bodyPr>
               <a:lstStyle/>
               <a:p>
+                <a:pPr/>
                 <a14:m>
                   <m:oMathPara xmlns:m="http://schemas.openxmlformats.org/officeDocument/2006/math">
                     <m:oMathParaPr>
@@ -9657,7 +11786,7 @@
             </p:txBody>
           </p:sp>
         </mc:Choice>
-        <mc:Fallback>
+        <mc:Fallback xmlns="">
           <p:sp>
             <p:nvSpPr>
               <p:cNvPr id="2" name="TextBox 1">
@@ -9774,8 +11903,8 @@
           </a:prstGeom>
         </p:spPr>
       </p:pic>
-      <mc:AlternateContent xmlns:mc="http://schemas.openxmlformats.org/markup-compatibility/2006">
-        <mc:Choice xmlns:a14="http://schemas.microsoft.com/office/drawing/2010/main" Requires="a14">
+      <mc:AlternateContent xmlns:mc="http://schemas.openxmlformats.org/markup-compatibility/2006" xmlns:a14="http://schemas.microsoft.com/office/drawing/2010/main">
+        <mc:Choice Requires="a14">
           <p:sp>
             <p:nvSpPr>
               <p:cNvPr id="14" name="TextBox 13">
@@ -9804,6 +11933,7 @@
               </a:bodyPr>
               <a:lstStyle/>
               <a:p>
+                <a:pPr/>
                 <a14:m>
                   <m:oMathPara xmlns:m="http://schemas.openxmlformats.org/officeDocument/2006/math">
                     <m:oMathParaPr>
@@ -9849,7 +11979,7 @@
             </p:txBody>
           </p:sp>
         </mc:Choice>
-        <mc:Fallback>
+        <mc:Fallback xmlns="">
           <p:sp>
             <p:nvSpPr>
               <p:cNvPr id="14" name="TextBox 13">
@@ -9894,8 +12024,8 @@
           </p:sp>
         </mc:Fallback>
       </mc:AlternateContent>
-      <mc:AlternateContent xmlns:mc="http://schemas.openxmlformats.org/markup-compatibility/2006">
-        <mc:Choice xmlns:a14="http://schemas.microsoft.com/office/drawing/2010/main" Requires="a14">
+      <mc:AlternateContent xmlns:mc="http://schemas.openxmlformats.org/markup-compatibility/2006" xmlns:a14="http://schemas.microsoft.com/office/drawing/2010/main">
+        <mc:Choice Requires="a14">
           <p:sp>
             <p:nvSpPr>
               <p:cNvPr id="20" name="TextBox 19">
@@ -9924,6 +12054,7 @@
               </a:bodyPr>
               <a:lstStyle/>
               <a:p>
+                <a:pPr/>
                 <a14:m>
                   <m:oMathPara xmlns:m="http://schemas.openxmlformats.org/officeDocument/2006/math">
                     <m:oMathParaPr>
@@ -9969,7 +12100,7 @@
             </p:txBody>
           </p:sp>
         </mc:Choice>
-        <mc:Fallback>
+        <mc:Fallback xmlns="">
           <p:sp>
             <p:nvSpPr>
               <p:cNvPr id="20" name="TextBox 19">
@@ -10029,7 +12160,7 @@
         <p:spPr>
           <a:xfrm>
             <a:off x="182563" y="4581128"/>
-            <a:ext cx="4101405" cy="1200329"/>
+            <a:ext cx="4101405" cy="1792798"/>
           </a:xfrm>
           <a:prstGeom prst="rect">
             <a:avLst/>
@@ -10054,195 +12185,25 @@
               <a:t>For the increased frequency of aperiodic task generation, it is clear, that at some point the performance of DSS decreases.</a:t>
             </a:r>
           </a:p>
+          <a:p>
+            <a:pPr marL="285750" indent="-285750">
+              <a:lnSpc>
+                <a:spcPct val="100000"/>
+              </a:lnSpc>
+              <a:buFont typeface="Arial" panose="020B0604020202020204" pitchFamily="34" charset="0"/>
+              <a:buChar char="•"/>
+            </a:pPr>
+            <a:r>
+              <a:rPr lang="en-US" sz="1800" dirty="0"/>
+              <a:t>Sometimes even worse than Background Scheduler</a:t>
+            </a:r>
+          </a:p>
         </p:txBody>
       </p:sp>
     </p:spTree>
     <p:extLst>
       <p:ext uri="{BB962C8B-B14F-4D97-AF65-F5344CB8AC3E}">
         <p14:creationId xmlns:p14="http://schemas.microsoft.com/office/powerpoint/2010/main" val="22680542"/>
-      </p:ext>
-    </p:extLst>
-  </p:cSld>
-  <p:clrMapOvr>
-    <a:masterClrMapping/>
-  </p:clrMapOvr>
-</p:sld>
-</file>
-
-<file path=ppt/slides/slide8.xml><?xml version="1.0" encoding="utf-8"?>
-<p:sld xmlns:a="http://schemas.openxmlformats.org/drawingml/2006/main" xmlns:r="http://schemas.openxmlformats.org/officeDocument/2006/relationships" xmlns:p="http://schemas.openxmlformats.org/presentationml/2006/main">
-  <p:cSld>
-    <p:spTree>
-      <p:nvGrpSpPr>
-        <p:cNvPr id="1" name="">
-          <a:extLst>
-            <a:ext uri="{FF2B5EF4-FFF2-40B4-BE49-F238E27FC236}">
-              <a16:creationId xmlns:a16="http://schemas.microsoft.com/office/drawing/2014/main" id="{4B2A3DCF-508E-B2FB-A957-8EC6446C46BF}"/>
-            </a:ext>
-          </a:extLst>
-        </p:cNvPr>
-        <p:cNvGrpSpPr/>
-        <p:nvPr/>
-      </p:nvGrpSpPr>
-      <p:grpSpPr>
-        <a:xfrm>
-          <a:off x="0" y="0"/>
-          <a:ext cx="0" cy="0"/>
-          <a:chOff x="0" y="0"/>
-          <a:chExt cx="0" cy="0"/>
-        </a:xfrm>
-      </p:grpSpPr>
-      <p:sp>
-        <p:nvSpPr>
-          <p:cNvPr id="4" name="Нижний колонтитул 3">
-            <a:extLst>
-              <a:ext uri="{FF2B5EF4-FFF2-40B4-BE49-F238E27FC236}">
-                <a16:creationId xmlns:a16="http://schemas.microsoft.com/office/drawing/2014/main" id="{6BBB6C7D-732C-5C79-FDC3-C76542D23265}"/>
-              </a:ext>
-            </a:extLst>
-          </p:cNvPr>
-          <p:cNvSpPr>
-            <a:spLocks noGrp="1"/>
-          </p:cNvSpPr>
-          <p:nvPr>
-            <p:ph type="ftr" sz="quarter" idx="10"/>
-          </p:nvPr>
-        </p:nvSpPr>
-        <p:spPr/>
-        <p:txBody>
-          <a:bodyPr/>
-          <a:lstStyle/>
-          <a:p>
-            <a:pPr>
-              <a:defRPr/>
-            </a:pPr>
-            <a:r>
-              <a:rPr lang="de-DE" dirty="0"/>
-              <a:t>Oleg Kelner – University </a:t>
-            </a:r>
-            <a:r>
-              <a:rPr lang="de-DE" dirty="0" err="1"/>
-              <a:t>of</a:t>
-            </a:r>
-            <a:r>
-              <a:rPr lang="de-DE" dirty="0"/>
-              <a:t> Applied Sciences Hamm-Lippstadt</a:t>
-            </a:r>
-          </a:p>
-        </p:txBody>
-      </p:sp>
-      <p:sp>
-        <p:nvSpPr>
-          <p:cNvPr id="5" name="Дата 4">
-            <a:extLst>
-              <a:ext uri="{FF2B5EF4-FFF2-40B4-BE49-F238E27FC236}">
-                <a16:creationId xmlns:a16="http://schemas.microsoft.com/office/drawing/2014/main" id="{DAFC4770-E0FD-719C-7A8E-604F6D27294C}"/>
-              </a:ext>
-            </a:extLst>
-          </p:cNvPr>
-          <p:cNvSpPr>
-            <a:spLocks noGrp="1"/>
-          </p:cNvSpPr>
-          <p:nvPr>
-            <p:ph type="dt" sz="half" idx="12"/>
-          </p:nvPr>
-        </p:nvSpPr>
-        <p:spPr/>
-        <p:txBody>
-          <a:bodyPr/>
-          <a:lstStyle/>
-          <a:p>
-            <a:pPr>
-              <a:defRPr/>
-            </a:pPr>
-            <a:fld id="{D1C5E747-687F-9C49-A498-1184E7908D39}" type="datetime1">
-              <a:rPr lang="de-DE" smtClean="0"/>
-              <a:t>21.06.2026</a:t>
-            </a:fld>
-            <a:endParaRPr lang="de-DE"/>
-          </a:p>
-        </p:txBody>
-      </p:sp>
-      <p:sp>
-        <p:nvSpPr>
-          <p:cNvPr id="6" name="Номер слайда 5">
-            <a:extLst>
-              <a:ext uri="{FF2B5EF4-FFF2-40B4-BE49-F238E27FC236}">
-                <a16:creationId xmlns:a16="http://schemas.microsoft.com/office/drawing/2014/main" id="{0DF7045B-7EF2-499A-F96C-5FC0857AF102}"/>
-              </a:ext>
-            </a:extLst>
-          </p:cNvPr>
-          <p:cNvSpPr>
-            <a:spLocks noGrp="1"/>
-          </p:cNvSpPr>
-          <p:nvPr>
-            <p:ph type="sldNum" sz="quarter" idx="13"/>
-          </p:nvPr>
-        </p:nvSpPr>
-        <p:spPr/>
-        <p:txBody>
-          <a:bodyPr/>
-          <a:lstStyle/>
-          <a:p>
-            <a:pPr>
-              <a:defRPr/>
-            </a:pPr>
-            <a:r>
-              <a:rPr lang="de-DE"/>
-              <a:t>&lt; </a:t>
-            </a:r>
-            <a:fld id="{1A61C92B-C297-4AC9-B551-2D8A658A0122}" type="slidenum">
-              <a:rPr lang="de-DE" smtClean="0"/>
-              <a:pPr>
-                <a:defRPr/>
-              </a:pPr>
-              <a:t>8</a:t>
-            </a:fld>
-            <a:r>
-              <a:rPr lang="de-DE"/>
-              <a:t> &gt;</a:t>
-            </a:r>
-            <a:endParaRPr lang="de-DE" dirty="0"/>
-          </a:p>
-        </p:txBody>
-      </p:sp>
-      <p:sp>
-        <p:nvSpPr>
-          <p:cNvPr id="7" name="Заголовок 1">
-            <a:extLst>
-              <a:ext uri="{FF2B5EF4-FFF2-40B4-BE49-F238E27FC236}">
-                <a16:creationId xmlns:a16="http://schemas.microsoft.com/office/drawing/2014/main" id="{DDF0EE4D-5E5D-CCB9-8E8A-809BB9A0B745}"/>
-              </a:ext>
-            </a:extLst>
-          </p:cNvPr>
-          <p:cNvSpPr>
-            <a:spLocks noGrp="1"/>
-          </p:cNvSpPr>
-          <p:nvPr>
-            <p:ph type="ctrTitle"/>
-          </p:nvPr>
-        </p:nvSpPr>
-        <p:spPr>
-          <a:xfrm>
-            <a:off x="395536" y="188640"/>
-            <a:ext cx="7324934" cy="492443"/>
-          </a:xfrm>
-        </p:spPr>
-        <p:txBody>
-          <a:bodyPr/>
-          <a:lstStyle/>
-          <a:p>
-            <a:r>
-              <a:rPr lang="en-US" sz="3200" dirty="0"/>
-              <a:t>Implementation</a:t>
-            </a:r>
-          </a:p>
-        </p:txBody>
-      </p:sp>
-    </p:spTree>
-    <p:extLst>
-      <p:ext uri="{BB962C8B-B14F-4D97-AF65-F5344CB8AC3E}">
-        <p14:creationId xmlns:p14="http://schemas.microsoft.com/office/powerpoint/2010/main" val="3770422993"/>
       </p:ext>
     </p:extLst>
   </p:cSld>

--- a/DSS_Presentation/DSS_Presentation.pptx
+++ b/DSS_Presentation/DSS_Presentation.pptx
@@ -429,7 +429,7 @@
             </a:pPr>
             <a:fld id="{4E0C06B7-C559-4809-80E3-2886171D3968}" type="datetime1">
               <a:rPr lang="de-DE" smtClean="0"/>
-              <a:t>21.06.2026</a:t>
+              <a:t>22.06.2026</a:t>
             </a:fld>
             <a:endParaRPr lang="de-DE"/>
           </a:p>
@@ -457,14 +457,14 @@
           </a:ln>
           <a:extLst>
             <a:ext uri="{909E8E84-426E-40dd-AFC4-6F175D3DCCD1}">
-              <a14:hiddenFill xmlns="" xmlns:a14="http://schemas.microsoft.com/office/drawing/2010/main">
+              <a14:hiddenFill xmlns:a14="http://schemas.microsoft.com/office/drawing/2010/main" xmlns="">
                 <a:solidFill>
                   <a:srgbClr val="FFFFFF"/>
                 </a:solidFill>
               </a14:hiddenFill>
             </a:ext>
             <a:ext uri="{91240B29-F687-4f45-9708-019B960494DF}">
-              <a14:hiddenLine xmlns="" xmlns:a14="http://schemas.microsoft.com/office/drawing/2010/main" w="9525">
+              <a14:hiddenLine xmlns:a14="http://schemas.microsoft.com/office/drawing/2010/main" xmlns="" w="9525">
                 <a:solidFill>
                   <a:srgbClr val="000000"/>
                 </a:solidFill>
@@ -517,14 +517,14 @@
           </a:ln>
           <a:extLst>
             <a:ext uri="{909E8E84-426E-40dd-AFC4-6F175D3DCCD1}">
-              <a14:hiddenFill xmlns="" xmlns:a14="http://schemas.microsoft.com/office/drawing/2010/main">
+              <a14:hiddenFill xmlns:a14="http://schemas.microsoft.com/office/drawing/2010/main" xmlns="">
                 <a:solidFill>
                   <a:srgbClr val="FFFFFF"/>
                 </a:solidFill>
               </a14:hiddenFill>
             </a:ext>
             <a:ext uri="{91240B29-F687-4f45-9708-019B960494DF}">
-              <a14:hiddenLine xmlns="" xmlns:a14="http://schemas.microsoft.com/office/drawing/2010/main" w="9525">
+              <a14:hiddenLine xmlns:a14="http://schemas.microsoft.com/office/drawing/2010/main" xmlns="" w="9525">
                 <a:solidFill>
                   <a:srgbClr val="000000"/>
                 </a:solidFill>
@@ -598,7 +598,7 @@
           </a:ln>
           <a:extLst>
             <a:ext uri="{909E8E84-426E-40dd-AFC4-6F175D3DCCD1}">
-              <a14:hiddenFill xmlns="" xmlns:a14="http://schemas.microsoft.com/office/drawing/2010/main">
+              <a14:hiddenFill xmlns:a14="http://schemas.microsoft.com/office/drawing/2010/main" xmlns="">
                 <a:noFill/>
               </a14:hiddenFill>
             </a:ext>
@@ -638,7 +638,7 @@
           </a:ln>
           <a:extLst>
             <a:ext uri="{91240B29-F687-4f45-9708-019B960494DF}">
-              <a14:hiddenLine xmlns="" xmlns:a14="http://schemas.microsoft.com/office/drawing/2010/main" w="9525">
+              <a14:hiddenLine xmlns:a14="http://schemas.microsoft.com/office/drawing/2010/main" xmlns="" w="9525">
                 <a:solidFill>
                   <a:srgbClr val="000000"/>
                 </a:solidFill>
@@ -684,7 +684,7 @@
           </a:ln>
           <a:extLst>
             <a:ext uri="{909E8E84-426E-40dd-AFC4-6F175D3DCCD1}">
-              <a14:hiddenFill xmlns="" xmlns:a14="http://schemas.microsoft.com/office/drawing/2010/main">
+              <a14:hiddenFill xmlns:a14="http://schemas.microsoft.com/office/drawing/2010/main" xmlns="">
                 <a:noFill/>
               </a14:hiddenFill>
             </a:ext>
@@ -725,7 +725,7 @@
           </a:ln>
           <a:extLst>
             <a:ext uri="{909E8E84-426E-40dd-AFC4-6F175D3DCCD1}">
-              <a14:hiddenFill xmlns="" xmlns:a14="http://schemas.microsoft.com/office/drawing/2010/main">
+              <a14:hiddenFill xmlns:a14="http://schemas.microsoft.com/office/drawing/2010/main" xmlns="">
                 <a:noFill/>
               </a14:hiddenFill>
             </a:ext>
@@ -774,14 +774,14 @@
           </a:ln>
           <a:extLst>
             <a:ext uri="{909E8E84-426E-40dd-AFC4-6F175D3DCCD1}">
-              <a14:hiddenFill xmlns="" xmlns:a14="http://schemas.microsoft.com/office/drawing/2010/main">
+              <a14:hiddenFill xmlns:a14="http://schemas.microsoft.com/office/drawing/2010/main" xmlns="">
                 <a:solidFill>
                   <a:srgbClr val="FFFFFF"/>
                 </a:solidFill>
               </a14:hiddenFill>
             </a:ext>
             <a:ext uri="{91240B29-F687-4f45-9708-019B960494DF}">
-              <a14:hiddenLine xmlns="" xmlns:a14="http://schemas.microsoft.com/office/drawing/2010/main" w="9525">
+              <a14:hiddenLine xmlns:a14="http://schemas.microsoft.com/office/drawing/2010/main" xmlns="" w="9525">
                 <a:solidFill>
                   <a:srgbClr val="000000"/>
                 </a:solidFill>
@@ -859,7 +859,7 @@
           </a:ln>
           <a:extLst>
             <a:ext uri="{909E8E84-426E-40dd-AFC4-6F175D3DCCD1}">
-              <a14:hiddenFill xmlns="" xmlns:a14="http://schemas.microsoft.com/office/drawing/2010/main">
+              <a14:hiddenFill xmlns:a14="http://schemas.microsoft.com/office/drawing/2010/main" xmlns="">
                 <a:solidFill>
                   <a:srgbClr val="FFFFFF"/>
                 </a:solidFill>
@@ -1059,7 +1059,7 @@
             </a:pPr>
             <a:fld id="{C7E54160-B116-4109-AA92-3860CE6317DD}" type="datetime1">
               <a:rPr lang="de-DE" smtClean="0"/>
-              <a:t>21.06.2026</a:t>
+              <a:t>22.06.2026</a:t>
             </a:fld>
             <a:endParaRPr lang="de-DE"/>
           </a:p>
@@ -1087,14 +1087,14 @@
           </a:ln>
           <a:extLst>
             <a:ext uri="{909E8E84-426E-40dd-AFC4-6F175D3DCCD1}">
-              <a14:hiddenFill xmlns="" xmlns:a14="http://schemas.microsoft.com/office/drawing/2010/main">
+              <a14:hiddenFill xmlns:a14="http://schemas.microsoft.com/office/drawing/2010/main" xmlns="">
                 <a:solidFill>
                   <a:srgbClr val="FFFFFF"/>
                 </a:solidFill>
               </a14:hiddenFill>
             </a:ext>
             <a:ext uri="{91240B29-F687-4f45-9708-019B960494DF}">
-              <a14:hiddenLine xmlns="" xmlns:a14="http://schemas.microsoft.com/office/drawing/2010/main" w="9525">
+              <a14:hiddenLine xmlns:a14="http://schemas.microsoft.com/office/drawing/2010/main" xmlns="" w="9525">
                 <a:solidFill>
                   <a:srgbClr val="000000"/>
                 </a:solidFill>
@@ -1149,14 +1149,14 @@
           </a:ln>
           <a:extLst>
             <a:ext uri="{909E8E84-426E-40dd-AFC4-6F175D3DCCD1}">
-              <a14:hiddenFill xmlns="" xmlns:a14="http://schemas.microsoft.com/office/drawing/2010/main">
+              <a14:hiddenFill xmlns:a14="http://schemas.microsoft.com/office/drawing/2010/main" xmlns="">
                 <a:solidFill>
                   <a:srgbClr val="FFFFFF"/>
                 </a:solidFill>
               </a14:hiddenFill>
             </a:ext>
             <a:ext uri="{91240B29-F687-4f45-9708-019B960494DF}">
-              <a14:hiddenLine xmlns="" xmlns:a14="http://schemas.microsoft.com/office/drawing/2010/main" w="9525">
+              <a14:hiddenLine xmlns:a14="http://schemas.microsoft.com/office/drawing/2010/main" xmlns="" w="9525">
                 <a:solidFill>
                   <a:srgbClr val="000000"/>
                 </a:solidFill>
@@ -1234,7 +1234,7 @@
           </a:ln>
           <a:extLst>
             <a:ext uri="{909E8E84-426E-40dd-AFC4-6F175D3DCCD1}">
-              <a14:hiddenFill xmlns="" xmlns:a14="http://schemas.microsoft.com/office/drawing/2010/main">
+              <a14:hiddenFill xmlns:a14="http://schemas.microsoft.com/office/drawing/2010/main" xmlns="">
                 <a:noFill/>
               </a14:hiddenFill>
             </a:ext>
@@ -1274,7 +1274,7 @@
           </a:ln>
           <a:extLst>
             <a:ext uri="{91240B29-F687-4f45-9708-019B960494DF}">
-              <a14:hiddenLine xmlns="" xmlns:a14="http://schemas.microsoft.com/office/drawing/2010/main" w="9525">
+              <a14:hiddenLine xmlns:a14="http://schemas.microsoft.com/office/drawing/2010/main" xmlns="" w="9525">
                 <a:solidFill>
                   <a:srgbClr val="000000"/>
                 </a:solidFill>
@@ -1320,7 +1320,7 @@
           </a:ln>
           <a:extLst>
             <a:ext uri="{909E8E84-426E-40dd-AFC4-6F175D3DCCD1}">
-              <a14:hiddenFill xmlns="" xmlns:a14="http://schemas.microsoft.com/office/drawing/2010/main">
+              <a14:hiddenFill xmlns:a14="http://schemas.microsoft.com/office/drawing/2010/main" xmlns="">
                 <a:noFill/>
               </a14:hiddenFill>
             </a:ext>
@@ -1361,7 +1361,7 @@
           </a:ln>
           <a:extLst>
             <a:ext uri="{909E8E84-426E-40dd-AFC4-6F175D3DCCD1}">
-              <a14:hiddenFill xmlns="" xmlns:a14="http://schemas.microsoft.com/office/drawing/2010/main">
+              <a14:hiddenFill xmlns:a14="http://schemas.microsoft.com/office/drawing/2010/main" xmlns="">
                 <a:noFill/>
               </a14:hiddenFill>
             </a:ext>
@@ -1410,14 +1410,14 @@
           </a:ln>
           <a:extLst>
             <a:ext uri="{909E8E84-426E-40dd-AFC4-6F175D3DCCD1}">
-              <a14:hiddenFill xmlns="" xmlns:a14="http://schemas.microsoft.com/office/drawing/2010/main">
+              <a14:hiddenFill xmlns:a14="http://schemas.microsoft.com/office/drawing/2010/main" xmlns="">
                 <a:solidFill>
                   <a:srgbClr val="FFFFFF"/>
                 </a:solidFill>
               </a14:hiddenFill>
             </a:ext>
             <a:ext uri="{91240B29-F687-4f45-9708-019B960494DF}">
-              <a14:hiddenLine xmlns="" xmlns:a14="http://schemas.microsoft.com/office/drawing/2010/main" w="9525">
+              <a14:hiddenLine xmlns:a14="http://schemas.microsoft.com/office/drawing/2010/main" xmlns="" w="9525">
                 <a:solidFill>
                   <a:srgbClr val="000000"/>
                 </a:solidFill>
@@ -1607,7 +1607,7 @@
           </a:ln>
           <a:extLst>
             <a:ext uri="{909E8E84-426E-40dd-AFC4-6F175D3DCCD1}">
-              <a14:hiddenFill xmlns="" xmlns:a14="http://schemas.microsoft.com/office/drawing/2010/main">
+              <a14:hiddenFill xmlns:a14="http://schemas.microsoft.com/office/drawing/2010/main" xmlns="">
                 <a:noFill/>
               </a14:hiddenFill>
             </a:ext>
@@ -1920,7 +1920,7 @@
             </a:pPr>
             <a:fld id="{67076C5B-2EA2-7A47-B86E-99AAD28441A6}" type="datetime1">
               <a:rPr lang="de-DE" smtClean="0"/>
-              <a:t>21.06.2026</a:t>
+              <a:t>22.06.2026</a:t>
             </a:fld>
             <a:endParaRPr lang="de-DE" dirty="0"/>
           </a:p>
@@ -2282,7 +2282,7 @@
             </a:pPr>
             <a:fld id="{EEA6CC5D-69A9-BA4B-AC99-9F8254D0981E}" type="datetime1">
               <a:rPr lang="de-DE" smtClean="0"/>
-              <a:t>21.06.2026</a:t>
+              <a:t>22.06.2026</a:t>
             </a:fld>
             <a:endParaRPr lang="de-DE" dirty="0"/>
           </a:p>
@@ -2695,7 +2695,7 @@
             </a:pPr>
             <a:fld id="{0B1EAA1D-2E15-9046-9A40-4947ABB751C4}" type="datetime1">
               <a:rPr lang="de-DE" smtClean="0"/>
-              <a:t>21.06.2026</a:t>
+              <a:t>22.06.2026</a:t>
             </a:fld>
             <a:endParaRPr lang="de-DE"/>
           </a:p>
@@ -2970,7 +2970,7 @@
             </a:pPr>
             <a:fld id="{25B5056C-E1FC-1F4E-A35C-F2D495D58E09}" type="datetime1">
               <a:rPr lang="de-DE" smtClean="0"/>
-              <a:t>21.06.2026</a:t>
+              <a:t>22.06.2026</a:t>
             </a:fld>
             <a:endParaRPr lang="de-DE"/>
           </a:p>
@@ -3220,7 +3220,7 @@
             </a:pPr>
             <a:fld id="{E5DC69DE-E521-EC4C-AFF3-2A6651E3F1AC}" type="datetime1">
               <a:rPr lang="de-DE" smtClean="0"/>
-              <a:t>21.06.2026</a:t>
+              <a:t>22.06.2026</a:t>
             </a:fld>
             <a:endParaRPr lang="de-DE"/>
           </a:p>
@@ -3482,7 +3482,7 @@
             </a:pPr>
             <a:fld id="{D1C5E747-687F-9C49-A498-1184E7908D39}" type="datetime1">
               <a:rPr lang="de-DE" smtClean="0"/>
-              <a:t>21.06.2026</a:t>
+              <a:t>22.06.2026</a:t>
             </a:fld>
             <a:endParaRPr lang="de-DE"/>
           </a:p>
@@ -3719,14 +3719,14 @@
           </a:ln>
           <a:extLst>
             <a:ext uri="{909E8E84-426E-40dd-AFC4-6F175D3DCCD1}">
-              <a14:hiddenFill xmlns="" xmlns:a14="http://schemas.microsoft.com/office/drawing/2010/main">
+              <a14:hiddenFill xmlns:a14="http://schemas.microsoft.com/office/drawing/2010/main" xmlns="">
                 <a:solidFill>
                   <a:srgbClr val="FFFFFF"/>
                 </a:solidFill>
               </a14:hiddenFill>
             </a:ext>
             <a:ext uri="{91240B29-F687-4f45-9708-019B960494DF}">
-              <a14:hiddenLine xmlns="" xmlns:a14="http://schemas.microsoft.com/office/drawing/2010/main" w="9525">
+              <a14:hiddenLine xmlns:a14="http://schemas.microsoft.com/office/drawing/2010/main" xmlns="" w="9525">
                 <a:solidFill>
                   <a:srgbClr val="000000"/>
                 </a:solidFill>
@@ -3777,14 +3777,14 @@
           </a:ln>
           <a:extLst>
             <a:ext uri="{909E8E84-426E-40dd-AFC4-6F175D3DCCD1}">
-              <a14:hiddenFill xmlns="" xmlns:a14="http://schemas.microsoft.com/office/drawing/2010/main">
+              <a14:hiddenFill xmlns:a14="http://schemas.microsoft.com/office/drawing/2010/main" xmlns="">
                 <a:solidFill>
                   <a:srgbClr val="FFFFFF"/>
                 </a:solidFill>
               </a14:hiddenFill>
             </a:ext>
             <a:ext uri="{91240B29-F687-4f45-9708-019B960494DF}">
-              <a14:hiddenLine xmlns="" xmlns:a14="http://schemas.microsoft.com/office/drawing/2010/main" w="9525">
+              <a14:hiddenLine xmlns:a14="http://schemas.microsoft.com/office/drawing/2010/main" xmlns="" w="9525">
                 <a:solidFill>
                   <a:srgbClr val="000000"/>
                 </a:solidFill>
@@ -4021,7 +4021,7 @@
           </a:ln>
           <a:extLst>
             <a:ext uri="{909E8E84-426E-40dd-AFC4-6F175D3DCCD1}">
-              <a14:hiddenFill xmlns="" xmlns:a14="http://schemas.microsoft.com/office/drawing/2010/main">
+              <a14:hiddenFill xmlns:a14="http://schemas.microsoft.com/office/drawing/2010/main" xmlns="">
                 <a:noFill/>
               </a14:hiddenFill>
             </a:ext>
@@ -4094,7 +4094,7 @@
             </a:pPr>
             <a:fld id="{0B2D14DF-C64B-D248-822C-9E9F774E507A}" type="datetime1">
               <a:rPr lang="de-DE" noProof="0" smtClean="0"/>
-              <a:t>21.06.2026</a:t>
+              <a:t>22.06.2026</a:t>
             </a:fld>
             <a:endParaRPr lang="de-DE" noProof="0" dirty="0"/>
           </a:p>
@@ -4782,7 +4782,7 @@
             </a:pPr>
             <a:fld id="{D1C5E747-687F-9C49-A498-1184E7908D39}" type="datetime1">
               <a:rPr lang="de-DE" smtClean="0"/>
-              <a:t>21.06.2026</a:t>
+              <a:t>22.06.2026</a:t>
             </a:fld>
             <a:endParaRPr lang="de-DE"/>
           </a:p>
@@ -4932,7 +4932,7 @@
             </a:pPr>
             <a:fld id="{D1C5E747-687F-9C49-A498-1184E7908D39}" type="datetime1">
               <a:rPr lang="de-DE" smtClean="0"/>
-              <a:t>21.06.2026</a:t>
+              <a:t>22.06.2026</a:t>
             </a:fld>
             <a:endParaRPr lang="de-DE"/>
           </a:p>
@@ -5201,7 +5201,7 @@
             </a:pPr>
             <a:fld id="{D1C5E747-687F-9C49-A498-1184E7908D39}" type="datetime1">
               <a:rPr lang="de-DE" smtClean="0"/>
-              <a:t>21.06.2026</a:t>
+              <a:t>22.06.2026</a:t>
             </a:fld>
             <a:endParaRPr lang="de-DE"/>
           </a:p>
@@ -5584,7 +5584,7 @@
             </a:pPr>
             <a:fld id="{D1C5E747-687F-9C49-A498-1184E7908D39}" type="datetime1">
               <a:rPr lang="de-DE" smtClean="0"/>
-              <a:t>21.06.2026</a:t>
+              <a:t>22.06.2026</a:t>
             </a:fld>
             <a:endParaRPr lang="de-DE"/>
           </a:p>
@@ -5764,7 +5764,7 @@
             </a:pPr>
             <a:fld id="{D1C5E747-687F-9C49-A498-1184E7908D39}" type="datetime1">
               <a:rPr lang="de-DE" smtClean="0"/>
-              <a:t>21.06.2026</a:t>
+              <a:t>22.06.2026</a:t>
             </a:fld>
             <a:endParaRPr lang="de-DE"/>
           </a:p>
@@ -5846,8 +5846,8 @@
           </a:p>
         </p:txBody>
       </p:sp>
-      <mc:AlternateContent xmlns:mc="http://schemas.openxmlformats.org/markup-compatibility/2006">
-        <mc:Choice xmlns:a14="http://schemas.microsoft.com/office/drawing/2010/main" Requires="a14">
+      <mc:AlternateContent xmlns:mc="http://schemas.openxmlformats.org/markup-compatibility/2006" xmlns:a14="http://schemas.microsoft.com/office/drawing/2010/main">
+        <mc:Choice Requires="a14">
           <p:sp>
             <p:nvSpPr>
               <p:cNvPr id="12" name="TextBox 11">
@@ -6269,6 +6269,7 @@
                     </m:r>
                   </m:oMath>
                 </a14:m>
+                <a:endParaRPr lang="en-US" sz="1800" dirty="0"/>
               </a:p>
               <a:p>
                 <a:pPr marL="285750" indent="-285750">
@@ -6283,7 +6284,7 @@
             </p:txBody>
           </p:sp>
         </mc:Choice>
-        <mc:Fallback>
+        <mc:Fallback xmlns="">
           <p:sp>
             <p:nvSpPr>
               <p:cNvPr id="12" name="TextBox 11">
@@ -6429,7 +6430,7 @@
             </a:pPr>
             <a:fld id="{D1C5E747-687F-9C49-A498-1184E7908D39}" type="datetime1">
               <a:rPr lang="de-DE" smtClean="0"/>
-              <a:t>21.06.2026</a:t>
+              <a:t>22.06.2026</a:t>
             </a:fld>
             <a:endParaRPr lang="de-DE"/>
           </a:p>
@@ -6511,8 +6512,8 @@
           </a:p>
         </p:txBody>
       </p:sp>
-      <mc:AlternateContent xmlns:mc="http://schemas.openxmlformats.org/markup-compatibility/2006">
-        <mc:Choice xmlns:a14="http://schemas.microsoft.com/office/drawing/2010/main" Requires="a14">
+      <mc:AlternateContent xmlns:mc="http://schemas.openxmlformats.org/markup-compatibility/2006" xmlns:a14="http://schemas.microsoft.com/office/drawing/2010/main">
+        <mc:Choice Requires="a14">
           <p:sp>
             <p:nvSpPr>
               <p:cNvPr id="12" name="TextBox 11">
@@ -6915,7 +6916,7 @@
             </p:txBody>
           </p:sp>
         </mc:Choice>
-        <mc:Fallback>
+        <mc:Fallback xmlns="">
           <p:sp>
             <p:nvSpPr>
               <p:cNvPr id="12" name="TextBox 11">
@@ -7055,7 +7056,7 @@
             </a:pPr>
             <a:fld id="{D1C5E747-687F-9C49-A498-1184E7908D39}" type="datetime1">
               <a:rPr lang="de-DE" smtClean="0"/>
-              <a:t>21.06.2026</a:t>
+              <a:t>22.06.2026</a:t>
             </a:fld>
             <a:endParaRPr lang="de-DE"/>
           </a:p>
@@ -7358,7 +7359,7 @@
             </a:pPr>
             <a:fld id="{D1C5E747-687F-9C49-A498-1184E7908D39}" type="datetime1">
               <a:rPr lang="de-DE" smtClean="0"/>
-              <a:t>21.06.2026</a:t>
+              <a:t>22.06.2026</a:t>
             </a:fld>
             <a:endParaRPr lang="de-DE"/>
           </a:p>
@@ -7779,7 +7780,7 @@
             </a:pPr>
             <a:fld id="{D1C5E747-687F-9C49-A498-1184E7908D39}" type="datetime1">
               <a:rPr lang="de-DE" smtClean="0"/>
-              <a:t>21.06.2026</a:t>
+              <a:t>22.06.2026</a:t>
             </a:fld>
             <a:endParaRPr lang="de-DE"/>
           </a:p>
@@ -8605,7 +8606,7 @@
             </a:pPr>
             <a:fld id="{D1C5E747-687F-9C49-A498-1184E7908D39}" type="datetime1">
               <a:rPr lang="de-DE" smtClean="0"/>
-              <a:t>21.06.2026</a:t>
+              <a:t>22.06.2026</a:t>
             </a:fld>
             <a:endParaRPr lang="de-DE"/>
           </a:p>
@@ -10012,7 +10013,7 @@
             </a:pPr>
             <a:fld id="{D1C5E747-687F-9C49-A498-1184E7908D39}" type="datetime1">
               <a:rPr lang="de-DE" smtClean="0"/>
-              <a:t>21.06.2026</a:t>
+              <a:t>22.06.2026</a:t>
             </a:fld>
             <a:endParaRPr lang="de-DE"/>
           </a:p>
@@ -11401,7 +11402,7 @@
             </a:pPr>
             <a:fld id="{D1C5E747-687F-9C49-A498-1184E7908D39}" type="datetime1">
               <a:rPr lang="de-DE" smtClean="0"/>
-              <a:t>21.06.2026</a:t>
+              <a:t>22.06.2026</a:t>
             </a:fld>
             <a:endParaRPr lang="de-DE"/>
           </a:p>
